--- a/presentation/HWSW_CoDesign_Final_Taha_Lana.pptx
+++ b/presentation/HWSW_CoDesign_Final_Taha_Lana.pptx
@@ -2287,7 +2287,7 @@
           <a:p>
             <a:r>
               <a:rPr lang="en-US" dirty="0"/>
-              <a:t>Taha. 1:10. Staff wrote that command, so be matter-of-fact, not smug. Frame it as something we hit and fixed.</a:t>
+              <a:t>Taha. 1:10. The point: we established these by testing, not assuming. The cycles=0 story is the strongest bit - we nearly published a wrong fact.</a:t>
             </a:r>
             <a:endParaRPr lang="en-US" dirty="0"/>
           </a:p>
@@ -3459,7 +3459,7 @@
                 <a:ea typeface="Cambria" pitchFamily="34" charset="-122"/>
                 <a:cs typeface="Cambria" pitchFamily="34" charset="-120"/>
               </a:rPr>
-              <a:t>2.38×</a:t>
+              <a:t>2.51×</a:t>
             </a:r>
             <a:endParaRPr lang="en-US" sz="3400" dirty="0"/>
           </a:p>
@@ -3537,7 +3537,7 @@
                 <a:ea typeface="Cambria" pitchFamily="34" charset="-122"/>
                 <a:cs typeface="Cambria" pitchFamily="34" charset="-120"/>
               </a:rPr>
-              <a:t>2.55×</a:t>
+              <a:t>2.87×</a:t>
             </a:r>
             <a:endParaRPr lang="en-US" sz="3400" dirty="0"/>
           </a:p>
@@ -3551,8 +3551,8 @@
         </p:nvSpPr>
         <p:spPr>
           <a:xfrm>
-            <a:off x="8915400" y="4206240"/>
-            <a:ext cx="2514600" cy="548640"/>
+            <a:off x="8915400" y="4114800"/>
+            <a:ext cx="2514600" cy="960120"/>
           </a:xfrm>
           <a:prstGeom prst="rect">
             <a:avLst/>
@@ -3600,6 +3600,55 @@
                 <a:cs typeface="Calibri" pitchFamily="34" charset="-120"/>
               </a:rPr>
               <a:t>Requirement was 7%.</a:t>
+            </a:r>
+            <a:endParaRPr lang="en-US" sz="1100" dirty="0"/>
+          </a:p>
+          <a:p>
+            <a:pPr indent="0" marL="0">
+              <a:lnSpc>
+                <a:spcPts val="1500"/>
+              </a:lnSpc>
+              <a:buNone/>
+            </a:pPr>
+            <a:endParaRPr lang="en-US" sz="1100" dirty="0"/>
+          </a:p>
+          <a:p>
+            <a:pPr indent="0" marL="0">
+              <a:lnSpc>
+                <a:spcPts val="1500"/>
+              </a:lnSpc>
+              <a:buNone/>
+            </a:pPr>
+            <a:r>
+              <a:rPr lang="en-US" sz="1100" dirty="0">
+                <a:solidFill>
+                  <a:srgbClr val="8A97A6"/>
+                </a:solidFill>
+                <a:latin typeface="Calibri" pitchFamily="34" charset="0"/>
+                <a:ea typeface="Calibri" pitchFamily="34" charset="-122"/>
+                <a:cs typeface="Calibri" pitchFamily="34" charset="-120"/>
+              </a:rPr>
+              <a:t>Measured inside the</a:t>
+            </a:r>
+            <a:endParaRPr lang="en-US" sz="1100" dirty="0"/>
+          </a:p>
+          <a:p>
+            <a:pPr indent="0" marL="0">
+              <a:lnSpc>
+                <a:spcPts val="1500"/>
+              </a:lnSpc>
+              <a:buNone/>
+            </a:pPr>
+            <a:r>
+              <a:rPr lang="en-US" sz="1100" dirty="0">
+                <a:solidFill>
+                  <a:srgbClr val="8A97A6"/>
+                </a:solidFill>
+                <a:latin typeface="Calibri" pitchFamily="34" charset="0"/>
+                <a:ea typeface="Calibri" pitchFamily="34" charset="-122"/>
+                <a:cs typeface="Calibri" pitchFamily="34" charset="-120"/>
+              </a:rPr>
+              <a:t>course QEMU image.</a:t>
             </a:r>
             <a:endParaRPr lang="en-US" sz="1100" dirty="0"/>
           </a:p>
@@ -4587,7 +4636,7 @@
                 <a:ea typeface="Calibri" pitchFamily="34" charset="-122"/>
                 <a:cs typeface="Calibri" pitchFamily="34" charset="-120"/>
               </a:rPr>
-              <a:t>Simulated under Icarus Verilog 12.0 on naranja7</a:t>
+              <a:t>Simulated under Icarus Verilog 11.0 inside the QEMU guest</a:t>
             </a:r>
             <a:endParaRPr lang="en-US" sz="1150" dirty="0"/>
           </a:p>
@@ -5446,7 +5495,7 @@
                 <a:ea typeface="Courier New" pitchFamily="34" charset="-122"/>
                 <a:cs typeface="Courier New" pitchFamily="34" charset="-120"/>
               </a:rPr>
-              <a:t>Point.__sub__</a:t>
+              <a:t>dot</a:t>
             </a:r>
             <a:endParaRPr lang="en-US" sz="1100" dirty="0"/>
           </a:p>
@@ -5461,7 +5510,7 @@
         <p:spPr>
           <a:xfrm>
             <a:off x="4206240" y="1481328"/>
-            <a:ext cx="3154680" cy="182880"/>
+            <a:ext cx="3219073" cy="182880"/>
           </a:xfrm>
           <a:prstGeom prst="rect">
             <a:avLst/>
@@ -5510,7 +5559,7 @@
                 <a:ea typeface="Calibri" pitchFamily="34" charset="-122"/>
                 <a:cs typeface="Calibri" pitchFamily="34" charset="-120"/>
               </a:rPr>
-              <a:t>17.25%</a:t>
+              <a:t>18.58%</a:t>
             </a:r>
             <a:endParaRPr lang="en-US" sz="1100" dirty="0"/>
           </a:p>
@@ -5549,7 +5598,7 @@
                 <a:ea typeface="Courier New" pitchFamily="34" charset="-122"/>
                 <a:cs typeface="Courier New" pitchFamily="34" charset="-120"/>
               </a:rPr>
-              <a:t>Vector.dot</a:t>
+              <a:t>__sub__</a:t>
             </a:r>
             <a:endParaRPr lang="en-US" sz="1100" dirty="0"/>
           </a:p>
@@ -5564,7 +5613,7 @@
         <p:spPr>
           <a:xfrm>
             <a:off x="4206240" y="1901952"/>
-            <a:ext cx="2867558" cy="182880"/>
+            <a:ext cx="2721832" cy="182880"/>
           </a:xfrm>
           <a:prstGeom prst="rect">
             <a:avLst/>
@@ -5613,7 +5662,7 @@
                 <a:ea typeface="Calibri" pitchFamily="34" charset="-122"/>
                 <a:cs typeface="Calibri" pitchFamily="34" charset="-120"/>
               </a:rPr>
-              <a:t>15.68%</a:t>
+              <a:t>15.71%</a:t>
             </a:r>
             <a:endParaRPr lang="en-US" sz="1100" dirty="0"/>
           </a:p>
@@ -5652,7 +5701,7 @@
                 <a:ea typeface="Courier New" pitchFamily="34" charset="-122"/>
                 <a:cs typeface="Courier New" pitchFamily="34" charset="-120"/>
               </a:rPr>
-              <a:t>Sphere.intersectionTime</a:t>
+              <a:t>__init__</a:t>
             </a:r>
             <a:endParaRPr lang="en-US" sz="1100" dirty="0"/>
           </a:p>
@@ -5667,7 +5716,110 @@
         <p:spPr>
           <a:xfrm>
             <a:off x="4206240" y="2322576"/>
-            <a:ext cx="2150669" cy="182880"/>
+            <a:ext cx="2631739" cy="182880"/>
+          </a:xfrm>
+          <a:prstGeom prst="rect">
+            <a:avLst/>
+          </a:prstGeom>
+          <a:solidFill>
+            <a:srgbClr val="E8833A"/>
+          </a:solidFill>
+          <a:ln w="12700">
+            <a:solidFill>
+              <a:srgbClr val="E8833A"/>
+            </a:solidFill>
+            <a:prstDash val="solid"/>
+          </a:ln>
+        </p:spPr>
+      </p:sp>
+      <p:sp>
+        <p:nvSpPr>
+          <p:cNvPr id="12" name="Text 10"/>
+          <p:cNvSpPr txBox="1"/>
+          <p:nvPr/>
+        </p:nvSpPr>
+        <p:spPr>
+          <a:xfrm>
+            <a:off x="7607808" y="2258568"/>
+            <a:ext cx="777240" cy="310896"/>
+          </a:xfrm>
+          <a:prstGeom prst="rect">
+            <a:avLst/>
+          </a:prstGeom>
+          <a:noFill/>
+          <a:ln/>
+        </p:spPr>
+        <p:txBody>
+          <a:bodyPr wrap="square" lIns="0" tIns="0" rIns="0" bIns="0" rtlCol="0" anchor="ctr"/>
+          <a:lstStyle/>
+          <a:p>
+            <a:pPr indent="0" marL="0">
+              <a:buNone/>
+            </a:pPr>
+            <a:r>
+              <a:rPr lang="en-US" sz="1100" b="1" dirty="0">
+                <a:solidFill>
+                  <a:srgbClr val="1B2430"/>
+                </a:solidFill>
+                <a:latin typeface="Calibri" pitchFamily="34" charset="0"/>
+                <a:ea typeface="Calibri" pitchFamily="34" charset="-122"/>
+                <a:cs typeface="Calibri" pitchFamily="34" charset="-120"/>
+              </a:rPr>
+              <a:t>15.19%</a:t>
+            </a:r>
+            <a:endParaRPr lang="en-US" sz="1100" dirty="0"/>
+          </a:p>
+        </p:txBody>
+      </p:sp>
+      <p:sp>
+        <p:nvSpPr>
+          <p:cNvPr id="13" name="Text 11"/>
+          <p:cNvSpPr txBox="1"/>
+          <p:nvPr/>
+        </p:nvSpPr>
+        <p:spPr>
+          <a:xfrm>
+            <a:off x="548640" y="2679192"/>
+            <a:ext cx="3566160" cy="310896"/>
+          </a:xfrm>
+          <a:prstGeom prst="rect">
+            <a:avLst/>
+          </a:prstGeom>
+          <a:noFill/>
+          <a:ln/>
+        </p:spPr>
+        <p:txBody>
+          <a:bodyPr wrap="square" lIns="0" tIns="0" rIns="0" bIns="0" rtlCol="0" anchor="ctr"/>
+          <a:lstStyle/>
+          <a:p>
+            <a:pPr indent="0" marL="0">
+              <a:buNone/>
+            </a:pPr>
+            <a:r>
+              <a:rPr lang="en-US" sz="1100" dirty="0">
+                <a:solidFill>
+                  <a:srgbClr val="1B2430"/>
+                </a:solidFill>
+                <a:latin typeface="Courier New" pitchFamily="34" charset="0"/>
+                <a:ea typeface="Courier New" pitchFamily="34" charset="-122"/>
+                <a:cs typeface="Courier New" pitchFamily="34" charset="-120"/>
+              </a:rPr>
+              <a:t>intersectionTime</a:t>
+            </a:r>
+            <a:endParaRPr lang="en-US" sz="1100" dirty="0"/>
+          </a:p>
+        </p:txBody>
+      </p:sp>
+      <p:sp>
+        <p:nvSpPr>
+          <p:cNvPr id="14" name="Shape 12"/>
+          <p:cNvSpPr/>
+          <p:nvPr/>
+        </p:nvSpPr>
+        <p:spPr>
+          <a:xfrm>
+            <a:off x="4206240" y="2743200"/>
+            <a:ext cx="2046138" cy="182880"/>
           </a:xfrm>
           <a:prstGeom prst="rect">
             <a:avLst/>
@@ -5685,13 +5837,13 @@
       </p:sp>
       <p:sp>
         <p:nvSpPr>
-          <p:cNvPr id="12" name="Text 10"/>
-          <p:cNvSpPr txBox="1"/>
-          <p:nvPr/>
-        </p:nvSpPr>
-        <p:spPr>
-          <a:xfrm>
-            <a:off x="7607808" y="2258568"/>
+          <p:cNvPr id="15" name="Text 13"/>
+          <p:cNvSpPr txBox="1"/>
+          <p:nvPr/>
+        </p:nvSpPr>
+        <p:spPr>
+          <a:xfrm>
+            <a:off x="7607808" y="2679192"/>
             <a:ext cx="777240" cy="310896"/>
           </a:xfrm>
           <a:prstGeom prst="rect">
@@ -5716,7 +5868,7 @@
                 <a:ea typeface="Calibri" pitchFamily="34" charset="-122"/>
                 <a:cs typeface="Calibri" pitchFamily="34" charset="-120"/>
               </a:rPr>
-              <a:t>11.76%</a:t>
+              <a:t>11.81%</a:t>
             </a:r>
             <a:endParaRPr lang="en-US" sz="1100" dirty="0"/>
           </a:p>
@@ -5724,13 +5876,13 @@
       </p:sp>
       <p:sp>
         <p:nvSpPr>
-          <p:cNvPr id="13" name="Text 11"/>
-          <p:cNvSpPr txBox="1"/>
-          <p:nvPr/>
-        </p:nvSpPr>
-        <p:spPr>
-          <a:xfrm>
-            <a:off x="548640" y="2679192"/>
+          <p:cNvPr id="16" name="Text 14"/>
+          <p:cNvSpPr txBox="1"/>
+          <p:nvPr/>
+        </p:nvSpPr>
+        <p:spPr>
+          <a:xfrm>
+            <a:off x="548640" y="3099816"/>
             <a:ext cx="3566160" cy="310896"/>
           </a:xfrm>
           <a:prstGeom prst="rect">
@@ -5755,7 +5907,7 @@
                 <a:ea typeface="Courier New" pitchFamily="34" charset="-122"/>
                 <a:cs typeface="Courier New" pitchFamily="34" charset="-120"/>
               </a:rPr>
-              <a:t>Scene._lightIsVisible</a:t>
+              <a:t>_lightIsVisible</a:t>
             </a:r>
             <a:endParaRPr lang="en-US" sz="1100" dirty="0"/>
           </a:p>
@@ -5763,14 +5915,14 @@
       </p:sp>
       <p:sp>
         <p:nvSpPr>
-          <p:cNvPr id="14" name="Shape 12"/>
+          <p:cNvPr id="17" name="Shape 15"/>
           <p:cNvSpPr/>
           <p:nvPr/>
         </p:nvSpPr>
         <p:spPr>
           <a:xfrm>
-            <a:off x="4206240" y="2743200"/>
-            <a:ext cx="1426464" cy="182880"/>
+            <a:off x="4206240" y="3163824"/>
+            <a:ext cx="1386038" cy="182880"/>
           </a:xfrm>
           <a:prstGeom prst="rect">
             <a:avLst/>
@@ -5788,13 +5940,13 @@
       </p:sp>
       <p:sp>
         <p:nvSpPr>
-          <p:cNvPr id="15" name="Text 13"/>
-          <p:cNvSpPr txBox="1"/>
-          <p:nvPr/>
-        </p:nvSpPr>
-        <p:spPr>
-          <a:xfrm>
-            <a:off x="7607808" y="2679192"/>
+          <p:cNvPr id="18" name="Text 16"/>
+          <p:cNvSpPr txBox="1"/>
+          <p:nvPr/>
+        </p:nvSpPr>
+        <p:spPr>
+          <a:xfrm>
+            <a:off x="7607808" y="3099816"/>
             <a:ext cx="777240" cy="310896"/>
           </a:xfrm>
           <a:prstGeom prst="rect">
@@ -5819,7 +5971,7 @@
                 <a:ea typeface="Calibri" pitchFamily="34" charset="-122"/>
                 <a:cs typeface="Calibri" pitchFamily="34" charset="-120"/>
               </a:rPr>
-              <a:t>7.80%</a:t>
+              <a:t>8.00%</a:t>
             </a:r>
             <a:endParaRPr lang="en-US" sz="1100" dirty="0"/>
           </a:p>
@@ -5827,13 +5979,13 @@
       </p:sp>
       <p:sp>
         <p:nvSpPr>
-          <p:cNvPr id="16" name="Text 14"/>
-          <p:cNvSpPr txBox="1"/>
-          <p:nvPr/>
-        </p:nvSpPr>
-        <p:spPr>
-          <a:xfrm>
-            <a:off x="548640" y="3099816"/>
+          <p:cNvPr id="19" name="Text 17"/>
+          <p:cNvSpPr txBox="1"/>
+          <p:nvPr/>
+        </p:nvSpPr>
+        <p:spPr>
+          <a:xfrm>
+            <a:off x="548640" y="3520440"/>
             <a:ext cx="3566160" cy="310896"/>
           </a:xfrm>
           <a:prstGeom prst="rect">
@@ -5858,7 +6010,7 @@
                 <a:ea typeface="Courier New" pitchFamily="34" charset="-122"/>
                 <a:cs typeface="Courier New" pitchFamily="34" charset="-120"/>
               </a:rPr>
-              <a:t>Vector.scale</a:t>
+              <a:t>scale</a:t>
             </a:r>
             <a:endParaRPr lang="en-US" sz="1100" dirty="0"/>
           </a:p>
@@ -5866,14 +6018,14 @@
       </p:sp>
       <p:sp>
         <p:nvSpPr>
-          <p:cNvPr id="17" name="Shape 15"/>
+          <p:cNvPr id="20" name="Shape 18"/>
           <p:cNvSpPr/>
           <p:nvPr/>
         </p:nvSpPr>
         <p:spPr>
           <a:xfrm>
-            <a:off x="4206240" y="3163824"/>
-            <a:ext cx="1205179" cy="182880"/>
+            <a:off x="4206240" y="3584448"/>
+            <a:ext cx="765786" cy="182880"/>
           </a:xfrm>
           <a:prstGeom prst="rect">
             <a:avLst/>
@@ -5891,13 +6043,13 @@
       </p:sp>
       <p:sp>
         <p:nvSpPr>
-          <p:cNvPr id="18" name="Text 16"/>
-          <p:cNvSpPr txBox="1"/>
-          <p:nvPr/>
-        </p:nvSpPr>
-        <p:spPr>
-          <a:xfrm>
-            <a:off x="7607808" y="3099816"/>
+          <p:cNvPr id="21" name="Text 19"/>
+          <p:cNvSpPr txBox="1"/>
+          <p:nvPr/>
+        </p:nvSpPr>
+        <p:spPr>
+          <a:xfrm>
+            <a:off x="7607808" y="3520440"/>
             <a:ext cx="777240" cy="310896"/>
           </a:xfrm>
           <a:prstGeom prst="rect">
@@ -5922,7 +6074,7 @@
                 <a:ea typeface="Calibri" pitchFamily="34" charset="-122"/>
                 <a:cs typeface="Calibri" pitchFamily="34" charset="-120"/>
               </a:rPr>
-              <a:t>6.59%</a:t>
+              <a:t>4.42%</a:t>
             </a:r>
             <a:endParaRPr lang="en-US" sz="1100" dirty="0"/>
           </a:p>
@@ -5930,13 +6082,13 @@
       </p:sp>
       <p:sp>
         <p:nvSpPr>
-          <p:cNvPr id="19" name="Text 17"/>
-          <p:cNvSpPr txBox="1"/>
-          <p:nvPr/>
-        </p:nvSpPr>
-        <p:spPr>
-          <a:xfrm>
-            <a:off x="548640" y="3520440"/>
+          <p:cNvPr id="22" name="Text 20"/>
+          <p:cNvSpPr txBox="1"/>
+          <p:nvPr/>
+        </p:nvSpPr>
+        <p:spPr>
+          <a:xfrm>
+            <a:off x="548640" y="3941064"/>
             <a:ext cx="3566160" cy="310896"/>
           </a:xfrm>
           <a:prstGeom prst="rect">
@@ -5961,110 +6113,7 @@
                 <a:ea typeface="Courier New" pitchFamily="34" charset="-122"/>
                 <a:cs typeface="Courier New" pitchFamily="34" charset="-120"/>
               </a:rPr>
-              <a:t>Scene.rayColour</a:t>
-            </a:r>
-            <a:endParaRPr lang="en-US" sz="1100" dirty="0"/>
-          </a:p>
-        </p:txBody>
-      </p:sp>
-      <p:sp>
-        <p:nvSpPr>
-          <p:cNvPr id="20" name="Shape 18"/>
-          <p:cNvSpPr/>
-          <p:nvPr/>
-        </p:nvSpPr>
-        <p:spPr>
-          <a:xfrm>
-            <a:off x="4206240" y="3584448"/>
-            <a:ext cx="905256" cy="182880"/>
-          </a:xfrm>
-          <a:prstGeom prst="rect">
-            <a:avLst/>
-          </a:prstGeom>
-          <a:solidFill>
-            <a:srgbClr val="C3CBD3"/>
-          </a:solidFill>
-          <a:ln w="12700">
-            <a:solidFill>
-              <a:srgbClr val="C3CBD3"/>
-            </a:solidFill>
-            <a:prstDash val="solid"/>
-          </a:ln>
-        </p:spPr>
-      </p:sp>
-      <p:sp>
-        <p:nvSpPr>
-          <p:cNvPr id="21" name="Text 19"/>
-          <p:cNvSpPr txBox="1"/>
-          <p:nvPr/>
-        </p:nvSpPr>
-        <p:spPr>
-          <a:xfrm>
-            <a:off x="7607808" y="3520440"/>
-            <a:ext cx="777240" cy="310896"/>
-          </a:xfrm>
-          <a:prstGeom prst="rect">
-            <a:avLst/>
-          </a:prstGeom>
-          <a:noFill/>
-          <a:ln/>
-        </p:spPr>
-        <p:txBody>
-          <a:bodyPr wrap="square" lIns="0" tIns="0" rIns="0" bIns="0" rtlCol="0" anchor="ctr"/>
-          <a:lstStyle/>
-          <a:p>
-            <a:pPr indent="0" marL="0">
-              <a:buNone/>
-            </a:pPr>
-            <a:r>
-              <a:rPr lang="en-US" sz="1100" b="1" dirty="0">
-                <a:solidFill>
-                  <a:srgbClr val="1B2430"/>
-                </a:solidFill>
-                <a:latin typeface="Calibri" pitchFamily="34" charset="0"/>
-                <a:ea typeface="Calibri" pitchFamily="34" charset="-122"/>
-                <a:cs typeface="Calibri" pitchFamily="34" charset="-120"/>
-              </a:rPr>
-              <a:t>4.95%</a:t>
-            </a:r>
-            <a:endParaRPr lang="en-US" sz="1100" dirty="0"/>
-          </a:p>
-        </p:txBody>
-      </p:sp>
-      <p:sp>
-        <p:nvSpPr>
-          <p:cNvPr id="22" name="Text 20"/>
-          <p:cNvSpPr txBox="1"/>
-          <p:nvPr/>
-        </p:nvSpPr>
-        <p:spPr>
-          <a:xfrm>
-            <a:off x="548640" y="3941064"/>
-            <a:ext cx="3566160" cy="310896"/>
-          </a:xfrm>
-          <a:prstGeom prst="rect">
-            <a:avLst/>
-          </a:prstGeom>
-          <a:noFill/>
-          <a:ln/>
-        </p:spPr>
-        <p:txBody>
-          <a:bodyPr wrap="square" lIns="0" tIns="0" rIns="0" bIns="0" rtlCol="0" anchor="ctr"/>
-          <a:lstStyle/>
-          <a:p>
-            <a:pPr indent="0" marL="0">
-              <a:buNone/>
-            </a:pPr>
-            <a:r>
-              <a:rPr lang="en-US" sz="1100" dirty="0">
-                <a:solidFill>
-                  <a:srgbClr val="1B2430"/>
-                </a:solidFill>
-                <a:latin typeface="Courier New" pitchFamily="34" charset="0"/>
-                <a:ea typeface="Courier New" pitchFamily="34" charset="-122"/>
-                <a:cs typeface="Courier New" pitchFamily="34" charset="-120"/>
-              </a:rPr>
-              <a:t>Vector.__init__</a:t>
+              <a:t>normalized</a:t>
             </a:r>
             <a:endParaRPr lang="en-US" sz="1100" dirty="0"/>
           </a:p>
@@ -6079,7 +6128,7 @@
         <p:spPr>
           <a:xfrm>
             <a:off x="4206240" y="4005072"/>
-            <a:ext cx="863194" cy="182880"/>
+            <a:ext cx="530159" cy="182880"/>
           </a:xfrm>
           <a:prstGeom prst="rect">
             <a:avLst/>
@@ -6128,7 +6177,7 @@
                 <a:ea typeface="Calibri" pitchFamily="34" charset="-122"/>
                 <a:cs typeface="Calibri" pitchFamily="34" charset="-120"/>
               </a:rPr>
-              <a:t>4.72%</a:t>
+              <a:t>3.06%</a:t>
             </a:r>
             <a:endParaRPr lang="en-US" sz="1100" dirty="0"/>
           </a:p>
@@ -6167,7 +6216,7 @@
                 <a:ea typeface="Courier New" pitchFamily="34" charset="-122"/>
                 <a:cs typeface="Courier New" pitchFamily="34" charset="-120"/>
               </a:rPr>
-              <a:t>Vector.normalized</a:t>
+              <a:t>magnitude</a:t>
             </a:r>
             <a:endParaRPr lang="en-US" sz="1100" dirty="0"/>
           </a:p>
@@ -6182,7 +6231,7 @@
         <p:spPr>
           <a:xfrm>
             <a:off x="4206240" y="4425696"/>
-            <a:ext cx="587045" cy="182880"/>
+            <a:ext cx="481648" cy="182880"/>
           </a:xfrm>
           <a:prstGeom prst="rect">
             <a:avLst/>
@@ -6231,7 +6280,7 @@
                 <a:ea typeface="Calibri" pitchFamily="34" charset="-122"/>
                 <a:cs typeface="Calibri" pitchFamily="34" charset="-120"/>
               </a:rPr>
-              <a:t>3.21%</a:t>
+              <a:t>2.78%</a:t>
             </a:r>
             <a:endParaRPr lang="en-US" sz="1100" dirty="0"/>
           </a:p>
@@ -6297,7 +6346,7 @@
                 <a:ea typeface="Cambria" pitchFamily="34" charset="-122"/>
                 <a:cs typeface="Cambria" pitchFamily="34" charset="-120"/>
               </a:rPr>
-              <a:t>47.45%</a:t>
+              <a:t>59.74%</a:t>
             </a:r>
             <a:endParaRPr lang="en-US" sz="3600" dirty="0"/>
           </a:p>
@@ -6339,7 +6388,7 @@
                 <a:ea typeface="Calibri" pitchFamily="34" charset="-122"/>
                 <a:cs typeface="Calibri" pitchFamily="34" charset="-120"/>
               </a:rPr>
-              <a:t>of runtime is in Vector/Point operator wrappers (orange bars), not in the ray tracing algorithm</a:t>
+              <a:t>of runtime is in Vector/Point wrappers (orange bars), not in the ray tracing algorithm itself</a:t>
             </a:r>
             <a:endParaRPr lang="en-US" sz="1150" dirty="0"/>
           </a:p>
@@ -6674,7 +6723,7 @@
                 <a:ea typeface="Cambria" pitchFamily="34" charset="-122"/>
                 <a:cs typeface="Cambria" pitchFamily="34" charset="-120"/>
               </a:rPr>
-              <a:t>One line, in the wrong place, cost 49%</a:t>
+              <a:t>One line, in the wrong place, cost 44%</a:t>
             </a:r>
             <a:endParaRPr lang="en-US" sz="3200" dirty="0"/>
           </a:p>
@@ -7078,7 +7127,7 @@
                 <a:ea typeface="Cambria" pitchFamily="34" charset="-122"/>
                 <a:cs typeface="Cambria" pitchFamily="34" charset="-120"/>
               </a:rPr>
-              <a:t>+49%</a:t>
+              <a:t>+44%</a:t>
             </a:r>
             <a:endParaRPr lang="en-US" sz="3600" dirty="0"/>
           </a:p>
@@ -7571,7 +7620,7 @@
         <p:spPr>
           <a:xfrm>
             <a:off x="5897880" y="2221992"/>
-            <a:ext cx="1271847" cy="219456"/>
+            <a:ext cx="1280160" cy="219456"/>
           </a:xfrm>
           <a:prstGeom prst="rect">
             <a:avLst/>
@@ -7620,7 +7669,7 @@
                 <a:ea typeface="Calibri" pitchFamily="34" charset="-122"/>
                 <a:cs typeface="Calibri" pitchFamily="34" charset="-120"/>
               </a:rPr>
-              <a:t>+51%</a:t>
+              <a:t>+56%</a:t>
             </a:r>
             <a:endParaRPr lang="en-US" sz="1400" dirty="0"/>
           </a:p>
@@ -7740,7 +7789,7 @@
         <p:spPr>
           <a:xfrm>
             <a:off x="5897880" y="3090672"/>
-            <a:ext cx="1221971" cy="219456"/>
+            <a:ext cx="1005840" cy="219456"/>
           </a:xfrm>
           <a:prstGeom prst="rect">
             <a:avLst/>
@@ -7789,7 +7838,7 @@
                 <a:ea typeface="Calibri" pitchFamily="34" charset="-122"/>
                 <a:cs typeface="Calibri" pitchFamily="34" charset="-120"/>
               </a:rPr>
-              <a:t>+49%</a:t>
+              <a:t>+44%</a:t>
             </a:r>
             <a:endParaRPr lang="en-US" sz="1400" dirty="0"/>
           </a:p>
@@ -7909,7 +7958,7 @@
         <p:spPr>
           <a:xfrm>
             <a:off x="5897880" y="3959352"/>
-            <a:ext cx="174567" cy="219456"/>
+            <a:ext cx="182880" cy="219456"/>
           </a:xfrm>
           <a:prstGeom prst="rect">
             <a:avLst/>
@@ -7958,7 +8007,7 @@
                 <a:ea typeface="Calibri" pitchFamily="34" charset="-122"/>
                 <a:cs typeface="Calibri" pitchFamily="34" charset="-120"/>
               </a:rPr>
-              <a:t>+7%</a:t>
+              <a:t>+8%</a:t>
             </a:r>
             <a:endParaRPr lang="en-US" sz="1400" dirty="0"/>
           </a:p>
@@ -8066,7 +8115,7 @@
                 <a:ea typeface="Calibri" pitchFamily="34" charset="-122"/>
                 <a:cs typeface="Calibri" pitchFamily="34" charset="-120"/>
               </a:rPr>
-              <a:t>Removing ~200,000 allocations per frame — the thing you instinctively reach for — was worth only 7%.</a:t>
+              <a:t>Removing ~200,000 allocations per frame — the thing you instinctively reach for — was worth only 8%.</a:t>
             </a:r>
             <a:endParaRPr lang="en-US" sz="1200" dirty="0"/>
           </a:p>
@@ -8360,7 +8409,7 @@
                 <a:ea typeface="Cambria" pitchFamily="34" charset="-122"/>
                 <a:cs typeface="Cambria" pitchFamily="34" charset="-120"/>
               </a:rPr>
-              <a:t>2.55× faster — and a trap in reading counters</a:t>
+              <a:t>2.87× faster — and a trap in reading counters</a:t>
             </a:r>
             <a:endParaRPr lang="en-US" sz="2900" dirty="0"/>
           </a:p>
@@ -8399,7 +8448,7 @@
                 <a:ea typeface="Cambria" pitchFamily="34" charset="-122"/>
                 <a:cs typeface="Cambria" pitchFamily="34" charset="-120"/>
               </a:rPr>
-              <a:t>554 ms</a:t>
+              <a:t>809 ms</a:t>
             </a:r>
             <a:endParaRPr lang="en-US" sz="4000" dirty="0"/>
           </a:p>
@@ -8501,7 +8550,7 @@
                 <a:ea typeface="Cambria" pitchFamily="34" charset="-122"/>
                 <a:cs typeface="Cambria" pitchFamily="34" charset="-120"/>
               </a:rPr>
-              <a:t>217 ms</a:t>
+              <a:t>282 ms</a:t>
             </a:r>
             <a:endParaRPr lang="en-US" sz="4000" dirty="0"/>
           </a:p>
@@ -8606,7 +8655,7 @@
                 <a:ea typeface="Cambria" pitchFamily="34" charset="-122"/>
                 <a:cs typeface="Cambria" pitchFamily="34" charset="-120"/>
               </a:rPr>
-              <a:t>2.55×</a:t>
+              <a:t>2.87×</a:t>
             </a:r>
             <a:endParaRPr lang="en-US" sz="3200" dirty="0"/>
           </a:p>
@@ -8645,7 +8694,7 @@
                 <a:ea typeface="Calibri" pitchFamily="34" charset="-122"/>
                 <a:cs typeface="Calibri" pitchFamily="34" charset="-120"/>
               </a:rPr>
-              <a:t>60.8% cut  ·  t = 671</a:t>
+              <a:t>65.1% cut  ·  t = 315</a:t>
             </a:r>
             <a:endParaRPr lang="en-US" sz="1100" dirty="0"/>
           </a:p>
@@ -8687,7 +8736,7 @@
                 <a:ea typeface="Calibri" pitchFamily="34" charset="-122"/>
                 <a:cs typeface="Calibri" pitchFamily="34" charset="-120"/>
               </a:rPr>
-              <a:t>IPC 2.44 → 2.52</a:t>
+              <a:t>IPC 2.59 → 2.70</a:t>
             </a:r>
             <a:endParaRPr lang="en-US" sz="1200" dirty="0"/>
           </a:p>
@@ -8707,7 +8756,7 @@
                 <a:ea typeface="Calibri" pitchFamily="34" charset="-122"/>
                 <a:cs typeface="Calibri" pitchFamily="34" charset="-120"/>
               </a:rPr>
-              <a:t>instructions 2.57× fewer</a:t>
+              <a:t>instructions 2.78× fewer</a:t>
             </a:r>
             <a:endParaRPr lang="en-US" sz="1200" dirty="0"/>
           </a:p>
@@ -8871,7 +8920,7 @@
                 <a:ea typeface="Calibri" pitchFamily="34" charset="-122"/>
                 <a:cs typeface="Calibri" pitchFamily="34" charset="-120"/>
               </a:rPr>
-              <a:t>1.20%</a:t>
+              <a:t>1.02%</a:t>
             </a:r>
             <a:endParaRPr lang="en-US" sz="1250" dirty="0"/>
           </a:p>
@@ -8910,7 +8959,7 @@
                 <a:ea typeface="Calibri" pitchFamily="34" charset="-122"/>
                 <a:cs typeface="Calibri" pitchFamily="34" charset="-120"/>
               </a:rPr>
-              <a:t>1.40%</a:t>
+              <a:t>2.91%</a:t>
             </a:r>
             <a:endParaRPr lang="en-US" sz="1250" dirty="0"/>
           </a:p>
@@ -9027,7 +9076,7 @@
                 <a:ea typeface="Calibri" pitchFamily="34" charset="-122"/>
                 <a:cs typeface="Calibri" pitchFamily="34" charset="-120"/>
               </a:rPr>
-              <a:t>10.7 M</a:t>
+              <a:t>18.7 M</a:t>
             </a:r>
             <a:endParaRPr lang="en-US" sz="1250" dirty="0"/>
           </a:p>
@@ -9066,7 +9115,7 @@
                 <a:ea typeface="Calibri" pitchFamily="34" charset="-122"/>
                 <a:cs typeface="Calibri" pitchFamily="34" charset="-120"/>
               </a:rPr>
-              <a:t>3.48 M</a:t>
+              <a:t>3.00 M</a:t>
             </a:r>
             <a:endParaRPr lang="en-US" sz="1250" dirty="0"/>
           </a:p>
@@ -9105,7 +9154,7 @@
                 <a:ea typeface="Calibri" pitchFamily="34" charset="-122"/>
                 <a:cs typeface="Calibri" pitchFamily="34" charset="-120"/>
               </a:rPr>
-              <a:t>3.08× fewer</a:t>
+              <a:t>6.23× fewer</a:t>
             </a:r>
             <a:endParaRPr lang="en-US" sz="1250" dirty="0"/>
           </a:p>
@@ -9183,7 +9232,7 @@
                 <a:ea typeface="Calibri" pitchFamily="34" charset="-122"/>
                 <a:cs typeface="Calibri" pitchFamily="34" charset="-120"/>
               </a:rPr>
-              <a:t>129 K</a:t>
+              <a:t>190 K</a:t>
             </a:r>
             <a:endParaRPr lang="en-US" sz="1250" dirty="0"/>
           </a:p>
@@ -9222,7 +9271,7 @@
                 <a:ea typeface="Calibri" pitchFamily="34" charset="-122"/>
                 <a:cs typeface="Calibri" pitchFamily="34" charset="-120"/>
               </a:rPr>
-              <a:t>48.6 K</a:t>
+              <a:t>87 K</a:t>
             </a:r>
             <a:endParaRPr lang="en-US" sz="1250" dirty="0"/>
           </a:p>
@@ -9261,7 +9310,7 @@
                 <a:ea typeface="Calibri" pitchFamily="34" charset="-122"/>
                 <a:cs typeface="Calibri" pitchFamily="34" charset="-120"/>
               </a:rPr>
-              <a:t>2.65× fewer</a:t>
+              <a:t>2.18× fewer</a:t>
             </a:r>
             <a:endParaRPr lang="en-US" sz="1250" dirty="0"/>
           </a:p>
@@ -9303,7 +9352,7 @@
                 <a:ea typeface="Calibri" pitchFamily="34" charset="-122"/>
                 <a:cs typeface="Calibri" pitchFamily="34" charset="-120"/>
               </a:rPr>
-              <a:t>The optimized code makes 3.08× fewer cache REFERENCES, because it no longer allocates and chases a swarm of short-lived Vector objects. The references that remain are the genuinely cold ones — so the ratio of misses to references rises even though the machine stalls far less often.</a:t>
+              <a:t>The optimized code makes 6.23× fewer cache REFERENCES, because it no longer allocates and chases a swarm of short-lived Vector objects. The references that remain are the genuinely cold ones — so the ratio of misses to references rises even though the machine stalls far less often.</a:t>
             </a:r>
             <a:endParaRPr lang="en-US" sz="1250" dirty="0"/>
           </a:p>
@@ -10570,7 +10619,7 @@
                 <a:ea typeface="Calibri" pitchFamily="34" charset="-122"/>
                 <a:cs typeface="Calibri" pitchFamily="34" charset="-120"/>
               </a:rPr>
-              <a:t>Intersection is 36.02% of the OPTIMIZED runtime. So even an infinitely fast intersection unit caps the whole-frame speedup at 1.56×. We report that instead of the ~10,000× kernel ratio, which would be meaningless. A real product would have to move shading onto the accelerator too — which is the path GPUs actually took.</a:t>
+              <a:t>Intersection is 35.03% of the OPTIMIZED runtime. So even an infinitely fast intersection unit caps the whole-frame speedup at 1.54×. We report that instead of the ~12,000× kernel ratio, which would be meaningless. A real product would have to move shading onto the accelerator too — which is the path GPUs actually took.</a:t>
             </a:r>
             <a:endParaRPr lang="en-US" sz="1250" dirty="0"/>
           </a:p>
@@ -14430,7 +14479,7 @@
                 <a:ea typeface="Calibri" pitchFamily="34" charset="-122"/>
                 <a:cs typeface="Calibri" pitchFamily="34" charset="-120"/>
               </a:rPr>
-              <a:t>raytrace intersection is 36% of the optimized runtime → 1.56× ceiling on a whole frame. For pyflate, a 67 KB input behind PCIe would be dominated by the round trip — which is why this belongs on-die, not on a discrete card.</a:t>
+              <a:t>raytrace intersection is 35% of the optimized runtime → 1.54× ceiling on a whole frame. For pyflate, a 67 KB input behind PCIe would be dominated by the round trip — which is why this belongs on-die, not on a discrete card.</a:t>
             </a:r>
             <a:endParaRPr lang="en-US" sz="1200" dirty="0"/>
           </a:p>
@@ -14868,7 +14917,7 @@
                 <a:ea typeface="Calibri" pitchFamily="34" charset="-122"/>
                 <a:cs typeface="Calibri" pitchFamily="34" charset="-120"/>
               </a:rPr>
-              <a:t>733.3 ms</a:t>
+              <a:t>1115.1 ms</a:t>
             </a:r>
             <a:endParaRPr lang="en-US" sz="1400" dirty="0"/>
           </a:p>
@@ -14907,7 +14956,7 @@
                 <a:ea typeface="Calibri" pitchFamily="34" charset="-122"/>
                 <a:cs typeface="Calibri" pitchFamily="34" charset="-120"/>
               </a:rPr>
-              <a:t>308.7 ms</a:t>
+              <a:t>444.6 ms</a:t>
             </a:r>
             <a:endParaRPr lang="en-US" sz="1400" dirty="0"/>
           </a:p>
@@ -14946,7 +14995,7 @@
                 <a:ea typeface="Calibri" pitchFamily="34" charset="-122"/>
                 <a:cs typeface="Calibri" pitchFamily="34" charset="-120"/>
               </a:rPr>
-              <a:t>57.9%</a:t>
+              <a:t>60.1%</a:t>
             </a:r>
             <a:endParaRPr lang="en-US" sz="1400" dirty="0"/>
           </a:p>
@@ -14985,7 +15034,7 @@
                 <a:ea typeface="Calibri" pitchFamily="34" charset="-122"/>
                 <a:cs typeface="Calibri" pitchFamily="34" charset="-120"/>
               </a:rPr>
-              <a:t>2.38×</a:t>
+              <a:t>2.51×</a:t>
             </a:r>
             <a:endParaRPr lang="en-US" sz="2000" dirty="0"/>
           </a:p>
@@ -15024,7 +15073,7 @@
                 <a:ea typeface="Calibri" pitchFamily="34" charset="-122"/>
                 <a:cs typeface="Calibri" pitchFamily="34" charset="-120"/>
               </a:rPr>
-              <a:t>t = 620.51</a:t>
+              <a:t>t = 676.00</a:t>
             </a:r>
             <a:endParaRPr lang="en-US" sz="1400" dirty="0"/>
           </a:p>
@@ -15129,7 +15178,7 @@
                 <a:ea typeface="Calibri" pitchFamily="34" charset="-122"/>
                 <a:cs typeface="Calibri" pitchFamily="34" charset="-120"/>
               </a:rPr>
-              <a:t>554.5 ms</a:t>
+              <a:t>809.3 ms</a:t>
             </a:r>
             <a:endParaRPr lang="en-US" sz="1400" dirty="0"/>
           </a:p>
@@ -15168,7 +15217,7 @@
                 <a:ea typeface="Calibri" pitchFamily="34" charset="-122"/>
                 <a:cs typeface="Calibri" pitchFamily="34" charset="-120"/>
               </a:rPr>
-              <a:t>217.1 ms</a:t>
+              <a:t>282.2 ms</a:t>
             </a:r>
             <a:endParaRPr lang="en-US" sz="1400" dirty="0"/>
           </a:p>
@@ -15207,7 +15256,7 @@
                 <a:ea typeface="Calibri" pitchFamily="34" charset="-122"/>
                 <a:cs typeface="Calibri" pitchFamily="34" charset="-120"/>
               </a:rPr>
-              <a:t>60.8%</a:t>
+              <a:t>65.1%</a:t>
             </a:r>
             <a:endParaRPr lang="en-US" sz="1400" dirty="0"/>
           </a:p>
@@ -15246,7 +15295,7 @@
                 <a:ea typeface="Calibri" pitchFamily="34" charset="-122"/>
                 <a:cs typeface="Calibri" pitchFamily="34" charset="-120"/>
               </a:rPr>
-              <a:t>2.55×</a:t>
+              <a:t>2.87×</a:t>
             </a:r>
             <a:endParaRPr lang="en-US" sz="2000" dirty="0"/>
           </a:p>
@@ -15285,7 +15334,7 @@
                 <a:ea typeface="Calibri" pitchFamily="34" charset="-122"/>
                 <a:cs typeface="Calibri" pitchFamily="34" charset="-120"/>
               </a:rPr>
-              <a:t>t = 670.87</a:t>
+              <a:t>t = 315.11</a:t>
             </a:r>
             <a:endParaRPr lang="en-US" sz="1400" dirty="0"/>
           </a:p>
@@ -15327,7 +15376,7 @@
                 <a:ea typeface="Calibri" pitchFamily="34" charset="-122"/>
                 <a:cs typeface="Calibri" pitchFamily="34" charset="-120"/>
               </a:rPr>
-              <a:t>Both clear the bar by roughly 8×, both statistically significant, and both with output identical to the original — byte for byte for pyflate, pixel for pixel for raytrace.</a:t>
+              <a:t>Measured inside the course QEMU guest. Both clear the bar by roughly 9×, both statistically significant, and both with output identical to the original — byte for byte for pyflate, pixel for pixel for raytrace.</a:t>
             </a:r>
             <a:endParaRPr lang="en-US" sz="1400" dirty="0"/>
           </a:p>
@@ -15435,7 +15484,7 @@
                 <a:ea typeface="Calibri" pitchFamily="34" charset="-122"/>
                 <a:cs typeface="Calibri" pitchFamily="34" charset="-120"/>
               </a:rPr>
-              <a:t>In both benchmarks the obvious diagnosis was wrong, and the counters — not intuition — settled it. IPC stayed flat while instructions retired fell in proportion to the runtime. We did not make the machine faster; we stopped asking it to do work that was never needed.</a:t>
+              <a:t>In both benchmarks the obvious diagnosis was wrong, and the counters — not intuition — settled it. Cycles fell in step with the stopwatch while IPC barely moved. We did not make the machine faster; we stopped asking it to do work that was never needed.</a:t>
             </a:r>
             <a:endParaRPr lang="en-US" sz="1350" dirty="0"/>
           </a:p>
@@ -17030,7 +17079,7 @@
         </p:nvSpPr>
         <p:spPr>
           <a:xfrm>
-            <a:off x="548640" y="1417320"/>
+            <a:off x="548640" y="1371600"/>
             <a:ext cx="1645920" cy="320040"/>
           </a:xfrm>
           <a:prstGeom prst="rect">
@@ -17055,7 +17104,7 @@
                 <a:ea typeface="Courier New" pitchFamily="34" charset="-122"/>
                 <a:cs typeface="Courier New" pitchFamily="34" charset="-120"/>
               </a:rPr>
-              <a:t>host</a:t>
+              <a:t>where</a:t>
             </a:r>
             <a:endParaRPr lang="en-US" sz="1200" dirty="0"/>
           </a:p>
@@ -17069,7 +17118,7 @@
         </p:nvSpPr>
         <p:spPr>
           <a:xfrm>
-            <a:off x="2286000" y="1417320"/>
+            <a:off x="2286000" y="1371600"/>
             <a:ext cx="9326880" cy="320040"/>
           </a:xfrm>
           <a:prstGeom prst="rect">
@@ -17094,7 +17143,7 @@
                 <a:ea typeface="Calibri" pitchFamily="34" charset="-122"/>
                 <a:cs typeface="Calibri" pitchFamily="34" charset="-120"/>
               </a:rPr>
-              <a:t>naranja7.cslcs.technion.ac.il — the server assigned to ece882-031</a:t>
+              <a:t>INSIDE the course QEMU image — systemd-detect-virt = kvm</a:t>
             </a:r>
             <a:endParaRPr lang="en-US" sz="1250" dirty="0"/>
           </a:p>
@@ -17108,7 +17157,7 @@
         </p:nvSpPr>
         <p:spPr>
           <a:xfrm>
-            <a:off x="548640" y="1984248"/>
+            <a:off x="548640" y="1874520"/>
             <a:ext cx="1645920" cy="320040"/>
           </a:xfrm>
           <a:prstGeom prst="rect">
@@ -17133,7 +17182,7 @@
                 <a:ea typeface="Courier New" pitchFamily="34" charset="-122"/>
                 <a:cs typeface="Courier New" pitchFamily="34" charset="-120"/>
               </a:rPr>
-              <a:t>cpu</a:t>
+              <a:t>distro</a:t>
             </a:r>
             <a:endParaRPr lang="en-US" sz="1200" dirty="0"/>
           </a:p>
@@ -17147,7 +17196,7 @@
         </p:nvSpPr>
         <p:spPr>
           <a:xfrm>
-            <a:off x="2286000" y="1984248"/>
+            <a:off x="2286000" y="1874520"/>
             <a:ext cx="9326880" cy="320040"/>
           </a:xfrm>
           <a:prstGeom prst="rect">
@@ -17172,7 +17221,7 @@
                 <a:ea typeface="Calibri" pitchFamily="34" charset="-122"/>
                 <a:cs typeface="Calibri" pitchFamily="34" charset="-120"/>
               </a:rPr>
-              <a:t>2 × Intel Xeon E5-2630 v3 @ 2.40 GHz, 32 threads</a:t>
+              <a:t>Ubuntu 22.04.5 LTS, kernel 5.15.0-1080-kvm</a:t>
             </a:r>
             <a:endParaRPr lang="en-US" sz="1250" dirty="0"/>
           </a:p>
@@ -17186,7 +17235,7 @@
         </p:nvSpPr>
         <p:spPr>
           <a:xfrm>
-            <a:off x="548640" y="2551176"/>
+            <a:off x="548640" y="2377440"/>
             <a:ext cx="1645920" cy="320040"/>
           </a:xfrm>
           <a:prstGeom prst="rect">
@@ -17211,7 +17260,7 @@
                 <a:ea typeface="Courier New" pitchFamily="34" charset="-122"/>
                 <a:cs typeface="Courier New" pitchFamily="34" charset="-120"/>
               </a:rPr>
-              <a:t>os</a:t>
+              <a:t>guest</a:t>
             </a:r>
             <a:endParaRPr lang="en-US" sz="1200" dirty="0"/>
           </a:p>
@@ -17225,7 +17274,7 @@
         </p:nvSpPr>
         <p:spPr>
           <a:xfrm>
-            <a:off x="2286000" y="2551176"/>
+            <a:off x="2286000" y="2377440"/>
             <a:ext cx="9326880" cy="320040"/>
           </a:xfrm>
           <a:prstGeom prst="rect">
@@ -17250,7 +17299,7 @@
                 <a:ea typeface="Calibri" pitchFamily="34" charset="-122"/>
                 <a:cs typeface="Calibri" pitchFamily="34" charset="-120"/>
               </a:rPr>
-              <a:t>Ubuntu 24.04.4 LTS, kernel 6.8.0-124</a:t>
+              <a:t>8 vcpus, 3938 MB, Haswell vPMU</a:t>
             </a:r>
             <a:endParaRPr lang="en-US" sz="1250" dirty="0"/>
           </a:p>
@@ -17264,7 +17313,7 @@
         </p:nvSpPr>
         <p:spPr>
           <a:xfrm>
-            <a:off x="548640" y="3118104"/>
+            <a:off x="548640" y="2880360"/>
             <a:ext cx="1645920" cy="320040"/>
           </a:xfrm>
           <a:prstGeom prst="rect">
@@ -17303,7 +17352,7 @@
         </p:nvSpPr>
         <p:spPr>
           <a:xfrm>
-            <a:off x="2286000" y="3118104"/>
+            <a:off x="2286000" y="2880360"/>
             <a:ext cx="9326880" cy="320040"/>
           </a:xfrm>
           <a:prstGeom prst="rect">
@@ -17328,7 +17377,7 @@
                 <a:ea typeface="Calibri" pitchFamily="34" charset="-122"/>
                 <a:cs typeface="Calibri" pitchFamily="34" charset="-120"/>
               </a:rPr>
-              <a:t>CPython 3.12.3  ·  pyperf 2.10.0  ·  perf 6.8.12</a:t>
+              <a:t>CPython 3.10.12  ·  pyperf 2.10.0  ·  perf 5.15.179</a:t>
             </a:r>
             <a:endParaRPr lang="en-US" sz="1250" dirty="0"/>
           </a:p>
@@ -17342,7 +17391,7 @@
         </p:nvSpPr>
         <p:spPr>
           <a:xfrm>
-            <a:off x="548640" y="3685032"/>
+            <a:off x="548640" y="3383280"/>
             <a:ext cx="1645920" cy="320040"/>
           </a:xfrm>
           <a:prstGeom prst="rect">
@@ -17367,7 +17416,7 @@
                 <a:ea typeface="Courier New" pitchFamily="34" charset="-122"/>
                 <a:cs typeface="Courier New" pitchFamily="34" charset="-120"/>
               </a:rPr>
-              <a:t>simulator</a:t>
+              <a:t>profilers</a:t>
             </a:r>
             <a:endParaRPr lang="en-US" sz="1200" dirty="0"/>
           </a:p>
@@ -17381,7 +17430,7 @@
         </p:nvSpPr>
         <p:spPr>
           <a:xfrm>
-            <a:off x="2286000" y="3685032"/>
+            <a:off x="2286000" y="3383280"/>
             <a:ext cx="9326880" cy="320040"/>
           </a:xfrm>
           <a:prstGeom prst="rect">
@@ -17406,7 +17455,7 @@
                 <a:ea typeface="Calibri" pitchFamily="34" charset="-122"/>
                 <a:cs typeface="Calibri" pitchFamily="34" charset="-120"/>
               </a:rPr>
-              <a:t>Icarus Verilog 12.0 (installed without root via dpkg -x)</a:t>
+              <a:t>py-spy 0.4.2 (Python frames)  ·  cProfile (call counts)</a:t>
             </a:r>
             <a:endParaRPr lang="en-US" sz="1250" dirty="0"/>
           </a:p>
@@ -17420,7 +17469,7 @@
         </p:nvSpPr>
         <p:spPr>
           <a:xfrm>
-            <a:off x="548640" y="4251960"/>
+            <a:off x="548640" y="3886200"/>
             <a:ext cx="1645920" cy="320040"/>
           </a:xfrm>
           <a:prstGeom prst="rect">
@@ -17445,7 +17494,7 @@
                 <a:ea typeface="Courier New" pitchFamily="34" charset="-122"/>
                 <a:cs typeface="Courier New" pitchFamily="34" charset="-120"/>
               </a:rPr>
-              <a:t>method</a:t>
+              <a:t>simulator</a:t>
             </a:r>
             <a:endParaRPr lang="en-US" sz="1200" dirty="0"/>
           </a:p>
@@ -17459,7 +17508,7 @@
         </p:nvSpPr>
         <p:spPr>
           <a:xfrm>
-            <a:off x="2286000" y="4251960"/>
+            <a:off x="2286000" y="3886200"/>
             <a:ext cx="9326880" cy="320040"/>
           </a:xfrm>
           <a:prstGeom prst="rect">
@@ -17484,7 +17533,7 @@
                 <a:ea typeface="Calibri" pitchFamily="34" charset="-122"/>
                 <a:cs typeface="Calibri" pitchFamily="34" charset="-120"/>
               </a:rPr>
-              <a:t>pyperf --rigorous, taskset -c 8, load average 0.16 before the run</a:t>
+              <a:t>Icarus Verilog 11.0</a:t>
             </a:r>
             <a:endParaRPr lang="en-US" sz="1250" dirty="0"/>
           </a:p>
@@ -17498,7 +17547,7 @@
         </p:nvSpPr>
         <p:spPr>
           <a:xfrm>
-            <a:off x="548640" y="4818888"/>
+            <a:off x="548640" y="4389120"/>
             <a:ext cx="1645920" cy="320040"/>
           </a:xfrm>
           <a:prstGeom prst="rect">
@@ -17523,7 +17572,7 @@
                 <a:ea typeface="Courier New" pitchFamily="34" charset="-122"/>
                 <a:cs typeface="Courier New" pitchFamily="34" charset="-120"/>
               </a:rPr>
-              <a:t>counters</a:t>
+              <a:t>launch</a:t>
             </a:r>
             <a:endParaRPr lang="en-US" sz="1200" dirty="0"/>
           </a:p>
@@ -17537,7 +17586,7 @@
         </p:nvSpPr>
         <p:spPr>
           <a:xfrm>
-            <a:off x="2286000" y="4818888"/>
+            <a:off x="2286000" y="4389120"/>
             <a:ext cx="9326880" cy="320040"/>
           </a:xfrm>
           <a:prstGeom prst="rect">
@@ -17562,7 +17611,7 @@
                 <a:ea typeface="Calibri" pitchFamily="34" charset="-122"/>
                 <a:cs typeface="Calibri" pitchFamily="34" charset="-120"/>
               </a:rPr>
-              <a:t>perf_event_paranoid = -1 — full hardware counter access</a:t>
+              <a:t>-cpu host,pmu=on over a qcow2 overlay; image never written</a:t>
             </a:r>
             <a:endParaRPr lang="en-US" sz="1250" dirty="0"/>
           </a:p>
@@ -17576,8 +17625,86 @@
         </p:nvSpPr>
         <p:spPr>
           <a:xfrm>
-            <a:off x="548640" y="5532120"/>
-            <a:ext cx="11091672" cy="457200"/>
+            <a:off x="548640" y="4892040"/>
+            <a:ext cx="1645920" cy="320040"/>
+          </a:xfrm>
+          <a:prstGeom prst="rect">
+            <a:avLst/>
+          </a:prstGeom>
+          <a:noFill/>
+          <a:ln/>
+        </p:spPr>
+        <p:txBody>
+          <a:bodyPr wrap="square" lIns="0" tIns="0" rIns="0" bIns="0" rtlCol="0" anchor="ctr"/>
+          <a:lstStyle/>
+          <a:p>
+            <a:pPr indent="0" marL="0">
+              <a:buNone/>
+            </a:pPr>
+            <a:r>
+              <a:rPr lang="en-US" sz="1200" b="1" dirty="0">
+                <a:solidFill>
+                  <a:srgbClr val="E8833A"/>
+                </a:solidFill>
+                <a:latin typeface="Courier New" pitchFamily="34" charset="0"/>
+                <a:ea typeface="Courier New" pitchFamily="34" charset="-122"/>
+                <a:cs typeface="Courier New" pitchFamily="34" charset="-120"/>
+              </a:rPr>
+              <a:t>method</a:t>
+            </a:r>
+            <a:endParaRPr lang="en-US" sz="1200" dirty="0"/>
+          </a:p>
+        </p:txBody>
+      </p:sp>
+      <p:sp>
+        <p:nvSpPr>
+          <p:cNvPr id="20" name="Text 18"/>
+          <p:cNvSpPr txBox="1"/>
+          <p:nvPr/>
+        </p:nvSpPr>
+        <p:spPr>
+          <a:xfrm>
+            <a:off x="2286000" y="4892040"/>
+            <a:ext cx="9326880" cy="320040"/>
+          </a:xfrm>
+          <a:prstGeom prst="rect">
+            <a:avLst/>
+          </a:prstGeom>
+          <a:noFill/>
+          <a:ln/>
+        </p:spPr>
+        <p:txBody>
+          <a:bodyPr wrap="square" lIns="0" tIns="0" rIns="0" bIns="0" rtlCol="0" anchor="ctr"/>
+          <a:lstStyle/>
+          <a:p>
+            <a:pPr indent="0" marL="0">
+              <a:buNone/>
+            </a:pPr>
+            <a:r>
+              <a:rPr lang="en-US" sz="1250" dirty="0">
+                <a:solidFill>
+                  <a:srgbClr val="1B2430"/>
+                </a:solidFill>
+                <a:latin typeface="Calibri" pitchFamily="34" charset="0"/>
+                <a:ea typeface="Calibri" pitchFamily="34" charset="-122"/>
+                <a:cs typeface="Calibri" pitchFamily="34" charset="-120"/>
+              </a:rPr>
+              <a:t>pyperf --rigorous, taskset -c 2, counters in groups of two</a:t>
+            </a:r>
+            <a:endParaRPr lang="en-US" sz="1250" dirty="0"/>
+          </a:p>
+        </p:txBody>
+      </p:sp>
+      <p:sp>
+        <p:nvSpPr>
+          <p:cNvPr id="21" name="Text 19"/>
+          <p:cNvSpPr txBox="1"/>
+          <p:nvPr/>
+        </p:nvSpPr>
+        <p:spPr>
+          <a:xfrm>
+            <a:off x="548640" y="5577840"/>
+            <a:ext cx="11091672" cy="548640"/>
           </a:xfrm>
           <a:prstGeom prst="rect">
             <a:avLst/>
@@ -17591,12 +17718,12 @@
           <a:p>
             <a:pPr indent="0" marL="0">
               <a:lnSpc>
-                <a:spcPts val="1700"/>
+                <a:spcPts val="1500"/>
               </a:lnSpc>
               <a:buNone/>
             </a:pPr>
             <a:r>
-              <a:rPr lang="en-US" sz="1250" i="1" dirty="0">
+              <a:rPr lang="en-US" sz="1150" i="1" dirty="0">
                 <a:solidFill>
                   <a:srgbClr val="6B7785"/>
                 </a:solidFill>
@@ -17604,15 +17731,15 @@
                 <a:ea typeface="Calibri" pitchFamily="34" charset="-122"/>
                 <a:cs typeface="Calibri" pitchFamily="34" charset="-120"/>
               </a:rPr>
-              <a:t>Error bars of 1–2% come from the machine being genuinely idle and the process pinned. Every table in both reports regenerates with ./script_pyflate.sh and ./script_raytrace.sh.</a:t>
-            </a:r>
-            <a:endParaRPr lang="en-US" sz="1250" dirty="0"/>
-          </a:p>
-        </p:txBody>
-      </p:sp>
-      <p:sp>
-        <p:nvSpPr>
-          <p:cNvPr id="20" name="Text 18"/>
+              <a:t>pmu=on is what makes hardware counters work at all in the guest; without it perf answers &lt;not supported&gt; for every hardware event. Every table in both reports regenerates with ./script_pyflate.sh and ./script_raytrace.sh, run inside the guest.</a:t>
+            </a:r>
+            <a:endParaRPr lang="en-US" sz="1150" dirty="0"/>
+          </a:p>
+        </p:txBody>
+      </p:sp>
+      <p:sp>
+        <p:nvSpPr>
+          <p:cNvPr id="22" name="Text 20"/>
           <p:cNvSpPr txBox="1"/>
           <p:nvPr/>
         </p:nvSpPr>
@@ -17651,7 +17778,7 @@
       </p:sp>
       <p:sp>
         <p:nvSpPr>
-          <p:cNvPr id="21" name="Text 19"/>
+          <p:cNvPr id="23" name="Text 21"/>
           <p:cNvSpPr txBox="1"/>
           <p:nvPr/>
         </p:nvSpPr>
@@ -18064,7 +18191,7 @@
                 <a:ea typeface="Calibri" pitchFamily="34" charset="-122"/>
                 <a:cs typeface="Calibri" pitchFamily="34" charset="-120"/>
               </a:rPr>
-              <a:t>An added dependency for a stage the ablation shows is worth ~2%.</a:t>
+              <a:t>An added dependency for a stage the ablation shows is worth ~3%.</a:t>
             </a:r>
             <a:endParaRPr lang="en-US" sz="1200" dirty="0"/>
           </a:p>
@@ -19512,7 +19639,7 @@
                 <a:ea typeface="Courier New" pitchFamily="34" charset="-122"/>
                 <a:cs typeface="Courier New" pitchFamily="34" charset="-120"/>
               </a:rPr>
-              <a:t>perf record</a:t>
+              <a:t>py-spy</a:t>
             </a:r>
             <a:endParaRPr lang="en-US" sz="1400" dirty="0"/>
           </a:p>
@@ -19593,7 +19720,7 @@
                 <a:ea typeface="Calibri" pitchFamily="34" charset="-122"/>
                 <a:cs typeface="Calibri" pitchFamily="34" charset="-120"/>
               </a:rPr>
-              <a:t>cycle-weighted, per Python function</a:t>
+              <a:t>samples PYTHON frames directly;</a:t>
             </a:r>
             <a:endParaRPr lang="en-US" sz="1200" dirty="0"/>
           </a:p>
@@ -19613,7 +19740,7 @@
                 <a:ea typeface="Calibri" pitchFamily="34" charset="-122"/>
                 <a:cs typeface="Calibri" pitchFamily="34" charset="-120"/>
               </a:rPr>
-              <a:t>(needs CPython's -X perf trampoline)</a:t>
+              <a:t>no -X perf needed</a:t>
             </a:r>
             <a:endParaRPr lang="en-US" sz="1200" dirty="0"/>
           </a:p>
@@ -20055,7 +20182,7 @@
                 <a:ea typeface="Calibri" pitchFamily="34" charset="-122"/>
                 <a:cs typeface="Calibri" pitchFamily="34" charset="-120"/>
               </a:rPr>
-              <a:t>IPC, cache misses, branch misses</a:t>
+              <a:t>cycles, IPC, cache, branch</a:t>
             </a:r>
             <a:endParaRPr lang="en-US" sz="1200" dirty="0"/>
           </a:p>
@@ -20183,7 +20310,7 @@
                 <a:ea typeface="Calibri" pitchFamily="34" charset="-122"/>
                 <a:cs typeface="Calibri" pitchFamily="34" charset="-120"/>
               </a:rPr>
-              <a:t>cProfile ranks move_to_front at about 8%. perf puts it at 19.28% — second overall. Instrumentation charges per CALL; sampling charges per CYCLE. move_to_front is a function that is simply slow inside, so the call-count profiler under-reports it. We rewrote our analysis around perf.</a:t>
+              <a:t>cProfile charges move_to_front about 10%. py-spy puts it at 15.69% — third overall. Instrumentation charges per CALL; sampling charges per CYCLE. move_to_front rebuilds a list from three slices on every one of its 92,803 calls, so a call-count profiler under-reports exactly that shape. We rewrote the analysis around the sampler.</a:t>
             </a:r>
             <a:endParaRPr lang="en-US" sz="1300" dirty="0"/>
           </a:p>
@@ -20364,7 +20491,7 @@
                 <a:ea typeface="Cambria" pitchFamily="34" charset="-122"/>
                 <a:cs typeface="Cambria" pitchFamily="34" charset="-120"/>
               </a:rPr>
-              <a:t>The command in the brief does not do what it looks like</a:t>
+              <a:t>What perf can and cannot do inside the guest</a:t>
             </a:r>
             <a:endParaRPr lang="en-US" sz="2900" dirty="0"/>
           </a:p>
@@ -20378,8 +20505,8 @@
         </p:nvSpPr>
         <p:spPr>
           <a:xfrm>
-            <a:off x="548640" y="1353312"/>
-            <a:ext cx="3657600" cy="256032"/>
+            <a:off x="548640" y="1298448"/>
+            <a:ext cx="11091672" cy="420624"/>
           </a:xfrm>
           <a:prstGeom prst="rect">
             <a:avLst/>
@@ -20397,13 +20524,13 @@
             <a:r>
               <a:rPr lang="en-US" sz="1300" dirty="0">
                 <a:solidFill>
-                  <a:srgbClr val="6B7785"/>
-                </a:solidFill>
-                <a:latin typeface="Calibri" pitchFamily="34" charset="0"/>
-                <a:ea typeface="Calibri" pitchFamily="34" charset="-122"/>
-                <a:cs typeface="Calibri" pitchFamily="34" charset="-120"/>
-              </a:rPr>
-              <a:t>Project.pdf suggests:</a:t>
+                  <a:srgbClr val="1B2430"/>
+                </a:solidFill>
+                <a:latin typeface="Calibri" pitchFamily="34" charset="0"/>
+                <a:ea typeface="Calibri" pitchFamily="34" charset="-122"/>
+                <a:cs typeface="Calibri" pitchFamily="34" charset="-120"/>
+              </a:rPr>
+              <a:t>All of our work runs inside the course QEMU image. That constrains the tooling in ways we had to establish by testing, not by assuming:</a:t>
             </a:r>
             <a:endParaRPr lang="en-US" sz="1300" dirty="0"/>
           </a:p>
@@ -20417,7 +20544,7 @@
         </p:nvSpPr>
         <p:spPr>
           <a:xfrm>
-            <a:off x="548640" y="1627632"/>
+            <a:off x="548640" y="1691640"/>
             <a:ext cx="11091672" cy="457200"/>
           </a:xfrm>
           <a:prstGeom prst="roundRect">
@@ -20444,7 +20571,7 @@
         </p:nvSpPr>
         <p:spPr>
           <a:xfrm>
-            <a:off x="777240" y="1719072"/>
+            <a:off x="777240" y="1783080"/>
             <a:ext cx="10634472" cy="292608"/>
           </a:xfrm>
           <a:prstGeom prst="rect">
@@ -20469,7 +20596,7 @@
                 <a:ea typeface="Courier New" pitchFamily="34" charset="-122"/>
                 <a:cs typeface="Courier New" pitchFamily="34" charset="-120"/>
               </a:rPr>
-              <a:t>perf record -F 999 -g -- python3-dbg -m pyperformance run --bench &lt;name&gt;</a:t>
+              <a:t>qemu-system-x86_64 -m 4096 -smp 8 -cpu host,pmu=on -accel kvm ...</a:t>
             </a:r>
             <a:endParaRPr lang="en-US" sz="1400" dirty="0"/>
           </a:p>
@@ -20483,7 +20610,7 @@
         </p:nvSpPr>
         <p:spPr>
           <a:xfrm>
-            <a:off x="548640" y="2331720"/>
+            <a:off x="548640" y="2377440"/>
             <a:ext cx="5394960" cy="2148840"/>
           </a:xfrm>
           <a:prstGeom prst="roundRect">
@@ -20510,7 +20637,7 @@
         </p:nvSpPr>
         <p:spPr>
           <a:xfrm>
-            <a:off x="822960" y="2487168"/>
+            <a:off x="822960" y="2532888"/>
             <a:ext cx="4846320" cy="292608"/>
           </a:xfrm>
           <a:prstGeom prst="rect">
@@ -20529,13 +20656,13 @@
             <a:r>
               <a:rPr lang="en-US" sz="1400" b="1" dirty="0">
                 <a:solidFill>
-                  <a:srgbClr val="B3543F"/>
-                </a:solidFill>
-                <a:latin typeface="Calibri" pitchFamily="34" charset="0"/>
-                <a:ea typeface="Calibri" pitchFamily="34" charset="-122"/>
-                <a:cs typeface="Calibri" pitchFamily="34" charset="-120"/>
-              </a:rPr>
-              <a:t>Trap 1  ·  you profile the wrong process</a:t>
+                  <a:srgbClr val="2D9B8A"/>
+                </a:solidFill>
+                <a:latin typeface="Calibri" pitchFamily="34" charset="0"/>
+                <a:ea typeface="Calibri" pitchFamily="34" charset="-122"/>
+                <a:cs typeface="Calibri" pitchFamily="34" charset="-120"/>
+              </a:rPr>
+              <a:t>Counting works — only because of pmu=on</a:t>
             </a:r>
             <a:endParaRPr lang="en-US" sz="1400" dirty="0"/>
           </a:p>
@@ -20549,7 +20676,7 @@
         </p:nvSpPr>
         <p:spPr>
           <a:xfrm>
-            <a:off x="822960" y="2834640"/>
+            <a:off x="822960" y="2880360"/>
             <a:ext cx="4846320" cy="914400"/>
           </a:xfrm>
           <a:prstGeom prst="rect">
@@ -20577,7 +20704,7 @@
                 <a:ea typeface="Calibri" pitchFamily="34" charset="-122"/>
                 <a:cs typeface="Calibri" pitchFamily="34" charset="-120"/>
               </a:rPr>
-              <a:t>pyperformance builds a virtualenv and re-execs the benchmark in a CHILD process, using an interpreter that is not python3-dbg unless you pass --python. perf then samples process machinery.</a:t>
+              <a:t>Without that flag the guest has NO virtual PMU and perf answers &lt;not supported&gt; for every hardware event. With it we get a Haswell vPMU: cycles, instructions, cache and branch counters all count.</a:t>
             </a:r>
             <a:endParaRPr lang="en-US" sz="1200" dirty="0"/>
           </a:p>
@@ -20591,7 +20718,7 @@
         </p:nvSpPr>
         <p:spPr>
           <a:xfrm>
-            <a:off x="822960" y="3931920"/>
+            <a:off x="822960" y="3977640"/>
             <a:ext cx="4846320" cy="411480"/>
           </a:xfrm>
           <a:prstGeom prst="rect">
@@ -20616,7 +20743,7 @@
                 <a:ea typeface="Calibri" pitchFamily="34" charset="-122"/>
                 <a:cs typeface="Calibri" pitchFamily="34" charset="-120"/>
               </a:rPr>
-              <a:t>Fix: tools/profile_target.py runs the workload in-process.</a:t>
+              <a:t>This is the only reason we have counter data at all.</a:t>
             </a:r>
             <a:endParaRPr lang="en-US" sz="1200" dirty="0"/>
           </a:p>
@@ -20630,7 +20757,7 @@
         </p:nvSpPr>
         <p:spPr>
           <a:xfrm>
-            <a:off x="6245352" y="2331720"/>
+            <a:off x="6245352" y="2377440"/>
             <a:ext cx="5394960" cy="2148840"/>
           </a:xfrm>
           <a:prstGeom prst="roundRect">
@@ -20657,7 +20784,7 @@
         </p:nvSpPr>
         <p:spPr>
           <a:xfrm>
-            <a:off x="6519672" y="2487168"/>
+            <a:off x="6519672" y="2532888"/>
             <a:ext cx="4846320" cy="292608"/>
           </a:xfrm>
           <a:prstGeom prst="rect">
@@ -20682,7 +20809,7 @@
                 <a:ea typeface="Calibri" pitchFamily="34" charset="-122"/>
                 <a:cs typeface="Calibri" pitchFamily="34" charset="-120"/>
               </a:rPr>
-              <a:t>Trap 2  ·  no Python names in the graph</a:t>
+              <a:t>Sampling does NOT work</a:t>
             </a:r>
             <a:endParaRPr lang="en-US" sz="1400" dirty="0"/>
           </a:p>
@@ -20696,7 +20823,7 @@
         </p:nvSpPr>
         <p:spPr>
           <a:xfrm>
-            <a:off x="6519672" y="2834640"/>
+            <a:off x="6519672" y="2880360"/>
             <a:ext cx="4846320" cy="914400"/>
           </a:xfrm>
           <a:prstGeom prst="rect">
@@ -20724,7 +20851,7 @@
                 <a:ea typeface="Calibri" pitchFamily="34" charset="-122"/>
                 <a:cs typeface="Calibri" pitchFamily="34" charset="-120"/>
               </a:rPr>
-              <a:t>Python function names need CPython's perf trampoline, -X perf, which exists only in 3.12+. naranja7 runs 3.12.3 so it works; the course QEMU guest runs 3.10, where perf shows only _PyEval_EvalFrameDefault.</a:t>
+              <a:t>perf record on a hardware event captures ZERO samples here, even though perf stat counts that same event fine. Counting and sampling are different paths and only counting is virtualized.</a:t>
             </a:r>
             <a:endParaRPr lang="en-US" sz="1200" dirty="0"/>
           </a:p>
@@ -20738,7 +20865,7 @@
         </p:nvSpPr>
         <p:spPr>
           <a:xfrm>
-            <a:off x="6519672" y="3931920"/>
+            <a:off x="6519672" y="3977640"/>
             <a:ext cx="4846320" cy="411480"/>
           </a:xfrm>
           <a:prstGeom prst="rect">
@@ -20763,7 +20890,7 @@
                 <a:ea typeface="Calibri" pitchFamily="34" charset="-122"/>
                 <a:cs typeface="Calibri" pitchFamily="34" charset="-120"/>
               </a:rPr>
-              <a:t>Fix: detect the version; always emit cProfile as a fallback.</a:t>
+              <a:t>Fix: flame graphs use -e cpu-clock, which is timer-based.</a:t>
             </a:r>
             <a:endParaRPr lang="en-US" sz="1200" dirty="0"/>
           </a:p>
@@ -20777,7 +20904,7 @@
         </p:nvSpPr>
         <p:spPr>
           <a:xfrm>
-            <a:off x="548640" y="4663440"/>
+            <a:off x="548640" y="4709160"/>
             <a:ext cx="11091672" cy="1280160"/>
           </a:xfrm>
           <a:prstGeom prst="roundRect">
@@ -20804,7 +20931,7 @@
         </p:nvSpPr>
         <p:spPr>
           <a:xfrm>
-            <a:off x="822960" y="4791456"/>
+            <a:off x="822960" y="4837176"/>
             <a:ext cx="10543032" cy="274320"/>
           </a:xfrm>
           <a:prstGeom prst="rect">
@@ -20829,7 +20956,7 @@
                 <a:ea typeface="Calibri" pitchFamily="34" charset="-122"/>
                 <a:cs typeface="Calibri" pitchFamily="34" charset="-120"/>
               </a:rPr>
-              <a:t>And one that cost us an afternoon</a:t>
+              <a:t>The trap that nearly went into the report as a fact</a:t>
             </a:r>
             <a:endParaRPr lang="en-US" sz="1300" dirty="0"/>
           </a:p>
@@ -20843,8 +20970,8 @@
         </p:nvSpPr>
         <p:spPr>
           <a:xfrm>
-            <a:off x="822960" y="5074920"/>
-            <a:ext cx="10543032" cy="731520"/>
+            <a:off x="822960" y="5120640"/>
+            <a:ext cx="10543032" cy="777240"/>
           </a:xfrm>
           <a:prstGeom prst="rect">
             <a:avLst/>
@@ -20871,7 +20998,7 @@
                 <a:ea typeface="Calibri" pitchFamily="34" charset="-122"/>
                 <a:cs typeface="Calibri" pitchFamily="34" charset="-120"/>
               </a:rPr>
-              <a:t>The trampoline writes /tmp/perf-&lt;pid&gt;.map, and perf script needs that file to resolve py:: frames. A diagnostic of ours deleted /tmp between record and script — the flame graph still rendered, it had just silently become interpreter soup. Record and collapse in one pass.</a:t>
+              <a:t>Our first pass asked perf stat for six events at once. cycles came back as exactly 0, and we almost wrote "cycles is unsupported in the guest". It is counter multiplexing: the guest has fewer usable counters than a bare machine. In groups of two, cycles reads fine. Also: CPython 3.10 predates -X perf, so perf cannot name Python functions here — py-spy does that instead.</a:t>
             </a:r>
             <a:endParaRPr lang="en-US" sz="1200" dirty="0"/>
           </a:p>
@@ -22113,7 +22240,7 @@
                 <a:ea typeface="Calibri" pitchFamily="34" charset="-122"/>
                 <a:cs typeface="Calibri" pitchFamily="34" charset="-120"/>
               </a:rPr>
-              <a:t>perf, cycle-weighted, with Python function names resolved. Measured on naranja7.</a:t>
+              <a:t>py-spy, cycle-weighted, Python function names. Measured inside the QEMU guest.</a:t>
             </a:r>
             <a:endParaRPr lang="en-US" sz="1300" dirty="0"/>
           </a:p>
@@ -22167,7 +22294,7 @@
         <p:spPr>
           <a:xfrm>
             <a:off x="4206240" y="1847088"/>
-            <a:ext cx="3444586" cy="182880"/>
+            <a:ext cx="3378549" cy="182880"/>
           </a:xfrm>
           <a:prstGeom prst="rect">
             <a:avLst/>
@@ -22216,7 +22343,7 @@
                 <a:ea typeface="Calibri" pitchFamily="34" charset="-122"/>
                 <a:cs typeface="Calibri" pitchFamily="34" charset="-120"/>
               </a:rPr>
-              <a:t>21.25%</a:t>
+              <a:t>21.79%</a:t>
             </a:r>
             <a:endParaRPr lang="en-US" sz="1100" dirty="0"/>
           </a:p>
@@ -22255,7 +22382,7 @@
                 <a:ea typeface="Courier New" pitchFamily="34" charset="-122"/>
                 <a:cs typeface="Courier New" pitchFamily="34" charset="-120"/>
               </a:rPr>
-              <a:t>move_to_front</a:t>
+              <a:t>find_next_symbol</a:t>
             </a:r>
             <a:endParaRPr lang="en-US" sz="1100" dirty="0"/>
           </a:p>
@@ -22270,7 +22397,7 @@
         <p:spPr>
           <a:xfrm>
             <a:off x="4206240" y="2267712"/>
-            <a:ext cx="3125253" cy="182880"/>
+            <a:ext cx="2564534" cy="182880"/>
           </a:xfrm>
           <a:prstGeom prst="rect">
             <a:avLst/>
@@ -22319,7 +22446,7 @@
                 <a:ea typeface="Calibri" pitchFamily="34" charset="-122"/>
                 <a:cs typeface="Calibri" pitchFamily="34" charset="-120"/>
               </a:rPr>
-              <a:t>19.28%</a:t>
+              <a:t>16.54%</a:t>
             </a:r>
             <a:endParaRPr lang="en-US" sz="1100" dirty="0"/>
           </a:p>
@@ -22358,7 +22485,7 @@
                 <a:ea typeface="Courier New" pitchFamily="34" charset="-122"/>
                 <a:cs typeface="Courier New" pitchFamily="34" charset="-120"/>
               </a:rPr>
-              <a:t>HuffmanTable.find_next_symbol</a:t>
+              <a:t>move_to_front</a:t>
             </a:r>
             <a:endParaRPr lang="en-US" sz="1100" dirty="0"/>
           </a:p>
@@ -22373,7 +22500,7 @@
         <p:spPr>
           <a:xfrm>
             <a:off x="4206240" y="2688336"/>
-            <a:ext cx="2142938" cy="182880"/>
+            <a:ext cx="2432741" cy="182880"/>
           </a:xfrm>
           <a:prstGeom prst="rect">
             <a:avLst/>
@@ -22422,7 +22549,7 @@
                 <a:ea typeface="Calibri" pitchFamily="34" charset="-122"/>
                 <a:cs typeface="Calibri" pitchFamily="34" charset="-120"/>
               </a:rPr>
-              <a:t>13.22%</a:t>
+              <a:t>15.69%</a:t>
             </a:r>
             <a:endParaRPr lang="en-US" sz="1100" dirty="0"/>
           </a:p>
@@ -22461,7 +22588,7 @@
                 <a:ea typeface="Courier New" pitchFamily="34" charset="-122"/>
                 <a:cs typeface="Courier New" pitchFamily="34" charset="-120"/>
               </a:rPr>
-              <a:t>RBitfield.readbits</a:t>
+              <a:t>readbits</a:t>
             </a:r>
             <a:endParaRPr lang="en-US" sz="1100" dirty="0"/>
           </a:p>
@@ -22476,7 +22603,7 @@
         <p:spPr>
           <a:xfrm>
             <a:off x="4206240" y="3108960"/>
-            <a:ext cx="1376214" cy="182880"/>
+            <a:ext cx="1505540" cy="182880"/>
           </a:xfrm>
           <a:prstGeom prst="rect">
             <a:avLst/>
@@ -22525,7 +22652,7 @@
                 <a:ea typeface="Calibri" pitchFamily="34" charset="-122"/>
                 <a:cs typeface="Calibri" pitchFamily="34" charset="-120"/>
               </a:rPr>
-              <a:t>8.49%</a:t>
+              <a:t>9.71%</a:t>
             </a:r>
             <a:endParaRPr lang="en-US" sz="1100" dirty="0"/>
           </a:p>
@@ -22564,7 +22691,7 @@
                 <a:ea typeface="Courier New" pitchFamily="34" charset="-122"/>
                 <a:cs typeface="Courier New" pitchFamily="34" charset="-120"/>
               </a:rPr>
-              <a:t>bwt_transform</a:t>
+              <a:t>snoopbits</a:t>
             </a:r>
             <a:endParaRPr lang="en-US" sz="1100" dirty="0"/>
           </a:p>
@@ -22579,7 +22706,7 @@
         <p:spPr>
           <a:xfrm>
             <a:off x="4206240" y="3529584"/>
-            <a:ext cx="1369730" cy="182880"/>
+            <a:ext cx="1434217" cy="182880"/>
           </a:xfrm>
           <a:prstGeom prst="rect">
             <a:avLst/>
@@ -22628,7 +22755,7 @@
                 <a:ea typeface="Calibri" pitchFamily="34" charset="-122"/>
                 <a:cs typeface="Calibri" pitchFamily="34" charset="-120"/>
               </a:rPr>
-              <a:t>8.45%</a:t>
+              <a:t>9.25%</a:t>
             </a:r>
             <a:endParaRPr lang="en-US" sz="1100" dirty="0"/>
           </a:p>
@@ -22667,7 +22794,7 @@
                 <a:ea typeface="Courier New" pitchFamily="34" charset="-122"/>
                 <a:cs typeface="Courier New" pitchFamily="34" charset="-120"/>
               </a:rPr>
-              <a:t>RBitfield.snoopbits</a:t>
+              <a:t>bwt_transform</a:t>
             </a:r>
             <a:endParaRPr lang="en-US" sz="1100" dirty="0"/>
           </a:p>
@@ -22682,7 +22809,7 @@
         <p:spPr>
           <a:xfrm>
             <a:off x="4206240" y="3950208"/>
-            <a:ext cx="1324342" cy="182880"/>
+            <a:ext cx="1397004" cy="182880"/>
           </a:xfrm>
           <a:prstGeom prst="rect">
             <a:avLst/>
@@ -22731,7 +22858,7 @@
                 <a:ea typeface="Calibri" pitchFamily="34" charset="-122"/>
                 <a:cs typeface="Calibri" pitchFamily="34" charset="-120"/>
               </a:rPr>
-              <a:t>8.17%</a:t>
+              <a:t>9.01%</a:t>
             </a:r>
             <a:endParaRPr lang="en-US" sz="1100" dirty="0"/>
           </a:p>
@@ -22785,7 +22912,7 @@
         <p:spPr>
           <a:xfrm>
             <a:off x="4206240" y="4370832"/>
-            <a:ext cx="893161" cy="182880"/>
+            <a:ext cx="955111" cy="182880"/>
           </a:xfrm>
           <a:prstGeom prst="rect">
             <a:avLst/>
@@ -22834,7 +22961,7 @@
                 <a:ea typeface="Calibri" pitchFamily="34" charset="-122"/>
                 <a:cs typeface="Calibri" pitchFamily="34" charset="-120"/>
               </a:rPr>
-              <a:t>5.51%</a:t>
+              <a:t>6.16%</a:t>
             </a:r>
             <a:endParaRPr lang="en-US" sz="1100" dirty="0"/>
           </a:p>
@@ -22873,7 +23000,7 @@
                 <a:ea typeface="Courier New" pitchFamily="34" charset="-122"/>
                 <a:cs typeface="Courier New" pitchFamily="34" charset="-120"/>
               </a:rPr>
-              <a:t>BitfieldBase._mask</a:t>
+              <a:t>_mask</a:t>
             </a:r>
             <a:endParaRPr lang="en-US" sz="1100" dirty="0"/>
           </a:p>
@@ -22888,7 +23015,7 @@
         <p:spPr>
           <a:xfrm>
             <a:off x="4206240" y="4791456"/>
-            <a:ext cx="889919" cy="182880"/>
+            <a:ext cx="573687" cy="182880"/>
           </a:xfrm>
           <a:prstGeom prst="rect">
             <a:avLst/>
@@ -22937,7 +23064,7 @@
                 <a:ea typeface="Calibri" pitchFamily="34" charset="-122"/>
                 <a:cs typeface="Calibri" pitchFamily="34" charset="-120"/>
               </a:rPr>
-              <a:t>5.49%</a:t>
+              <a:t>3.70%</a:t>
             </a:r>
             <a:endParaRPr lang="en-US" sz="1100" dirty="0"/>
           </a:p>
@@ -23042,7 +23169,7 @@
                 <a:ea typeface="Cambria" pitchFamily="34" charset="-122"/>
                 <a:cs typeface="Cambria" pitchFamily="34" charset="-120"/>
               </a:rPr>
-              <a:t>37.4%</a:t>
+              <a:t>42.0%</a:t>
             </a:r>
             <a:endParaRPr lang="en-US" sz="2200" dirty="0"/>
           </a:p>
@@ -23120,7 +23247,7 @@
                 <a:ea typeface="Cambria" pitchFamily="34" charset="-122"/>
                 <a:cs typeface="Cambria" pitchFamily="34" charset="-120"/>
               </a:rPr>
-              <a:t>19.3%</a:t>
+              <a:t>15.7%</a:t>
             </a:r>
             <a:endParaRPr lang="en-US" sz="2200" dirty="0"/>
           </a:p>
@@ -23198,7 +23325,7 @@
                 <a:ea typeface="Cambria" pitchFamily="34" charset="-122"/>
                 <a:cs typeface="Cambria" pitchFamily="34" charset="-120"/>
               </a:rPr>
-              <a:t>14.0%</a:t>
+              <a:t>15.2%</a:t>
             </a:r>
             <a:endParaRPr lang="en-US" sz="2200" dirty="0"/>
           </a:p>
@@ -23276,7 +23403,7 @@
                 <a:ea typeface="Cambria" pitchFamily="34" charset="-122"/>
                 <a:cs typeface="Cambria" pitchFamily="34" charset="-120"/>
               </a:rPr>
-              <a:t>21.3%</a:t>
+              <a:t>21.8%</a:t>
             </a:r>
             <a:endParaRPr lang="en-US" sz="2200" dirty="0"/>
           </a:p>
@@ -23354,7 +23481,7 @@
                 <a:ea typeface="Calibri" pitchFamily="34" charset="-122"/>
                 <a:cs typeface="Calibri" pitchFamily="34" charset="-120"/>
               </a:rPr>
-              <a:t>3,185,453 Python function calls to decompress 400 KB.  That is the number to keep in your head for the next slide.</a:t>
+              <a:t>3,185,454 Python function calls to decompress 400 KB.  That is the number to keep in your head for the next slide.</a:t>
             </a:r>
             <a:endParaRPr lang="en-US" sz="1400" dirty="0"/>
           </a:p>
@@ -25182,7 +25309,7 @@
                 <a:ea typeface="Cambria" pitchFamily="34" charset="-122"/>
                 <a:cs typeface="Cambria" pitchFamily="34" charset="-120"/>
               </a:rPr>
-              <a:t>2.38× faster — and the counters say why</a:t>
+              <a:t>2.51× faster — and the counters say why</a:t>
             </a:r>
             <a:endParaRPr lang="en-US" sz="2900" dirty="0"/>
           </a:p>
@@ -25221,7 +25348,7 @@
                 <a:ea typeface="Cambria" pitchFamily="34" charset="-122"/>
                 <a:cs typeface="Cambria" pitchFamily="34" charset="-120"/>
               </a:rPr>
-              <a:t>733 ms</a:t>
+              <a:t>1115 ms</a:t>
             </a:r>
             <a:endParaRPr lang="en-US" sz="4000" dirty="0"/>
           </a:p>
@@ -25323,7 +25450,7 @@
                 <a:ea typeface="Cambria" pitchFamily="34" charset="-122"/>
                 <a:cs typeface="Cambria" pitchFamily="34" charset="-120"/>
               </a:rPr>
-              <a:t>309 ms</a:t>
+              <a:t>445 ms</a:t>
             </a:r>
             <a:endParaRPr lang="en-US" sz="4000" dirty="0"/>
           </a:p>
@@ -25428,7 +25555,7 @@
                 <a:ea typeface="Cambria" pitchFamily="34" charset="-122"/>
                 <a:cs typeface="Cambria" pitchFamily="34" charset="-120"/>
               </a:rPr>
-              <a:t>2.38×</a:t>
+              <a:t>2.51×</a:t>
             </a:r>
             <a:endParaRPr lang="en-US" sz="3200" dirty="0"/>
           </a:p>
@@ -25467,7 +25594,7 @@
                 <a:ea typeface="Calibri" pitchFamily="34" charset="-122"/>
                 <a:cs typeface="Calibri" pitchFamily="34" charset="-120"/>
               </a:rPr>
-              <a:t>57.9% cut  ·  t = 620</a:t>
+              <a:t>60.1% cut  ·  t = 676</a:t>
             </a:r>
             <a:endParaRPr lang="en-US" sz="1100" dirty="0"/>
           </a:p>
@@ -25529,7 +25656,7 @@
                 <a:ea typeface="Calibri" pitchFamily="34" charset="-122"/>
                 <a:cs typeface="Calibri" pitchFamily="34" charset="-120"/>
               </a:rPr>
-              <a:t>±1–2% error bars</a:t>
+              <a:t>inside the QEMU guest</a:t>
             </a:r>
             <a:endParaRPr lang="en-US" sz="1200" dirty="0"/>
           </a:p>
@@ -25549,7 +25676,7 @@
                 <a:ea typeface="Calibri" pitchFamily="34" charset="-122"/>
                 <a:cs typeface="Calibri" pitchFamily="34" charset="-120"/>
               </a:rPr>
-              <a:t>idle, pinned machine</a:t>
+              <a:t>pinned with taskset</a:t>
             </a:r>
             <a:endParaRPr lang="en-US" sz="1200" dirty="0"/>
           </a:p>
@@ -25733,7 +25860,7 @@
                 <a:ea typeface="Courier New" pitchFamily="34" charset="-122"/>
                 <a:cs typeface="Courier New" pitchFamily="34" charset="-120"/>
               </a:rPr>
-              <a:t>instructions</a:t>
+              <a:t>cycles</a:t>
             </a:r>
             <a:endParaRPr lang="en-US" sz="1200" dirty="0"/>
           </a:p>
@@ -25772,7 +25899,7 @@
                 <a:ea typeface="Calibri" pitchFamily="34" charset="-122"/>
                 <a:cs typeface="Calibri" pitchFamily="34" charset="-120"/>
               </a:rPr>
-              <a:t>24.81 G</a:t>
+              <a:t>8.30 G</a:t>
             </a:r>
             <a:endParaRPr lang="en-US" sz="1200" dirty="0"/>
           </a:p>
@@ -25811,7 +25938,7 @@
                 <a:ea typeface="Calibri" pitchFamily="34" charset="-122"/>
                 <a:cs typeface="Calibri" pitchFamily="34" charset="-120"/>
               </a:rPr>
-              <a:t>10.74 G</a:t>
+              <a:t>3.30 G</a:t>
             </a:r>
             <a:endParaRPr lang="en-US" sz="1200" dirty="0"/>
           </a:p>
@@ -25850,7 +25977,7 @@
                 <a:ea typeface="Calibri" pitchFamily="34" charset="-122"/>
                 <a:cs typeface="Calibri" pitchFamily="34" charset="-120"/>
               </a:rPr>
-              <a:t>2.31× fewer</a:t>
+              <a:t>2.51× fewer</a:t>
             </a:r>
             <a:endParaRPr lang="en-US" sz="1200" dirty="0"/>
           </a:p>
@@ -25858,13 +25985,169 @@
       </p:sp>
       <p:sp>
         <p:nvSpPr>
-          <p:cNvPr id="21" name="Shape 19"/>
+          <p:cNvPr id="21" name="Text 19"/>
+          <p:cNvSpPr txBox="1"/>
+          <p:nvPr/>
+        </p:nvSpPr>
+        <p:spPr>
+          <a:xfrm>
+            <a:off x="548640" y="3401568"/>
+            <a:ext cx="3017520" cy="310896"/>
+          </a:xfrm>
+          <a:prstGeom prst="rect">
+            <a:avLst/>
+          </a:prstGeom>
+          <a:noFill/>
+          <a:ln/>
+        </p:spPr>
+        <p:txBody>
+          <a:bodyPr wrap="square" lIns="0" tIns="0" rIns="0" bIns="0" rtlCol="0" anchor="ctr"/>
+          <a:lstStyle/>
+          <a:p>
+            <a:pPr indent="0" marL="0">
+              <a:buNone/>
+            </a:pPr>
+            <a:r>
+              <a:rPr lang="en-US" sz="1200" dirty="0">
+                <a:solidFill>
+                  <a:srgbClr val="1B2430"/>
+                </a:solidFill>
+                <a:latin typeface="Courier New" pitchFamily="34" charset="0"/>
+                <a:ea typeface="Courier New" pitchFamily="34" charset="-122"/>
+                <a:cs typeface="Courier New" pitchFamily="34" charset="-120"/>
+              </a:rPr>
+              <a:t>instructions</a:t>
+            </a:r>
+            <a:endParaRPr lang="en-US" sz="1200" dirty="0"/>
+          </a:p>
+        </p:txBody>
+      </p:sp>
+      <p:sp>
+        <p:nvSpPr>
+          <p:cNvPr id="22" name="Text 20"/>
+          <p:cNvSpPr txBox="1"/>
+          <p:nvPr/>
+        </p:nvSpPr>
+        <p:spPr>
+          <a:xfrm>
+            <a:off x="3566160" y="3401568"/>
+            <a:ext cx="2286000" cy="310896"/>
+          </a:xfrm>
+          <a:prstGeom prst="rect">
+            <a:avLst/>
+          </a:prstGeom>
+          <a:noFill/>
+          <a:ln/>
+        </p:spPr>
+        <p:txBody>
+          <a:bodyPr wrap="square" lIns="0" tIns="0" rIns="0" bIns="0" rtlCol="0" anchor="ctr"/>
+          <a:lstStyle/>
+          <a:p>
+            <a:pPr indent="0" marL="0">
+              <a:buNone/>
+            </a:pPr>
+            <a:r>
+              <a:rPr lang="en-US" sz="1200" dirty="0">
+                <a:solidFill>
+                  <a:srgbClr val="1B2430"/>
+                </a:solidFill>
+                <a:latin typeface="Calibri" pitchFamily="34" charset="0"/>
+                <a:ea typeface="Calibri" pitchFamily="34" charset="-122"/>
+                <a:cs typeface="Calibri" pitchFamily="34" charset="-120"/>
+              </a:rPr>
+              <a:t>21.56 G</a:t>
+            </a:r>
+            <a:endParaRPr lang="en-US" sz="1200" dirty="0"/>
+          </a:p>
+        </p:txBody>
+      </p:sp>
+      <p:sp>
+        <p:nvSpPr>
+          <p:cNvPr id="23" name="Text 21"/>
+          <p:cNvSpPr txBox="1"/>
+          <p:nvPr/>
+        </p:nvSpPr>
+        <p:spPr>
+          <a:xfrm>
+            <a:off x="5852160" y="3401568"/>
+            <a:ext cx="2286000" cy="310896"/>
+          </a:xfrm>
+          <a:prstGeom prst="rect">
+            <a:avLst/>
+          </a:prstGeom>
+          <a:noFill/>
+          <a:ln/>
+        </p:spPr>
+        <p:txBody>
+          <a:bodyPr wrap="square" lIns="0" tIns="0" rIns="0" bIns="0" rtlCol="0" anchor="ctr"/>
+          <a:lstStyle/>
+          <a:p>
+            <a:pPr indent="0" marL="0">
+              <a:buNone/>
+            </a:pPr>
+            <a:r>
+              <a:rPr lang="en-US" sz="1200" dirty="0">
+                <a:solidFill>
+                  <a:srgbClr val="1B2430"/>
+                </a:solidFill>
+                <a:latin typeface="Calibri" pitchFamily="34" charset="0"/>
+                <a:ea typeface="Calibri" pitchFamily="34" charset="-122"/>
+                <a:cs typeface="Calibri" pitchFamily="34" charset="-120"/>
+              </a:rPr>
+              <a:t>9.49 G</a:t>
+            </a:r>
+            <a:endParaRPr lang="en-US" sz="1200" dirty="0"/>
+          </a:p>
+        </p:txBody>
+      </p:sp>
+      <p:sp>
+        <p:nvSpPr>
+          <p:cNvPr id="24" name="Text 22"/>
+          <p:cNvSpPr txBox="1"/>
+          <p:nvPr/>
+        </p:nvSpPr>
+        <p:spPr>
+          <a:xfrm>
+            <a:off x="8138160" y="3401568"/>
+            <a:ext cx="2377440" cy="310896"/>
+          </a:xfrm>
+          <a:prstGeom prst="rect">
+            <a:avLst/>
+          </a:prstGeom>
+          <a:noFill/>
+          <a:ln/>
+        </p:spPr>
+        <p:txBody>
+          <a:bodyPr wrap="square" lIns="0" tIns="0" rIns="0" bIns="0" rtlCol="0" anchor="ctr"/>
+          <a:lstStyle/>
+          <a:p>
+            <a:pPr indent="0" marL="0">
+              <a:buNone/>
+            </a:pPr>
+            <a:r>
+              <a:rPr lang="en-US" sz="1200" dirty="0">
+                <a:solidFill>
+                  <a:srgbClr val="2D9B8A"/>
+                </a:solidFill>
+                <a:latin typeface="Calibri" pitchFamily="34" charset="0"/>
+                <a:ea typeface="Calibri" pitchFamily="34" charset="-122"/>
+                <a:cs typeface="Calibri" pitchFamily="34" charset="-120"/>
+              </a:rPr>
+              <a:t>2.27× fewer</a:t>
+            </a:r>
+            <a:endParaRPr lang="en-US" sz="1200" dirty="0"/>
+          </a:p>
+        </p:txBody>
+      </p:sp>
+      <p:sp>
+        <p:nvSpPr>
+          <p:cNvPr id="25" name="Shape 23"/>
           <p:cNvSpPr/>
           <p:nvPr/>
         </p:nvSpPr>
         <p:spPr>
           <a:xfrm>
-            <a:off x="457200" y="3364992"/>
+            <a:off x="457200" y="3749040"/>
             <a:ext cx="10149840" cy="365760"/>
           </a:xfrm>
           <a:prstGeom prst="rect">
@@ -25883,13 +26166,13 @@
       </p:sp>
       <p:sp>
         <p:nvSpPr>
-          <p:cNvPr id="22" name="Text 20"/>
-          <p:cNvSpPr txBox="1"/>
-          <p:nvPr/>
-        </p:nvSpPr>
-        <p:spPr>
-          <a:xfrm>
-            <a:off x="548640" y="3401568"/>
+          <p:cNvPr id="26" name="Text 24"/>
+          <p:cNvSpPr txBox="1"/>
+          <p:nvPr/>
+        </p:nvSpPr>
+        <p:spPr>
+          <a:xfrm>
+            <a:off x="548640" y="3785616"/>
             <a:ext cx="3017520" cy="310896"/>
           </a:xfrm>
           <a:prstGeom prst="rect">
@@ -25922,13 +26205,13 @@
       </p:sp>
       <p:sp>
         <p:nvSpPr>
-          <p:cNvPr id="23" name="Text 21"/>
-          <p:cNvSpPr txBox="1"/>
-          <p:nvPr/>
-        </p:nvSpPr>
-        <p:spPr>
-          <a:xfrm>
-            <a:off x="3566160" y="3401568"/>
+          <p:cNvPr id="27" name="Text 25"/>
+          <p:cNvSpPr txBox="1"/>
+          <p:nvPr/>
+        </p:nvSpPr>
+        <p:spPr>
+          <a:xfrm>
+            <a:off x="3566160" y="3785616"/>
             <a:ext cx="2286000" cy="310896"/>
           </a:xfrm>
           <a:prstGeom prst="rect">
@@ -25953,7 +26236,7 @@
                 <a:ea typeface="Calibri" pitchFamily="34" charset="-122"/>
                 <a:cs typeface="Calibri" pitchFamily="34" charset="-120"/>
               </a:rPr>
-              <a:t>2.73</a:t>
+              <a:t>2.60</a:t>
             </a:r>
             <a:endParaRPr lang="en-US" sz="1200" dirty="0"/>
           </a:p>
@@ -25961,13 +26244,13 @@
       </p:sp>
       <p:sp>
         <p:nvSpPr>
-          <p:cNvPr id="24" name="Text 22"/>
-          <p:cNvSpPr txBox="1"/>
-          <p:nvPr/>
-        </p:nvSpPr>
-        <p:spPr>
-          <a:xfrm>
-            <a:off x="5852160" y="3401568"/>
+          <p:cNvPr id="28" name="Text 26"/>
+          <p:cNvSpPr txBox="1"/>
+          <p:nvPr/>
+        </p:nvSpPr>
+        <p:spPr>
+          <a:xfrm>
+            <a:off x="5852160" y="3785616"/>
             <a:ext cx="2286000" cy="310896"/>
           </a:xfrm>
           <a:prstGeom prst="rect">
@@ -25992,7 +26275,7 @@
                 <a:ea typeface="Calibri" pitchFamily="34" charset="-122"/>
                 <a:cs typeface="Calibri" pitchFamily="34" charset="-120"/>
               </a:rPr>
-              <a:t>2.85</a:t>
+              <a:t>2.87</a:t>
             </a:r>
             <a:endParaRPr lang="en-US" sz="1200" dirty="0"/>
           </a:p>
@@ -26000,13 +26283,13 @@
       </p:sp>
       <p:sp>
         <p:nvSpPr>
-          <p:cNvPr id="25" name="Text 23"/>
-          <p:cNvSpPr txBox="1"/>
-          <p:nvPr/>
-        </p:nvSpPr>
-        <p:spPr>
-          <a:xfrm>
-            <a:off x="8138160" y="3401568"/>
+          <p:cNvPr id="29" name="Text 27"/>
+          <p:cNvSpPr txBox="1"/>
+          <p:nvPr/>
+        </p:nvSpPr>
+        <p:spPr>
+          <a:xfrm>
+            <a:off x="8138160" y="3785616"/>
             <a:ext cx="2377440" cy="310896"/>
           </a:xfrm>
           <a:prstGeom prst="rect">
@@ -26031,7 +26314,7 @@
                 <a:ea typeface="Calibri" pitchFamily="34" charset="-122"/>
                 <a:cs typeface="Calibri" pitchFamily="34" charset="-120"/>
               </a:rPr>
-              <a:t>unchanged</a:t>
+              <a:t>+10% only</a:t>
             </a:r>
             <a:endParaRPr lang="en-US" sz="1200" dirty="0"/>
           </a:p>
@@ -26039,13 +26322,13 @@
       </p:sp>
       <p:sp>
         <p:nvSpPr>
-          <p:cNvPr id="26" name="Text 24"/>
-          <p:cNvSpPr txBox="1"/>
-          <p:nvPr/>
-        </p:nvSpPr>
-        <p:spPr>
-          <a:xfrm>
-            <a:off x="548640" y="3785616"/>
+          <p:cNvPr id="30" name="Text 28"/>
+          <p:cNvSpPr txBox="1"/>
+          <p:nvPr/>
+        </p:nvSpPr>
+        <p:spPr>
+          <a:xfrm>
+            <a:off x="548640" y="4169664"/>
             <a:ext cx="3017520" cy="310896"/>
           </a:xfrm>
           <a:prstGeom prst="rect">
@@ -26078,162 +26361,6 @@
       </p:sp>
       <p:sp>
         <p:nvSpPr>
-          <p:cNvPr id="27" name="Text 25"/>
-          <p:cNvSpPr txBox="1"/>
-          <p:nvPr/>
-        </p:nvSpPr>
-        <p:spPr>
-          <a:xfrm>
-            <a:off x="3566160" y="3785616"/>
-            <a:ext cx="2286000" cy="310896"/>
-          </a:xfrm>
-          <a:prstGeom prst="rect">
-            <a:avLst/>
-          </a:prstGeom>
-          <a:noFill/>
-          <a:ln/>
-        </p:spPr>
-        <p:txBody>
-          <a:bodyPr wrap="square" lIns="0" tIns="0" rIns="0" bIns="0" rtlCol="0" anchor="ctr"/>
-          <a:lstStyle/>
-          <a:p>
-            <a:pPr indent="0" marL="0">
-              <a:buNone/>
-            </a:pPr>
-            <a:r>
-              <a:rPr lang="en-US" sz="1200" dirty="0">
-                <a:solidFill>
-                  <a:srgbClr val="1B2430"/>
-                </a:solidFill>
-                <a:latin typeface="Calibri" pitchFamily="34" charset="0"/>
-                <a:ea typeface="Calibri" pitchFamily="34" charset="-122"/>
-                <a:cs typeface="Calibri" pitchFamily="34" charset="-120"/>
-              </a:rPr>
-              <a:t>1.95 M</a:t>
-            </a:r>
-            <a:endParaRPr lang="en-US" sz="1200" dirty="0"/>
-          </a:p>
-        </p:txBody>
-      </p:sp>
-      <p:sp>
-        <p:nvSpPr>
-          <p:cNvPr id="28" name="Text 26"/>
-          <p:cNvSpPr txBox="1"/>
-          <p:nvPr/>
-        </p:nvSpPr>
-        <p:spPr>
-          <a:xfrm>
-            <a:off x="5852160" y="3785616"/>
-            <a:ext cx="2286000" cy="310896"/>
-          </a:xfrm>
-          <a:prstGeom prst="rect">
-            <a:avLst/>
-          </a:prstGeom>
-          <a:noFill/>
-          <a:ln/>
-        </p:spPr>
-        <p:txBody>
-          <a:bodyPr wrap="square" lIns="0" tIns="0" rIns="0" bIns="0" rtlCol="0" anchor="ctr"/>
-          <a:lstStyle/>
-          <a:p>
-            <a:pPr indent="0" marL="0">
-              <a:buNone/>
-            </a:pPr>
-            <a:r>
-              <a:rPr lang="en-US" sz="1200" dirty="0">
-                <a:solidFill>
-                  <a:srgbClr val="1B2430"/>
-                </a:solidFill>
-                <a:latin typeface="Calibri" pitchFamily="34" charset="0"/>
-                <a:ea typeface="Calibri" pitchFamily="34" charset="-122"/>
-                <a:cs typeface="Calibri" pitchFamily="34" charset="-120"/>
-              </a:rPr>
-              <a:t>187 K</a:t>
-            </a:r>
-            <a:endParaRPr lang="en-US" sz="1200" dirty="0"/>
-          </a:p>
-        </p:txBody>
-      </p:sp>
-      <p:sp>
-        <p:nvSpPr>
-          <p:cNvPr id="29" name="Text 27"/>
-          <p:cNvSpPr txBox="1"/>
-          <p:nvPr/>
-        </p:nvSpPr>
-        <p:spPr>
-          <a:xfrm>
-            <a:off x="8138160" y="3785616"/>
-            <a:ext cx="2377440" cy="310896"/>
-          </a:xfrm>
-          <a:prstGeom prst="rect">
-            <a:avLst/>
-          </a:prstGeom>
-          <a:noFill/>
-          <a:ln/>
-        </p:spPr>
-        <p:txBody>
-          <a:bodyPr wrap="square" lIns="0" tIns="0" rIns="0" bIns="0" rtlCol="0" anchor="ctr"/>
-          <a:lstStyle/>
-          <a:p>
-            <a:pPr indent="0" marL="0">
-              <a:buNone/>
-            </a:pPr>
-            <a:r>
-              <a:rPr lang="en-US" sz="1200" dirty="0">
-                <a:solidFill>
-                  <a:srgbClr val="2D9B8A"/>
-                </a:solidFill>
-                <a:latin typeface="Calibri" pitchFamily="34" charset="0"/>
-                <a:ea typeface="Calibri" pitchFamily="34" charset="-122"/>
-                <a:cs typeface="Calibri" pitchFamily="34" charset="-120"/>
-              </a:rPr>
-              <a:t>10.4× fewer</a:t>
-            </a:r>
-            <a:endParaRPr lang="en-US" sz="1200" dirty="0"/>
-          </a:p>
-        </p:txBody>
-      </p:sp>
-      <p:sp>
-        <p:nvSpPr>
-          <p:cNvPr id="30" name="Text 28"/>
-          <p:cNvSpPr txBox="1"/>
-          <p:nvPr/>
-        </p:nvSpPr>
-        <p:spPr>
-          <a:xfrm>
-            <a:off x="548640" y="4169664"/>
-            <a:ext cx="3017520" cy="310896"/>
-          </a:xfrm>
-          <a:prstGeom prst="rect">
-            <a:avLst/>
-          </a:prstGeom>
-          <a:noFill/>
-          <a:ln/>
-        </p:spPr>
-        <p:txBody>
-          <a:bodyPr wrap="square" lIns="0" tIns="0" rIns="0" bIns="0" rtlCol="0" anchor="ctr"/>
-          <a:lstStyle/>
-          <a:p>
-            <a:pPr indent="0" marL="0">
-              <a:buNone/>
-            </a:pPr>
-            <a:r>
-              <a:rPr lang="en-US" sz="1200" dirty="0">
-                <a:solidFill>
-                  <a:srgbClr val="1B2430"/>
-                </a:solidFill>
-                <a:latin typeface="Courier New" pitchFamily="34" charset="0"/>
-                <a:ea typeface="Courier New" pitchFamily="34" charset="-122"/>
-                <a:cs typeface="Courier New" pitchFamily="34" charset="-120"/>
-              </a:rPr>
-              <a:t>branch-misses</a:t>
-            </a:r>
-            <a:endParaRPr lang="en-US" sz="1200" dirty="0"/>
-          </a:p>
-        </p:txBody>
-      </p:sp>
-      <p:sp>
-        <p:nvSpPr>
           <p:cNvPr id="31" name="Text 29"/>
           <p:cNvSpPr txBox="1"/>
           <p:nvPr/>
@@ -26265,7 +26392,7 @@
                 <a:ea typeface="Calibri" pitchFamily="34" charset="-122"/>
                 <a:cs typeface="Calibri" pitchFamily="34" charset="-120"/>
               </a:rPr>
-              <a:t>19.4 M</a:t>
+              <a:t>2.78 M</a:t>
             </a:r>
             <a:endParaRPr lang="en-US" sz="1200" dirty="0"/>
           </a:p>
@@ -26304,7 +26431,7 @@
                 <a:ea typeface="Calibri" pitchFamily="34" charset="-122"/>
                 <a:cs typeface="Calibri" pitchFamily="34" charset="-120"/>
               </a:rPr>
-              <a:t>3.58 M</a:t>
+              <a:t>526 K</a:t>
             </a:r>
             <a:endParaRPr lang="en-US" sz="1200" dirty="0"/>
           </a:p>
@@ -26343,7 +26470,7 @@
                 <a:ea typeface="Calibri" pitchFamily="34" charset="-122"/>
                 <a:cs typeface="Calibri" pitchFamily="34" charset="-120"/>
               </a:rPr>
-              <a:t>5.4× fewer</a:t>
+              <a:t>5.3× fewer</a:t>
             </a:r>
             <a:endParaRPr lang="en-US" sz="1200" dirty="0"/>
           </a:p>
@@ -26451,7 +26578,7 @@
                 <a:ea typeface="Calibri" pitchFamily="34" charset="-122"/>
                 <a:cs typeface="Calibri" pitchFamily="34" charset="-120"/>
               </a:rPr>
-              <a:t>Instructions retired fell 2.31× against a 2.38× speedup. Those two numbers matching is the hardware-level proof that the win came from deleting interpreter work — frames, argument tuples, temporary objects — exactly as the call-count analysis predicted. Nothing here was won by being clever with the microarchitecture.</a:t>
+              <a:t>Cycles fell 2.51x and runtime fell 2.51x — the counters and the stopwatch agree. Instructions fell 2.27x while IPC gained only 10%, so the speedup is 2.27 × 1.10 = 2.50: overwhelmingly execute-fewer-instructions. The win came from deleting interpreter work, not microarchitectural cleverness.</a:t>
             </a:r>
             <a:endParaRPr lang="en-US" sz="1250" dirty="0"/>
           </a:p>

--- a/presentation/HWSW_CoDesign_Final_Taha_Lana.pptx
+++ b/presentation/HWSW_CoDesign_Final_Taha_Lana.pptx
@@ -3998,12 +3998,12 @@
         </p:nvSpPr>
         <p:spPr>
           <a:xfrm>
-            <a:off x="7498080" y="1371600"/>
-            <a:ext cx="4142232" cy="804672"/>
+            <a:off x="7498080" y="1325880"/>
+            <a:ext cx="4142232" cy="658368"/>
           </a:xfrm>
           <a:prstGeom prst="roundRect">
             <a:avLst>
-              <a:gd name="adj" fmla="val 6818"/>
+              <a:gd name="adj" fmla="val 8333"/>
             </a:avLst>
           </a:prstGeom>
           <a:solidFill>
@@ -4025,7 +4025,7 @@
         </p:nvSpPr>
         <p:spPr>
           <a:xfrm>
-            <a:off x="7726680" y="1463040"/>
+            <a:off x="7726680" y="1417320"/>
             <a:ext cx="3657600" cy="274320"/>
           </a:xfrm>
           <a:prstGeom prst="rect">
@@ -4064,8 +4064,8 @@
         </p:nvSpPr>
         <p:spPr>
           <a:xfrm>
-            <a:off x="7726680" y="1755648"/>
-            <a:ext cx="3657600" cy="274320"/>
+            <a:off x="7726680" y="1673352"/>
+            <a:ext cx="3657600" cy="256032"/>
           </a:xfrm>
           <a:prstGeom prst="rect">
             <a:avLst/>
@@ -4103,8 +4103,8 @@
         </p:nvSpPr>
         <p:spPr>
           <a:xfrm>
-            <a:off x="9555480" y="2176272"/>
-            <a:ext cx="0" cy="182880"/>
+            <a:off x="9555480" y="1984248"/>
+            <a:ext cx="0" cy="137160"/>
           </a:xfrm>
           <a:prstGeom prst="line">
             <a:avLst/>
@@ -4127,12 +4127,12 @@
         </p:nvSpPr>
         <p:spPr>
           <a:xfrm>
-            <a:off x="7498080" y="2359152"/>
-            <a:ext cx="4142232" cy="804672"/>
+            <a:off x="7498080" y="2130552"/>
+            <a:ext cx="4142232" cy="658368"/>
           </a:xfrm>
           <a:prstGeom prst="roundRect">
             <a:avLst>
-              <a:gd name="adj" fmla="val 6818"/>
+              <a:gd name="adj" fmla="val 8333"/>
             </a:avLst>
           </a:prstGeom>
           <a:solidFill>
@@ -4154,7 +4154,7 @@
         </p:nvSpPr>
         <p:spPr>
           <a:xfrm>
-            <a:off x="7726680" y="2450592"/>
+            <a:off x="7726680" y="2221992"/>
             <a:ext cx="3657600" cy="274320"/>
           </a:xfrm>
           <a:prstGeom prst="rect">
@@ -4193,8 +4193,8 @@
         </p:nvSpPr>
         <p:spPr>
           <a:xfrm>
-            <a:off x="7726680" y="2743200"/>
-            <a:ext cx="3657600" cy="274320"/>
+            <a:off x="7726680" y="2478024"/>
+            <a:ext cx="3657600" cy="256032"/>
           </a:xfrm>
           <a:prstGeom prst="rect">
             <a:avLst/>
@@ -4232,8 +4232,8 @@
         </p:nvSpPr>
         <p:spPr>
           <a:xfrm>
-            <a:off x="9555480" y="3163824"/>
-            <a:ext cx="0" cy="182880"/>
+            <a:off x="9555480" y="2788920"/>
+            <a:ext cx="0" cy="137160"/>
           </a:xfrm>
           <a:prstGeom prst="line">
             <a:avLst/>
@@ -4256,12 +4256,12 @@
         </p:nvSpPr>
         <p:spPr>
           <a:xfrm>
-            <a:off x="7498080" y="3346704"/>
-            <a:ext cx="4142232" cy="804672"/>
+            <a:off x="7498080" y="2935224"/>
+            <a:ext cx="4142232" cy="658368"/>
           </a:xfrm>
           <a:prstGeom prst="roundRect">
             <a:avLst>
-              <a:gd name="adj" fmla="val 6818"/>
+              <a:gd name="adj" fmla="val 8333"/>
             </a:avLst>
           </a:prstGeom>
           <a:solidFill>
@@ -4283,7 +4283,7 @@
         </p:nvSpPr>
         <p:spPr>
           <a:xfrm>
-            <a:off x="7726680" y="3438144"/>
+            <a:off x="7726680" y="3026664"/>
             <a:ext cx="3657600" cy="274320"/>
           </a:xfrm>
           <a:prstGeom prst="rect">
@@ -4322,8 +4322,8 @@
         </p:nvSpPr>
         <p:spPr>
           <a:xfrm>
-            <a:off x="7726680" y="3730752"/>
-            <a:ext cx="3657600" cy="274320"/>
+            <a:off x="7726680" y="3282696"/>
+            <a:ext cx="3657600" cy="256032"/>
           </a:xfrm>
           <a:prstGeom prst="rect">
             <a:avLst/>
@@ -4361,8 +4361,8 @@
         </p:nvSpPr>
         <p:spPr>
           <a:xfrm>
-            <a:off x="9555480" y="4151376"/>
-            <a:ext cx="0" cy="182880"/>
+            <a:off x="9555480" y="3593592"/>
+            <a:ext cx="0" cy="137160"/>
           </a:xfrm>
           <a:prstGeom prst="line">
             <a:avLst/>
@@ -4385,12 +4385,12 @@
         </p:nvSpPr>
         <p:spPr>
           <a:xfrm>
-            <a:off x="7498080" y="4334256"/>
-            <a:ext cx="4142232" cy="804672"/>
+            <a:off x="7498080" y="3739896"/>
+            <a:ext cx="4142232" cy="658368"/>
           </a:xfrm>
           <a:prstGeom prst="roundRect">
             <a:avLst>
-              <a:gd name="adj" fmla="val 6818"/>
+              <a:gd name="adj" fmla="val 8333"/>
             </a:avLst>
           </a:prstGeom>
           <a:solidFill>
@@ -4412,7 +4412,7 @@
         </p:nvSpPr>
         <p:spPr>
           <a:xfrm>
-            <a:off x="7726680" y="4425696"/>
+            <a:off x="7726680" y="3831336"/>
             <a:ext cx="3657600" cy="274320"/>
           </a:xfrm>
           <a:prstGeom prst="rect">
@@ -4437,7 +4437,7 @@
                 <a:ea typeface="Courier New" pitchFamily="34" charset="-122"/>
                 <a:cs typeface="Courier New" pitchFamily="34" charset="-120"/>
               </a:rPr>
-              <a:t>bwt_reverse_engine</a:t>
+              <a:t>bwt_index_builder</a:t>
             </a:r>
             <a:endParaRPr lang="en-US" sz="1200" dirty="0"/>
           </a:p>
@@ -4451,8 +4451,8 @@
         </p:nvSpPr>
         <p:spPr>
           <a:xfrm>
-            <a:off x="7726680" y="4718304"/>
-            <a:ext cx="3657600" cy="274320"/>
+            <a:off x="7726680" y="4087368"/>
+            <a:ext cx="3657600" cy="256032"/>
           </a:xfrm>
           <a:prstGeom prst="rect">
             <a:avLst/>
@@ -4476,7 +4476,7 @@
                 <a:ea typeface="Calibri" pitchFamily="34" charset="-122"/>
                 <a:cs typeface="Calibri" pitchFamily="34" charset="-120"/>
               </a:rPr>
-              <a:t>on-chip SRAM chase</a:t>
+              <a:t>builds T[]: 256 + 2n</a:t>
             </a:r>
             <a:endParaRPr lang="en-US" sz="1100" dirty="0"/>
           </a:p>
@@ -4490,12 +4490,36 @@
         </p:nvSpPr>
         <p:spPr>
           <a:xfrm>
-            <a:off x="548640" y="4297680"/>
-            <a:ext cx="6537960" cy="1691640"/>
+            <a:off x="9555480" y="4398264"/>
+            <a:ext cx="0" cy="137160"/>
+          </a:xfrm>
+          <a:prstGeom prst="line">
+            <a:avLst/>
+          </a:prstGeom>
+          <a:noFill/>
+          <a:ln w="22225">
+            <a:solidFill>
+              <a:srgbClr val="6B7785"/>
+            </a:solidFill>
+            <a:prstDash val="solid"/>
+            <a:tailEnd type="triangle"/>
+          </a:ln>
+        </p:spPr>
+      </p:sp>
+      <p:sp>
+        <p:nvSpPr>
+          <p:cNvPr id="24" name="Shape 22"/>
+          <p:cNvSpPr/>
+          <p:nvPr/>
+        </p:nvSpPr>
+        <p:spPr>
+          <a:xfrm>
+            <a:off x="7498080" y="4544568"/>
+            <a:ext cx="4142232" cy="658368"/>
           </a:xfrm>
           <a:prstGeom prst="roundRect">
             <a:avLst>
-              <a:gd name="adj" fmla="val 3243"/>
+              <a:gd name="adj" fmla="val 8333"/>
             </a:avLst>
           </a:prstGeom>
           <a:solidFill>
@@ -4511,7 +4535,112 @@
       </p:sp>
       <p:sp>
         <p:nvSpPr>
-          <p:cNvPr id="24" name="Text 22"/>
+          <p:cNvPr id="25" name="Text 23"/>
+          <p:cNvSpPr txBox="1"/>
+          <p:nvPr/>
+        </p:nvSpPr>
+        <p:spPr>
+          <a:xfrm>
+            <a:off x="7726680" y="4636008"/>
+            <a:ext cx="3657600" cy="274320"/>
+          </a:xfrm>
+          <a:prstGeom prst="rect">
+            <a:avLst/>
+          </a:prstGeom>
+          <a:noFill/>
+          <a:ln/>
+        </p:spPr>
+        <p:txBody>
+          <a:bodyPr wrap="square" lIns="0" tIns="0" rIns="0" bIns="0" rtlCol="0" anchor="ctr"/>
+          <a:lstStyle/>
+          <a:p>
+            <a:pPr indent="0" marL="0">
+              <a:buNone/>
+            </a:pPr>
+            <a:r>
+              <a:rPr lang="en-US" sz="1200" b="1" dirty="0">
+                <a:solidFill>
+                  <a:srgbClr val="1B2430"/>
+                </a:solidFill>
+                <a:latin typeface="Courier New" pitchFamily="34" charset="0"/>
+                <a:ea typeface="Courier New" pitchFamily="34" charset="-122"/>
+                <a:cs typeface="Courier New" pitchFamily="34" charset="-120"/>
+              </a:rPr>
+              <a:t>bwt_reverse_engine</a:t>
+            </a:r>
+            <a:endParaRPr lang="en-US" sz="1200" dirty="0"/>
+          </a:p>
+        </p:txBody>
+      </p:sp>
+      <p:sp>
+        <p:nvSpPr>
+          <p:cNvPr id="26" name="Text 24"/>
+          <p:cNvSpPr txBox="1"/>
+          <p:nvPr/>
+        </p:nvSpPr>
+        <p:spPr>
+          <a:xfrm>
+            <a:off x="7726680" y="4892040"/>
+            <a:ext cx="3657600" cy="256032"/>
+          </a:xfrm>
+          <a:prstGeom prst="rect">
+            <a:avLst/>
+          </a:prstGeom>
+          <a:noFill/>
+          <a:ln/>
+        </p:spPr>
+        <p:txBody>
+          <a:bodyPr wrap="square" lIns="0" tIns="0" rIns="0" bIns="0" rtlCol="0" anchor="ctr"/>
+          <a:lstStyle/>
+          <a:p>
+            <a:pPr indent="0" marL="0">
+              <a:buNone/>
+            </a:pPr>
+            <a:r>
+              <a:rPr lang="en-US" sz="1100" dirty="0">
+                <a:solidFill>
+                  <a:srgbClr val="6B7785"/>
+                </a:solidFill>
+                <a:latin typeface="Calibri" pitchFamily="34" charset="0"/>
+                <a:ea typeface="Calibri" pitchFamily="34" charset="-122"/>
+                <a:cs typeface="Calibri" pitchFamily="34" charset="-120"/>
+              </a:rPr>
+              <a:t>on-chip SRAM chase</a:t>
+            </a:r>
+            <a:endParaRPr lang="en-US" sz="1100" dirty="0"/>
+          </a:p>
+        </p:txBody>
+      </p:sp>
+      <p:sp>
+        <p:nvSpPr>
+          <p:cNvPr id="27" name="Shape 25"/>
+          <p:cNvSpPr/>
+          <p:nvPr/>
+        </p:nvSpPr>
+        <p:spPr>
+          <a:xfrm>
+            <a:off x="548640" y="4297680"/>
+            <a:ext cx="6537960" cy="1691640"/>
+          </a:xfrm>
+          <a:prstGeom prst="roundRect">
+            <a:avLst>
+              <a:gd name="adj" fmla="val 3243"/>
+            </a:avLst>
+          </a:prstGeom>
+          <a:solidFill>
+            <a:srgbClr val="F3F6F8"/>
+          </a:solidFill>
+          <a:ln w="9525">
+            <a:solidFill>
+              <a:srgbClr val="DBE2E8"/>
+            </a:solidFill>
+            <a:prstDash val="solid"/>
+          </a:ln>
+        </p:spPr>
+      </p:sp>
+      <p:sp>
+        <p:nvSpPr>
+          <p:cNvPr id="28" name="Text 26"/>
           <p:cNvSpPr txBox="1"/>
           <p:nvPr/>
         </p:nvSpPr>
@@ -4550,7 +4679,7 @@
       </p:sp>
       <p:sp>
         <p:nvSpPr>
-          <p:cNvPr id="25" name="Text 23"/>
+          <p:cNvPr id="29" name="Text 27"/>
           <p:cNvSpPr txBox="1"/>
           <p:nvPr/>
         </p:nvSpPr>
@@ -4644,7 +4773,7 @@
       </p:sp>
       <p:sp>
         <p:nvSpPr>
-          <p:cNvPr id="26" name="Text 24"/>
+          <p:cNvPr id="30" name="Text 28"/>
           <p:cNvSpPr txBox="1"/>
           <p:nvPr/>
         </p:nvSpPr>
@@ -4683,7 +4812,7 @@
       </p:sp>
       <p:sp>
         <p:nvSpPr>
-          <p:cNvPr id="27" name="Text 25"/>
+          <p:cNvPr id="31" name="Text 29"/>
           <p:cNvSpPr txBox="1"/>
           <p:nvPr/>
         </p:nvSpPr>
@@ -11693,7 +11822,7 @@
                 <a:ea typeface="Calibri" pitchFamily="34" charset="-122"/>
                 <a:cs typeface="Calibri" pitchFamily="34" charset="-120"/>
               </a:rPr>
-              <a:t>correctness gate — both benchmarks byte / bit-identical</a:t>
+              <a:t>correctness gate — byte / bit-identical</a:t>
             </a:r>
             <a:endParaRPr lang="en-US" sz="1150" dirty="0"/>
           </a:p>
@@ -11757,7 +11886,7 @@
                 <a:ea typeface="Calibri" pitchFamily="34" charset="-122"/>
                 <a:cs typeface="Calibri" pitchFamily="34" charset="-120"/>
               </a:rPr>
-              <a:t>golden model — all 148,271 real Huffman symbols</a:t>
+              <a:t>golden model — all 148,271 Huffman symbols</a:t>
             </a:r>
             <a:endParaRPr lang="en-US" sz="1150" dirty="0"/>
           </a:p>
@@ -11885,7 +12014,7 @@
                 <a:ea typeface="Calibri" pitchFamily="34" charset="-122"/>
                 <a:cs typeface="Calibri" pitchFamily="34" charset="-120"/>
               </a:rPr>
-              <a:t>tb_huffman_decoder — symbol and retired bit count</a:t>
+              <a:t>tb_huffman_decoder — symbol + retired bits</a:t>
             </a:r>
             <a:endParaRPr lang="en-US" sz="1150" dirty="0"/>
           </a:p>
@@ -11949,7 +12078,7 @@
                 <a:ea typeface="Calibri" pitchFamily="34" charset="-122"/>
                 <a:cs typeface="Calibri" pitchFamily="34" charset="-120"/>
               </a:rPr>
-              <a:t>tb_bit_window — 12 irregular retires, 1 to 20 bits</a:t>
+              <a:t>tb_bit_window — 12 retires, 1 to 20 bits</a:t>
             </a:r>
             <a:endParaRPr lang="en-US" sz="1150" dirty="0"/>
           </a:p>
@@ -12013,7 +12142,7 @@
                 <a:ea typeface="Calibri" pitchFamily="34" charset="-122"/>
                 <a:cs typeface="Calibri" pitchFamily="34" charset="-120"/>
               </a:rPr>
-              <a:t>bzip2_accel_top — elaborates</a:t>
+              <a:t>tb_bwt_index_builder — T[] vs software</a:t>
             </a:r>
             <a:endParaRPr lang="en-US" sz="1150" dirty="0"/>
           </a:p>
@@ -12077,7 +12206,7 @@
                 <a:ea typeface="Calibri" pitchFamily="34" charset="-122"/>
                 <a:cs typeface="Calibri" pitchFamily="34" charset="-120"/>
               </a:rPr>
-              <a:t>tb_ray_sphere — single PE, bit-exact</a:t>
+              <a:t>bzip2_accel_top — elaborates</a:t>
             </a:r>
             <a:endParaRPr lang="en-US" sz="1150" dirty="0"/>
           </a:p>
@@ -12141,7 +12270,7 @@
                 <a:ea typeface="Calibri" pitchFamily="34" charset="-122"/>
                 <a:cs typeface="Calibri" pitchFamily="34" charset="-120"/>
               </a:rPr>
-              <a:t>tb_ray_array — nearest hit across 8 spheres</a:t>
+              <a:t>tb_ray_sphere — single PE, bit-exact</a:t>
             </a:r>
             <a:endParaRPr lang="en-US" sz="1150" dirty="0"/>
           </a:p>
@@ -12205,6 +12334,70 @@
                 <a:ea typeface="Calibri" pitchFamily="34" charset="-122"/>
                 <a:cs typeface="Calibri" pitchFamily="34" charset="-120"/>
               </a:rPr>
+              <a:t>tb_ray_array — nearest of 8 spheres</a:t>
+            </a:r>
+            <a:endParaRPr lang="en-US" sz="1150" dirty="0"/>
+          </a:p>
+        </p:txBody>
+      </p:sp>
+      <p:sp>
+        <p:nvSpPr>
+          <p:cNvPr id="27" name="Shape 25"/>
+          <p:cNvSpPr/>
+          <p:nvPr/>
+        </p:nvSpPr>
+        <p:spPr>
+          <a:xfrm>
+            <a:off x="6126480" y="5340096"/>
+            <a:ext cx="182880" cy="182880"/>
+          </a:xfrm>
+          <a:prstGeom prst="ellipse">
+            <a:avLst/>
+          </a:prstGeom>
+          <a:solidFill>
+            <a:srgbClr val="2D9B8A"/>
+          </a:solidFill>
+          <a:ln w="12700">
+            <a:solidFill>
+              <a:srgbClr val="2D9B8A"/>
+            </a:solidFill>
+            <a:prstDash val="solid"/>
+          </a:ln>
+        </p:spPr>
+      </p:sp>
+      <p:sp>
+        <p:nvSpPr>
+          <p:cNvPr id="28" name="Text 26"/>
+          <p:cNvSpPr txBox="1"/>
+          <p:nvPr/>
+        </p:nvSpPr>
+        <p:spPr>
+          <a:xfrm>
+            <a:off x="6400800" y="5285232"/>
+            <a:ext cx="5212080" cy="292608"/>
+          </a:xfrm>
+          <a:prstGeom prst="rect">
+            <a:avLst/>
+          </a:prstGeom>
+          <a:noFill/>
+          <a:ln/>
+        </p:spPr>
+        <p:txBody>
+          <a:bodyPr wrap="square" lIns="0" tIns="0" rIns="0" bIns="0" rtlCol="0" anchor="ctr"/>
+          <a:lstStyle/>
+          <a:p>
+            <a:pPr indent="0" marL="0">
+              <a:buNone/>
+            </a:pPr>
+            <a:r>
+              <a:rPr lang="en-US" sz="1150" dirty="0">
+                <a:solidFill>
+                  <a:srgbClr val="1B2430"/>
+                </a:solidFill>
+                <a:latin typeface="Calibri" pitchFamily="34" charset="0"/>
+                <a:ea typeface="Calibri" pitchFamily="34" charset="-122"/>
+                <a:cs typeface="Calibri" pitchFamily="34" charset="-120"/>
+              </a:rPr>
               <a:t>tb_fp_random — 400 vectors, bit-exact</a:t>
             </a:r>
             <a:endParaRPr lang="en-US" sz="1150" dirty="0"/>
@@ -12213,14 +12406,14 @@
       </p:sp>
       <p:sp>
         <p:nvSpPr>
-          <p:cNvPr id="27" name="Text 25"/>
-          <p:cNvSpPr txBox="1"/>
-          <p:nvPr/>
-        </p:nvSpPr>
-        <p:spPr>
-          <a:xfrm>
-            <a:off x="6126480" y="5669280"/>
-            <a:ext cx="5513832" cy="320040"/>
+          <p:cNvPr id="29" name="Text 27"/>
+          <p:cNvSpPr txBox="1"/>
+          <p:nvPr/>
+        </p:nvSpPr>
+        <p:spPr>
+          <a:xfrm>
+            <a:off x="5394960" y="5742432"/>
+            <a:ext cx="6245352" cy="320040"/>
           </a:xfrm>
           <a:prstGeom prst="rect">
             <a:avLst/>
@@ -12244,7 +12437,7 @@
                 <a:ea typeface="Calibri" pitchFamily="34" charset="-122"/>
                 <a:cs typeface="Calibri" pitchFamily="34" charset="-120"/>
               </a:rPr>
-              <a:t>9 / 9 green  ·  ./tools/regress.sh</a:t>
+              <a:t>10 / 10 green in the guest  ·  ./tools/regress.sh</a:t>
             </a:r>
             <a:endParaRPr lang="en-US" sz="1400" dirty="0"/>
           </a:p>
@@ -12252,7 +12445,7 @@
       </p:sp>
       <p:sp>
         <p:nvSpPr>
-          <p:cNvPr id="28" name="Text 26"/>
+          <p:cNvPr id="30" name="Text 28"/>
           <p:cNvSpPr txBox="1"/>
           <p:nvPr/>
         </p:nvSpPr>
@@ -12291,7 +12484,7 @@
       </p:sp>
       <p:sp>
         <p:nvSpPr>
-          <p:cNvPr id="29" name="Text 27"/>
+          <p:cNvPr id="31" name="Text 29"/>
           <p:cNvSpPr txBox="1"/>
           <p:nvPr/>
         </p:nvSpPr>
@@ -14292,7 +14485,7 @@
                 <a:ea typeface="Calibri" pitchFamily="34" charset="-122"/>
                 <a:cs typeface="Calibri" pitchFamily="34" charset="-120"/>
               </a:rPr>
-              <a:t>bzip2_accel_top is an integration sketch</a:t>
+              <a:t>No end-to-end RTL simulation of a real block</a:t>
             </a:r>
             <a:endParaRPr lang="en-US" sz="1400" dirty="0"/>
           </a:p>
@@ -14334,7 +14527,7 @@
                 <a:ea typeface="Calibri" pitchFamily="34" charset="-122"/>
                 <a:cs typeface="Calibri" pitchFamily="34" charset="-120"/>
               </a:rPr>
-              <a:t>The T[] counting-sort engine that bwt_reverse_engine depends on is specified in the source but NOT implemented, so t_we is tied low. The individual blocks are simulated and correct; the assembled top elaborates but would not decompress a file. What is missing is about n + 512 cycles of work: a 256-counter histogram, a prefix sum, and a second pass over L[].</a:t>
+              <a:t>Every block is individually verified and the assembled top elaborates, but we have no full-stream testbench that feeds interpreter.tar.bz2 in and checks 399,360 bytes out. The integration is verified by construction, not by simulation. An earlier revision had a bigger gap - the T[] counting-sort engine was missing entirely - which bwt_index_builder.v now closes.</a:t>
             </a:r>
             <a:endParaRPr lang="en-US" sz="1200" dirty="0"/>
           </a:p>

--- a/presentation/HWSW_CoDesign_Final_Taha_Lana.pptx
+++ b/presentation/HWSW_CoDesign_Final_Taha_Lana.pptx
@@ -1319,7 +1319,7 @@
           <a:p>
             <a:r>
               <a:rPr lang="en-US" dirty="0"/>
-              <a:t>Lana. 1:00. Do not hide this - a found bug is evidence the verification works. Say plainly: we wrote it carefully, reviewed it, and it was wrong on vector two.</a:t>
+              <a:t>Lana. 1:00. Do not hide this - a found bug is evidence the verification works. Say plainly: we wrote it carefully, reviewed it, and it was wrong on vector two. If asked what tb_top_block covers: the assembled accelerator is programmed through its CSRs like a driver would, fed one compressed block, and checked byte for byte - plus both Rule 3 refusals (randomised block, block bigger than the on-chip index memory).</a:t>
             </a:r>
             <a:endParaRPr lang="en-US" dirty="0"/>
           </a:p>
@@ -9701,7 +9701,7 @@
                 <a:ea typeface="Cambria" pitchFamily="34" charset="-122"/>
                 <a:cs typeface="Cambria" pitchFamily="34" charset="-120"/>
               </a:rPr>
-              <a:t>A weight-stationary systolic array</a:t>
+              <a:t>A weight-stationary array — systolic in style</a:t>
             </a:r>
             <a:endParaRPr lang="en-US" sz="2900" dirty="0"/>
           </a:p>
@@ -9715,8 +9715,8 @@
         </p:nvSpPr>
         <p:spPr>
           <a:xfrm>
-            <a:off x="548640" y="1325880"/>
-            <a:ext cx="11091672" cy="502920"/>
+            <a:off x="548640" y="1298448"/>
+            <a:ext cx="11091672" cy="658368"/>
           </a:xfrm>
           <a:prstGeom prst="rect">
             <a:avLst/>
@@ -9743,7 +9743,7 @@
                 <a:ea typeface="Calibri" pitchFamily="34" charset="-122"/>
                 <a:cs typeface="Calibri" pitchFamily="34" charset="-120"/>
               </a:rPr>
-              <a:t>Every intersection test is the same fixed shape — 3 subtractions, 6 multiplies, 4 adds, one square root. Fixed operand count, fixed latency, no data-dependent control. That is exactly what a systolic array wants.</a:t>
+              <a:t>Every intersection test is the same fixed shape — 3 subtractions, 6 multiplies, 4 adds, one square root. Fixed operand count, fixed latency, no data-dependent control — exactly what a systolic array wants. We take two of its three properties: weights stationary, PEs with no control. The ray is BROADCAST to all 8, not pulsed neighbour to neighbour.</a:t>
             </a:r>
             <a:endParaRPr lang="en-US" sz="1300" dirty="0"/>
           </a:p>
@@ -11730,8 +11730,8 @@
         </p:nvSpPr>
         <p:spPr>
           <a:xfrm>
-            <a:off x="548640" y="3154680"/>
-            <a:ext cx="11091672" cy="457200"/>
+            <a:off x="548640" y="3072384"/>
+            <a:ext cx="11091672" cy="640080"/>
           </a:xfrm>
           <a:prstGeom prst="rect">
             <a:avLst/>
@@ -11758,7 +11758,7 @@
                 <a:ea typeface="Calibri" pitchFamily="34" charset="-122"/>
                 <a:cs typeface="Calibri" pitchFamily="34" charset="-120"/>
               </a:rPr>
-              <a:t>Three hand-picked vectors were enough to MISS it, so we added 400 randomized ones — a quarter of them near-cancelling subtractions, the case that exercises the long normalize path where the bug lived.</a:t>
+              <a:t>Three hand-picked vectors were enough to MISS it, so we added 400 randomized ones — a quarter of them near-cancelling subtractions, the case that exercises the long normalize path where the bug lived. It happened again later: a rewritten BWT chase looked right and ran at two cycles per hop until its new testbench caught it.</a:t>
             </a:r>
             <a:endParaRPr lang="en-US" sz="1300" dirty="0"/>
           </a:p>
@@ -11772,8 +11772,8 @@
         </p:nvSpPr>
         <p:spPr>
           <a:xfrm>
-            <a:off x="548640" y="3803904"/>
-            <a:ext cx="182880" cy="182880"/>
+            <a:off x="548640" y="3813048"/>
+            <a:ext cx="164592" cy="164592"/>
           </a:xfrm>
           <a:prstGeom prst="ellipse">
             <a:avLst/>
@@ -11797,24 +11797,24 @@
         </p:nvSpPr>
         <p:spPr>
           <a:xfrm>
-            <a:off x="822960" y="3749040"/>
-            <a:ext cx="5212080" cy="292608"/>
-          </a:xfrm>
-          <a:prstGeom prst="rect">
-            <a:avLst/>
-          </a:prstGeom>
-          <a:noFill/>
-          <a:ln/>
-        </p:spPr>
-        <p:txBody>
-          <a:bodyPr wrap="square" lIns="0" tIns="0" rIns="0" bIns="0" rtlCol="0" anchor="ctr"/>
-          <a:lstStyle/>
-          <a:p>
-            <a:pPr indent="0" marL="0">
-              <a:buNone/>
-            </a:pPr>
-            <a:r>
-              <a:rPr lang="en-US" sz="1150" dirty="0">
+            <a:off x="786384" y="3749040"/>
+            <a:ext cx="3383280" cy="292608"/>
+          </a:xfrm>
+          <a:prstGeom prst="rect">
+            <a:avLst/>
+          </a:prstGeom>
+          <a:noFill/>
+          <a:ln/>
+        </p:spPr>
+        <p:txBody>
+          <a:bodyPr wrap="square" lIns="0" tIns="0" rIns="0" bIns="0" rtlCol="0" anchor="ctr"/>
+          <a:lstStyle/>
+          <a:p>
+            <a:pPr indent="0" marL="0">
+              <a:buNone/>
+            </a:pPr>
+            <a:r>
+              <a:rPr lang="en-US" sz="1050" dirty="0">
                 <a:solidFill>
                   <a:srgbClr val="1B2430"/>
                 </a:solidFill>
@@ -11824,7 +11824,7 @@
               </a:rPr>
               <a:t>correctness gate — byte / bit-identical</a:t>
             </a:r>
-            <a:endParaRPr lang="en-US" sz="1150" dirty="0"/>
+            <a:endParaRPr lang="en-US" sz="1050" dirty="0"/>
           </a:p>
         </p:txBody>
       </p:sp>
@@ -11836,8 +11836,8 @@
         </p:nvSpPr>
         <p:spPr>
           <a:xfrm>
-            <a:off x="6126480" y="3803904"/>
-            <a:ext cx="182880" cy="182880"/>
+            <a:off x="4261104" y="3813048"/>
+            <a:ext cx="164592" cy="164592"/>
           </a:xfrm>
           <a:prstGeom prst="ellipse">
             <a:avLst/>
@@ -11861,24 +11861,24 @@
         </p:nvSpPr>
         <p:spPr>
           <a:xfrm>
-            <a:off x="6400800" y="3749040"/>
-            <a:ext cx="5212080" cy="292608"/>
-          </a:xfrm>
-          <a:prstGeom prst="rect">
-            <a:avLst/>
-          </a:prstGeom>
-          <a:noFill/>
-          <a:ln/>
-        </p:spPr>
-        <p:txBody>
-          <a:bodyPr wrap="square" lIns="0" tIns="0" rIns="0" bIns="0" rtlCol="0" anchor="ctr"/>
-          <a:lstStyle/>
-          <a:p>
-            <a:pPr indent="0" marL="0">
-              <a:buNone/>
-            </a:pPr>
-            <a:r>
-              <a:rPr lang="en-US" sz="1150" dirty="0">
+            <a:off x="4498848" y="3749040"/>
+            <a:ext cx="3383280" cy="292608"/>
+          </a:xfrm>
+          <a:prstGeom prst="rect">
+            <a:avLst/>
+          </a:prstGeom>
+          <a:noFill/>
+          <a:ln/>
+        </p:spPr>
+        <p:txBody>
+          <a:bodyPr wrap="square" lIns="0" tIns="0" rIns="0" bIns="0" rtlCol="0" anchor="ctr"/>
+          <a:lstStyle/>
+          <a:p>
+            <a:pPr indent="0" marL="0">
+              <a:buNone/>
+            </a:pPr>
+            <a:r>
+              <a:rPr lang="en-US" sz="1050" dirty="0">
                 <a:solidFill>
                   <a:srgbClr val="1B2430"/>
                 </a:solidFill>
@@ -11886,9 +11886,9 @@
                 <a:ea typeface="Calibri" pitchFamily="34" charset="-122"/>
                 <a:cs typeface="Calibri" pitchFamily="34" charset="-120"/>
               </a:rPr>
-              <a:t>golden model — all 148,271 Huffman symbols</a:t>
-            </a:r>
-            <a:endParaRPr lang="en-US" sz="1150" dirty="0"/>
+              <a:t>extended — 16 streams vs libbz2</a:t>
+            </a:r>
+            <a:endParaRPr lang="en-US" sz="1050" dirty="0"/>
           </a:p>
         </p:txBody>
       </p:sp>
@@ -11900,8 +11900,8 @@
         </p:nvSpPr>
         <p:spPr>
           <a:xfrm>
-            <a:off x="548640" y="4187952"/>
-            <a:ext cx="182880" cy="182880"/>
+            <a:off x="7973568" y="3813048"/>
+            <a:ext cx="164592" cy="164592"/>
           </a:xfrm>
           <a:prstGeom prst="ellipse">
             <a:avLst/>
@@ -11925,24 +11925,24 @@
         </p:nvSpPr>
         <p:spPr>
           <a:xfrm>
-            <a:off x="822960" y="4133088"/>
-            <a:ext cx="5212080" cy="292608"/>
-          </a:xfrm>
-          <a:prstGeom prst="rect">
-            <a:avLst/>
-          </a:prstGeom>
-          <a:noFill/>
-          <a:ln/>
-        </p:spPr>
-        <p:txBody>
-          <a:bodyPr wrap="square" lIns="0" tIns="0" rIns="0" bIns="0" rtlCol="0" anchor="ctr"/>
-          <a:lstStyle/>
-          <a:p>
-            <a:pPr indent="0" marL="0">
-              <a:buNone/>
-            </a:pPr>
-            <a:r>
-              <a:rPr lang="en-US" sz="1150" dirty="0">
+            <a:off x="8211312" y="3749040"/>
+            <a:ext cx="3383280" cy="292608"/>
+          </a:xfrm>
+          <a:prstGeom prst="rect">
+            <a:avLst/>
+          </a:prstGeom>
+          <a:noFill/>
+          <a:ln/>
+        </p:spPr>
+        <p:txBody>
+          <a:bodyPr wrap="square" lIns="0" tIns="0" rIns="0" bIns="0" rtlCol="0" anchor="ctr"/>
+          <a:lstStyle/>
+          <a:p>
+            <a:pPr indent="0" marL="0">
+              <a:buNone/>
+            </a:pPr>
+            <a:r>
+              <a:rPr lang="en-US" sz="1050" dirty="0">
                 <a:solidFill>
                   <a:srgbClr val="1B2430"/>
                 </a:solidFill>
@@ -11950,9 +11950,9 @@
                 <a:ea typeface="Calibri" pitchFamily="34" charset="-122"/>
                 <a:cs typeface="Calibri" pitchFamily="34" charset="-120"/>
               </a:rPr>
-              <a:t>sqrt model — 6,008 samples, 1.16 ulp</a:t>
-            </a:r>
-            <a:endParaRPr lang="en-US" sz="1150" dirty="0"/>
+              <a:t>golden model — 148,271 symbols</a:t>
+            </a:r>
+            <a:endParaRPr lang="en-US" sz="1050" dirty="0"/>
           </a:p>
         </p:txBody>
       </p:sp>
@@ -11964,8 +11964,8 @@
         </p:nvSpPr>
         <p:spPr>
           <a:xfrm>
-            <a:off x="6126480" y="4187952"/>
-            <a:ext cx="182880" cy="182880"/>
+            <a:off x="548640" y="4197096"/>
+            <a:ext cx="164592" cy="164592"/>
           </a:xfrm>
           <a:prstGeom prst="ellipse">
             <a:avLst/>
@@ -11989,24 +11989,24 @@
         </p:nvSpPr>
         <p:spPr>
           <a:xfrm>
-            <a:off x="6400800" y="4133088"/>
-            <a:ext cx="5212080" cy="292608"/>
-          </a:xfrm>
-          <a:prstGeom prst="rect">
-            <a:avLst/>
-          </a:prstGeom>
-          <a:noFill/>
-          <a:ln/>
-        </p:spPr>
-        <p:txBody>
-          <a:bodyPr wrap="square" lIns="0" tIns="0" rIns="0" bIns="0" rtlCol="0" anchor="ctr"/>
-          <a:lstStyle/>
-          <a:p>
-            <a:pPr indent="0" marL="0">
-              <a:buNone/>
-            </a:pPr>
-            <a:r>
-              <a:rPr lang="en-US" sz="1150" dirty="0">
+            <a:off x="786384" y="4133088"/>
+            <a:ext cx="3383280" cy="292608"/>
+          </a:xfrm>
+          <a:prstGeom prst="rect">
+            <a:avLst/>
+          </a:prstGeom>
+          <a:noFill/>
+          <a:ln/>
+        </p:spPr>
+        <p:txBody>
+          <a:bodyPr wrap="square" lIns="0" tIns="0" rIns="0" bIns="0" rtlCol="0" anchor="ctr"/>
+          <a:lstStyle/>
+          <a:p>
+            <a:pPr indent="0" marL="0">
+              <a:buNone/>
+            </a:pPr>
+            <a:r>
+              <a:rPr lang="en-US" sz="1050" dirty="0">
                 <a:solidFill>
                   <a:srgbClr val="1B2430"/>
                 </a:solidFill>
@@ -12014,9 +12014,9 @@
                 <a:ea typeface="Calibri" pitchFamily="34" charset="-122"/>
                 <a:cs typeface="Calibri" pitchFamily="34" charset="-120"/>
               </a:rPr>
-              <a:t>tb_huffman_decoder — symbol + retired bits</a:t>
-            </a:r>
-            <a:endParaRPr lang="en-US" sz="1150" dirty="0"/>
+              <a:t>sqrt model — 6,008 samples</a:t>
+            </a:r>
+            <a:endParaRPr lang="en-US" sz="1050" dirty="0"/>
           </a:p>
         </p:txBody>
       </p:sp>
@@ -12028,8 +12028,8 @@
         </p:nvSpPr>
         <p:spPr>
           <a:xfrm>
-            <a:off x="548640" y="4572000"/>
-            <a:ext cx="182880" cy="182880"/>
+            <a:off x="4261104" y="4197096"/>
+            <a:ext cx="164592" cy="164592"/>
           </a:xfrm>
           <a:prstGeom prst="ellipse">
             <a:avLst/>
@@ -12053,24 +12053,24 @@
         </p:nvSpPr>
         <p:spPr>
           <a:xfrm>
-            <a:off x="822960" y="4517136"/>
-            <a:ext cx="5212080" cy="292608"/>
-          </a:xfrm>
-          <a:prstGeom prst="rect">
-            <a:avLst/>
-          </a:prstGeom>
-          <a:noFill/>
-          <a:ln/>
-        </p:spPr>
-        <p:txBody>
-          <a:bodyPr wrap="square" lIns="0" tIns="0" rIns="0" bIns="0" rtlCol="0" anchor="ctr"/>
-          <a:lstStyle/>
-          <a:p>
-            <a:pPr indent="0" marL="0">
-              <a:buNone/>
-            </a:pPr>
-            <a:r>
-              <a:rPr lang="en-US" sz="1150" dirty="0">
+            <a:off x="4498848" y="4133088"/>
+            <a:ext cx="3383280" cy="292608"/>
+          </a:xfrm>
+          <a:prstGeom prst="rect">
+            <a:avLst/>
+          </a:prstGeom>
+          <a:noFill/>
+          <a:ln/>
+        </p:spPr>
+        <p:txBody>
+          <a:bodyPr wrap="square" lIns="0" tIns="0" rIns="0" bIns="0" rtlCol="0" anchor="ctr"/>
+          <a:lstStyle/>
+          <a:p>
+            <a:pPr indent="0" marL="0">
+              <a:buNone/>
+            </a:pPr>
+            <a:r>
+              <a:rPr lang="en-US" sz="1050" dirty="0">
                 <a:solidFill>
                   <a:srgbClr val="1B2430"/>
                 </a:solidFill>
@@ -12078,9 +12078,9 @@
                 <a:ea typeface="Calibri" pitchFamily="34" charset="-122"/>
                 <a:cs typeface="Calibri" pitchFamily="34" charset="-120"/>
               </a:rPr>
-              <a:t>tb_bit_window — 12 retires, 1 to 20 bits</a:t>
-            </a:r>
-            <a:endParaRPr lang="en-US" sz="1150" dirty="0"/>
+              <a:t>tb_huffman_decoder — symbol + bits</a:t>
+            </a:r>
+            <a:endParaRPr lang="en-US" sz="1050" dirty="0"/>
           </a:p>
         </p:txBody>
       </p:sp>
@@ -12092,8 +12092,8 @@
         </p:nvSpPr>
         <p:spPr>
           <a:xfrm>
-            <a:off x="6126480" y="4572000"/>
-            <a:ext cx="182880" cy="182880"/>
+            <a:off x="7973568" y="4197096"/>
+            <a:ext cx="164592" cy="164592"/>
           </a:xfrm>
           <a:prstGeom prst="ellipse">
             <a:avLst/>
@@ -12117,24 +12117,24 @@
         </p:nvSpPr>
         <p:spPr>
           <a:xfrm>
-            <a:off x="6400800" y="4517136"/>
-            <a:ext cx="5212080" cy="292608"/>
-          </a:xfrm>
-          <a:prstGeom prst="rect">
-            <a:avLst/>
-          </a:prstGeom>
-          <a:noFill/>
-          <a:ln/>
-        </p:spPr>
-        <p:txBody>
-          <a:bodyPr wrap="square" lIns="0" tIns="0" rIns="0" bIns="0" rtlCol="0" anchor="ctr"/>
-          <a:lstStyle/>
-          <a:p>
-            <a:pPr indent="0" marL="0">
-              <a:buNone/>
-            </a:pPr>
-            <a:r>
-              <a:rPr lang="en-US" sz="1150" dirty="0">
+            <a:off x="8211312" y="4133088"/>
+            <a:ext cx="3383280" cy="292608"/>
+          </a:xfrm>
+          <a:prstGeom prst="rect">
+            <a:avLst/>
+          </a:prstGeom>
+          <a:noFill/>
+          <a:ln/>
+        </p:spPr>
+        <p:txBody>
+          <a:bodyPr wrap="square" lIns="0" tIns="0" rIns="0" bIns="0" rtlCol="0" anchor="ctr"/>
+          <a:lstStyle/>
+          <a:p>
+            <a:pPr indent="0" marL="0">
+              <a:buNone/>
+            </a:pPr>
+            <a:r>
+              <a:rPr lang="en-US" sz="1050" dirty="0">
                 <a:solidFill>
                   <a:srgbClr val="1B2430"/>
                 </a:solidFill>
@@ -12142,9 +12142,9 @@
                 <a:ea typeface="Calibri" pitchFamily="34" charset="-122"/>
                 <a:cs typeface="Calibri" pitchFamily="34" charset="-120"/>
               </a:rPr>
-              <a:t>tb_bwt_index_builder — T[] vs software</a:t>
-            </a:r>
-            <a:endParaRPr lang="en-US" sz="1150" dirty="0"/>
+              <a:t>tb_bit_window — 12 retires, 1 to 20 b</a:t>
+            </a:r>
+            <a:endParaRPr lang="en-US" sz="1050" dirty="0"/>
           </a:p>
         </p:txBody>
       </p:sp>
@@ -12156,8 +12156,8 @@
         </p:nvSpPr>
         <p:spPr>
           <a:xfrm>
-            <a:off x="548640" y="4956048"/>
-            <a:ext cx="182880" cy="182880"/>
+            <a:off x="548640" y="4581144"/>
+            <a:ext cx="164592" cy="164592"/>
           </a:xfrm>
           <a:prstGeom prst="ellipse">
             <a:avLst/>
@@ -12181,24 +12181,24 @@
         </p:nvSpPr>
         <p:spPr>
           <a:xfrm>
-            <a:off x="822960" y="4901184"/>
-            <a:ext cx="5212080" cy="292608"/>
-          </a:xfrm>
-          <a:prstGeom prst="rect">
-            <a:avLst/>
-          </a:prstGeom>
-          <a:noFill/>
-          <a:ln/>
-        </p:spPr>
-        <p:txBody>
-          <a:bodyPr wrap="square" lIns="0" tIns="0" rIns="0" bIns="0" rtlCol="0" anchor="ctr"/>
-          <a:lstStyle/>
-          <a:p>
-            <a:pPr indent="0" marL="0">
-              <a:buNone/>
-            </a:pPr>
-            <a:r>
-              <a:rPr lang="en-US" sz="1150" dirty="0">
+            <a:off x="786384" y="4517136"/>
+            <a:ext cx="3383280" cy="292608"/>
+          </a:xfrm>
+          <a:prstGeom prst="rect">
+            <a:avLst/>
+          </a:prstGeom>
+          <a:noFill/>
+          <a:ln/>
+        </p:spPr>
+        <p:txBody>
+          <a:bodyPr wrap="square" lIns="0" tIns="0" rIns="0" bIns="0" rtlCol="0" anchor="ctr"/>
+          <a:lstStyle/>
+          <a:p>
+            <a:pPr indent="0" marL="0">
+              <a:buNone/>
+            </a:pPr>
+            <a:r>
+              <a:rPr lang="en-US" sz="1050" dirty="0">
                 <a:solidFill>
                   <a:srgbClr val="1B2430"/>
                 </a:solidFill>
@@ -12206,9 +12206,9 @@
                 <a:ea typeface="Calibri" pitchFamily="34" charset="-122"/>
                 <a:cs typeface="Calibri" pitchFamily="34" charset="-120"/>
               </a:rPr>
-              <a:t>bzip2_accel_top — elaborates</a:t>
-            </a:r>
-            <a:endParaRPr lang="en-US" sz="1150" dirty="0"/>
+              <a:t>tb_mtf_unit — pre-move entry</a:t>
+            </a:r>
+            <a:endParaRPr lang="en-US" sz="1050" dirty="0"/>
           </a:p>
         </p:txBody>
       </p:sp>
@@ -12220,8 +12220,8 @@
         </p:nvSpPr>
         <p:spPr>
           <a:xfrm>
-            <a:off x="6126480" y="4956048"/>
-            <a:ext cx="182880" cy="182880"/>
+            <a:off x="4261104" y="4581144"/>
+            <a:ext cx="164592" cy="164592"/>
           </a:xfrm>
           <a:prstGeom prst="ellipse">
             <a:avLst/>
@@ -12245,24 +12245,24 @@
         </p:nvSpPr>
         <p:spPr>
           <a:xfrm>
-            <a:off x="6400800" y="4901184"/>
-            <a:ext cx="5212080" cy="292608"/>
-          </a:xfrm>
-          <a:prstGeom prst="rect">
-            <a:avLst/>
-          </a:prstGeom>
-          <a:noFill/>
-          <a:ln/>
-        </p:spPr>
-        <p:txBody>
-          <a:bodyPr wrap="square" lIns="0" tIns="0" rIns="0" bIns="0" rtlCol="0" anchor="ctr"/>
-          <a:lstStyle/>
-          <a:p>
-            <a:pPr indent="0" marL="0">
-              <a:buNone/>
-            </a:pPr>
-            <a:r>
-              <a:rPr lang="en-US" sz="1150" dirty="0">
+            <a:off x="4498848" y="4517136"/>
+            <a:ext cx="3383280" cy="292608"/>
+          </a:xfrm>
+          <a:prstGeom prst="rect">
+            <a:avLst/>
+          </a:prstGeom>
+          <a:noFill/>
+          <a:ln/>
+        </p:spPr>
+        <p:txBody>
+          <a:bodyPr wrap="square" lIns="0" tIns="0" rIns="0" bIns="0" rtlCol="0" anchor="ctr"/>
+          <a:lstStyle/>
+          <a:p>
+            <a:pPr indent="0" marL="0">
+              <a:buNone/>
+            </a:pPr>
+            <a:r>
+              <a:rPr lang="en-US" sz="1050" dirty="0">
                 <a:solidFill>
                   <a:srgbClr val="1B2430"/>
                 </a:solidFill>
@@ -12270,9 +12270,9 @@
                 <a:ea typeface="Calibri" pitchFamily="34" charset="-122"/>
                 <a:cs typeface="Calibri" pitchFamily="34" charset="-120"/>
               </a:rPr>
-              <a:t>tb_ray_sphere — single PE, bit-exact</a:t>
-            </a:r>
-            <a:endParaRPr lang="en-US" sz="1150" dirty="0"/>
+              <a:t>tb_run_expander — RUNA/RUNB + stall</a:t>
+            </a:r>
+            <a:endParaRPr lang="en-US" sz="1050" dirty="0"/>
           </a:p>
         </p:txBody>
       </p:sp>
@@ -12284,8 +12284,8 @@
         </p:nvSpPr>
         <p:spPr>
           <a:xfrm>
-            <a:off x="548640" y="5340096"/>
-            <a:ext cx="182880" cy="182880"/>
+            <a:off x="7973568" y="4581144"/>
+            <a:ext cx="164592" cy="164592"/>
           </a:xfrm>
           <a:prstGeom prst="ellipse">
             <a:avLst/>
@@ -12309,24 +12309,24 @@
         </p:nvSpPr>
         <p:spPr>
           <a:xfrm>
-            <a:off x="822960" y="5285232"/>
-            <a:ext cx="5212080" cy="292608"/>
-          </a:xfrm>
-          <a:prstGeom prst="rect">
-            <a:avLst/>
-          </a:prstGeom>
-          <a:noFill/>
-          <a:ln/>
-        </p:spPr>
-        <p:txBody>
-          <a:bodyPr wrap="square" lIns="0" tIns="0" rIns="0" bIns="0" rtlCol="0" anchor="ctr"/>
-          <a:lstStyle/>
-          <a:p>
-            <a:pPr indent="0" marL="0">
-              <a:buNone/>
-            </a:pPr>
-            <a:r>
-              <a:rPr lang="en-US" sz="1150" dirty="0">
+            <a:off x="8211312" y="4517136"/>
+            <a:ext cx="3383280" cy="292608"/>
+          </a:xfrm>
+          <a:prstGeom prst="rect">
+            <a:avLst/>
+          </a:prstGeom>
+          <a:noFill/>
+          <a:ln/>
+        </p:spPr>
+        <p:txBody>
+          <a:bodyPr wrap="square" lIns="0" tIns="0" rIns="0" bIns="0" rtlCol="0" anchor="ctr"/>
+          <a:lstStyle/>
+          <a:p>
+            <a:pPr indent="0" marL="0">
+              <a:buNone/>
+            </a:pPr>
+            <a:r>
+              <a:rPr lang="en-US" sz="1050" dirty="0">
                 <a:solidFill>
                   <a:srgbClr val="1B2430"/>
                 </a:solidFill>
@@ -12334,9 +12334,9 @@
                 <a:ea typeface="Calibri" pitchFamily="34" charset="-122"/>
                 <a:cs typeface="Calibri" pitchFamily="34" charset="-120"/>
               </a:rPr>
-              <a:t>tb_ray_array — nearest of 8 spheres</a:t>
-            </a:r>
-            <a:endParaRPr lang="en-US" sz="1150" dirty="0"/>
+              <a:t>tb_rle_final — outer RLE, zero count</a:t>
+            </a:r>
+            <a:endParaRPr lang="en-US" sz="1050" dirty="0"/>
           </a:p>
         </p:txBody>
       </p:sp>
@@ -12348,8 +12348,8 @@
         </p:nvSpPr>
         <p:spPr>
           <a:xfrm>
-            <a:off x="6126480" y="5340096"/>
-            <a:ext cx="182880" cy="182880"/>
+            <a:off x="548640" y="4965192"/>
+            <a:ext cx="164592" cy="164592"/>
           </a:xfrm>
           <a:prstGeom prst="ellipse">
             <a:avLst/>
@@ -12373,24 +12373,24 @@
         </p:nvSpPr>
         <p:spPr>
           <a:xfrm>
-            <a:off x="6400800" y="5285232"/>
-            <a:ext cx="5212080" cy="292608"/>
-          </a:xfrm>
-          <a:prstGeom prst="rect">
-            <a:avLst/>
-          </a:prstGeom>
-          <a:noFill/>
-          <a:ln/>
-        </p:spPr>
-        <p:txBody>
-          <a:bodyPr wrap="square" lIns="0" tIns="0" rIns="0" bIns="0" rtlCol="0" anchor="ctr"/>
-          <a:lstStyle/>
-          <a:p>
-            <a:pPr indent="0" marL="0">
-              <a:buNone/>
-            </a:pPr>
-            <a:r>
-              <a:rPr lang="en-US" sz="1150" dirty="0">
+            <a:off x="786384" y="4901184"/>
+            <a:ext cx="3383280" cy="292608"/>
+          </a:xfrm>
+          <a:prstGeom prst="rect">
+            <a:avLst/>
+          </a:prstGeom>
+          <a:noFill/>
+          <a:ln/>
+        </p:spPr>
+        <p:txBody>
+          <a:bodyPr wrap="square" lIns="0" tIns="0" rIns="0" bIns="0" rtlCol="0" anchor="ctr"/>
+          <a:lstStyle/>
+          <a:p>
+            <a:pPr indent="0" marL="0">
+              <a:buNone/>
+            </a:pPr>
+            <a:r>
+              <a:rPr lang="en-US" sz="1050" dirty="0">
                 <a:solidFill>
                   <a:srgbClr val="1B2430"/>
                 </a:solidFill>
@@ -12398,15 +12398,335 @@
                 <a:ea typeface="Calibri" pitchFamily="34" charset="-122"/>
                 <a:cs typeface="Calibri" pitchFamily="34" charset="-120"/>
               </a:rPr>
+              <a:t>tb_bwt_index_builder — T[] vs software</a:t>
+            </a:r>
+            <a:endParaRPr lang="en-US" sz="1050" dirty="0"/>
+          </a:p>
+        </p:txBody>
+      </p:sp>
+      <p:sp>
+        <p:nvSpPr>
+          <p:cNvPr id="29" name="Shape 27"/>
+          <p:cNvSpPr/>
+          <p:nvPr/>
+        </p:nvSpPr>
+        <p:spPr>
+          <a:xfrm>
+            <a:off x="4261104" y="4965192"/>
+            <a:ext cx="164592" cy="164592"/>
+          </a:xfrm>
+          <a:prstGeom prst="ellipse">
+            <a:avLst/>
+          </a:prstGeom>
+          <a:solidFill>
+            <a:srgbClr val="2D9B8A"/>
+          </a:solidFill>
+          <a:ln w="12700">
+            <a:solidFill>
+              <a:srgbClr val="2D9B8A"/>
+            </a:solidFill>
+            <a:prstDash val="solid"/>
+          </a:ln>
+        </p:spPr>
+      </p:sp>
+      <p:sp>
+        <p:nvSpPr>
+          <p:cNvPr id="30" name="Text 28"/>
+          <p:cNvSpPr txBox="1"/>
+          <p:nvPr/>
+        </p:nvSpPr>
+        <p:spPr>
+          <a:xfrm>
+            <a:off x="4498848" y="4901184"/>
+            <a:ext cx="3383280" cy="292608"/>
+          </a:xfrm>
+          <a:prstGeom prst="rect">
+            <a:avLst/>
+          </a:prstGeom>
+          <a:noFill/>
+          <a:ln/>
+        </p:spPr>
+        <p:txBody>
+          <a:bodyPr wrap="square" lIns="0" tIns="0" rIns="0" bIns="0" rtlCol="0" anchor="ctr"/>
+          <a:lstStyle/>
+          <a:p>
+            <a:pPr indent="0" marL="0">
+              <a:buNone/>
+            </a:pPr>
+            <a:r>
+              <a:rPr lang="en-US" sz="1050" dirty="0">
+                <a:solidFill>
+                  <a:srgbClr val="1B2430"/>
+                </a:solidFill>
+                <a:latin typeface="Calibri" pitchFamily="34" charset="0"/>
+                <a:ea typeface="Calibri" pitchFamily="34" charset="-122"/>
+                <a:cs typeface="Calibri" pitchFamily="34" charset="-120"/>
+              </a:rPr>
+              <a:t>tb_bwt_reverse — chase vs software</a:t>
+            </a:r>
+            <a:endParaRPr lang="en-US" sz="1050" dirty="0"/>
+          </a:p>
+        </p:txBody>
+      </p:sp>
+      <p:sp>
+        <p:nvSpPr>
+          <p:cNvPr id="31" name="Shape 29"/>
+          <p:cNvSpPr/>
+          <p:nvPr/>
+        </p:nvSpPr>
+        <p:spPr>
+          <a:xfrm>
+            <a:off x="7973568" y="4965192"/>
+            <a:ext cx="164592" cy="164592"/>
+          </a:xfrm>
+          <a:prstGeom prst="ellipse">
+            <a:avLst/>
+          </a:prstGeom>
+          <a:solidFill>
+            <a:srgbClr val="E8833A"/>
+          </a:solidFill>
+          <a:ln w="12700">
+            <a:solidFill>
+              <a:srgbClr val="E8833A"/>
+            </a:solidFill>
+            <a:prstDash val="solid"/>
+          </a:ln>
+        </p:spPr>
+      </p:sp>
+      <p:sp>
+        <p:nvSpPr>
+          <p:cNvPr id="32" name="Text 30"/>
+          <p:cNvSpPr txBox="1"/>
+          <p:nvPr/>
+        </p:nvSpPr>
+        <p:spPr>
+          <a:xfrm>
+            <a:off x="8211312" y="4901184"/>
+            <a:ext cx="3383280" cy="292608"/>
+          </a:xfrm>
+          <a:prstGeom prst="rect">
+            <a:avLst/>
+          </a:prstGeom>
+          <a:noFill/>
+          <a:ln/>
+        </p:spPr>
+        <p:txBody>
+          <a:bodyPr wrap="square" lIns="0" tIns="0" rIns="0" bIns="0" rtlCol="0" anchor="ctr"/>
+          <a:lstStyle/>
+          <a:p>
+            <a:pPr indent="0" marL="0">
+              <a:buNone/>
+            </a:pPr>
+            <a:r>
+              <a:rPr lang="en-US" sz="1050" b="1" dirty="0">
+                <a:solidFill>
+                  <a:srgbClr val="1B2430"/>
+                </a:solidFill>
+                <a:latin typeface="Calibri" pitchFamily="34" charset="0"/>
+                <a:ea typeface="Calibri" pitchFamily="34" charset="-122"/>
+                <a:cs typeface="Calibri" pitchFamily="34" charset="-120"/>
+              </a:rPr>
+              <a:t>tb_top_block — END TO END, whole block</a:t>
+            </a:r>
+            <a:endParaRPr lang="en-US" sz="1050" dirty="0"/>
+          </a:p>
+        </p:txBody>
+      </p:sp>
+      <p:sp>
+        <p:nvSpPr>
+          <p:cNvPr id="33" name="Shape 31"/>
+          <p:cNvSpPr/>
+          <p:nvPr/>
+        </p:nvSpPr>
+        <p:spPr>
+          <a:xfrm>
+            <a:off x="548640" y="5349240"/>
+            <a:ext cx="164592" cy="164592"/>
+          </a:xfrm>
+          <a:prstGeom prst="ellipse">
+            <a:avLst/>
+          </a:prstGeom>
+          <a:solidFill>
+            <a:srgbClr val="2D9B8A"/>
+          </a:solidFill>
+          <a:ln w="12700">
+            <a:solidFill>
+              <a:srgbClr val="2D9B8A"/>
+            </a:solidFill>
+            <a:prstDash val="solid"/>
+          </a:ln>
+        </p:spPr>
+      </p:sp>
+      <p:sp>
+        <p:nvSpPr>
+          <p:cNvPr id="34" name="Text 32"/>
+          <p:cNvSpPr txBox="1"/>
+          <p:nvPr/>
+        </p:nvSpPr>
+        <p:spPr>
+          <a:xfrm>
+            <a:off x="786384" y="5285232"/>
+            <a:ext cx="3383280" cy="292608"/>
+          </a:xfrm>
+          <a:prstGeom prst="rect">
+            <a:avLst/>
+          </a:prstGeom>
+          <a:noFill/>
+          <a:ln/>
+        </p:spPr>
+        <p:txBody>
+          <a:bodyPr wrap="square" lIns="0" tIns="0" rIns="0" bIns="0" rtlCol="0" anchor="ctr"/>
+          <a:lstStyle/>
+          <a:p>
+            <a:pPr indent="0" marL="0">
+              <a:buNone/>
+            </a:pPr>
+            <a:r>
+              <a:rPr lang="en-US" sz="1050" dirty="0">
+                <a:solidFill>
+                  <a:srgbClr val="1B2430"/>
+                </a:solidFill>
+                <a:latin typeface="Calibri" pitchFamily="34" charset="0"/>
+                <a:ea typeface="Calibri" pitchFamily="34" charset="-122"/>
+                <a:cs typeface="Calibri" pitchFamily="34" charset="-120"/>
+              </a:rPr>
+              <a:t>tb_ray_sphere — single PE, bit-exact</a:t>
+            </a:r>
+            <a:endParaRPr lang="en-US" sz="1050" dirty="0"/>
+          </a:p>
+        </p:txBody>
+      </p:sp>
+      <p:sp>
+        <p:nvSpPr>
+          <p:cNvPr id="35" name="Shape 33"/>
+          <p:cNvSpPr/>
+          <p:nvPr/>
+        </p:nvSpPr>
+        <p:spPr>
+          <a:xfrm>
+            <a:off x="4261104" y="5349240"/>
+            <a:ext cx="164592" cy="164592"/>
+          </a:xfrm>
+          <a:prstGeom prst="ellipse">
+            <a:avLst/>
+          </a:prstGeom>
+          <a:solidFill>
+            <a:srgbClr val="2D9B8A"/>
+          </a:solidFill>
+          <a:ln w="12700">
+            <a:solidFill>
+              <a:srgbClr val="2D9B8A"/>
+            </a:solidFill>
+            <a:prstDash val="solid"/>
+          </a:ln>
+        </p:spPr>
+      </p:sp>
+      <p:sp>
+        <p:nvSpPr>
+          <p:cNvPr id="36" name="Text 34"/>
+          <p:cNvSpPr txBox="1"/>
+          <p:nvPr/>
+        </p:nvSpPr>
+        <p:spPr>
+          <a:xfrm>
+            <a:off x="4498848" y="5285232"/>
+            <a:ext cx="3383280" cy="292608"/>
+          </a:xfrm>
+          <a:prstGeom prst="rect">
+            <a:avLst/>
+          </a:prstGeom>
+          <a:noFill/>
+          <a:ln/>
+        </p:spPr>
+        <p:txBody>
+          <a:bodyPr wrap="square" lIns="0" tIns="0" rIns="0" bIns="0" rtlCol="0" anchor="ctr"/>
+          <a:lstStyle/>
+          <a:p>
+            <a:pPr indent="0" marL="0">
+              <a:buNone/>
+            </a:pPr>
+            <a:r>
+              <a:rPr lang="en-US" sz="1050" dirty="0">
+                <a:solidFill>
+                  <a:srgbClr val="1B2430"/>
+                </a:solidFill>
+                <a:latin typeface="Calibri" pitchFamily="34" charset="0"/>
+                <a:ea typeface="Calibri" pitchFamily="34" charset="-122"/>
+                <a:cs typeface="Calibri" pitchFamily="34" charset="-120"/>
+              </a:rPr>
+              <a:t>tb_ray_array — nearest of 8 spheres</a:t>
+            </a:r>
+            <a:endParaRPr lang="en-US" sz="1050" dirty="0"/>
+          </a:p>
+        </p:txBody>
+      </p:sp>
+      <p:sp>
+        <p:nvSpPr>
+          <p:cNvPr id="37" name="Shape 35"/>
+          <p:cNvSpPr/>
+          <p:nvPr/>
+        </p:nvSpPr>
+        <p:spPr>
+          <a:xfrm>
+            <a:off x="7973568" y="5349240"/>
+            <a:ext cx="164592" cy="164592"/>
+          </a:xfrm>
+          <a:prstGeom prst="ellipse">
+            <a:avLst/>
+          </a:prstGeom>
+          <a:solidFill>
+            <a:srgbClr val="2D9B8A"/>
+          </a:solidFill>
+          <a:ln w="12700">
+            <a:solidFill>
+              <a:srgbClr val="2D9B8A"/>
+            </a:solidFill>
+            <a:prstDash val="solid"/>
+          </a:ln>
+        </p:spPr>
+      </p:sp>
+      <p:sp>
+        <p:nvSpPr>
+          <p:cNvPr id="38" name="Text 36"/>
+          <p:cNvSpPr txBox="1"/>
+          <p:nvPr/>
+        </p:nvSpPr>
+        <p:spPr>
+          <a:xfrm>
+            <a:off x="8211312" y="5285232"/>
+            <a:ext cx="3383280" cy="292608"/>
+          </a:xfrm>
+          <a:prstGeom prst="rect">
+            <a:avLst/>
+          </a:prstGeom>
+          <a:noFill/>
+          <a:ln/>
+        </p:spPr>
+        <p:txBody>
+          <a:bodyPr wrap="square" lIns="0" tIns="0" rIns="0" bIns="0" rtlCol="0" anchor="ctr"/>
+          <a:lstStyle/>
+          <a:p>
+            <a:pPr indent="0" marL="0">
+              <a:buNone/>
+            </a:pPr>
+            <a:r>
+              <a:rPr lang="en-US" sz="1050" dirty="0">
+                <a:solidFill>
+                  <a:srgbClr val="1B2430"/>
+                </a:solidFill>
+                <a:latin typeface="Calibri" pitchFamily="34" charset="0"/>
+                <a:ea typeface="Calibri" pitchFamily="34" charset="-122"/>
+                <a:cs typeface="Calibri" pitchFamily="34" charset="-120"/>
+              </a:rPr>
               <a:t>tb_fp_random — 400 vectors, bit-exact</a:t>
             </a:r>
-            <a:endParaRPr lang="en-US" sz="1150" dirty="0"/>
-          </a:p>
-        </p:txBody>
-      </p:sp>
-      <p:sp>
-        <p:nvSpPr>
-          <p:cNvPr id="29" name="Text 27"/>
+            <a:endParaRPr lang="en-US" sz="1050" dirty="0"/>
+          </a:p>
+        </p:txBody>
+      </p:sp>
+      <p:sp>
+        <p:nvSpPr>
+          <p:cNvPr id="39" name="Text 37"/>
           <p:cNvSpPr txBox="1"/>
           <p:nvPr/>
         </p:nvSpPr>
@@ -12437,7 +12757,7 @@
                 <a:ea typeface="Calibri" pitchFamily="34" charset="-122"/>
                 <a:cs typeface="Calibri" pitchFamily="34" charset="-120"/>
               </a:rPr>
-              <a:t>10 / 10 green in the guest  ·  ./tools/regress.sh</a:t>
+              <a:t>15 / 15 green in the guest  ·  ./tools/regress.sh</a:t>
             </a:r>
             <a:endParaRPr lang="en-US" sz="1400" dirty="0"/>
           </a:p>
@@ -12445,7 +12765,7 @@
       </p:sp>
       <p:sp>
         <p:nvSpPr>
-          <p:cNvPr id="30" name="Text 28"/>
+          <p:cNvPr id="40" name="Text 38"/>
           <p:cNvSpPr txBox="1"/>
           <p:nvPr/>
         </p:nvSpPr>
@@ -12484,7 +12804,7 @@
       </p:sp>
       <p:sp>
         <p:nvSpPr>
-          <p:cNvPr id="31" name="Text 29"/>
+          <p:cNvPr id="41" name="Text 39"/>
           <p:cNvSpPr txBox="1"/>
           <p:nvPr/>
         </p:nvSpPr>
@@ -13124,7 +13444,7 @@
                 <a:ea typeface="Calibri" pitchFamily="34" charset="-122"/>
                 <a:cs typeface="Calibri" pitchFamily="34" charset="-120"/>
               </a:rPr>
-              <a:t>SYSTOLIC, weight-stationary</a:t>
+              <a:t>SYSTOLIC-STYLE, weight-stationary</a:t>
             </a:r>
             <a:endParaRPr lang="en-US" sz="1250" dirty="0"/>
           </a:p>
@@ -14485,7 +14805,7 @@
                 <a:ea typeface="Calibri" pitchFamily="34" charset="-122"/>
                 <a:cs typeface="Calibri" pitchFamily="34" charset="-120"/>
               </a:rPr>
-              <a:t>No end-to-end RTL simulation of a real block</a:t>
+              <a:t>End-to-end simulation covers a SMALL block, not the benchmark file</a:t>
             </a:r>
             <a:endParaRPr lang="en-US" sz="1400" dirty="0"/>
           </a:p>
@@ -14527,7 +14847,7 @@
                 <a:ea typeface="Calibri" pitchFamily="34" charset="-122"/>
                 <a:cs typeface="Calibri" pitchFamily="34" charset="-120"/>
               </a:rPr>
-              <a:t>Every block is individually verified and the assembled top elaborates, but we have no full-stream testbench that feeds interpreter.tar.bz2 in and checks 399,360 bytes out. The integration is verified by construction, not by simulation. An earlier revision had a bigger gap - the T[] counting-sort engine was missing entirely - which bwt_index_builder.v now closes.</a:t>
+              <a:t>tb_top_block programs the accelerator through its CSRs, streams one compressed block in and checks the bytes that come out - so the assembled design does decompress. But the block is 15 bytes, generated by running the bzip2 encoder in Python. Feeding interpreter.tar.bz2 through the RTL would need a full driver model and a long simulation.</a:t>
             </a:r>
             <a:endParaRPr lang="en-US" sz="1200" dirty="0"/>
           </a:p>
@@ -14630,7 +14950,7 @@
                 <a:ea typeface="Calibri" pitchFamily="34" charset="-122"/>
                 <a:cs typeface="Calibri" pitchFamily="34" charset="-120"/>
               </a:rPr>
-              <a:t>Amdahl caps both accelerators</a:t>
+              <a:t>One Huffman table at a time - the biggest gap to a usable accelerator</a:t>
             </a:r>
             <a:endParaRPr lang="en-US" sz="1400" dirty="0"/>
           </a:p>
@@ -14672,7 +14992,7 @@
                 <a:ea typeface="Calibri" pitchFamily="34" charset="-122"/>
                 <a:cs typeface="Calibri" pitchFamily="34" charset="-120"/>
               </a:rPr>
-              <a:t>raytrace intersection is 35% of the optimized runtime → 1.54× ceiling on a whole frame. For pyflate, a 67 KB input behind PCIe would be dominated by the round trip — which is why this belongs on-die, not on a discrete card.</a:t>
+              <a:t>A real block carries up to six tables and switches every 50 symbols. The hardware holds one set, so the driver would reprogram it at each switch - roughly 3,000 bursts for the benchmark block. A production design holds six banks and selects with the decoded selector stream.</a:t>
             </a:r>
             <a:endParaRPr lang="en-US" sz="1200" dirty="0"/>
           </a:p>
@@ -14775,7 +15095,7 @@
                 <a:ea typeface="Calibri" pitchFamily="34" charset="-122"/>
                 <a:cs typeface="Calibri" pitchFamily="34" charset="-120"/>
               </a:rPr>
-              <a:t>A latent divergence we left alone</a:t>
+              <a:t>Amdahl caps both accelerators</a:t>
             </a:r>
             <a:endParaRPr lang="en-US" sz="1400" dirty="0"/>
           </a:p>
@@ -14817,7 +15137,7 @@
                 <a:ea typeface="Calibri" pitchFamily="34" charset="-122"/>
                 <a:cs typeface="Calibri" pitchFamily="34" charset="-120"/>
               </a:rPr>
-              <a:t>build_decode_tables does not skip zero-length symbols while the baseline does. We instrumented the real workload: all 6 Huffman tables have minimum length 2, so it never triggers. Latent, not active.</a:t>
+              <a:t>raytrace intersection is 35% of the optimized runtime → 1.54× ceiling on a whole frame. For pyflate, a 67 KB input behind PCIe would be dominated by the round trip — which is why this belongs on-die, not on a discrete card.</a:t>
             </a:r>
             <a:endParaRPr lang="en-US" sz="1200" dirty="0"/>
           </a:p>
@@ -19030,7 +19350,7 @@
                 <a:ea typeface="Calibri" pitchFamily="34" charset="-122"/>
                 <a:cs typeface="Calibri" pitchFamily="34" charset="-120"/>
               </a:rPr>
-              <a:t>pyflate — 14 extra streams</a:t>
+              <a:t>pyflate — 16 streams vs libbz2</a:t>
             </a:r>
             <a:endParaRPr lang="en-US" sz="1400" dirty="0"/>
           </a:p>
@@ -19076,7 +19396,7 @@
                 <a:ea typeface="Calibri" pitchFamily="34" charset="-122"/>
                 <a:cs typeface="Calibri" pitchFamily="34" charset="-120"/>
               </a:rPr>
-              <a:t>empty, 1 byte, 1 KB of zeros</a:t>
+              <a:t>empty, 1 byte, 1 KB of zeros, RLE runs</a:t>
             </a:r>
             <a:endParaRPr lang="en-US" sz="1200" dirty="0"/>
           </a:p>
@@ -19100,7 +19420,7 @@
                 <a:ea typeface="Calibri" pitchFamily="34" charset="-122"/>
                 <a:cs typeface="Calibri" pitchFamily="34" charset="-120"/>
               </a:rPr>
-              <a:t>highly repetitive, 64 KB random</a:t>
+              <a:t>highly repetitive, text, 64 KB random</a:t>
             </a:r>
             <a:endParaRPr lang="en-US" sz="1200" dirty="0"/>
           </a:p>
@@ -19124,7 +19444,7 @@
                 <a:ea typeface="Calibri" pitchFamily="34" charset="-122"/>
                 <a:cs typeface="Calibri" pitchFamily="34" charset="-120"/>
               </a:rPr>
-              <a:t>text, and a 900 KB MULTI-BLOCK file</a:t>
+              <a:t>a 900 KB MULTI-BLOCK file</a:t>
             </a:r>
             <a:endParaRPr lang="en-US" sz="1200" dirty="0"/>
           </a:p>
@@ -19148,7 +19468,7 @@
                 <a:ea typeface="Calibri" pitchFamily="34" charset="-122"/>
                 <a:cs typeface="Calibri" pitchFamily="34" charset="-120"/>
               </a:rPr>
-              <a:t>at compression levels 1 and 9</a:t>
+              <a:t>levels 1 and 9 — checked against libbz2,</a:t>
             </a:r>
             <a:endParaRPr lang="en-US" sz="1200" dirty="0"/>
           </a:p>
@@ -19172,7 +19492,7 @@
                 <a:ea typeface="Calibri" pitchFamily="34" charset="-122"/>
                 <a:cs typeface="Calibri" pitchFamily="34" charset="-120"/>
               </a:rPr>
-              <a:t>all round-trip correctly</a:t>
+              <a:t>an oracle we did not write</a:t>
             </a:r>
             <a:endParaRPr lang="en-US" sz="1200" dirty="0"/>
           </a:p>

--- a/presentation/HWSW_CoDesign_Final_Taha_Lana.pptx
+++ b/presentation/HWSW_CoDesign_Final_Taha_Lana.pptx
@@ -31,9 +31,10 @@
     <p:sldId id="279" r:id="rId25"/>
     <p:sldId id="280" r:id="rId26"/>
     <p:sldId id="281" r:id="rId27"/>
+    <p:sldId id="282" r:id="rId28"/>
   </p:sldIdLst>
   <p:notesMasterIdLst>
-    <p:notesMasterId r:id="rId28"/>
+    <p:notesMasterId r:id="rId29"/>
   </p:notesMasterIdLst>
   <p:sldSz cx="12192000" cy="6858000"/>
   <p:notesSz cx="6858000" cy="12192000"/>
@@ -1759,7 +1760,7 @@
           <a:p>
             <a:r>
               <a:rPr lang="en-US" dirty="0"/>
-              <a:t>If asked how canonical decoding works, or how the hardware table is built.</a:t>
+              <a:t>Both. 0:05. Stop here - this is the end of the presented material. Leave the slide up for the questions: it carries both headline numbers and the verification count. Everything after it is backup: B1 canonical Huffman, B2 the three interface rules, B3 the measurement environment, B4 what we rejected, B5 testing beyond the benchmark.</a:t>
             </a:r>
             <a:endParaRPr lang="en-US" dirty="0"/>
           </a:p>
@@ -1847,7 +1848,7 @@
           <a:p>
             <a:r>
               <a:rPr lang="en-US" dirty="0"/>
-              <a:t>If asked about the HW/SW interface, the driver, or security.</a:t>
+              <a:t>If asked how canonical decoding works, or how the hardware table is built.</a:t>
             </a:r>
             <a:endParaRPr lang="en-US" dirty="0"/>
           </a:p>
@@ -1935,7 +1936,7 @@
           <a:p>
             <a:r>
               <a:rPr lang="en-US" dirty="0"/>
-              <a:t>If asked where the numbers came from, or about measurement noise.</a:t>
+              <a:t>If asked about the HW/SW interface, the driver, or security.</a:t>
             </a:r>
             <a:endParaRPr lang="en-US" dirty="0"/>
           </a:p>
@@ -2023,7 +2024,7 @@
           <a:p>
             <a:r>
               <a:rPr lang="en-US" dirty="0"/>
-              <a:t>If asked 'did you consider X'. Most likely question of the whole session.</a:t>
+              <a:t>If asked where the numbers came from, or about measurement noise.</a:t>
             </a:r>
             <a:endParaRPr lang="en-US" dirty="0"/>
           </a:p>
@@ -2111,7 +2112,7 @@
           <a:p>
             <a:r>
               <a:rPr lang="en-US" dirty="0"/>
-              <a:t>If asked whether the optimization generalizes, or only works on the one benchmark file.</a:t>
+              <a:t>If asked 'did you consider X'. Most likely question of the whole session.</a:t>
             </a:r>
             <a:endParaRPr lang="en-US" dirty="0"/>
           </a:p>
@@ -2135,6 +2136,94 @@
             <a:fld id="{F7021451-1387-4CA6-816F-3879F97B5CBC}" type="slidenum">
               <a:rPr lang="en-US"/>
               <a:t>26</a:t>
+            </a:fld>
+            <a:endParaRPr lang="en-US"/>
+          </a:p>
+        </p:txBody>
+      </p:sp>
+    </p:spTree>
+    <p:extLst>
+      <p:ext uri="{BB962C8B-B14F-4D97-AF65-F5344CB8AC3E}">
+        <p14:creationId xmlns:p14="http://schemas.microsoft.com/office/powerpoint/2010/main" val="1024086991"/>
+      </p:ext>
+    </p:extLst>
+  </p:cSld>
+  <p:clrMapOvr>
+    <a:masterClrMapping/>
+  </p:clrMapOvr>
+</p:notes>
+</file>
+
+<file path=ppt/notesSlides/notesSlide27.xml><?xml version="1.0" encoding="utf-8"?>
+<p:notes xmlns:a="http://schemas.openxmlformats.org/drawingml/2006/main" xmlns:r="http://schemas.openxmlformats.org/officeDocument/2006/relationships" xmlns:p="http://schemas.openxmlformats.org/presentationml/2006/main">
+  <p:cSld>
+    <p:spTree>
+      <p:nvGrpSpPr>
+        <p:cNvPr id="1" name=""/>
+        <p:cNvGrpSpPr/>
+        <p:nvPr/>
+      </p:nvGrpSpPr>
+      <p:grpSpPr>
+        <a:xfrm>
+          <a:off x="0" y="0"/>
+          <a:ext cx="0" cy="0"/>
+          <a:chOff x="0" y="0"/>
+          <a:chExt cx="0" cy="0"/>
+        </a:xfrm>
+      </p:grpSpPr>
+      <p:sp>
+        <p:nvSpPr>
+          <p:cNvPr id="2" name="Slide Image Placeholder 1"/>
+          <p:cNvSpPr>
+            <a:spLocks noGrp="1" noRot="1" noChangeAspect="1"/>
+          </p:cNvSpPr>
+          <p:nvPr>
+            <p:ph type="sldImg"/>
+          </p:nvPr>
+        </p:nvSpPr>
+        <p:spPr/>
+      </p:sp>
+      <p:sp>
+        <p:nvSpPr>
+          <p:cNvPr id="3" name="Notes Placeholder 2"/>
+          <p:cNvSpPr>
+            <a:spLocks noGrp="1"/>
+          </p:cNvSpPr>
+          <p:nvPr>
+            <p:ph type="body" idx="1"/>
+          </p:nvPr>
+        </p:nvSpPr>
+        <p:spPr/>
+        <p:txBody>
+          <a:bodyPr/>
+          <a:lstStyle/>
+          <a:p>
+            <a:r>
+              <a:rPr lang="en-US" dirty="0"/>
+              <a:t>If asked whether the optimization generalizes, or only works on the one benchmark file.</a:t>
+            </a:r>
+            <a:endParaRPr lang="en-US" dirty="0"/>
+          </a:p>
+        </p:txBody>
+      </p:sp>
+      <p:sp>
+        <p:nvSpPr>
+          <p:cNvPr id="4" name="Slide Number Placeholder 3"/>
+          <p:cNvSpPr>
+            <a:spLocks noGrp="1"/>
+          </p:cNvSpPr>
+          <p:nvPr>
+            <p:ph type="sldNum" sz="quarter" idx="10"/>
+          </p:nvPr>
+        </p:nvSpPr>
+        <p:spPr/>
+        <p:txBody>
+          <a:bodyPr/>
+          <a:lstStyle/>
+          <a:p>
+            <a:fld id="{F7021451-1387-4CA6-816F-3879F97B5CBC}" type="slidenum">
+              <a:rPr lang="en-US"/>
+              <a:t>27</a:t>
             </a:fld>
             <a:endParaRPr lang="en-US"/>
           </a:p>
@@ -16092,6 +16181,13 @@
 <file path=ppt/slides/slide22.xml><?xml version="1.0" encoding="utf-8"?>
 <p:sld xmlns:a="http://schemas.openxmlformats.org/drawingml/2006/main" xmlns:r="http://schemas.openxmlformats.org/officeDocument/2006/relationships" xmlns:p="http://schemas.openxmlformats.org/presentationml/2006/main">
   <p:cSld name="Slide 22">
+    <p:bg>
+      <p:bgPr>
+        <a:solidFill>
+          <a:srgbClr val="1B2430"/>
+        </a:solidFill>
+      </p:bgPr>
+    </p:bg>
     <p:spTree>
       <p:nvGrpSpPr>
         <p:cNvPr id="1" name=""/>
@@ -16114,34 +16210,34 @@
         </p:nvSpPr>
         <p:spPr>
           <a:xfrm>
-            <a:off x="548640" y="457200"/>
-            <a:ext cx="6858000" cy="237744"/>
-          </a:xfrm>
-          <a:prstGeom prst="rect">
-            <a:avLst/>
-          </a:prstGeom>
-          <a:noFill/>
-          <a:ln/>
-        </p:spPr>
-        <p:txBody>
-          <a:bodyPr wrap="square" lIns="0" tIns="0" rIns="0" bIns="0" rtlCol="0" anchor="ctr"/>
-          <a:lstStyle/>
-          <a:p>
-            <a:pPr indent="0" marL="0">
-              <a:buNone/>
-            </a:pPr>
-            <a:r>
-              <a:rPr lang="en-US" sz="1100" b="1" spc="160" kern="0" dirty="0">
-                <a:solidFill>
-                  <a:srgbClr val="6B7785"/>
-                </a:solidFill>
-                <a:latin typeface="Calibri" pitchFamily="34" charset="0"/>
-                <a:ea typeface="Calibri" pitchFamily="34" charset="-122"/>
-                <a:cs typeface="Calibri" pitchFamily="34" charset="-120"/>
-              </a:rPr>
-              <a:t>BACKUP B1</a:t>
-            </a:r>
-            <a:endParaRPr lang="en-US" sz="1100" dirty="0"/>
+            <a:off x="548640" y="1417320"/>
+            <a:ext cx="11091672" cy="274320"/>
+          </a:xfrm>
+          <a:prstGeom prst="rect">
+            <a:avLst/>
+          </a:prstGeom>
+          <a:noFill/>
+          <a:ln/>
+        </p:spPr>
+        <p:txBody>
+          <a:bodyPr wrap="square" lIns="0" tIns="0" rIns="0" bIns="0" rtlCol="0" anchor="ctr"/>
+          <a:lstStyle/>
+          <a:p>
+            <a:pPr indent="0" marL="0">
+              <a:buNone/>
+            </a:pPr>
+            <a:r>
+              <a:rPr lang="en-US" sz="1300" b="1" spc="200" kern="0" dirty="0">
+                <a:solidFill>
+                  <a:srgbClr val="E8833A"/>
+                </a:solidFill>
+                <a:latin typeface="Calibri" pitchFamily="34" charset="0"/>
+                <a:ea typeface="Calibri" pitchFamily="34" charset="-122"/>
+                <a:cs typeface="Calibri" pitchFamily="34" charset="-120"/>
+              </a:rPr>
+              <a:t>END OF PRESENTATION</a:t>
+            </a:r>
+            <a:endParaRPr lang="en-US" sz="1300" dirty="0"/>
           </a:p>
         </p:txBody>
       </p:sp>
@@ -16153,34 +16249,34 @@
         </p:nvSpPr>
         <p:spPr>
           <a:xfrm>
-            <a:off x="548640" y="694944"/>
-            <a:ext cx="11091672" cy="585216"/>
-          </a:xfrm>
-          <a:prstGeom prst="rect">
-            <a:avLst/>
-          </a:prstGeom>
-          <a:noFill/>
-          <a:ln/>
-        </p:spPr>
-        <p:txBody>
-          <a:bodyPr wrap="square" lIns="0" tIns="0" rIns="0" bIns="0" rtlCol="0" anchor="ctr"/>
-          <a:lstStyle/>
-          <a:p>
-            <a:pPr indent="0" marL="0">
-              <a:buNone/>
-            </a:pPr>
-            <a:r>
-              <a:rPr lang="en-US" sz="2900" b="1" dirty="0">
-                <a:solidFill>
-                  <a:srgbClr val="1B2430"/>
+            <a:off x="548640" y="1783080"/>
+            <a:ext cx="7863840" cy="1143000"/>
+          </a:xfrm>
+          <a:prstGeom prst="rect">
+            <a:avLst/>
+          </a:prstGeom>
+          <a:noFill/>
+          <a:ln/>
+        </p:spPr>
+        <p:txBody>
+          <a:bodyPr wrap="square" lIns="0" tIns="0" rIns="0" bIns="0" rtlCol="0" anchor="ctr"/>
+          <a:lstStyle/>
+          <a:p>
+            <a:pPr indent="0" marL="0">
+              <a:buNone/>
+            </a:pPr>
+            <a:r>
+              <a:rPr lang="en-US" sz="5400" b="1" dirty="0">
+                <a:solidFill>
+                  <a:srgbClr val="FFFFFF"/>
                 </a:solidFill>
                 <a:latin typeface="Cambria" pitchFamily="34" charset="0"/>
                 <a:ea typeface="Cambria" pitchFamily="34" charset="-122"/>
                 <a:cs typeface="Cambria" pitchFamily="34" charset="-120"/>
               </a:rPr>
-              <a:t>Canonical Huffman: why limit/base/perm works</a:t>
-            </a:r>
-            <a:endParaRPr lang="en-US" sz="2900" dirty="0"/>
+              <a:t>Thank you</a:t>
+            </a:r>
+            <a:endParaRPr lang="en-US" sz="5400" dirty="0"/>
           </a:p>
         </p:txBody>
       </p:sp>
@@ -16192,34 +16288,37 @@
         </p:nvSpPr>
         <p:spPr>
           <a:xfrm>
-            <a:off x="8897112" y="457200"/>
-            <a:ext cx="2743200" cy="237744"/>
-          </a:xfrm>
-          <a:prstGeom prst="rect">
-            <a:avLst/>
-          </a:prstGeom>
-          <a:noFill/>
-          <a:ln/>
-        </p:spPr>
-        <p:txBody>
-          <a:bodyPr wrap="square" lIns="0" tIns="0" rIns="0" bIns="0" rtlCol="0" anchor="ctr"/>
-          <a:lstStyle/>
-          <a:p>
-            <a:pPr algn="r" indent="0" marL="0">
-              <a:buNone/>
-            </a:pPr>
-            <a:r>
-              <a:rPr lang="en-US" sz="1000" b="1" dirty="0">
-                <a:solidFill>
-                  <a:srgbClr val="B3543F"/>
-                </a:solidFill>
-                <a:latin typeface="Calibri" pitchFamily="34" charset="0"/>
-                <a:ea typeface="Calibri" pitchFamily="34" charset="-122"/>
-                <a:cs typeface="Calibri" pitchFamily="34" charset="-120"/>
-              </a:rPr>
-              <a:t>BACKUP — not presented</a:t>
-            </a:r>
-            <a:endParaRPr lang="en-US" sz="1000" dirty="0"/>
+            <a:off x="548640" y="3017520"/>
+            <a:ext cx="7680960" cy="685800"/>
+          </a:xfrm>
+          <a:prstGeom prst="rect">
+            <a:avLst/>
+          </a:prstGeom>
+          <a:noFill/>
+          <a:ln/>
+        </p:spPr>
+        <p:txBody>
+          <a:bodyPr wrap="square" lIns="0" tIns="0" rIns="0" bIns="0" rtlCol="0" anchor="ctr"/>
+          <a:lstStyle/>
+          <a:p>
+            <a:pPr indent="0" marL="0">
+              <a:lnSpc>
+                <a:spcPts val="2100"/>
+              </a:lnSpc>
+              <a:buNone/>
+            </a:pPr>
+            <a:r>
+              <a:rPr lang="en-US" sz="1500" dirty="0">
+                <a:solidFill>
+                  <a:srgbClr val="AFBECD"/>
+                </a:solidFill>
+                <a:latin typeface="Calibri" pitchFamily="34" charset="0"/>
+                <a:ea typeface="Calibri" pitchFamily="34" charset="-122"/>
+                <a:cs typeface="Calibri" pitchFamily="34" charset="-120"/>
+              </a:rPr>
+              <a:t>Questions welcome — the code runs, and we can open any file, flame graph or testbench you would like to see.</a:t>
+            </a:r>
+            <a:endParaRPr lang="en-US" sz="1500" dirty="0"/>
           </a:p>
         </p:txBody>
       </p:sp>
@@ -16231,62 +16330,98 @@
         </p:nvSpPr>
         <p:spPr>
           <a:xfrm>
-            <a:off x="548640" y="1371600"/>
-            <a:ext cx="11091672" cy="502920"/>
-          </a:xfrm>
-          <a:prstGeom prst="rect">
-            <a:avLst/>
-          </a:prstGeom>
-          <a:noFill/>
-          <a:ln/>
-        </p:spPr>
-        <p:txBody>
-          <a:bodyPr wrap="square" lIns="0" tIns="0" rIns="0" bIns="0" rtlCol="0" anchor="ctr"/>
-          <a:lstStyle/>
-          <a:p>
-            <a:pPr indent="0" marL="0">
-              <a:lnSpc>
-                <a:spcPts val="1800"/>
-              </a:lnSpc>
-              <a:buNone/>
-            </a:pPr>
-            <a:r>
-              <a:rPr lang="en-US" sz="1300" dirty="0">
-                <a:solidFill>
-                  <a:srgbClr val="1B2430"/>
-                </a:solidFill>
-                <a:latin typeface="Calibri" pitchFamily="34" charset="0"/>
-                <a:ea typeface="Calibri" pitchFamily="34" charset="-122"/>
-                <a:cs typeface="Calibri" pitchFamily="34" charset="-120"/>
-              </a:rPr>
-              <a:t>populate_huffman_symbols() already assigns canonical MSB-first codes — codes handed out in increasing order, shifted left whenever the length grows. That structure is what the linear scan ignores.</a:t>
-            </a:r>
-            <a:endParaRPr lang="en-US" sz="1300" dirty="0"/>
-          </a:p>
-        </p:txBody>
-      </p:sp>
-      <p:sp>
-        <p:nvSpPr>
-          <p:cNvPr id="6" name="Shape 4"/>
+            <a:off x="548640" y="3886200"/>
+            <a:ext cx="7315200" cy="320040"/>
+          </a:xfrm>
+          <a:prstGeom prst="rect">
+            <a:avLst/>
+          </a:prstGeom>
+          <a:noFill/>
+          <a:ln/>
+        </p:spPr>
+        <p:txBody>
+          <a:bodyPr wrap="square" lIns="0" tIns="0" rIns="0" bIns="0" rtlCol="0" anchor="ctr"/>
+          <a:lstStyle/>
+          <a:p>
+            <a:pPr indent="0" marL="0">
+              <a:buNone/>
+            </a:pPr>
+            <a:r>
+              <a:rPr lang="en-US" sz="1600" b="1" dirty="0">
+                <a:solidFill>
+                  <a:srgbClr val="FFFFFF"/>
+                </a:solidFill>
+                <a:latin typeface="Calibri" pitchFamily="34" charset="0"/>
+                <a:ea typeface="Calibri" pitchFamily="34" charset="-122"/>
+                <a:cs typeface="Calibri" pitchFamily="34" charset="-120"/>
+              </a:rPr>
+              <a:t>Taha Taha   ·   Lana Bakre</a:t>
+            </a:r>
+            <a:endParaRPr lang="en-US" sz="1600" dirty="0"/>
+          </a:p>
+        </p:txBody>
+      </p:sp>
+      <p:sp>
+        <p:nvSpPr>
+          <p:cNvPr id="6" name="Text 4"/>
+          <p:cNvSpPr txBox="1"/>
+          <p:nvPr/>
+        </p:nvSpPr>
+        <p:spPr>
+          <a:xfrm>
+            <a:off x="548640" y="4224528"/>
+            <a:ext cx="7315200" cy="274320"/>
+          </a:xfrm>
+          <a:prstGeom prst="rect">
+            <a:avLst/>
+          </a:prstGeom>
+          <a:noFill/>
+          <a:ln/>
+        </p:spPr>
+        <p:txBody>
+          <a:bodyPr wrap="square" lIns="0" tIns="0" rIns="0" bIns="0" rtlCol="0" anchor="ctr"/>
+          <a:lstStyle/>
+          <a:p>
+            <a:pPr indent="0" marL="0">
+              <a:buNone/>
+            </a:pPr>
+            <a:r>
+              <a:rPr lang="en-US" sz="1200" dirty="0">
+                <a:solidFill>
+                  <a:srgbClr val="8A97A6"/>
+                </a:solidFill>
+                <a:latin typeface="Calibri" pitchFamily="34" charset="0"/>
+                <a:ea typeface="Calibri" pitchFamily="34" charset="-122"/>
+                <a:cs typeface="Calibri" pitchFamily="34" charset="-120"/>
+              </a:rPr>
+              <a:t>HW/SW Co-design  ·  00460882  ·  Technion</a:t>
+            </a:r>
+            <a:endParaRPr lang="en-US" sz="1200" dirty="0"/>
+          </a:p>
+        </p:txBody>
+      </p:sp>
+      <p:sp>
+        <p:nvSpPr>
+          <p:cNvPr id="7" name="Shape 5"/>
           <p:cNvSpPr/>
           <p:nvPr/>
         </p:nvSpPr>
         <p:spPr>
           <a:xfrm>
-            <a:off x="548640" y="1965960"/>
-            <a:ext cx="6035040" cy="1828800"/>
+            <a:off x="8686800" y="1783080"/>
+            <a:ext cx="2971800" cy="2697480"/>
           </a:xfrm>
           <a:prstGeom prst="roundRect">
             <a:avLst>
-              <a:gd name="adj" fmla="val 2500"/>
+              <a:gd name="adj" fmla="val 2034"/>
             </a:avLst>
           </a:prstGeom>
           <a:solidFill>
-            <a:srgbClr val="1B2430"/>
+            <a:srgbClr val="2B3A4A"/>
           </a:solidFill>
-          <a:ln w="12700">
+          <a:ln w="9525">
             <a:solidFill>
-              <a:srgbClr val="1B2430"/>
+              <a:srgbClr val="3C4E61"/>
             </a:solidFill>
             <a:prstDash val="solid"/>
           </a:ln>
@@ -16294,148 +16429,299 @@
       </p:sp>
       <p:sp>
         <p:nvSpPr>
-          <p:cNvPr id="7" name="Text 5"/>
-          <p:cNvSpPr txBox="1"/>
-          <p:nvPr/>
-        </p:nvSpPr>
-        <p:spPr>
-          <a:xfrm>
-            <a:off x="777240" y="2103120"/>
-            <a:ext cx="5577840" cy="1554480"/>
-          </a:xfrm>
-          <a:prstGeom prst="rect">
-            <a:avLst/>
-          </a:prstGeom>
-          <a:noFill/>
-          <a:ln/>
-        </p:spPr>
-        <p:txBody>
-          <a:bodyPr wrap="square" lIns="0" tIns="0" rIns="0" bIns="0" rtlCol="0" anchor="ctr"/>
-          <a:lstStyle/>
-          <a:p>
-            <a:pPr indent="0" marL="0">
-              <a:lnSpc>
-                <a:spcPts val="1800"/>
-              </a:lnSpc>
+          <p:cNvPr id="8" name="Text 6"/>
+          <p:cNvSpPr txBox="1"/>
+          <p:nvPr/>
+        </p:nvSpPr>
+        <p:spPr>
+          <a:xfrm>
+            <a:off x="8915400" y="1965960"/>
+            <a:ext cx="2514600" cy="228600"/>
+          </a:xfrm>
+          <a:prstGeom prst="rect">
+            <a:avLst/>
+          </a:prstGeom>
+          <a:noFill/>
+          <a:ln/>
+        </p:spPr>
+        <p:txBody>
+          <a:bodyPr wrap="square" lIns="0" tIns="0" rIns="0" bIns="0" rtlCol="0" anchor="ctr"/>
+          <a:lstStyle/>
+          <a:p>
+            <a:pPr indent="0" marL="0">
+              <a:buNone/>
+            </a:pPr>
+            <a:r>
+              <a:rPr lang="en-US" sz="1000" b="1" spc="150" kern="0" dirty="0">
+                <a:solidFill>
+                  <a:srgbClr val="8A97A6"/>
+                </a:solidFill>
+                <a:latin typeface="Calibri" pitchFamily="34" charset="0"/>
+                <a:ea typeface="Calibri" pitchFamily="34" charset="-122"/>
+                <a:cs typeface="Calibri" pitchFamily="34" charset="-120"/>
+              </a:rPr>
+              <a:t>RESULTS</a:t>
+            </a:r>
+            <a:endParaRPr lang="en-US" sz="1000" dirty="0"/>
+          </a:p>
+        </p:txBody>
+      </p:sp>
+      <p:sp>
+        <p:nvSpPr>
+          <p:cNvPr id="9" name="Text 7"/>
+          <p:cNvSpPr txBox="1"/>
+          <p:nvPr/>
+        </p:nvSpPr>
+        <p:spPr>
+          <a:xfrm>
+            <a:off x="8915400" y="2331720"/>
+            <a:ext cx="2514600" cy="256032"/>
+          </a:xfrm>
+          <a:prstGeom prst="rect">
+            <a:avLst/>
+          </a:prstGeom>
+          <a:noFill/>
+          <a:ln/>
+        </p:spPr>
+        <p:txBody>
+          <a:bodyPr wrap="square" lIns="0" tIns="0" rIns="0" bIns="0" rtlCol="0" anchor="ctr"/>
+          <a:lstStyle/>
+          <a:p>
+            <a:pPr indent="0" marL="0">
               <a:buNone/>
             </a:pPr>
             <a:r>
               <a:rPr lang="en-US" sz="1200" dirty="0">
                 <a:solidFill>
-                  <a:srgbClr val="8FE3D2"/>
-                </a:solidFill>
-                <a:latin typeface="Courier New" pitchFamily="34" charset="0"/>
-                <a:ea typeface="Courier New" pitchFamily="34" charset="-122"/>
-                <a:cs typeface="Courier New" pitchFamily="34" charset="-120"/>
-              </a:rPr>
-              <a:t>zvec = next min_len bits</a:t>
+                  <a:srgbClr val="AFBECD"/>
+                </a:solidFill>
+                <a:latin typeface="Calibri" pitchFamily="34" charset="0"/>
+                <a:ea typeface="Calibri" pitchFamily="34" charset="-122"/>
+                <a:cs typeface="Calibri" pitchFamily="34" charset="-120"/>
+              </a:rPr>
+              <a:t>pyflate</a:t>
             </a:r>
             <a:endParaRPr lang="en-US" sz="1200" dirty="0"/>
           </a:p>
-          <a:p>
-            <a:pPr indent="0" marL="0">
-              <a:lnSpc>
-                <a:spcPts val="1800"/>
-              </a:lnSpc>
+        </p:txBody>
+      </p:sp>
+      <p:sp>
+        <p:nvSpPr>
+          <p:cNvPr id="10" name="Text 8"/>
+          <p:cNvSpPr txBox="1"/>
+          <p:nvPr/>
+        </p:nvSpPr>
+        <p:spPr>
+          <a:xfrm>
+            <a:off x="8915400" y="2569464"/>
+            <a:ext cx="2514600" cy="502920"/>
+          </a:xfrm>
+          <a:prstGeom prst="rect">
+            <a:avLst/>
+          </a:prstGeom>
+          <a:noFill/>
+          <a:ln/>
+        </p:spPr>
+        <p:txBody>
+          <a:bodyPr wrap="square" lIns="0" tIns="0" rIns="0" bIns="0" rtlCol="0" anchor="ctr"/>
+          <a:lstStyle/>
+          <a:p>
+            <a:pPr indent="0" marL="0">
+              <a:buNone/>
+            </a:pPr>
+            <a:r>
+              <a:rPr lang="en-US" sz="3000" b="1" dirty="0">
+                <a:solidFill>
+                  <a:srgbClr val="2D9B8A"/>
+                </a:solidFill>
+                <a:latin typeface="Cambria" pitchFamily="34" charset="0"/>
+                <a:ea typeface="Cambria" pitchFamily="34" charset="-122"/>
+                <a:cs typeface="Cambria" pitchFamily="34" charset="-120"/>
+              </a:rPr>
+              <a:t>2.51×</a:t>
+            </a:r>
+            <a:endParaRPr lang="en-US" sz="3000" dirty="0"/>
+          </a:p>
+        </p:txBody>
+      </p:sp>
+      <p:sp>
+        <p:nvSpPr>
+          <p:cNvPr id="11" name="Text 9"/>
+          <p:cNvSpPr txBox="1"/>
+          <p:nvPr/>
+        </p:nvSpPr>
+        <p:spPr>
+          <a:xfrm>
+            <a:off x="8915400" y="3081528"/>
+            <a:ext cx="2514600" cy="228600"/>
+          </a:xfrm>
+          <a:prstGeom prst="rect">
+            <a:avLst/>
+          </a:prstGeom>
+          <a:noFill/>
+          <a:ln/>
+        </p:spPr>
+        <p:txBody>
+          <a:bodyPr wrap="square" lIns="0" tIns="0" rIns="0" bIns="0" rtlCol="0" anchor="ctr"/>
+          <a:lstStyle/>
+          <a:p>
+            <a:pPr indent="0" marL="0">
+              <a:buNone/>
+            </a:pPr>
+            <a:r>
+              <a:rPr lang="en-US" sz="1050" dirty="0">
+                <a:solidFill>
+                  <a:srgbClr val="8A97A6"/>
+                </a:solidFill>
+                <a:latin typeface="Calibri" pitchFamily="34" charset="0"/>
+                <a:ea typeface="Calibri" pitchFamily="34" charset="-122"/>
+                <a:cs typeface="Calibri" pitchFamily="34" charset="-120"/>
+              </a:rPr>
+              <a:t>60.1% less time</a:t>
+            </a:r>
+            <a:endParaRPr lang="en-US" sz="1050" dirty="0"/>
+          </a:p>
+        </p:txBody>
+      </p:sp>
+      <p:sp>
+        <p:nvSpPr>
+          <p:cNvPr id="12" name="Text 10"/>
+          <p:cNvSpPr txBox="1"/>
+          <p:nvPr/>
+        </p:nvSpPr>
+        <p:spPr>
+          <a:xfrm>
+            <a:off x="8915400" y="3383280"/>
+            <a:ext cx="2514600" cy="256032"/>
+          </a:xfrm>
+          <a:prstGeom prst="rect">
+            <a:avLst/>
+          </a:prstGeom>
+          <a:noFill/>
+          <a:ln/>
+        </p:spPr>
+        <p:txBody>
+          <a:bodyPr wrap="square" lIns="0" tIns="0" rIns="0" bIns="0" rtlCol="0" anchor="ctr"/>
+          <a:lstStyle/>
+          <a:p>
+            <a:pPr indent="0" marL="0">
               <a:buNone/>
             </a:pPr>
             <a:r>
               <a:rPr lang="en-US" sz="1200" dirty="0">
                 <a:solidFill>
-                  <a:srgbClr val="8FE3D2"/>
-                </a:solidFill>
-                <a:latin typeface="Courier New" pitchFamily="34" charset="0"/>
-                <a:ea typeface="Courier New" pitchFamily="34" charset="-122"/>
-                <a:cs typeface="Courier New" pitchFamily="34" charset="-120"/>
-              </a:rPr>
-              <a:t>while zvec &gt; limit[zn]:</a:t>
+                  <a:srgbClr val="AFBECD"/>
+                </a:solidFill>
+                <a:latin typeface="Calibri" pitchFamily="34" charset="0"/>
+                <a:ea typeface="Calibri" pitchFamily="34" charset="-122"/>
+                <a:cs typeface="Calibri" pitchFamily="34" charset="-120"/>
+              </a:rPr>
+              <a:t>raytrace</a:t>
             </a:r>
             <a:endParaRPr lang="en-US" sz="1200" dirty="0"/>
           </a:p>
-          <a:p>
-            <a:pPr indent="0" marL="0">
-              <a:lnSpc>
-                <a:spcPts val="1800"/>
-              </a:lnSpc>
-              <a:buNone/>
-            </a:pPr>
-            <a:r>
-              <a:rPr lang="en-US" sz="1200" dirty="0">
-                <a:solidFill>
-                  <a:srgbClr val="8FE3D2"/>
-                </a:solidFill>
-                <a:latin typeface="Courier New" pitchFamily="34" charset="0"/>
-                <a:ea typeface="Courier New" pitchFamily="34" charset="-122"/>
-                <a:cs typeface="Courier New" pitchFamily="34" charset="-120"/>
-              </a:rPr>
-              <a:t>    zn += 1</a:t>
-            </a:r>
-            <a:endParaRPr lang="en-US" sz="1200" dirty="0"/>
-          </a:p>
-          <a:p>
-            <a:pPr indent="0" marL="0">
-              <a:lnSpc>
-                <a:spcPts val="1800"/>
-              </a:lnSpc>
-              <a:buNone/>
-            </a:pPr>
-            <a:r>
-              <a:rPr lang="en-US" sz="1200" dirty="0">
-                <a:solidFill>
-                  <a:srgbClr val="8FE3D2"/>
-                </a:solidFill>
-                <a:latin typeface="Courier New" pitchFamily="34" charset="0"/>
-                <a:ea typeface="Courier New" pitchFamily="34" charset="-122"/>
-                <a:cs typeface="Courier New" pitchFamily="34" charset="-120"/>
-              </a:rPr>
-              <a:t>    zvec = (zvec &lt;&lt; 1) | next_bit</a:t>
-            </a:r>
-            <a:endParaRPr lang="en-US" sz="1200" dirty="0"/>
-          </a:p>
-          <a:p>
-            <a:pPr indent="0" marL="0">
-              <a:lnSpc>
-                <a:spcPts val="1800"/>
-              </a:lnSpc>
-              <a:buNone/>
-            </a:pPr>
-            <a:r>
-              <a:rPr lang="en-US" sz="1200" dirty="0">
-                <a:solidFill>
-                  <a:srgbClr val="8FE3D2"/>
-                </a:solidFill>
-                <a:latin typeface="Courier New" pitchFamily="34" charset="0"/>
-                <a:ea typeface="Courier New" pitchFamily="34" charset="-122"/>
-                <a:cs typeface="Courier New" pitchFamily="34" charset="-120"/>
-              </a:rPr>
-              <a:t>sym = perm[zvec - base[zn]]</a:t>
-            </a:r>
-            <a:endParaRPr lang="en-US" sz="1200" dirty="0"/>
-          </a:p>
-        </p:txBody>
-      </p:sp>
-      <p:sp>
-        <p:nvSpPr>
-          <p:cNvPr id="8" name="Shape 6"/>
+        </p:txBody>
+      </p:sp>
+      <p:sp>
+        <p:nvSpPr>
+          <p:cNvPr id="13" name="Text 11"/>
+          <p:cNvSpPr txBox="1"/>
+          <p:nvPr/>
+        </p:nvSpPr>
+        <p:spPr>
+          <a:xfrm>
+            <a:off x="8915400" y="3621024"/>
+            <a:ext cx="2514600" cy="502920"/>
+          </a:xfrm>
+          <a:prstGeom prst="rect">
+            <a:avLst/>
+          </a:prstGeom>
+          <a:noFill/>
+          <a:ln/>
+        </p:spPr>
+        <p:txBody>
+          <a:bodyPr wrap="square" lIns="0" tIns="0" rIns="0" bIns="0" rtlCol="0" anchor="ctr"/>
+          <a:lstStyle/>
+          <a:p>
+            <a:pPr indent="0" marL="0">
+              <a:buNone/>
+            </a:pPr>
+            <a:r>
+              <a:rPr lang="en-US" sz="3000" b="1" dirty="0">
+                <a:solidFill>
+                  <a:srgbClr val="2D9B8A"/>
+                </a:solidFill>
+                <a:latin typeface="Cambria" pitchFamily="34" charset="0"/>
+                <a:ea typeface="Cambria" pitchFamily="34" charset="-122"/>
+                <a:cs typeface="Cambria" pitchFamily="34" charset="-120"/>
+              </a:rPr>
+              <a:t>2.87×</a:t>
+            </a:r>
+            <a:endParaRPr lang="en-US" sz="3000" dirty="0"/>
+          </a:p>
+        </p:txBody>
+      </p:sp>
+      <p:sp>
+        <p:nvSpPr>
+          <p:cNvPr id="14" name="Text 12"/>
+          <p:cNvSpPr txBox="1"/>
+          <p:nvPr/>
+        </p:nvSpPr>
+        <p:spPr>
+          <a:xfrm>
+            <a:off x="8915400" y="4133088"/>
+            <a:ext cx="2514600" cy="228600"/>
+          </a:xfrm>
+          <a:prstGeom prst="rect">
+            <a:avLst/>
+          </a:prstGeom>
+          <a:noFill/>
+          <a:ln/>
+        </p:spPr>
+        <p:txBody>
+          <a:bodyPr wrap="square" lIns="0" tIns="0" rIns="0" bIns="0" rtlCol="0" anchor="ctr"/>
+          <a:lstStyle/>
+          <a:p>
+            <a:pPr indent="0" marL="0">
+              <a:buNone/>
+            </a:pPr>
+            <a:r>
+              <a:rPr lang="en-US" sz="1050" dirty="0">
+                <a:solidFill>
+                  <a:srgbClr val="8A97A6"/>
+                </a:solidFill>
+                <a:latin typeface="Calibri" pitchFamily="34" charset="0"/>
+                <a:ea typeface="Calibri" pitchFamily="34" charset="-122"/>
+                <a:cs typeface="Calibri" pitchFamily="34" charset="-120"/>
+              </a:rPr>
+              <a:t>65.1% less time</a:t>
+            </a:r>
+            <a:endParaRPr lang="en-US" sz="1050" dirty="0"/>
+          </a:p>
+        </p:txBody>
+      </p:sp>
+      <p:sp>
+        <p:nvSpPr>
+          <p:cNvPr id="15" name="Shape 13"/>
           <p:cNvSpPr/>
           <p:nvPr/>
         </p:nvSpPr>
         <p:spPr>
           <a:xfrm>
-            <a:off x="6766560" y="1965960"/>
-            <a:ext cx="4873752" cy="1828800"/>
+            <a:off x="548640" y="4846320"/>
+            <a:ext cx="11091672" cy="1051560"/>
           </a:xfrm>
           <a:prstGeom prst="roundRect">
             <a:avLst>
-              <a:gd name="adj" fmla="val 3000"/>
+              <a:gd name="adj" fmla="val 5217"/>
             </a:avLst>
           </a:prstGeom>
           <a:solidFill>
-            <a:srgbClr val="F3F6F8"/>
+            <a:srgbClr val="2B3A4A"/>
           </a:solidFill>
-          <a:ln w="9525">
+          <a:ln w="19050">
             <a:solidFill>
-              <a:srgbClr val="DBE2E8"/>
+              <a:srgbClr val="2D9B8A"/>
             </a:solidFill>
             <a:prstDash val="solid"/>
           </a:ln>
@@ -16443,195 +16729,53 @@
       </p:sp>
       <p:sp>
         <p:nvSpPr>
-          <p:cNvPr id="9" name="Text 7"/>
-          <p:cNvSpPr txBox="1"/>
-          <p:nvPr/>
-        </p:nvSpPr>
-        <p:spPr>
-          <a:xfrm>
-            <a:off x="6995160" y="2103120"/>
-            <a:ext cx="4389120" cy="274320"/>
-          </a:xfrm>
-          <a:prstGeom prst="rect">
-            <a:avLst/>
-          </a:prstGeom>
-          <a:noFill/>
-          <a:ln/>
-        </p:spPr>
-        <p:txBody>
-          <a:bodyPr wrap="square" lIns="0" tIns="0" rIns="0" bIns="0" rtlCol="0" anchor="ctr"/>
-          <a:lstStyle/>
-          <a:p>
-            <a:pPr indent="0" marL="0">
-              <a:buNone/>
-            </a:pPr>
-            <a:r>
-              <a:rPr lang="en-US" sz="1200" b="1" dirty="0">
-                <a:solidFill>
-                  <a:srgbClr val="1B2430"/>
-                </a:solidFill>
-                <a:latin typeface="Calibri" pitchFamily="34" charset="0"/>
-                <a:ea typeface="Calibri" pitchFamily="34" charset="-122"/>
-                <a:cs typeface="Calibri" pitchFamily="34" charset="-120"/>
-              </a:rPr>
-              <a:t>Worked example (6 symbols)</a:t>
-            </a:r>
-            <a:endParaRPr lang="en-US" sz="1200" dirty="0"/>
-          </a:p>
-        </p:txBody>
-      </p:sp>
-      <p:sp>
-        <p:nvSpPr>
-          <p:cNvPr id="10" name="Text 8"/>
-          <p:cNvSpPr txBox="1"/>
-          <p:nvPr/>
-        </p:nvSpPr>
-        <p:spPr>
-          <a:xfrm>
-            <a:off x="6995160" y="2395728"/>
-            <a:ext cx="4389120" cy="1280160"/>
-          </a:xfrm>
-          <a:prstGeom prst="rect">
-            <a:avLst/>
-          </a:prstGeom>
-          <a:noFill/>
-          <a:ln/>
-        </p:spPr>
-        <p:txBody>
-          <a:bodyPr wrap="square" lIns="0" tIns="0" rIns="0" bIns="0" rtlCol="0" anchor="ctr"/>
-          <a:lstStyle/>
-          <a:p>
-            <a:pPr indent="0" marL="0">
-              <a:lnSpc>
-                <a:spcPts val="1400"/>
-              </a:lnSpc>
-              <a:buNone/>
-            </a:pPr>
-            <a:r>
-              <a:rPr lang="en-US" sz="1050" dirty="0">
-                <a:solidFill>
-                  <a:srgbClr val="6B7785"/>
-                </a:solidFill>
-                <a:latin typeface="Courier New" pitchFamily="34" charset="0"/>
-                <a:ea typeface="Courier New" pitchFamily="34" charset="-122"/>
-                <a:cs typeface="Courier New" pitchFamily="34" charset="-120"/>
-              </a:rPr>
-              <a:t>lengths [2,2,2,3,4,4]</a:t>
-            </a:r>
-            <a:endParaRPr lang="en-US" sz="1050" dirty="0"/>
-          </a:p>
-          <a:p>
-            <a:pPr indent="0" marL="0">
-              <a:lnSpc>
-                <a:spcPts val="1400"/>
-              </a:lnSpc>
-              <a:buNone/>
-            </a:pPr>
-            <a:r>
-              <a:rPr lang="en-US" sz="1050" dirty="0">
-                <a:solidFill>
-                  <a:srgbClr val="6B7785"/>
-                </a:solidFill>
-                <a:latin typeface="Courier New" pitchFamily="34" charset="0"/>
-                <a:ea typeface="Courier New" pitchFamily="34" charset="-122"/>
-                <a:cs typeface="Courier New" pitchFamily="34" charset="-120"/>
-              </a:rPr>
-              <a:t>sym 0→00  1→01  2→10</a:t>
-            </a:r>
-            <a:endParaRPr lang="en-US" sz="1050" dirty="0"/>
-          </a:p>
-          <a:p>
-            <a:pPr indent="0" marL="0">
-              <a:lnSpc>
-                <a:spcPts val="1400"/>
-              </a:lnSpc>
-              <a:buNone/>
-            </a:pPr>
-            <a:r>
-              <a:rPr lang="en-US" sz="1050" dirty="0">
-                <a:solidFill>
-                  <a:srgbClr val="6B7785"/>
-                </a:solidFill>
-                <a:latin typeface="Courier New" pitchFamily="34" charset="0"/>
-                <a:ea typeface="Courier New" pitchFamily="34" charset="-122"/>
-                <a:cs typeface="Courier New" pitchFamily="34" charset="-120"/>
-              </a:rPr>
-              <a:t>sym 3→110  4→1110  5→1111</a:t>
-            </a:r>
-            <a:endParaRPr lang="en-US" sz="1050" dirty="0"/>
-          </a:p>
-          <a:p>
-            <a:pPr indent="0" marL="0">
-              <a:lnSpc>
-                <a:spcPts val="1400"/>
-              </a:lnSpc>
-              <a:buNone/>
-            </a:pPr>
-            <a:r>
-              <a:rPr lang="en-US" sz="1050" dirty="0">
-                <a:solidFill>
-                  <a:srgbClr val="6B7785"/>
-                </a:solidFill>
-                <a:latin typeface="Courier New" pitchFamily="34" charset="0"/>
-                <a:ea typeface="Courier New" pitchFamily="34" charset="-122"/>
-                <a:cs typeface="Courier New" pitchFamily="34" charset="-120"/>
-              </a:rPr>
-              <a:t>limit[2]=2 base[2]=0</a:t>
-            </a:r>
-            <a:endParaRPr lang="en-US" sz="1050" dirty="0"/>
-          </a:p>
-          <a:p>
-            <a:pPr indent="0" marL="0">
-              <a:lnSpc>
-                <a:spcPts val="1400"/>
-              </a:lnSpc>
-              <a:buNone/>
-            </a:pPr>
-            <a:r>
-              <a:rPr lang="en-US" sz="1050" dirty="0">
-                <a:solidFill>
-                  <a:srgbClr val="6B7785"/>
-                </a:solidFill>
-                <a:latin typeface="Courier New" pitchFamily="34" charset="0"/>
-                <a:ea typeface="Courier New" pitchFamily="34" charset="-122"/>
-                <a:cs typeface="Courier New" pitchFamily="34" charset="-120"/>
-              </a:rPr>
-              <a:t>limit[3]=6 base[3]=3</a:t>
-            </a:r>
-            <a:endParaRPr lang="en-US" sz="1050" dirty="0"/>
-          </a:p>
-          <a:p>
-            <a:pPr indent="0" marL="0">
-              <a:lnSpc>
-                <a:spcPts val="1400"/>
-              </a:lnSpc>
-              <a:buNone/>
-            </a:pPr>
-            <a:r>
-              <a:rPr lang="en-US" sz="1050" dirty="0">
-                <a:solidFill>
-                  <a:srgbClr val="6B7785"/>
-                </a:solidFill>
-                <a:latin typeface="Courier New" pitchFamily="34" charset="0"/>
-                <a:ea typeface="Courier New" pitchFamily="34" charset="-122"/>
-                <a:cs typeface="Courier New" pitchFamily="34" charset="-120"/>
-              </a:rPr>
-              <a:t>limit[4]=15 base[4]=10</a:t>
-            </a:r>
-            <a:endParaRPr lang="en-US" sz="1050" dirty="0"/>
-          </a:p>
-        </p:txBody>
-      </p:sp>
-      <p:sp>
-        <p:nvSpPr>
-          <p:cNvPr id="11" name="Text 9"/>
-          <p:cNvSpPr txBox="1"/>
-          <p:nvPr/>
-        </p:nvSpPr>
-        <p:spPr>
-          <a:xfrm>
-            <a:off x="548640" y="3977640"/>
-            <a:ext cx="11091672" cy="548640"/>
+          <p:cNvPr id="16" name="Text 14"/>
+          <p:cNvSpPr txBox="1"/>
+          <p:nvPr/>
+        </p:nvSpPr>
+        <p:spPr>
+          <a:xfrm>
+            <a:off x="868680" y="4983480"/>
+            <a:ext cx="10424160" cy="274320"/>
+          </a:xfrm>
+          <a:prstGeom prst="rect">
+            <a:avLst/>
+          </a:prstGeom>
+          <a:noFill/>
+          <a:ln/>
+        </p:spPr>
+        <p:txBody>
+          <a:bodyPr wrap="square" lIns="0" tIns="0" rIns="0" bIns="0" rtlCol="0" anchor="ctr"/>
+          <a:lstStyle/>
+          <a:p>
+            <a:pPr indent="0" marL="0">
+              <a:buNone/>
+            </a:pPr>
+            <a:r>
+              <a:rPr lang="en-US" sz="1300" b="1" dirty="0">
+                <a:solidFill>
+                  <a:srgbClr val="2D9B8A"/>
+                </a:solidFill>
+                <a:latin typeface="Calibri" pitchFamily="34" charset="0"/>
+                <a:ea typeface="Calibri" pitchFamily="34" charset="-122"/>
+                <a:cs typeface="Calibri" pitchFamily="34" charset="-120"/>
+              </a:rPr>
+              <a:t>15 / 15 checks green inside the course QEMU guest</a:t>
+            </a:r>
+            <a:endParaRPr lang="en-US" sz="1300" dirty="0"/>
+          </a:p>
+        </p:txBody>
+      </p:sp>
+      <p:sp>
+        <p:nvSpPr>
+          <p:cNvPr id="17" name="Text 15"/>
+          <p:cNvSpPr txBox="1"/>
+          <p:nvPr/>
+        </p:nvSpPr>
+        <p:spPr>
+          <a:xfrm>
+            <a:off x="868680" y="5285232"/>
+            <a:ext cx="10424160" cy="457200"/>
           </a:xfrm>
           <a:prstGeom prst="rect">
             <a:avLst/>
@@ -16652,13 +16796,13 @@
             <a:r>
               <a:rPr lang="en-US" sz="1250" dirty="0">
                 <a:solidFill>
-                  <a:srgbClr val="1B2430"/>
-                </a:solidFill>
-                <a:latin typeface="Calibri" pitchFamily="34" charset="0"/>
-                <a:ea typeface="Calibri" pitchFamily="34" charset="-122"/>
-                <a:cs typeface="Calibri" pitchFamily="34" charset="-120"/>
-              </a:rPr>
-              <a:t>These are the exact vectors in tb_huffman_decoder.v. The testbench checks both the decoded symbol and the number of bits retired — a decoder that returns the right symbol while consuming the wrong number of bits destroys the rest of the stream.</a:t>
+                  <a:srgbClr val="E8EDF2"/>
+                </a:solidFill>
+                <a:latin typeface="Calibri" pitchFamily="34" charset="0"/>
+                <a:ea typeface="Calibri" pitchFamily="34" charset="-122"/>
+                <a:cs typeface="Calibri" pitchFamily="34" charset="-120"/>
+              </a:rPr>
+              <a:t>pyflate byte-identical over all 399,360 bytes  ·  raytrace bit-identical at seven resolutions  ·  the bzip2 accelerator decompresses a whole block end to end in simulation</a:t>
             </a:r>
             <a:endParaRPr lang="en-US" sz="1250" dirty="0"/>
           </a:p>
@@ -16666,7 +16810,46 @@
       </p:sp>
       <p:sp>
         <p:nvSpPr>
-          <p:cNvPr id="12" name="Text 10"/>
+          <p:cNvPr id="18" name="Text 16"/>
+          <p:cNvSpPr txBox="1"/>
+          <p:nvPr/>
+        </p:nvSpPr>
+        <p:spPr>
+          <a:xfrm>
+            <a:off x="548640" y="5943600"/>
+            <a:ext cx="5486400" cy="256032"/>
+          </a:xfrm>
+          <a:prstGeom prst="rect">
+            <a:avLst/>
+          </a:prstGeom>
+          <a:noFill/>
+          <a:ln/>
+        </p:spPr>
+        <p:txBody>
+          <a:bodyPr wrap="square" lIns="0" tIns="0" rIns="0" bIns="0" rtlCol="0" anchor="ctr"/>
+          <a:lstStyle/>
+          <a:p>
+            <a:pPr indent="0" marL="0">
+              <a:buNone/>
+            </a:pPr>
+            <a:r>
+              <a:rPr lang="en-US" sz="1100" i="1" dirty="0">
+                <a:solidFill>
+                  <a:srgbClr val="6B7785"/>
+                </a:solidFill>
+                <a:latin typeface="Calibri" pitchFamily="34" charset="0"/>
+                <a:ea typeface="Calibri" pitchFamily="34" charset="-122"/>
+                <a:cs typeface="Calibri" pitchFamily="34" charset="-120"/>
+              </a:rPr>
+              <a:t>Backup slides follow — B1 to B5</a:t>
+            </a:r>
+            <a:endParaRPr lang="en-US" sz="1100" dirty="0"/>
+          </a:p>
+        </p:txBody>
+      </p:sp>
+      <p:sp>
+        <p:nvSpPr>
+          <p:cNvPr id="19" name="Text 17"/>
           <p:cNvSpPr txBox="1"/>
           <p:nvPr/>
         </p:nvSpPr>
@@ -16691,13 +16874,13 @@
             <a:r>
               <a:rPr lang="en-US" sz="1000" dirty="0">
                 <a:solidFill>
-                  <a:srgbClr val="6B7785"/>
-                </a:solidFill>
-                <a:latin typeface="Calibri" pitchFamily="34" charset="0"/>
-                <a:ea typeface="Calibri" pitchFamily="34" charset="-122"/>
-                <a:cs typeface="Calibri" pitchFamily="34" charset="-120"/>
-              </a:rPr>
-              <a:t>backup</a:t>
+                  <a:srgbClr val="8A97A6"/>
+                </a:solidFill>
+                <a:latin typeface="Calibri" pitchFamily="34" charset="0"/>
+                <a:ea typeface="Calibri" pitchFamily="34" charset="-122"/>
+                <a:cs typeface="Calibri" pitchFamily="34" charset="-120"/>
+              </a:rPr>
+              <a:t>Taha + Lana</a:t>
             </a:r>
             <a:endParaRPr lang="en-US" sz="1000" dirty="0"/>
           </a:p>
@@ -16705,7 +16888,7 @@
       </p:sp>
       <p:sp>
         <p:nvSpPr>
-          <p:cNvPr id="13" name="Text 11"/>
+          <p:cNvPr id="20" name="Text 18"/>
           <p:cNvSpPr txBox="1"/>
           <p:nvPr/>
         </p:nvSpPr>
@@ -16730,7 +16913,7 @@
             <a:r>
               <a:rPr lang="en-US" sz="1000" dirty="0">
                 <a:solidFill>
-                  <a:srgbClr val="6B7785"/>
+                  <a:srgbClr val="8A97A6"/>
                 </a:solidFill>
                 <a:latin typeface="Calibri" pitchFamily="34" charset="0"/>
                 <a:ea typeface="Calibri" pitchFamily="34" charset="-122"/>
@@ -16800,7 +16983,7 @@
                 <a:ea typeface="Calibri" pitchFamily="34" charset="-122"/>
                 <a:cs typeface="Calibri" pitchFamily="34" charset="-120"/>
               </a:rPr>
-              <a:t>BACKUP B2</a:t>
+              <a:t>BACKUP B1</a:t>
             </a:r>
             <a:endParaRPr lang="en-US" sz="1100" dirty="0"/>
           </a:p>
@@ -16839,7 +17022,7 @@
                 <a:ea typeface="Cambria" pitchFamily="34" charset="-122"/>
                 <a:cs typeface="Cambria" pitchFamily="34" charset="-120"/>
               </a:rPr>
-              <a:t>Host/software interface and the three rules</a:t>
+              <a:t>Canonical Huffman: why limit/base/perm works</a:t>
             </a:r>
             <a:endParaRPr lang="en-US" sz="2900" dirty="0"/>
           </a:p>
@@ -16886,18 +17069,209 @@
       </p:sp>
       <p:sp>
         <p:nvSpPr>
-          <p:cNvPr id="5" name="Shape 3"/>
+          <p:cNvPr id="5" name="Text 3"/>
+          <p:cNvSpPr txBox="1"/>
+          <p:nvPr/>
+        </p:nvSpPr>
+        <p:spPr>
+          <a:xfrm>
+            <a:off x="548640" y="1371600"/>
+            <a:ext cx="11091672" cy="502920"/>
+          </a:xfrm>
+          <a:prstGeom prst="rect">
+            <a:avLst/>
+          </a:prstGeom>
+          <a:noFill/>
+          <a:ln/>
+        </p:spPr>
+        <p:txBody>
+          <a:bodyPr wrap="square" lIns="0" tIns="0" rIns="0" bIns="0" rtlCol="0" anchor="ctr"/>
+          <a:lstStyle/>
+          <a:p>
+            <a:pPr indent="0" marL="0">
+              <a:lnSpc>
+                <a:spcPts val="1800"/>
+              </a:lnSpc>
+              <a:buNone/>
+            </a:pPr>
+            <a:r>
+              <a:rPr lang="en-US" sz="1300" dirty="0">
+                <a:solidFill>
+                  <a:srgbClr val="1B2430"/>
+                </a:solidFill>
+                <a:latin typeface="Calibri" pitchFamily="34" charset="0"/>
+                <a:ea typeface="Calibri" pitchFamily="34" charset="-122"/>
+                <a:cs typeface="Calibri" pitchFamily="34" charset="-120"/>
+              </a:rPr>
+              <a:t>populate_huffman_symbols() already assigns canonical MSB-first codes — codes handed out in increasing order, shifted left whenever the length grows. That structure is what the linear scan ignores.</a:t>
+            </a:r>
+            <a:endParaRPr lang="en-US" sz="1300" dirty="0"/>
+          </a:p>
+        </p:txBody>
+      </p:sp>
+      <p:sp>
+        <p:nvSpPr>
+          <p:cNvPr id="6" name="Shape 4"/>
           <p:cNvSpPr/>
           <p:nvPr/>
         </p:nvSpPr>
         <p:spPr>
           <a:xfrm>
-            <a:off x="548640" y="1371600"/>
-            <a:ext cx="11091672" cy="1188720"/>
+            <a:off x="548640" y="1965960"/>
+            <a:ext cx="6035040" cy="1828800"/>
           </a:xfrm>
           <a:prstGeom prst="roundRect">
             <a:avLst>
-              <a:gd name="adj" fmla="val 4615"/>
+              <a:gd name="adj" fmla="val 2500"/>
+            </a:avLst>
+          </a:prstGeom>
+          <a:solidFill>
+            <a:srgbClr val="1B2430"/>
+          </a:solidFill>
+          <a:ln w="12700">
+            <a:solidFill>
+              <a:srgbClr val="1B2430"/>
+            </a:solidFill>
+            <a:prstDash val="solid"/>
+          </a:ln>
+        </p:spPr>
+      </p:sp>
+      <p:sp>
+        <p:nvSpPr>
+          <p:cNvPr id="7" name="Text 5"/>
+          <p:cNvSpPr txBox="1"/>
+          <p:nvPr/>
+        </p:nvSpPr>
+        <p:spPr>
+          <a:xfrm>
+            <a:off x="777240" y="2103120"/>
+            <a:ext cx="5577840" cy="1554480"/>
+          </a:xfrm>
+          <a:prstGeom prst="rect">
+            <a:avLst/>
+          </a:prstGeom>
+          <a:noFill/>
+          <a:ln/>
+        </p:spPr>
+        <p:txBody>
+          <a:bodyPr wrap="square" lIns="0" tIns="0" rIns="0" bIns="0" rtlCol="0" anchor="ctr"/>
+          <a:lstStyle/>
+          <a:p>
+            <a:pPr indent="0" marL="0">
+              <a:lnSpc>
+                <a:spcPts val="1800"/>
+              </a:lnSpc>
+              <a:buNone/>
+            </a:pPr>
+            <a:r>
+              <a:rPr lang="en-US" sz="1200" dirty="0">
+                <a:solidFill>
+                  <a:srgbClr val="8FE3D2"/>
+                </a:solidFill>
+                <a:latin typeface="Courier New" pitchFamily="34" charset="0"/>
+                <a:ea typeface="Courier New" pitchFamily="34" charset="-122"/>
+                <a:cs typeface="Courier New" pitchFamily="34" charset="-120"/>
+              </a:rPr>
+              <a:t>zvec = next min_len bits</a:t>
+            </a:r>
+            <a:endParaRPr lang="en-US" sz="1200" dirty="0"/>
+          </a:p>
+          <a:p>
+            <a:pPr indent="0" marL="0">
+              <a:lnSpc>
+                <a:spcPts val="1800"/>
+              </a:lnSpc>
+              <a:buNone/>
+            </a:pPr>
+            <a:r>
+              <a:rPr lang="en-US" sz="1200" dirty="0">
+                <a:solidFill>
+                  <a:srgbClr val="8FE3D2"/>
+                </a:solidFill>
+                <a:latin typeface="Courier New" pitchFamily="34" charset="0"/>
+                <a:ea typeface="Courier New" pitchFamily="34" charset="-122"/>
+                <a:cs typeface="Courier New" pitchFamily="34" charset="-120"/>
+              </a:rPr>
+              <a:t>while zvec &gt; limit[zn]:</a:t>
+            </a:r>
+            <a:endParaRPr lang="en-US" sz="1200" dirty="0"/>
+          </a:p>
+          <a:p>
+            <a:pPr indent="0" marL="0">
+              <a:lnSpc>
+                <a:spcPts val="1800"/>
+              </a:lnSpc>
+              <a:buNone/>
+            </a:pPr>
+            <a:r>
+              <a:rPr lang="en-US" sz="1200" dirty="0">
+                <a:solidFill>
+                  <a:srgbClr val="8FE3D2"/>
+                </a:solidFill>
+                <a:latin typeface="Courier New" pitchFamily="34" charset="0"/>
+                <a:ea typeface="Courier New" pitchFamily="34" charset="-122"/>
+                <a:cs typeface="Courier New" pitchFamily="34" charset="-120"/>
+              </a:rPr>
+              <a:t>    zn += 1</a:t>
+            </a:r>
+            <a:endParaRPr lang="en-US" sz="1200" dirty="0"/>
+          </a:p>
+          <a:p>
+            <a:pPr indent="0" marL="0">
+              <a:lnSpc>
+                <a:spcPts val="1800"/>
+              </a:lnSpc>
+              <a:buNone/>
+            </a:pPr>
+            <a:r>
+              <a:rPr lang="en-US" sz="1200" dirty="0">
+                <a:solidFill>
+                  <a:srgbClr val="8FE3D2"/>
+                </a:solidFill>
+                <a:latin typeface="Courier New" pitchFamily="34" charset="0"/>
+                <a:ea typeface="Courier New" pitchFamily="34" charset="-122"/>
+                <a:cs typeface="Courier New" pitchFamily="34" charset="-120"/>
+              </a:rPr>
+              <a:t>    zvec = (zvec &lt;&lt; 1) | next_bit</a:t>
+            </a:r>
+            <a:endParaRPr lang="en-US" sz="1200" dirty="0"/>
+          </a:p>
+          <a:p>
+            <a:pPr indent="0" marL="0">
+              <a:lnSpc>
+                <a:spcPts val="1800"/>
+              </a:lnSpc>
+              <a:buNone/>
+            </a:pPr>
+            <a:r>
+              <a:rPr lang="en-US" sz="1200" dirty="0">
+                <a:solidFill>
+                  <a:srgbClr val="8FE3D2"/>
+                </a:solidFill>
+                <a:latin typeface="Courier New" pitchFamily="34" charset="0"/>
+                <a:ea typeface="Courier New" pitchFamily="34" charset="-122"/>
+                <a:cs typeface="Courier New" pitchFamily="34" charset="-120"/>
+              </a:rPr>
+              <a:t>sym = perm[zvec - base[zn]]</a:t>
+            </a:r>
+            <a:endParaRPr lang="en-US" sz="1200" dirty="0"/>
+          </a:p>
+        </p:txBody>
+      </p:sp>
+      <p:sp>
+        <p:nvSpPr>
+          <p:cNvPr id="8" name="Shape 6"/>
+          <p:cNvSpPr/>
+          <p:nvPr/>
+        </p:nvSpPr>
+        <p:spPr>
+          <a:xfrm>
+            <a:off x="6766560" y="1965960"/>
+            <a:ext cx="4873752" cy="1828800"/>
+          </a:xfrm>
+          <a:prstGeom prst="roundRect">
+            <a:avLst>
+              <a:gd name="adj" fmla="val 3000"/>
             </a:avLst>
           </a:prstGeom>
           <a:solidFill>
@@ -16913,69 +17287,30 @@
       </p:sp>
       <p:sp>
         <p:nvSpPr>
-          <p:cNvPr id="6" name="Text 4"/>
-          <p:cNvSpPr txBox="1"/>
-          <p:nvPr/>
-        </p:nvSpPr>
-        <p:spPr>
-          <a:xfrm>
-            <a:off x="822960" y="1508760"/>
-            <a:ext cx="1097280" cy="274320"/>
-          </a:xfrm>
-          <a:prstGeom prst="rect">
-            <a:avLst/>
-          </a:prstGeom>
-          <a:noFill/>
-          <a:ln/>
-        </p:spPr>
-        <p:txBody>
-          <a:bodyPr wrap="square" lIns="0" tIns="0" rIns="0" bIns="0" rtlCol="0" anchor="ctr"/>
-          <a:lstStyle/>
-          <a:p>
-            <a:pPr indent="0" marL="0">
-              <a:buNone/>
-            </a:pPr>
-            <a:r>
-              <a:rPr lang="en-US" sz="1300" b="1" dirty="0">
-                <a:solidFill>
-                  <a:srgbClr val="E8833A"/>
-                </a:solidFill>
-                <a:latin typeface="Calibri" pitchFamily="34" charset="0"/>
-                <a:ea typeface="Calibri" pitchFamily="34" charset="-122"/>
-                <a:cs typeface="Calibri" pitchFamily="34" charset="-120"/>
-              </a:rPr>
-              <a:t>Rule 1</a:t>
-            </a:r>
-            <a:endParaRPr lang="en-US" sz="1300" dirty="0"/>
-          </a:p>
-        </p:txBody>
-      </p:sp>
-      <p:sp>
-        <p:nvSpPr>
-          <p:cNvPr id="7" name="Text 5"/>
-          <p:cNvSpPr txBox="1"/>
-          <p:nvPr/>
-        </p:nvSpPr>
-        <p:spPr>
-          <a:xfrm>
-            <a:off x="1965960" y="1508760"/>
-            <a:ext cx="9326880" cy="274320"/>
-          </a:xfrm>
-          <a:prstGeom prst="rect">
-            <a:avLst/>
-          </a:prstGeom>
-          <a:noFill/>
-          <a:ln/>
-        </p:spPr>
-        <p:txBody>
-          <a:bodyPr wrap="square" lIns="0" tIns="0" rIns="0" bIns="0" rtlCol="0" anchor="ctr"/>
-          <a:lstStyle/>
-          <a:p>
-            <a:pPr indent="0" marL="0">
-              <a:buNone/>
-            </a:pPr>
-            <a:r>
-              <a:rPr lang="en-US" sz="1350" b="1" dirty="0">
+          <p:cNvPr id="9" name="Text 7"/>
+          <p:cNvSpPr txBox="1"/>
+          <p:nvPr/>
+        </p:nvSpPr>
+        <p:spPr>
+          <a:xfrm>
+            <a:off x="6995160" y="2103120"/>
+            <a:ext cx="4389120" cy="274320"/>
+          </a:xfrm>
+          <a:prstGeom prst="rect">
+            <a:avLst/>
+          </a:prstGeom>
+          <a:noFill/>
+          <a:ln/>
+        </p:spPr>
+        <p:txBody>
+          <a:bodyPr wrap="square" lIns="0" tIns="0" rIns="0" bIns="0" rtlCol="0" anchor="ctr"/>
+          <a:lstStyle/>
+          <a:p>
+            <a:pPr indent="0" marL="0">
+              <a:buNone/>
+            </a:pPr>
+            <a:r>
+              <a:rPr lang="en-US" sz="1200" b="1" dirty="0">
                 <a:solidFill>
                   <a:srgbClr val="1B2430"/>
                 </a:solidFill>
@@ -16983,22 +17318,22 @@
                 <a:ea typeface="Calibri" pitchFamily="34" charset="-122"/>
                 <a:cs typeface="Calibri" pitchFamily="34" charset="-120"/>
               </a:rPr>
-              <a:t>Do not expect users to change their code</a:t>
-            </a:r>
-            <a:endParaRPr lang="en-US" sz="1350" dirty="0"/>
-          </a:p>
-        </p:txBody>
-      </p:sp>
-      <p:sp>
-        <p:nvSpPr>
-          <p:cNvPr id="8" name="Text 6"/>
-          <p:cNvSpPr txBox="1"/>
-          <p:nvPr/>
-        </p:nvSpPr>
-        <p:spPr>
-          <a:xfrm>
-            <a:off x="1965960" y="1828800"/>
-            <a:ext cx="9326880" cy="640080"/>
+              <a:t>Worked example (6 symbols)</a:t>
+            </a:r>
+            <a:endParaRPr lang="en-US" sz="1200" dirty="0"/>
+          </a:p>
+        </p:txBody>
+      </p:sp>
+      <p:sp>
+        <p:nvSpPr>
+          <p:cNvPr id="10" name="Text 8"/>
+          <p:cNvSpPr txBox="1"/>
+          <p:nvPr/>
+        </p:nvSpPr>
+        <p:spPr>
+          <a:xfrm>
+            <a:off x="6995160" y="2395728"/>
+            <a:ext cx="4389120" cy="1280160"/>
           </a:xfrm>
           <a:prstGeom prst="rect">
             <a:avLst/>
@@ -17012,88 +17347,122 @@
           <a:p>
             <a:pPr indent="0" marL="0">
               <a:lnSpc>
-                <a:spcPts val="1600"/>
+                <a:spcPts val="1400"/>
               </a:lnSpc>
               <a:buNone/>
             </a:pPr>
             <a:r>
-              <a:rPr lang="en-US" sz="1200" dirty="0">
+              <a:rPr lang="en-US" sz="1050" dirty="0">
                 <a:solidFill>
                   <a:srgbClr val="6B7785"/>
                 </a:solidFill>
-                <a:latin typeface="Calibri" pitchFamily="34" charset="0"/>
-                <a:ea typeface="Calibri" pitchFamily="34" charset="-122"/>
-                <a:cs typeface="Calibri" pitchFamily="34" charset="-120"/>
-              </a:rPr>
-              <a:t>Python still calls bz2.decompress(). Nothing above the library moves.</a:t>
-            </a:r>
-            <a:endParaRPr lang="en-US" sz="1200" dirty="0"/>
-          </a:p>
-        </p:txBody>
-      </p:sp>
-      <p:sp>
-        <p:nvSpPr>
-          <p:cNvPr id="9" name="Shape 7"/>
-          <p:cNvSpPr/>
-          <p:nvPr/>
-        </p:nvSpPr>
-        <p:spPr>
-          <a:xfrm>
-            <a:off x="548640" y="2743200"/>
-            <a:ext cx="11091672" cy="1188720"/>
-          </a:xfrm>
-          <a:prstGeom prst="roundRect">
-            <a:avLst>
-              <a:gd name="adj" fmla="val 4615"/>
-            </a:avLst>
-          </a:prstGeom>
-          <a:solidFill>
-            <a:srgbClr val="F3F6F8"/>
-          </a:solidFill>
-          <a:ln w="9525">
-            <a:solidFill>
-              <a:srgbClr val="DBE2E8"/>
-            </a:solidFill>
-            <a:prstDash val="solid"/>
-          </a:ln>
-        </p:spPr>
-      </p:sp>
-      <p:sp>
-        <p:nvSpPr>
-          <p:cNvPr id="10" name="Text 8"/>
-          <p:cNvSpPr txBox="1"/>
-          <p:nvPr/>
-        </p:nvSpPr>
-        <p:spPr>
-          <a:xfrm>
-            <a:off x="822960" y="2880360"/>
-            <a:ext cx="1097280" cy="274320"/>
-          </a:xfrm>
-          <a:prstGeom prst="rect">
-            <a:avLst/>
-          </a:prstGeom>
-          <a:noFill/>
-          <a:ln/>
-        </p:spPr>
-        <p:txBody>
-          <a:bodyPr wrap="square" lIns="0" tIns="0" rIns="0" bIns="0" rtlCol="0" anchor="ctr"/>
-          <a:lstStyle/>
-          <a:p>
-            <a:pPr indent="0" marL="0">
-              <a:buNone/>
-            </a:pPr>
-            <a:r>
-              <a:rPr lang="en-US" sz="1300" b="1" dirty="0">
-                <a:solidFill>
-                  <a:srgbClr val="E8833A"/>
-                </a:solidFill>
-                <a:latin typeface="Calibri" pitchFamily="34" charset="0"/>
-                <a:ea typeface="Calibri" pitchFamily="34" charset="-122"/>
-                <a:cs typeface="Calibri" pitchFamily="34" charset="-120"/>
-              </a:rPr>
-              <a:t>Rule 2</a:t>
-            </a:r>
-            <a:endParaRPr lang="en-US" sz="1300" dirty="0"/>
+                <a:latin typeface="Courier New" pitchFamily="34" charset="0"/>
+                <a:ea typeface="Courier New" pitchFamily="34" charset="-122"/>
+                <a:cs typeface="Courier New" pitchFamily="34" charset="-120"/>
+              </a:rPr>
+              <a:t>lengths [2,2,2,3,4,4]</a:t>
+            </a:r>
+            <a:endParaRPr lang="en-US" sz="1050" dirty="0"/>
+          </a:p>
+          <a:p>
+            <a:pPr indent="0" marL="0">
+              <a:lnSpc>
+                <a:spcPts val="1400"/>
+              </a:lnSpc>
+              <a:buNone/>
+            </a:pPr>
+            <a:r>
+              <a:rPr lang="en-US" sz="1050" dirty="0">
+                <a:solidFill>
+                  <a:srgbClr val="6B7785"/>
+                </a:solidFill>
+                <a:latin typeface="Courier New" pitchFamily="34" charset="0"/>
+                <a:ea typeface="Courier New" pitchFamily="34" charset="-122"/>
+                <a:cs typeface="Courier New" pitchFamily="34" charset="-120"/>
+              </a:rPr>
+              <a:t>sym 0→00  1→01  2→10</a:t>
+            </a:r>
+            <a:endParaRPr lang="en-US" sz="1050" dirty="0"/>
+          </a:p>
+          <a:p>
+            <a:pPr indent="0" marL="0">
+              <a:lnSpc>
+                <a:spcPts val="1400"/>
+              </a:lnSpc>
+              <a:buNone/>
+            </a:pPr>
+            <a:r>
+              <a:rPr lang="en-US" sz="1050" dirty="0">
+                <a:solidFill>
+                  <a:srgbClr val="6B7785"/>
+                </a:solidFill>
+                <a:latin typeface="Courier New" pitchFamily="34" charset="0"/>
+                <a:ea typeface="Courier New" pitchFamily="34" charset="-122"/>
+                <a:cs typeface="Courier New" pitchFamily="34" charset="-120"/>
+              </a:rPr>
+              <a:t>sym 3→110  4→1110  5→1111</a:t>
+            </a:r>
+            <a:endParaRPr lang="en-US" sz="1050" dirty="0"/>
+          </a:p>
+          <a:p>
+            <a:pPr indent="0" marL="0">
+              <a:lnSpc>
+                <a:spcPts val="1400"/>
+              </a:lnSpc>
+              <a:buNone/>
+            </a:pPr>
+            <a:r>
+              <a:rPr lang="en-US" sz="1050" dirty="0">
+                <a:solidFill>
+                  <a:srgbClr val="6B7785"/>
+                </a:solidFill>
+                <a:latin typeface="Courier New" pitchFamily="34" charset="0"/>
+                <a:ea typeface="Courier New" pitchFamily="34" charset="-122"/>
+                <a:cs typeface="Courier New" pitchFamily="34" charset="-120"/>
+              </a:rPr>
+              <a:t>limit[2]=2 base[2]=0</a:t>
+            </a:r>
+            <a:endParaRPr lang="en-US" sz="1050" dirty="0"/>
+          </a:p>
+          <a:p>
+            <a:pPr indent="0" marL="0">
+              <a:lnSpc>
+                <a:spcPts val="1400"/>
+              </a:lnSpc>
+              <a:buNone/>
+            </a:pPr>
+            <a:r>
+              <a:rPr lang="en-US" sz="1050" dirty="0">
+                <a:solidFill>
+                  <a:srgbClr val="6B7785"/>
+                </a:solidFill>
+                <a:latin typeface="Courier New" pitchFamily="34" charset="0"/>
+                <a:ea typeface="Courier New" pitchFamily="34" charset="-122"/>
+                <a:cs typeface="Courier New" pitchFamily="34" charset="-120"/>
+              </a:rPr>
+              <a:t>limit[3]=6 base[3]=3</a:t>
+            </a:r>
+            <a:endParaRPr lang="en-US" sz="1050" dirty="0"/>
+          </a:p>
+          <a:p>
+            <a:pPr indent="0" marL="0">
+              <a:lnSpc>
+                <a:spcPts val="1400"/>
+              </a:lnSpc>
+              <a:buNone/>
+            </a:pPr>
+            <a:r>
+              <a:rPr lang="en-US" sz="1050" dirty="0">
+                <a:solidFill>
+                  <a:srgbClr val="6B7785"/>
+                </a:solidFill>
+                <a:latin typeface="Courier New" pitchFamily="34" charset="0"/>
+                <a:ea typeface="Courier New" pitchFamily="34" charset="-122"/>
+                <a:cs typeface="Courier New" pitchFamily="34" charset="-120"/>
+              </a:rPr>
+              <a:t>limit[4]=15 base[4]=10</a:t>
+            </a:r>
+            <a:endParaRPr lang="en-US" sz="1050" dirty="0"/>
           </a:p>
         </p:txBody>
       </p:sp>
@@ -17105,24 +17474,27 @@
         </p:nvSpPr>
         <p:spPr>
           <a:xfrm>
-            <a:off x="1965960" y="2880360"/>
-            <a:ext cx="9326880" cy="274320"/>
-          </a:xfrm>
-          <a:prstGeom prst="rect">
-            <a:avLst/>
-          </a:prstGeom>
-          <a:noFill/>
-          <a:ln/>
-        </p:spPr>
-        <p:txBody>
-          <a:bodyPr wrap="square" lIns="0" tIns="0" rIns="0" bIns="0" rtlCol="0" anchor="ctr"/>
-          <a:lstStyle/>
-          <a:p>
-            <a:pPr indent="0" marL="0">
-              <a:buNone/>
-            </a:pPr>
-            <a:r>
-              <a:rPr lang="en-US" sz="1350" b="1" dirty="0">
+            <a:off x="548640" y="3977640"/>
+            <a:ext cx="11091672" cy="548640"/>
+          </a:xfrm>
+          <a:prstGeom prst="rect">
+            <a:avLst/>
+          </a:prstGeom>
+          <a:noFill/>
+          <a:ln/>
+        </p:spPr>
+        <p:txBody>
+          <a:bodyPr wrap="square" lIns="0" tIns="0" rIns="0" bIns="0" rtlCol="0" anchor="ctr"/>
+          <a:lstStyle/>
+          <a:p>
+            <a:pPr indent="0" marL="0">
+              <a:lnSpc>
+                <a:spcPts val="1700"/>
+              </a:lnSpc>
+              <a:buNone/>
+            </a:pPr>
+            <a:r>
+              <a:rPr lang="en-US" sz="1250" dirty="0">
                 <a:solidFill>
                   <a:srgbClr val="1B2430"/>
                 </a:solidFill>
@@ -17130,243 +17502,15 @@
                 <a:ea typeface="Calibri" pitchFamily="34" charset="-122"/>
                 <a:cs typeface="Calibri" pitchFamily="34" charset="-120"/>
               </a:rPr>
-              <a:t>If software must change, confine it to the library</a:t>
-            </a:r>
-            <a:endParaRPr lang="en-US" sz="1350" dirty="0"/>
+              <a:t>These are the exact vectors in tb_huffman_decoder.v. The testbench checks both the decoded symbol and the number of bits retired — a decoder that returns the right symbol while consuming the wrong number of bits destroys the rest of the stream.</a:t>
+            </a:r>
+            <a:endParaRPr lang="en-US" sz="1250" dirty="0"/>
           </a:p>
         </p:txBody>
       </p:sp>
       <p:sp>
         <p:nvSpPr>
           <p:cNvPr id="12" name="Text 10"/>
-          <p:cNvSpPr txBox="1"/>
-          <p:nvPr/>
-        </p:nvSpPr>
-        <p:spPr>
-          <a:xfrm>
-            <a:off x="1965960" y="3200400"/>
-            <a:ext cx="9326880" cy="640080"/>
-          </a:xfrm>
-          <a:prstGeom prst="rect">
-            <a:avLst/>
-          </a:prstGeom>
-          <a:noFill/>
-          <a:ln/>
-        </p:spPr>
-        <p:txBody>
-          <a:bodyPr wrap="square" lIns="0" tIns="0" rIns="0" bIns="0" rtlCol="0" anchor="ctr"/>
-          <a:lstStyle/>
-          <a:p>
-            <a:pPr indent="0" marL="0">
-              <a:lnSpc>
-                <a:spcPts val="1600"/>
-              </a:lnSpc>
-              <a:buNone/>
-            </a:pPr>
-            <a:r>
-              <a:rPr lang="en-US" sz="1200" dirty="0">
-                <a:solidFill>
-                  <a:srgbClr val="6B7785"/>
-                </a:solidFill>
-                <a:latin typeface="Calibri" pitchFamily="34" charset="0"/>
-                <a:ea typeface="Calibri" pitchFamily="34" charset="-122"/>
-                <a:cs typeface="Calibri" pitchFamily="34" charset="-120"/>
-              </a:rPr>
-              <a:t>Only the decompressor gains a fast path: map buffers, push the Huffman tables through the CSR window, write CTRL.START, sleep on the interrupt.</a:t>
-            </a:r>
-            <a:endParaRPr lang="en-US" sz="1200" dirty="0"/>
-          </a:p>
-        </p:txBody>
-      </p:sp>
-      <p:sp>
-        <p:nvSpPr>
-          <p:cNvPr id="13" name="Shape 11"/>
-          <p:cNvSpPr/>
-          <p:nvPr/>
-        </p:nvSpPr>
-        <p:spPr>
-          <a:xfrm>
-            <a:off x="548640" y="4114800"/>
-            <a:ext cx="11091672" cy="1188720"/>
-          </a:xfrm>
-          <a:prstGeom prst="roundRect">
-            <a:avLst>
-              <a:gd name="adj" fmla="val 4615"/>
-            </a:avLst>
-          </a:prstGeom>
-          <a:solidFill>
-            <a:srgbClr val="F3F6F8"/>
-          </a:solidFill>
-          <a:ln w="9525">
-            <a:solidFill>
-              <a:srgbClr val="DBE2E8"/>
-            </a:solidFill>
-            <a:prstDash val="solid"/>
-          </a:ln>
-        </p:spPr>
-      </p:sp>
-      <p:sp>
-        <p:nvSpPr>
-          <p:cNvPr id="14" name="Text 12"/>
-          <p:cNvSpPr txBox="1"/>
-          <p:nvPr/>
-        </p:nvSpPr>
-        <p:spPr>
-          <a:xfrm>
-            <a:off x="822960" y="4251960"/>
-            <a:ext cx="1097280" cy="274320"/>
-          </a:xfrm>
-          <a:prstGeom prst="rect">
-            <a:avLst/>
-          </a:prstGeom>
-          <a:noFill/>
-          <a:ln/>
-        </p:spPr>
-        <p:txBody>
-          <a:bodyPr wrap="square" lIns="0" tIns="0" rIns="0" bIns="0" rtlCol="0" anchor="ctr"/>
-          <a:lstStyle/>
-          <a:p>
-            <a:pPr indent="0" marL="0">
-              <a:buNone/>
-            </a:pPr>
-            <a:r>
-              <a:rPr lang="en-US" sz="1300" b="1" dirty="0">
-                <a:solidFill>
-                  <a:srgbClr val="E8833A"/>
-                </a:solidFill>
-                <a:latin typeface="Calibri" pitchFamily="34" charset="0"/>
-                <a:ea typeface="Calibri" pitchFamily="34" charset="-122"/>
-                <a:cs typeface="Calibri" pitchFamily="34" charset="-120"/>
-              </a:rPr>
-              <a:t>Rule 3</a:t>
-            </a:r>
-            <a:endParaRPr lang="en-US" sz="1300" dirty="0"/>
-          </a:p>
-        </p:txBody>
-      </p:sp>
-      <p:sp>
-        <p:nvSpPr>
-          <p:cNvPr id="15" name="Text 13"/>
-          <p:cNvSpPr txBox="1"/>
-          <p:nvPr/>
-        </p:nvSpPr>
-        <p:spPr>
-          <a:xfrm>
-            <a:off x="1965960" y="4251960"/>
-            <a:ext cx="9326880" cy="274320"/>
-          </a:xfrm>
-          <a:prstGeom prst="rect">
-            <a:avLst/>
-          </a:prstGeom>
-          <a:noFill/>
-          <a:ln/>
-        </p:spPr>
-        <p:txBody>
-          <a:bodyPr wrap="square" lIns="0" tIns="0" rIns="0" bIns="0" rtlCol="0" anchor="ctr"/>
-          <a:lstStyle/>
-          <a:p>
-            <a:pPr indent="0" marL="0">
-              <a:buNone/>
-            </a:pPr>
-            <a:r>
-              <a:rPr lang="en-US" sz="1350" b="1" dirty="0">
-                <a:solidFill>
-                  <a:srgbClr val="1B2430"/>
-                </a:solidFill>
-                <a:latin typeface="Calibri" pitchFamily="34" charset="0"/>
-                <a:ea typeface="Calibri" pitchFamily="34" charset="-122"/>
-                <a:cs typeface="Calibri" pitchFamily="34" charset="-120"/>
-              </a:rPr>
-              <a:t>Never break the user's code</a:t>
-            </a:r>
-            <a:endParaRPr lang="en-US" sz="1350" dirty="0"/>
-          </a:p>
-        </p:txBody>
-      </p:sp>
-      <p:sp>
-        <p:nvSpPr>
-          <p:cNvPr id="16" name="Text 14"/>
-          <p:cNvSpPr txBox="1"/>
-          <p:nvPr/>
-        </p:nvSpPr>
-        <p:spPr>
-          <a:xfrm>
-            <a:off x="1965960" y="4572000"/>
-            <a:ext cx="9326880" cy="640080"/>
-          </a:xfrm>
-          <a:prstGeom prst="rect">
-            <a:avLst/>
-          </a:prstGeom>
-          <a:noFill/>
-          <a:ln/>
-        </p:spPr>
-        <p:txBody>
-          <a:bodyPr wrap="square" lIns="0" tIns="0" rIns="0" bIns="0" rtlCol="0" anchor="ctr"/>
-          <a:lstStyle/>
-          <a:p>
-            <a:pPr indent="0" marL="0">
-              <a:lnSpc>
-                <a:spcPts val="1600"/>
-              </a:lnSpc>
-              <a:buNone/>
-            </a:pPr>
-            <a:r>
-              <a:rPr lang="en-US" sz="1200" dirty="0">
-                <a:solidFill>
-                  <a:srgbClr val="6B7785"/>
-                </a:solidFill>
-                <a:latin typeface="Calibri" pitchFamily="34" charset="0"/>
-                <a:ea typeface="Calibri" pitchFamily="34" charset="-122"/>
-                <a:cs typeface="Calibri" pitchFamily="34" charset="-120"/>
-              </a:rPr>
-              <a:t>START returns UNSUPPORTED for a randomised block or one larger than the on-chip SRAM, and the driver falls back to software. Our optimized Python mirrors this: a gzip input falls back to the baseline decoder.</a:t>
-            </a:r>
-            <a:endParaRPr lang="en-US" sz="1200" dirty="0"/>
-          </a:p>
-        </p:txBody>
-      </p:sp>
-      <p:sp>
-        <p:nvSpPr>
-          <p:cNvPr id="17" name="Text 15"/>
-          <p:cNvSpPr txBox="1"/>
-          <p:nvPr/>
-        </p:nvSpPr>
-        <p:spPr>
-          <a:xfrm>
-            <a:off x="548640" y="5596128"/>
-            <a:ext cx="11091672" cy="475488"/>
-          </a:xfrm>
-          <a:prstGeom prst="rect">
-            <a:avLst/>
-          </a:prstGeom>
-          <a:noFill/>
-          <a:ln/>
-        </p:spPr>
-        <p:txBody>
-          <a:bodyPr wrap="square" lIns="0" tIns="0" rIns="0" bIns="0" rtlCol="0" anchor="ctr"/>
-          <a:lstStyle/>
-          <a:p>
-            <a:pPr indent="0" marL="0">
-              <a:buNone/>
-            </a:pPr>
-            <a:r>
-              <a:rPr lang="en-US" sz="1250" i="1" dirty="0">
-                <a:solidFill>
-                  <a:srgbClr val="2D9B8A"/>
-                </a:solidFill>
-                <a:latin typeface="Calibri" pitchFamily="34" charset="0"/>
-                <a:ea typeface="Calibri" pitchFamily="34" charset="-122"/>
-                <a:cs typeface="Calibri" pitchFamily="34" charset="-120"/>
-              </a:rPr>
-              <a:t>Security: the accelerator is a DMA master behind the IOMMU, with per-device page tables, so it can only touch the buffers the driver mapped for that request.</a:t>
-            </a:r>
-            <a:endParaRPr lang="en-US" sz="1250" dirty="0"/>
-          </a:p>
-        </p:txBody>
-      </p:sp>
-      <p:sp>
-        <p:nvSpPr>
-          <p:cNvPr id="18" name="Text 16"/>
           <p:cNvSpPr txBox="1"/>
           <p:nvPr/>
         </p:nvSpPr>
@@ -17405,7 +17549,7 @@
       </p:sp>
       <p:sp>
         <p:nvSpPr>
-          <p:cNvPr id="19" name="Text 17"/>
+          <p:cNvPr id="13" name="Text 11"/>
           <p:cNvSpPr txBox="1"/>
           <p:nvPr/>
         </p:nvSpPr>
@@ -17500,7 +17644,7 @@
                 <a:ea typeface="Calibri" pitchFamily="34" charset="-122"/>
                 <a:cs typeface="Calibri" pitchFamily="34" charset="-120"/>
               </a:rPr>
-              <a:t>BACKUP B3</a:t>
+              <a:t>BACKUP B2</a:t>
             </a:r>
             <a:endParaRPr lang="en-US" sz="1100" dirty="0"/>
           </a:p>
@@ -17539,7 +17683,7 @@
                 <a:ea typeface="Cambria" pitchFamily="34" charset="-122"/>
                 <a:cs typeface="Cambria" pitchFamily="34" charset="-120"/>
               </a:rPr>
-              <a:t>Measurement environment</a:t>
+              <a:t>Host/software interface and the three rules</a:t>
             </a:r>
             <a:endParaRPr lang="en-US" sz="2900" dirty="0"/>
           </a:p>
@@ -17586,38 +17730,146 @@
       </p:sp>
       <p:sp>
         <p:nvSpPr>
-          <p:cNvPr id="5" name="Text 3"/>
-          <p:cNvSpPr txBox="1"/>
+          <p:cNvPr id="5" name="Shape 3"/>
+          <p:cNvSpPr/>
           <p:nvPr/>
         </p:nvSpPr>
         <p:spPr>
           <a:xfrm>
             <a:off x="548640" y="1371600"/>
-            <a:ext cx="1645920" cy="320040"/>
-          </a:xfrm>
-          <a:prstGeom prst="rect">
-            <a:avLst/>
-          </a:prstGeom>
-          <a:noFill/>
-          <a:ln/>
-        </p:spPr>
-        <p:txBody>
-          <a:bodyPr wrap="square" lIns="0" tIns="0" rIns="0" bIns="0" rtlCol="0" anchor="ctr"/>
-          <a:lstStyle/>
-          <a:p>
-            <a:pPr indent="0" marL="0">
-              <a:buNone/>
-            </a:pPr>
-            <a:r>
-              <a:rPr lang="en-US" sz="1200" b="1" dirty="0">
+            <a:ext cx="11091672" cy="1188720"/>
+          </a:xfrm>
+          <a:prstGeom prst="roundRect">
+            <a:avLst>
+              <a:gd name="adj" fmla="val 4615"/>
+            </a:avLst>
+          </a:prstGeom>
+          <a:solidFill>
+            <a:srgbClr val="F3F6F8"/>
+          </a:solidFill>
+          <a:ln w="9525">
+            <a:solidFill>
+              <a:srgbClr val="DBE2E8"/>
+            </a:solidFill>
+            <a:prstDash val="solid"/>
+          </a:ln>
+        </p:spPr>
+      </p:sp>
+      <p:sp>
+        <p:nvSpPr>
+          <p:cNvPr id="6" name="Text 4"/>
+          <p:cNvSpPr txBox="1"/>
+          <p:nvPr/>
+        </p:nvSpPr>
+        <p:spPr>
+          <a:xfrm>
+            <a:off x="822960" y="1508760"/>
+            <a:ext cx="1097280" cy="274320"/>
+          </a:xfrm>
+          <a:prstGeom prst="rect">
+            <a:avLst/>
+          </a:prstGeom>
+          <a:noFill/>
+          <a:ln/>
+        </p:spPr>
+        <p:txBody>
+          <a:bodyPr wrap="square" lIns="0" tIns="0" rIns="0" bIns="0" rtlCol="0" anchor="ctr"/>
+          <a:lstStyle/>
+          <a:p>
+            <a:pPr indent="0" marL="0">
+              <a:buNone/>
+            </a:pPr>
+            <a:r>
+              <a:rPr lang="en-US" sz="1300" b="1" dirty="0">
                 <a:solidFill>
                   <a:srgbClr val="E8833A"/>
                 </a:solidFill>
-                <a:latin typeface="Courier New" pitchFamily="34" charset="0"/>
-                <a:ea typeface="Courier New" pitchFamily="34" charset="-122"/>
-                <a:cs typeface="Courier New" pitchFamily="34" charset="-120"/>
-              </a:rPr>
-              <a:t>where</a:t>
+                <a:latin typeface="Calibri" pitchFamily="34" charset="0"/>
+                <a:ea typeface="Calibri" pitchFamily="34" charset="-122"/>
+                <a:cs typeface="Calibri" pitchFamily="34" charset="-120"/>
+              </a:rPr>
+              <a:t>Rule 1</a:t>
+            </a:r>
+            <a:endParaRPr lang="en-US" sz="1300" dirty="0"/>
+          </a:p>
+        </p:txBody>
+      </p:sp>
+      <p:sp>
+        <p:nvSpPr>
+          <p:cNvPr id="7" name="Text 5"/>
+          <p:cNvSpPr txBox="1"/>
+          <p:nvPr/>
+        </p:nvSpPr>
+        <p:spPr>
+          <a:xfrm>
+            <a:off x="1965960" y="1508760"/>
+            <a:ext cx="9326880" cy="274320"/>
+          </a:xfrm>
+          <a:prstGeom prst="rect">
+            <a:avLst/>
+          </a:prstGeom>
+          <a:noFill/>
+          <a:ln/>
+        </p:spPr>
+        <p:txBody>
+          <a:bodyPr wrap="square" lIns="0" tIns="0" rIns="0" bIns="0" rtlCol="0" anchor="ctr"/>
+          <a:lstStyle/>
+          <a:p>
+            <a:pPr indent="0" marL="0">
+              <a:buNone/>
+            </a:pPr>
+            <a:r>
+              <a:rPr lang="en-US" sz="1350" b="1" dirty="0">
+                <a:solidFill>
+                  <a:srgbClr val="1B2430"/>
+                </a:solidFill>
+                <a:latin typeface="Calibri" pitchFamily="34" charset="0"/>
+                <a:ea typeface="Calibri" pitchFamily="34" charset="-122"/>
+                <a:cs typeface="Calibri" pitchFamily="34" charset="-120"/>
+              </a:rPr>
+              <a:t>Do not expect users to change their code</a:t>
+            </a:r>
+            <a:endParaRPr lang="en-US" sz="1350" dirty="0"/>
+          </a:p>
+        </p:txBody>
+      </p:sp>
+      <p:sp>
+        <p:nvSpPr>
+          <p:cNvPr id="8" name="Text 6"/>
+          <p:cNvSpPr txBox="1"/>
+          <p:nvPr/>
+        </p:nvSpPr>
+        <p:spPr>
+          <a:xfrm>
+            <a:off x="1965960" y="1828800"/>
+            <a:ext cx="9326880" cy="640080"/>
+          </a:xfrm>
+          <a:prstGeom prst="rect">
+            <a:avLst/>
+          </a:prstGeom>
+          <a:noFill/>
+          <a:ln/>
+        </p:spPr>
+        <p:txBody>
+          <a:bodyPr wrap="square" lIns="0" tIns="0" rIns="0" bIns="0" rtlCol="0" anchor="ctr"/>
+          <a:lstStyle/>
+          <a:p>
+            <a:pPr indent="0" marL="0">
+              <a:lnSpc>
+                <a:spcPts val="1600"/>
+              </a:lnSpc>
+              <a:buNone/>
+            </a:pPr>
+            <a:r>
+              <a:rPr lang="en-US" sz="1200" dirty="0">
+                <a:solidFill>
+                  <a:srgbClr val="6B7785"/>
+                </a:solidFill>
+                <a:latin typeface="Calibri" pitchFamily="34" charset="0"/>
+                <a:ea typeface="Calibri" pitchFamily="34" charset="-122"/>
+                <a:cs typeface="Calibri" pitchFamily="34" charset="-120"/>
+              </a:rPr>
+              <a:t>Python still calls bz2.decompress(). Nothing above the library moves.</a:t>
             </a:r>
             <a:endParaRPr lang="en-US" sz="1200" dirty="0"/>
           </a:p>
@@ -17625,30 +17877,96 @@
       </p:sp>
       <p:sp>
         <p:nvSpPr>
-          <p:cNvPr id="6" name="Text 4"/>
-          <p:cNvSpPr txBox="1"/>
-          <p:nvPr/>
-        </p:nvSpPr>
-        <p:spPr>
-          <a:xfrm>
-            <a:off x="2286000" y="1371600"/>
-            <a:ext cx="9326880" cy="320040"/>
-          </a:xfrm>
-          <a:prstGeom prst="rect">
-            <a:avLst/>
-          </a:prstGeom>
-          <a:noFill/>
-          <a:ln/>
-        </p:spPr>
-        <p:txBody>
-          <a:bodyPr wrap="square" lIns="0" tIns="0" rIns="0" bIns="0" rtlCol="0" anchor="ctr"/>
-          <a:lstStyle/>
-          <a:p>
-            <a:pPr indent="0" marL="0">
-              <a:buNone/>
-            </a:pPr>
-            <a:r>
-              <a:rPr lang="en-US" sz="1250" dirty="0">
+          <p:cNvPr id="9" name="Shape 7"/>
+          <p:cNvSpPr/>
+          <p:nvPr/>
+        </p:nvSpPr>
+        <p:spPr>
+          <a:xfrm>
+            <a:off x="548640" y="2743200"/>
+            <a:ext cx="11091672" cy="1188720"/>
+          </a:xfrm>
+          <a:prstGeom prst="roundRect">
+            <a:avLst>
+              <a:gd name="adj" fmla="val 4615"/>
+            </a:avLst>
+          </a:prstGeom>
+          <a:solidFill>
+            <a:srgbClr val="F3F6F8"/>
+          </a:solidFill>
+          <a:ln w="9525">
+            <a:solidFill>
+              <a:srgbClr val="DBE2E8"/>
+            </a:solidFill>
+            <a:prstDash val="solid"/>
+          </a:ln>
+        </p:spPr>
+      </p:sp>
+      <p:sp>
+        <p:nvSpPr>
+          <p:cNvPr id="10" name="Text 8"/>
+          <p:cNvSpPr txBox="1"/>
+          <p:nvPr/>
+        </p:nvSpPr>
+        <p:spPr>
+          <a:xfrm>
+            <a:off x="822960" y="2880360"/>
+            <a:ext cx="1097280" cy="274320"/>
+          </a:xfrm>
+          <a:prstGeom prst="rect">
+            <a:avLst/>
+          </a:prstGeom>
+          <a:noFill/>
+          <a:ln/>
+        </p:spPr>
+        <p:txBody>
+          <a:bodyPr wrap="square" lIns="0" tIns="0" rIns="0" bIns="0" rtlCol="0" anchor="ctr"/>
+          <a:lstStyle/>
+          <a:p>
+            <a:pPr indent="0" marL="0">
+              <a:buNone/>
+            </a:pPr>
+            <a:r>
+              <a:rPr lang="en-US" sz="1300" b="1" dirty="0">
+                <a:solidFill>
+                  <a:srgbClr val="E8833A"/>
+                </a:solidFill>
+                <a:latin typeface="Calibri" pitchFamily="34" charset="0"/>
+                <a:ea typeface="Calibri" pitchFamily="34" charset="-122"/>
+                <a:cs typeface="Calibri" pitchFamily="34" charset="-120"/>
+              </a:rPr>
+              <a:t>Rule 2</a:t>
+            </a:r>
+            <a:endParaRPr lang="en-US" sz="1300" dirty="0"/>
+          </a:p>
+        </p:txBody>
+      </p:sp>
+      <p:sp>
+        <p:nvSpPr>
+          <p:cNvPr id="11" name="Text 9"/>
+          <p:cNvSpPr txBox="1"/>
+          <p:nvPr/>
+        </p:nvSpPr>
+        <p:spPr>
+          <a:xfrm>
+            <a:off x="1965960" y="2880360"/>
+            <a:ext cx="9326880" cy="274320"/>
+          </a:xfrm>
+          <a:prstGeom prst="rect">
+            <a:avLst/>
+          </a:prstGeom>
+          <a:noFill/>
+          <a:ln/>
+        </p:spPr>
+        <p:txBody>
+          <a:bodyPr wrap="square" lIns="0" tIns="0" rIns="0" bIns="0" rtlCol="0" anchor="ctr"/>
+          <a:lstStyle/>
+          <a:p>
+            <a:pPr indent="0" marL="0">
+              <a:buNone/>
+            </a:pPr>
+            <a:r>
+              <a:rPr lang="en-US" sz="1350" b="1" dirty="0">
                 <a:solidFill>
                   <a:srgbClr val="1B2430"/>
                 </a:solidFill>
@@ -17656,7 +17974,235 @@
                 <a:ea typeface="Calibri" pitchFamily="34" charset="-122"/>
                 <a:cs typeface="Calibri" pitchFamily="34" charset="-120"/>
               </a:rPr>
-              <a:t>INSIDE the course QEMU image — systemd-detect-virt = kvm</a:t>
+              <a:t>If software must change, confine it to the library</a:t>
+            </a:r>
+            <a:endParaRPr lang="en-US" sz="1350" dirty="0"/>
+          </a:p>
+        </p:txBody>
+      </p:sp>
+      <p:sp>
+        <p:nvSpPr>
+          <p:cNvPr id="12" name="Text 10"/>
+          <p:cNvSpPr txBox="1"/>
+          <p:nvPr/>
+        </p:nvSpPr>
+        <p:spPr>
+          <a:xfrm>
+            <a:off x="1965960" y="3200400"/>
+            <a:ext cx="9326880" cy="640080"/>
+          </a:xfrm>
+          <a:prstGeom prst="rect">
+            <a:avLst/>
+          </a:prstGeom>
+          <a:noFill/>
+          <a:ln/>
+        </p:spPr>
+        <p:txBody>
+          <a:bodyPr wrap="square" lIns="0" tIns="0" rIns="0" bIns="0" rtlCol="0" anchor="ctr"/>
+          <a:lstStyle/>
+          <a:p>
+            <a:pPr indent="0" marL="0">
+              <a:lnSpc>
+                <a:spcPts val="1600"/>
+              </a:lnSpc>
+              <a:buNone/>
+            </a:pPr>
+            <a:r>
+              <a:rPr lang="en-US" sz="1200" dirty="0">
+                <a:solidFill>
+                  <a:srgbClr val="6B7785"/>
+                </a:solidFill>
+                <a:latin typeface="Calibri" pitchFamily="34" charset="0"/>
+                <a:ea typeface="Calibri" pitchFamily="34" charset="-122"/>
+                <a:cs typeface="Calibri" pitchFamily="34" charset="-120"/>
+              </a:rPr>
+              <a:t>Only the decompressor gains a fast path: map buffers, push the Huffman tables through the CSR window, write CTRL.START, sleep on the interrupt.</a:t>
+            </a:r>
+            <a:endParaRPr lang="en-US" sz="1200" dirty="0"/>
+          </a:p>
+        </p:txBody>
+      </p:sp>
+      <p:sp>
+        <p:nvSpPr>
+          <p:cNvPr id="13" name="Shape 11"/>
+          <p:cNvSpPr/>
+          <p:nvPr/>
+        </p:nvSpPr>
+        <p:spPr>
+          <a:xfrm>
+            <a:off x="548640" y="4114800"/>
+            <a:ext cx="11091672" cy="1188720"/>
+          </a:xfrm>
+          <a:prstGeom prst="roundRect">
+            <a:avLst>
+              <a:gd name="adj" fmla="val 4615"/>
+            </a:avLst>
+          </a:prstGeom>
+          <a:solidFill>
+            <a:srgbClr val="F3F6F8"/>
+          </a:solidFill>
+          <a:ln w="9525">
+            <a:solidFill>
+              <a:srgbClr val="DBE2E8"/>
+            </a:solidFill>
+            <a:prstDash val="solid"/>
+          </a:ln>
+        </p:spPr>
+      </p:sp>
+      <p:sp>
+        <p:nvSpPr>
+          <p:cNvPr id="14" name="Text 12"/>
+          <p:cNvSpPr txBox="1"/>
+          <p:nvPr/>
+        </p:nvSpPr>
+        <p:spPr>
+          <a:xfrm>
+            <a:off x="822960" y="4251960"/>
+            <a:ext cx="1097280" cy="274320"/>
+          </a:xfrm>
+          <a:prstGeom prst="rect">
+            <a:avLst/>
+          </a:prstGeom>
+          <a:noFill/>
+          <a:ln/>
+        </p:spPr>
+        <p:txBody>
+          <a:bodyPr wrap="square" lIns="0" tIns="0" rIns="0" bIns="0" rtlCol="0" anchor="ctr"/>
+          <a:lstStyle/>
+          <a:p>
+            <a:pPr indent="0" marL="0">
+              <a:buNone/>
+            </a:pPr>
+            <a:r>
+              <a:rPr lang="en-US" sz="1300" b="1" dirty="0">
+                <a:solidFill>
+                  <a:srgbClr val="E8833A"/>
+                </a:solidFill>
+                <a:latin typeface="Calibri" pitchFamily="34" charset="0"/>
+                <a:ea typeface="Calibri" pitchFamily="34" charset="-122"/>
+                <a:cs typeface="Calibri" pitchFamily="34" charset="-120"/>
+              </a:rPr>
+              <a:t>Rule 3</a:t>
+            </a:r>
+            <a:endParaRPr lang="en-US" sz="1300" dirty="0"/>
+          </a:p>
+        </p:txBody>
+      </p:sp>
+      <p:sp>
+        <p:nvSpPr>
+          <p:cNvPr id="15" name="Text 13"/>
+          <p:cNvSpPr txBox="1"/>
+          <p:nvPr/>
+        </p:nvSpPr>
+        <p:spPr>
+          <a:xfrm>
+            <a:off x="1965960" y="4251960"/>
+            <a:ext cx="9326880" cy="274320"/>
+          </a:xfrm>
+          <a:prstGeom prst="rect">
+            <a:avLst/>
+          </a:prstGeom>
+          <a:noFill/>
+          <a:ln/>
+        </p:spPr>
+        <p:txBody>
+          <a:bodyPr wrap="square" lIns="0" tIns="0" rIns="0" bIns="0" rtlCol="0" anchor="ctr"/>
+          <a:lstStyle/>
+          <a:p>
+            <a:pPr indent="0" marL="0">
+              <a:buNone/>
+            </a:pPr>
+            <a:r>
+              <a:rPr lang="en-US" sz="1350" b="1" dirty="0">
+                <a:solidFill>
+                  <a:srgbClr val="1B2430"/>
+                </a:solidFill>
+                <a:latin typeface="Calibri" pitchFamily="34" charset="0"/>
+                <a:ea typeface="Calibri" pitchFamily="34" charset="-122"/>
+                <a:cs typeface="Calibri" pitchFamily="34" charset="-120"/>
+              </a:rPr>
+              <a:t>Never break the user's code</a:t>
+            </a:r>
+            <a:endParaRPr lang="en-US" sz="1350" dirty="0"/>
+          </a:p>
+        </p:txBody>
+      </p:sp>
+      <p:sp>
+        <p:nvSpPr>
+          <p:cNvPr id="16" name="Text 14"/>
+          <p:cNvSpPr txBox="1"/>
+          <p:nvPr/>
+        </p:nvSpPr>
+        <p:spPr>
+          <a:xfrm>
+            <a:off x="1965960" y="4572000"/>
+            <a:ext cx="9326880" cy="640080"/>
+          </a:xfrm>
+          <a:prstGeom prst="rect">
+            <a:avLst/>
+          </a:prstGeom>
+          <a:noFill/>
+          <a:ln/>
+        </p:spPr>
+        <p:txBody>
+          <a:bodyPr wrap="square" lIns="0" tIns="0" rIns="0" bIns="0" rtlCol="0" anchor="ctr"/>
+          <a:lstStyle/>
+          <a:p>
+            <a:pPr indent="0" marL="0">
+              <a:lnSpc>
+                <a:spcPts val="1600"/>
+              </a:lnSpc>
+              <a:buNone/>
+            </a:pPr>
+            <a:r>
+              <a:rPr lang="en-US" sz="1200" dirty="0">
+                <a:solidFill>
+                  <a:srgbClr val="6B7785"/>
+                </a:solidFill>
+                <a:latin typeface="Calibri" pitchFamily="34" charset="0"/>
+                <a:ea typeface="Calibri" pitchFamily="34" charset="-122"/>
+                <a:cs typeface="Calibri" pitchFamily="34" charset="-120"/>
+              </a:rPr>
+              <a:t>START returns UNSUPPORTED for a randomised block or one larger than the on-chip SRAM, and the driver falls back to software. Our optimized Python mirrors this: a gzip input falls back to the baseline decoder.</a:t>
+            </a:r>
+            <a:endParaRPr lang="en-US" sz="1200" dirty="0"/>
+          </a:p>
+        </p:txBody>
+      </p:sp>
+      <p:sp>
+        <p:nvSpPr>
+          <p:cNvPr id="17" name="Text 15"/>
+          <p:cNvSpPr txBox="1"/>
+          <p:nvPr/>
+        </p:nvSpPr>
+        <p:spPr>
+          <a:xfrm>
+            <a:off x="548640" y="5596128"/>
+            <a:ext cx="11091672" cy="475488"/>
+          </a:xfrm>
+          <a:prstGeom prst="rect">
+            <a:avLst/>
+          </a:prstGeom>
+          <a:noFill/>
+          <a:ln/>
+        </p:spPr>
+        <p:txBody>
+          <a:bodyPr wrap="square" lIns="0" tIns="0" rIns="0" bIns="0" rtlCol="0" anchor="ctr"/>
+          <a:lstStyle/>
+          <a:p>
+            <a:pPr indent="0" marL="0">
+              <a:buNone/>
+            </a:pPr>
+            <a:r>
+              <a:rPr lang="en-US" sz="1250" i="1" dirty="0">
+                <a:solidFill>
+                  <a:srgbClr val="2D9B8A"/>
+                </a:solidFill>
+                <a:latin typeface="Calibri" pitchFamily="34" charset="0"/>
+                <a:ea typeface="Calibri" pitchFamily="34" charset="-122"/>
+                <a:cs typeface="Calibri" pitchFamily="34" charset="-120"/>
+              </a:rPr>
+              <a:t>Security: the accelerator is a DMA master behind the IOMMU, with per-device page tables, so it can only touch the buffers the driver mapped for that request.</a:t>
             </a:r>
             <a:endParaRPr lang="en-US" sz="1250" dirty="0"/>
           </a:p>
@@ -17664,595 +18210,7 @@
       </p:sp>
       <p:sp>
         <p:nvSpPr>
-          <p:cNvPr id="7" name="Text 5"/>
-          <p:cNvSpPr txBox="1"/>
-          <p:nvPr/>
-        </p:nvSpPr>
-        <p:spPr>
-          <a:xfrm>
-            <a:off x="548640" y="1874520"/>
-            <a:ext cx="1645920" cy="320040"/>
-          </a:xfrm>
-          <a:prstGeom prst="rect">
-            <a:avLst/>
-          </a:prstGeom>
-          <a:noFill/>
-          <a:ln/>
-        </p:spPr>
-        <p:txBody>
-          <a:bodyPr wrap="square" lIns="0" tIns="0" rIns="0" bIns="0" rtlCol="0" anchor="ctr"/>
-          <a:lstStyle/>
-          <a:p>
-            <a:pPr indent="0" marL="0">
-              <a:buNone/>
-            </a:pPr>
-            <a:r>
-              <a:rPr lang="en-US" sz="1200" b="1" dirty="0">
-                <a:solidFill>
-                  <a:srgbClr val="E8833A"/>
-                </a:solidFill>
-                <a:latin typeface="Courier New" pitchFamily="34" charset="0"/>
-                <a:ea typeface="Courier New" pitchFamily="34" charset="-122"/>
-                <a:cs typeface="Courier New" pitchFamily="34" charset="-120"/>
-              </a:rPr>
-              <a:t>distro</a:t>
-            </a:r>
-            <a:endParaRPr lang="en-US" sz="1200" dirty="0"/>
-          </a:p>
-        </p:txBody>
-      </p:sp>
-      <p:sp>
-        <p:nvSpPr>
-          <p:cNvPr id="8" name="Text 6"/>
-          <p:cNvSpPr txBox="1"/>
-          <p:nvPr/>
-        </p:nvSpPr>
-        <p:spPr>
-          <a:xfrm>
-            <a:off x="2286000" y="1874520"/>
-            <a:ext cx="9326880" cy="320040"/>
-          </a:xfrm>
-          <a:prstGeom prst="rect">
-            <a:avLst/>
-          </a:prstGeom>
-          <a:noFill/>
-          <a:ln/>
-        </p:spPr>
-        <p:txBody>
-          <a:bodyPr wrap="square" lIns="0" tIns="0" rIns="0" bIns="0" rtlCol="0" anchor="ctr"/>
-          <a:lstStyle/>
-          <a:p>
-            <a:pPr indent="0" marL="0">
-              <a:buNone/>
-            </a:pPr>
-            <a:r>
-              <a:rPr lang="en-US" sz="1250" dirty="0">
-                <a:solidFill>
-                  <a:srgbClr val="1B2430"/>
-                </a:solidFill>
-                <a:latin typeface="Calibri" pitchFamily="34" charset="0"/>
-                <a:ea typeface="Calibri" pitchFamily="34" charset="-122"/>
-                <a:cs typeface="Calibri" pitchFamily="34" charset="-120"/>
-              </a:rPr>
-              <a:t>Ubuntu 22.04.5 LTS, kernel 5.15.0-1080-kvm</a:t>
-            </a:r>
-            <a:endParaRPr lang="en-US" sz="1250" dirty="0"/>
-          </a:p>
-        </p:txBody>
-      </p:sp>
-      <p:sp>
-        <p:nvSpPr>
-          <p:cNvPr id="9" name="Text 7"/>
-          <p:cNvSpPr txBox="1"/>
-          <p:nvPr/>
-        </p:nvSpPr>
-        <p:spPr>
-          <a:xfrm>
-            <a:off x="548640" y="2377440"/>
-            <a:ext cx="1645920" cy="320040"/>
-          </a:xfrm>
-          <a:prstGeom prst="rect">
-            <a:avLst/>
-          </a:prstGeom>
-          <a:noFill/>
-          <a:ln/>
-        </p:spPr>
-        <p:txBody>
-          <a:bodyPr wrap="square" lIns="0" tIns="0" rIns="0" bIns="0" rtlCol="0" anchor="ctr"/>
-          <a:lstStyle/>
-          <a:p>
-            <a:pPr indent="0" marL="0">
-              <a:buNone/>
-            </a:pPr>
-            <a:r>
-              <a:rPr lang="en-US" sz="1200" b="1" dirty="0">
-                <a:solidFill>
-                  <a:srgbClr val="E8833A"/>
-                </a:solidFill>
-                <a:latin typeface="Courier New" pitchFamily="34" charset="0"/>
-                <a:ea typeface="Courier New" pitchFamily="34" charset="-122"/>
-                <a:cs typeface="Courier New" pitchFamily="34" charset="-120"/>
-              </a:rPr>
-              <a:t>guest</a:t>
-            </a:r>
-            <a:endParaRPr lang="en-US" sz="1200" dirty="0"/>
-          </a:p>
-        </p:txBody>
-      </p:sp>
-      <p:sp>
-        <p:nvSpPr>
-          <p:cNvPr id="10" name="Text 8"/>
-          <p:cNvSpPr txBox="1"/>
-          <p:nvPr/>
-        </p:nvSpPr>
-        <p:spPr>
-          <a:xfrm>
-            <a:off x="2286000" y="2377440"/>
-            <a:ext cx="9326880" cy="320040"/>
-          </a:xfrm>
-          <a:prstGeom prst="rect">
-            <a:avLst/>
-          </a:prstGeom>
-          <a:noFill/>
-          <a:ln/>
-        </p:spPr>
-        <p:txBody>
-          <a:bodyPr wrap="square" lIns="0" tIns="0" rIns="0" bIns="0" rtlCol="0" anchor="ctr"/>
-          <a:lstStyle/>
-          <a:p>
-            <a:pPr indent="0" marL="0">
-              <a:buNone/>
-            </a:pPr>
-            <a:r>
-              <a:rPr lang="en-US" sz="1250" dirty="0">
-                <a:solidFill>
-                  <a:srgbClr val="1B2430"/>
-                </a:solidFill>
-                <a:latin typeface="Calibri" pitchFamily="34" charset="0"/>
-                <a:ea typeface="Calibri" pitchFamily="34" charset="-122"/>
-                <a:cs typeface="Calibri" pitchFamily="34" charset="-120"/>
-              </a:rPr>
-              <a:t>8 vcpus, 3938 MB, Haswell vPMU</a:t>
-            </a:r>
-            <a:endParaRPr lang="en-US" sz="1250" dirty="0"/>
-          </a:p>
-        </p:txBody>
-      </p:sp>
-      <p:sp>
-        <p:nvSpPr>
-          <p:cNvPr id="11" name="Text 9"/>
-          <p:cNvSpPr txBox="1"/>
-          <p:nvPr/>
-        </p:nvSpPr>
-        <p:spPr>
-          <a:xfrm>
-            <a:off x="548640" y="2880360"/>
-            <a:ext cx="1645920" cy="320040"/>
-          </a:xfrm>
-          <a:prstGeom prst="rect">
-            <a:avLst/>
-          </a:prstGeom>
-          <a:noFill/>
-          <a:ln/>
-        </p:spPr>
-        <p:txBody>
-          <a:bodyPr wrap="square" lIns="0" tIns="0" rIns="0" bIns="0" rtlCol="0" anchor="ctr"/>
-          <a:lstStyle/>
-          <a:p>
-            <a:pPr indent="0" marL="0">
-              <a:buNone/>
-            </a:pPr>
-            <a:r>
-              <a:rPr lang="en-US" sz="1200" b="1" dirty="0">
-                <a:solidFill>
-                  <a:srgbClr val="E8833A"/>
-                </a:solidFill>
-                <a:latin typeface="Courier New" pitchFamily="34" charset="0"/>
-                <a:ea typeface="Courier New" pitchFamily="34" charset="-122"/>
-                <a:cs typeface="Courier New" pitchFamily="34" charset="-120"/>
-              </a:rPr>
-              <a:t>python</a:t>
-            </a:r>
-            <a:endParaRPr lang="en-US" sz="1200" dirty="0"/>
-          </a:p>
-        </p:txBody>
-      </p:sp>
-      <p:sp>
-        <p:nvSpPr>
-          <p:cNvPr id="12" name="Text 10"/>
-          <p:cNvSpPr txBox="1"/>
-          <p:nvPr/>
-        </p:nvSpPr>
-        <p:spPr>
-          <a:xfrm>
-            <a:off x="2286000" y="2880360"/>
-            <a:ext cx="9326880" cy="320040"/>
-          </a:xfrm>
-          <a:prstGeom prst="rect">
-            <a:avLst/>
-          </a:prstGeom>
-          <a:noFill/>
-          <a:ln/>
-        </p:spPr>
-        <p:txBody>
-          <a:bodyPr wrap="square" lIns="0" tIns="0" rIns="0" bIns="0" rtlCol="0" anchor="ctr"/>
-          <a:lstStyle/>
-          <a:p>
-            <a:pPr indent="0" marL="0">
-              <a:buNone/>
-            </a:pPr>
-            <a:r>
-              <a:rPr lang="en-US" sz="1250" dirty="0">
-                <a:solidFill>
-                  <a:srgbClr val="1B2430"/>
-                </a:solidFill>
-                <a:latin typeface="Calibri" pitchFamily="34" charset="0"/>
-                <a:ea typeface="Calibri" pitchFamily="34" charset="-122"/>
-                <a:cs typeface="Calibri" pitchFamily="34" charset="-120"/>
-              </a:rPr>
-              <a:t>CPython 3.10.12  ·  pyperf 2.10.0  ·  perf 5.15.179</a:t>
-            </a:r>
-            <a:endParaRPr lang="en-US" sz="1250" dirty="0"/>
-          </a:p>
-        </p:txBody>
-      </p:sp>
-      <p:sp>
-        <p:nvSpPr>
-          <p:cNvPr id="13" name="Text 11"/>
-          <p:cNvSpPr txBox="1"/>
-          <p:nvPr/>
-        </p:nvSpPr>
-        <p:spPr>
-          <a:xfrm>
-            <a:off x="548640" y="3383280"/>
-            <a:ext cx="1645920" cy="320040"/>
-          </a:xfrm>
-          <a:prstGeom prst="rect">
-            <a:avLst/>
-          </a:prstGeom>
-          <a:noFill/>
-          <a:ln/>
-        </p:spPr>
-        <p:txBody>
-          <a:bodyPr wrap="square" lIns="0" tIns="0" rIns="0" bIns="0" rtlCol="0" anchor="ctr"/>
-          <a:lstStyle/>
-          <a:p>
-            <a:pPr indent="0" marL="0">
-              <a:buNone/>
-            </a:pPr>
-            <a:r>
-              <a:rPr lang="en-US" sz="1200" b="1" dirty="0">
-                <a:solidFill>
-                  <a:srgbClr val="E8833A"/>
-                </a:solidFill>
-                <a:latin typeface="Courier New" pitchFamily="34" charset="0"/>
-                <a:ea typeface="Courier New" pitchFamily="34" charset="-122"/>
-                <a:cs typeface="Courier New" pitchFamily="34" charset="-120"/>
-              </a:rPr>
-              <a:t>profilers</a:t>
-            </a:r>
-            <a:endParaRPr lang="en-US" sz="1200" dirty="0"/>
-          </a:p>
-        </p:txBody>
-      </p:sp>
-      <p:sp>
-        <p:nvSpPr>
-          <p:cNvPr id="14" name="Text 12"/>
-          <p:cNvSpPr txBox="1"/>
-          <p:nvPr/>
-        </p:nvSpPr>
-        <p:spPr>
-          <a:xfrm>
-            <a:off x="2286000" y="3383280"/>
-            <a:ext cx="9326880" cy="320040"/>
-          </a:xfrm>
-          <a:prstGeom prst="rect">
-            <a:avLst/>
-          </a:prstGeom>
-          <a:noFill/>
-          <a:ln/>
-        </p:spPr>
-        <p:txBody>
-          <a:bodyPr wrap="square" lIns="0" tIns="0" rIns="0" bIns="0" rtlCol="0" anchor="ctr"/>
-          <a:lstStyle/>
-          <a:p>
-            <a:pPr indent="0" marL="0">
-              <a:buNone/>
-            </a:pPr>
-            <a:r>
-              <a:rPr lang="en-US" sz="1250" dirty="0">
-                <a:solidFill>
-                  <a:srgbClr val="1B2430"/>
-                </a:solidFill>
-                <a:latin typeface="Calibri" pitchFamily="34" charset="0"/>
-                <a:ea typeface="Calibri" pitchFamily="34" charset="-122"/>
-                <a:cs typeface="Calibri" pitchFamily="34" charset="-120"/>
-              </a:rPr>
-              <a:t>py-spy 0.4.2 (Python frames)  ·  cProfile (call counts)</a:t>
-            </a:r>
-            <a:endParaRPr lang="en-US" sz="1250" dirty="0"/>
-          </a:p>
-        </p:txBody>
-      </p:sp>
-      <p:sp>
-        <p:nvSpPr>
-          <p:cNvPr id="15" name="Text 13"/>
-          <p:cNvSpPr txBox="1"/>
-          <p:nvPr/>
-        </p:nvSpPr>
-        <p:spPr>
-          <a:xfrm>
-            <a:off x="548640" y="3886200"/>
-            <a:ext cx="1645920" cy="320040"/>
-          </a:xfrm>
-          <a:prstGeom prst="rect">
-            <a:avLst/>
-          </a:prstGeom>
-          <a:noFill/>
-          <a:ln/>
-        </p:spPr>
-        <p:txBody>
-          <a:bodyPr wrap="square" lIns="0" tIns="0" rIns="0" bIns="0" rtlCol="0" anchor="ctr"/>
-          <a:lstStyle/>
-          <a:p>
-            <a:pPr indent="0" marL="0">
-              <a:buNone/>
-            </a:pPr>
-            <a:r>
-              <a:rPr lang="en-US" sz="1200" b="1" dirty="0">
-                <a:solidFill>
-                  <a:srgbClr val="E8833A"/>
-                </a:solidFill>
-                <a:latin typeface="Courier New" pitchFamily="34" charset="0"/>
-                <a:ea typeface="Courier New" pitchFamily="34" charset="-122"/>
-                <a:cs typeface="Courier New" pitchFamily="34" charset="-120"/>
-              </a:rPr>
-              <a:t>simulator</a:t>
-            </a:r>
-            <a:endParaRPr lang="en-US" sz="1200" dirty="0"/>
-          </a:p>
-        </p:txBody>
-      </p:sp>
-      <p:sp>
-        <p:nvSpPr>
-          <p:cNvPr id="16" name="Text 14"/>
-          <p:cNvSpPr txBox="1"/>
-          <p:nvPr/>
-        </p:nvSpPr>
-        <p:spPr>
-          <a:xfrm>
-            <a:off x="2286000" y="3886200"/>
-            <a:ext cx="9326880" cy="320040"/>
-          </a:xfrm>
-          <a:prstGeom prst="rect">
-            <a:avLst/>
-          </a:prstGeom>
-          <a:noFill/>
-          <a:ln/>
-        </p:spPr>
-        <p:txBody>
-          <a:bodyPr wrap="square" lIns="0" tIns="0" rIns="0" bIns="0" rtlCol="0" anchor="ctr"/>
-          <a:lstStyle/>
-          <a:p>
-            <a:pPr indent="0" marL="0">
-              <a:buNone/>
-            </a:pPr>
-            <a:r>
-              <a:rPr lang="en-US" sz="1250" dirty="0">
-                <a:solidFill>
-                  <a:srgbClr val="1B2430"/>
-                </a:solidFill>
-                <a:latin typeface="Calibri" pitchFamily="34" charset="0"/>
-                <a:ea typeface="Calibri" pitchFamily="34" charset="-122"/>
-                <a:cs typeface="Calibri" pitchFamily="34" charset="-120"/>
-              </a:rPr>
-              <a:t>Icarus Verilog 11.0</a:t>
-            </a:r>
-            <a:endParaRPr lang="en-US" sz="1250" dirty="0"/>
-          </a:p>
-        </p:txBody>
-      </p:sp>
-      <p:sp>
-        <p:nvSpPr>
-          <p:cNvPr id="17" name="Text 15"/>
-          <p:cNvSpPr txBox="1"/>
-          <p:nvPr/>
-        </p:nvSpPr>
-        <p:spPr>
-          <a:xfrm>
-            <a:off x="548640" y="4389120"/>
-            <a:ext cx="1645920" cy="320040"/>
-          </a:xfrm>
-          <a:prstGeom prst="rect">
-            <a:avLst/>
-          </a:prstGeom>
-          <a:noFill/>
-          <a:ln/>
-        </p:spPr>
-        <p:txBody>
-          <a:bodyPr wrap="square" lIns="0" tIns="0" rIns="0" bIns="0" rtlCol="0" anchor="ctr"/>
-          <a:lstStyle/>
-          <a:p>
-            <a:pPr indent="0" marL="0">
-              <a:buNone/>
-            </a:pPr>
-            <a:r>
-              <a:rPr lang="en-US" sz="1200" b="1" dirty="0">
-                <a:solidFill>
-                  <a:srgbClr val="E8833A"/>
-                </a:solidFill>
-                <a:latin typeface="Courier New" pitchFamily="34" charset="0"/>
-                <a:ea typeface="Courier New" pitchFamily="34" charset="-122"/>
-                <a:cs typeface="Courier New" pitchFamily="34" charset="-120"/>
-              </a:rPr>
-              <a:t>launch</a:t>
-            </a:r>
-            <a:endParaRPr lang="en-US" sz="1200" dirty="0"/>
-          </a:p>
-        </p:txBody>
-      </p:sp>
-      <p:sp>
-        <p:nvSpPr>
           <p:cNvPr id="18" name="Text 16"/>
-          <p:cNvSpPr txBox="1"/>
-          <p:nvPr/>
-        </p:nvSpPr>
-        <p:spPr>
-          <a:xfrm>
-            <a:off x="2286000" y="4389120"/>
-            <a:ext cx="9326880" cy="320040"/>
-          </a:xfrm>
-          <a:prstGeom prst="rect">
-            <a:avLst/>
-          </a:prstGeom>
-          <a:noFill/>
-          <a:ln/>
-        </p:spPr>
-        <p:txBody>
-          <a:bodyPr wrap="square" lIns="0" tIns="0" rIns="0" bIns="0" rtlCol="0" anchor="ctr"/>
-          <a:lstStyle/>
-          <a:p>
-            <a:pPr indent="0" marL="0">
-              <a:buNone/>
-            </a:pPr>
-            <a:r>
-              <a:rPr lang="en-US" sz="1250" dirty="0">
-                <a:solidFill>
-                  <a:srgbClr val="1B2430"/>
-                </a:solidFill>
-                <a:latin typeface="Calibri" pitchFamily="34" charset="0"/>
-                <a:ea typeface="Calibri" pitchFamily="34" charset="-122"/>
-                <a:cs typeface="Calibri" pitchFamily="34" charset="-120"/>
-              </a:rPr>
-              <a:t>-cpu host,pmu=on over a qcow2 overlay; image never written</a:t>
-            </a:r>
-            <a:endParaRPr lang="en-US" sz="1250" dirty="0"/>
-          </a:p>
-        </p:txBody>
-      </p:sp>
-      <p:sp>
-        <p:nvSpPr>
-          <p:cNvPr id="19" name="Text 17"/>
-          <p:cNvSpPr txBox="1"/>
-          <p:nvPr/>
-        </p:nvSpPr>
-        <p:spPr>
-          <a:xfrm>
-            <a:off x="548640" y="4892040"/>
-            <a:ext cx="1645920" cy="320040"/>
-          </a:xfrm>
-          <a:prstGeom prst="rect">
-            <a:avLst/>
-          </a:prstGeom>
-          <a:noFill/>
-          <a:ln/>
-        </p:spPr>
-        <p:txBody>
-          <a:bodyPr wrap="square" lIns="0" tIns="0" rIns="0" bIns="0" rtlCol="0" anchor="ctr"/>
-          <a:lstStyle/>
-          <a:p>
-            <a:pPr indent="0" marL="0">
-              <a:buNone/>
-            </a:pPr>
-            <a:r>
-              <a:rPr lang="en-US" sz="1200" b="1" dirty="0">
-                <a:solidFill>
-                  <a:srgbClr val="E8833A"/>
-                </a:solidFill>
-                <a:latin typeface="Courier New" pitchFamily="34" charset="0"/>
-                <a:ea typeface="Courier New" pitchFamily="34" charset="-122"/>
-                <a:cs typeface="Courier New" pitchFamily="34" charset="-120"/>
-              </a:rPr>
-              <a:t>method</a:t>
-            </a:r>
-            <a:endParaRPr lang="en-US" sz="1200" dirty="0"/>
-          </a:p>
-        </p:txBody>
-      </p:sp>
-      <p:sp>
-        <p:nvSpPr>
-          <p:cNvPr id="20" name="Text 18"/>
-          <p:cNvSpPr txBox="1"/>
-          <p:nvPr/>
-        </p:nvSpPr>
-        <p:spPr>
-          <a:xfrm>
-            <a:off x="2286000" y="4892040"/>
-            <a:ext cx="9326880" cy="320040"/>
-          </a:xfrm>
-          <a:prstGeom prst="rect">
-            <a:avLst/>
-          </a:prstGeom>
-          <a:noFill/>
-          <a:ln/>
-        </p:spPr>
-        <p:txBody>
-          <a:bodyPr wrap="square" lIns="0" tIns="0" rIns="0" bIns="0" rtlCol="0" anchor="ctr"/>
-          <a:lstStyle/>
-          <a:p>
-            <a:pPr indent="0" marL="0">
-              <a:buNone/>
-            </a:pPr>
-            <a:r>
-              <a:rPr lang="en-US" sz="1250" dirty="0">
-                <a:solidFill>
-                  <a:srgbClr val="1B2430"/>
-                </a:solidFill>
-                <a:latin typeface="Calibri" pitchFamily="34" charset="0"/>
-                <a:ea typeface="Calibri" pitchFamily="34" charset="-122"/>
-                <a:cs typeface="Calibri" pitchFamily="34" charset="-120"/>
-              </a:rPr>
-              <a:t>pyperf --rigorous, taskset -c 2, counters in groups of two</a:t>
-            </a:r>
-            <a:endParaRPr lang="en-US" sz="1250" dirty="0"/>
-          </a:p>
-        </p:txBody>
-      </p:sp>
-      <p:sp>
-        <p:nvSpPr>
-          <p:cNvPr id="21" name="Text 19"/>
-          <p:cNvSpPr txBox="1"/>
-          <p:nvPr/>
-        </p:nvSpPr>
-        <p:spPr>
-          <a:xfrm>
-            <a:off x="548640" y="5577840"/>
-            <a:ext cx="11091672" cy="548640"/>
-          </a:xfrm>
-          <a:prstGeom prst="rect">
-            <a:avLst/>
-          </a:prstGeom>
-          <a:noFill/>
-          <a:ln/>
-        </p:spPr>
-        <p:txBody>
-          <a:bodyPr wrap="square" lIns="0" tIns="0" rIns="0" bIns="0" rtlCol="0" anchor="ctr"/>
-          <a:lstStyle/>
-          <a:p>
-            <a:pPr indent="0" marL="0">
-              <a:lnSpc>
-                <a:spcPts val="1500"/>
-              </a:lnSpc>
-              <a:buNone/>
-            </a:pPr>
-            <a:r>
-              <a:rPr lang="en-US" sz="1150" i="1" dirty="0">
-                <a:solidFill>
-                  <a:srgbClr val="6B7785"/>
-                </a:solidFill>
-                <a:latin typeface="Calibri" pitchFamily="34" charset="0"/>
-                <a:ea typeface="Calibri" pitchFamily="34" charset="-122"/>
-                <a:cs typeface="Calibri" pitchFamily="34" charset="-120"/>
-              </a:rPr>
-              <a:t>pmu=on is what makes hardware counters work at all in the guest; without it perf answers &lt;not supported&gt; for every hardware event. Every table in both reports regenerates with ./script_pyflate.sh and ./script_raytrace.sh, run inside the guest.</a:t>
-            </a:r>
-            <a:endParaRPr lang="en-US" sz="1150" dirty="0"/>
-          </a:p>
-        </p:txBody>
-      </p:sp>
-      <p:sp>
-        <p:nvSpPr>
-          <p:cNvPr id="22" name="Text 20"/>
           <p:cNvSpPr txBox="1"/>
           <p:nvPr/>
         </p:nvSpPr>
@@ -18291,7 +18249,7 @@
       </p:sp>
       <p:sp>
         <p:nvSpPr>
-          <p:cNvPr id="23" name="Text 21"/>
+          <p:cNvPr id="19" name="Text 17"/>
           <p:cNvSpPr txBox="1"/>
           <p:nvPr/>
         </p:nvSpPr>
@@ -18386,7 +18344,7 @@
                 <a:ea typeface="Calibri" pitchFamily="34" charset="-122"/>
                 <a:cs typeface="Calibri" pitchFamily="34" charset="-120"/>
               </a:rPr>
-              <a:t>BACKUP B4</a:t>
+              <a:t>BACKUP B3</a:t>
             </a:r>
             <a:endParaRPr lang="en-US" sz="1100" dirty="0"/>
           </a:p>
@@ -18425,7 +18383,7 @@
                 <a:ea typeface="Cambria" pitchFamily="34" charset="-122"/>
                 <a:cs typeface="Cambria" pitchFamily="34" charset="-120"/>
               </a:rPr>
-              <a:t>Things we tried and rejected</a:t>
+              <a:t>Measurement environment</a:t>
             </a:r>
             <a:endParaRPr lang="en-US" sz="2900" dirty="0"/>
           </a:p>
@@ -18479,33 +18437,33 @@
         <p:spPr>
           <a:xfrm>
             <a:off x="548640" y="1371600"/>
-            <a:ext cx="320040" cy="274320"/>
-          </a:xfrm>
-          <a:prstGeom prst="rect">
-            <a:avLst/>
-          </a:prstGeom>
-          <a:noFill/>
-          <a:ln/>
-        </p:spPr>
-        <p:txBody>
-          <a:bodyPr wrap="square" lIns="0" tIns="0" rIns="0" bIns="0" rtlCol="0" anchor="ctr"/>
-          <a:lstStyle/>
-          <a:p>
-            <a:pPr indent="0" marL="0">
-              <a:buNone/>
-            </a:pPr>
-            <a:r>
-              <a:rPr lang="en-US" sz="1500" b="1" dirty="0">
-                <a:solidFill>
-                  <a:srgbClr val="B3543F"/>
-                </a:solidFill>
-                <a:latin typeface="Calibri" pitchFamily="34" charset="0"/>
-                <a:ea typeface="Calibri" pitchFamily="34" charset="-122"/>
-                <a:cs typeface="Calibri" pitchFamily="34" charset="-120"/>
-              </a:rPr>
-              <a:t>✗</a:t>
-            </a:r>
-            <a:endParaRPr lang="en-US" sz="1500" dirty="0"/>
+            <a:ext cx="1645920" cy="320040"/>
+          </a:xfrm>
+          <a:prstGeom prst="rect">
+            <a:avLst/>
+          </a:prstGeom>
+          <a:noFill/>
+          <a:ln/>
+        </p:spPr>
+        <p:txBody>
+          <a:bodyPr wrap="square" lIns="0" tIns="0" rIns="0" bIns="0" rtlCol="0" anchor="ctr"/>
+          <a:lstStyle/>
+          <a:p>
+            <a:pPr indent="0" marL="0">
+              <a:buNone/>
+            </a:pPr>
+            <a:r>
+              <a:rPr lang="en-US" sz="1200" b="1" dirty="0">
+                <a:solidFill>
+                  <a:srgbClr val="E8833A"/>
+                </a:solidFill>
+                <a:latin typeface="Courier New" pitchFamily="34" charset="0"/>
+                <a:ea typeface="Courier New" pitchFamily="34" charset="-122"/>
+                <a:cs typeface="Courier New" pitchFamily="34" charset="-120"/>
+              </a:rPr>
+              <a:t>where</a:t>
+            </a:r>
+            <a:endParaRPr lang="en-US" sz="1200" dirty="0"/>
           </a:p>
         </p:txBody>
       </p:sp>
@@ -18517,24 +18475,24 @@
         </p:nvSpPr>
         <p:spPr>
           <a:xfrm>
-            <a:off x="914400" y="1371600"/>
-            <a:ext cx="10607040" cy="274320"/>
-          </a:xfrm>
-          <a:prstGeom prst="rect">
-            <a:avLst/>
-          </a:prstGeom>
-          <a:noFill/>
-          <a:ln/>
-        </p:spPr>
-        <p:txBody>
-          <a:bodyPr wrap="square" lIns="0" tIns="0" rIns="0" bIns="0" rtlCol="0" anchor="ctr"/>
-          <a:lstStyle/>
-          <a:p>
-            <a:pPr indent="0" marL="0">
-              <a:buNone/>
-            </a:pPr>
-            <a:r>
-              <a:rPr lang="en-US" sz="1350" b="1" dirty="0">
+            <a:off x="2286000" y="1371600"/>
+            <a:ext cx="9326880" cy="320040"/>
+          </a:xfrm>
+          <a:prstGeom prst="rect">
+            <a:avLst/>
+          </a:prstGeom>
+          <a:noFill/>
+          <a:ln/>
+        </p:spPr>
+        <p:txBody>
+          <a:bodyPr wrap="square" lIns="0" tIns="0" rIns="0" bIns="0" rtlCol="0" anchor="ctr"/>
+          <a:lstStyle/>
+          <a:p>
+            <a:pPr indent="0" marL="0">
+              <a:buNone/>
+            </a:pPr>
+            <a:r>
+              <a:rPr lang="en-US" sz="1250" dirty="0">
                 <a:solidFill>
                   <a:srgbClr val="1B2430"/>
                 </a:solidFill>
@@ -18542,9 +18500,9 @@
                 <a:ea typeface="Calibri" pitchFamily="34" charset="-122"/>
                 <a:cs typeface="Calibri" pitchFamily="34" charset="-120"/>
               </a:rPr>
-              <a:t>A full 2^20-entry Huffman LUT</a:t>
-            </a:r>
-            <a:endParaRPr lang="en-US" sz="1350" dirty="0"/>
+              <a:t>INSIDE the course QEMU image — systemd-detect-virt = kvm</a:t>
+            </a:r>
+            <a:endParaRPr lang="en-US" sz="1250" dirty="0"/>
           </a:p>
         </p:txBody>
       </p:sp>
@@ -18556,8 +18514,554 @@
         </p:nvSpPr>
         <p:spPr>
           <a:xfrm>
-            <a:off x="914400" y="1664208"/>
-            <a:ext cx="10607040" cy="566928"/>
+            <a:off x="548640" y="1874520"/>
+            <a:ext cx="1645920" cy="320040"/>
+          </a:xfrm>
+          <a:prstGeom prst="rect">
+            <a:avLst/>
+          </a:prstGeom>
+          <a:noFill/>
+          <a:ln/>
+        </p:spPr>
+        <p:txBody>
+          <a:bodyPr wrap="square" lIns="0" tIns="0" rIns="0" bIns="0" rtlCol="0" anchor="ctr"/>
+          <a:lstStyle/>
+          <a:p>
+            <a:pPr indent="0" marL="0">
+              <a:buNone/>
+            </a:pPr>
+            <a:r>
+              <a:rPr lang="en-US" sz="1200" b="1" dirty="0">
+                <a:solidFill>
+                  <a:srgbClr val="E8833A"/>
+                </a:solidFill>
+                <a:latin typeface="Courier New" pitchFamily="34" charset="0"/>
+                <a:ea typeface="Courier New" pitchFamily="34" charset="-122"/>
+                <a:cs typeface="Courier New" pitchFamily="34" charset="-120"/>
+              </a:rPr>
+              <a:t>distro</a:t>
+            </a:r>
+            <a:endParaRPr lang="en-US" sz="1200" dirty="0"/>
+          </a:p>
+        </p:txBody>
+      </p:sp>
+      <p:sp>
+        <p:nvSpPr>
+          <p:cNvPr id="8" name="Text 6"/>
+          <p:cNvSpPr txBox="1"/>
+          <p:nvPr/>
+        </p:nvSpPr>
+        <p:spPr>
+          <a:xfrm>
+            <a:off x="2286000" y="1874520"/>
+            <a:ext cx="9326880" cy="320040"/>
+          </a:xfrm>
+          <a:prstGeom prst="rect">
+            <a:avLst/>
+          </a:prstGeom>
+          <a:noFill/>
+          <a:ln/>
+        </p:spPr>
+        <p:txBody>
+          <a:bodyPr wrap="square" lIns="0" tIns="0" rIns="0" bIns="0" rtlCol="0" anchor="ctr"/>
+          <a:lstStyle/>
+          <a:p>
+            <a:pPr indent="0" marL="0">
+              <a:buNone/>
+            </a:pPr>
+            <a:r>
+              <a:rPr lang="en-US" sz="1250" dirty="0">
+                <a:solidFill>
+                  <a:srgbClr val="1B2430"/>
+                </a:solidFill>
+                <a:latin typeface="Calibri" pitchFamily="34" charset="0"/>
+                <a:ea typeface="Calibri" pitchFamily="34" charset="-122"/>
+                <a:cs typeface="Calibri" pitchFamily="34" charset="-120"/>
+              </a:rPr>
+              <a:t>Ubuntu 22.04.5 LTS, kernel 5.15.0-1080-kvm</a:t>
+            </a:r>
+            <a:endParaRPr lang="en-US" sz="1250" dirty="0"/>
+          </a:p>
+        </p:txBody>
+      </p:sp>
+      <p:sp>
+        <p:nvSpPr>
+          <p:cNvPr id="9" name="Text 7"/>
+          <p:cNvSpPr txBox="1"/>
+          <p:nvPr/>
+        </p:nvSpPr>
+        <p:spPr>
+          <a:xfrm>
+            <a:off x="548640" y="2377440"/>
+            <a:ext cx="1645920" cy="320040"/>
+          </a:xfrm>
+          <a:prstGeom prst="rect">
+            <a:avLst/>
+          </a:prstGeom>
+          <a:noFill/>
+          <a:ln/>
+        </p:spPr>
+        <p:txBody>
+          <a:bodyPr wrap="square" lIns="0" tIns="0" rIns="0" bIns="0" rtlCol="0" anchor="ctr"/>
+          <a:lstStyle/>
+          <a:p>
+            <a:pPr indent="0" marL="0">
+              <a:buNone/>
+            </a:pPr>
+            <a:r>
+              <a:rPr lang="en-US" sz="1200" b="1" dirty="0">
+                <a:solidFill>
+                  <a:srgbClr val="E8833A"/>
+                </a:solidFill>
+                <a:latin typeface="Courier New" pitchFamily="34" charset="0"/>
+                <a:ea typeface="Courier New" pitchFamily="34" charset="-122"/>
+                <a:cs typeface="Courier New" pitchFamily="34" charset="-120"/>
+              </a:rPr>
+              <a:t>guest</a:t>
+            </a:r>
+            <a:endParaRPr lang="en-US" sz="1200" dirty="0"/>
+          </a:p>
+        </p:txBody>
+      </p:sp>
+      <p:sp>
+        <p:nvSpPr>
+          <p:cNvPr id="10" name="Text 8"/>
+          <p:cNvSpPr txBox="1"/>
+          <p:nvPr/>
+        </p:nvSpPr>
+        <p:spPr>
+          <a:xfrm>
+            <a:off x="2286000" y="2377440"/>
+            <a:ext cx="9326880" cy="320040"/>
+          </a:xfrm>
+          <a:prstGeom prst="rect">
+            <a:avLst/>
+          </a:prstGeom>
+          <a:noFill/>
+          <a:ln/>
+        </p:spPr>
+        <p:txBody>
+          <a:bodyPr wrap="square" lIns="0" tIns="0" rIns="0" bIns="0" rtlCol="0" anchor="ctr"/>
+          <a:lstStyle/>
+          <a:p>
+            <a:pPr indent="0" marL="0">
+              <a:buNone/>
+            </a:pPr>
+            <a:r>
+              <a:rPr lang="en-US" sz="1250" dirty="0">
+                <a:solidFill>
+                  <a:srgbClr val="1B2430"/>
+                </a:solidFill>
+                <a:latin typeface="Calibri" pitchFamily="34" charset="0"/>
+                <a:ea typeface="Calibri" pitchFamily="34" charset="-122"/>
+                <a:cs typeface="Calibri" pitchFamily="34" charset="-120"/>
+              </a:rPr>
+              <a:t>8 vcpus, 3938 MB, Haswell vPMU</a:t>
+            </a:r>
+            <a:endParaRPr lang="en-US" sz="1250" dirty="0"/>
+          </a:p>
+        </p:txBody>
+      </p:sp>
+      <p:sp>
+        <p:nvSpPr>
+          <p:cNvPr id="11" name="Text 9"/>
+          <p:cNvSpPr txBox="1"/>
+          <p:nvPr/>
+        </p:nvSpPr>
+        <p:spPr>
+          <a:xfrm>
+            <a:off x="548640" y="2880360"/>
+            <a:ext cx="1645920" cy="320040"/>
+          </a:xfrm>
+          <a:prstGeom prst="rect">
+            <a:avLst/>
+          </a:prstGeom>
+          <a:noFill/>
+          <a:ln/>
+        </p:spPr>
+        <p:txBody>
+          <a:bodyPr wrap="square" lIns="0" tIns="0" rIns="0" bIns="0" rtlCol="0" anchor="ctr"/>
+          <a:lstStyle/>
+          <a:p>
+            <a:pPr indent="0" marL="0">
+              <a:buNone/>
+            </a:pPr>
+            <a:r>
+              <a:rPr lang="en-US" sz="1200" b="1" dirty="0">
+                <a:solidFill>
+                  <a:srgbClr val="E8833A"/>
+                </a:solidFill>
+                <a:latin typeface="Courier New" pitchFamily="34" charset="0"/>
+                <a:ea typeface="Courier New" pitchFamily="34" charset="-122"/>
+                <a:cs typeface="Courier New" pitchFamily="34" charset="-120"/>
+              </a:rPr>
+              <a:t>python</a:t>
+            </a:r>
+            <a:endParaRPr lang="en-US" sz="1200" dirty="0"/>
+          </a:p>
+        </p:txBody>
+      </p:sp>
+      <p:sp>
+        <p:nvSpPr>
+          <p:cNvPr id="12" name="Text 10"/>
+          <p:cNvSpPr txBox="1"/>
+          <p:nvPr/>
+        </p:nvSpPr>
+        <p:spPr>
+          <a:xfrm>
+            <a:off x="2286000" y="2880360"/>
+            <a:ext cx="9326880" cy="320040"/>
+          </a:xfrm>
+          <a:prstGeom prst="rect">
+            <a:avLst/>
+          </a:prstGeom>
+          <a:noFill/>
+          <a:ln/>
+        </p:spPr>
+        <p:txBody>
+          <a:bodyPr wrap="square" lIns="0" tIns="0" rIns="0" bIns="0" rtlCol="0" anchor="ctr"/>
+          <a:lstStyle/>
+          <a:p>
+            <a:pPr indent="0" marL="0">
+              <a:buNone/>
+            </a:pPr>
+            <a:r>
+              <a:rPr lang="en-US" sz="1250" dirty="0">
+                <a:solidFill>
+                  <a:srgbClr val="1B2430"/>
+                </a:solidFill>
+                <a:latin typeface="Calibri" pitchFamily="34" charset="0"/>
+                <a:ea typeface="Calibri" pitchFamily="34" charset="-122"/>
+                <a:cs typeface="Calibri" pitchFamily="34" charset="-120"/>
+              </a:rPr>
+              <a:t>CPython 3.10.12  ·  pyperf 2.10.0  ·  perf 5.15.179</a:t>
+            </a:r>
+            <a:endParaRPr lang="en-US" sz="1250" dirty="0"/>
+          </a:p>
+        </p:txBody>
+      </p:sp>
+      <p:sp>
+        <p:nvSpPr>
+          <p:cNvPr id="13" name="Text 11"/>
+          <p:cNvSpPr txBox="1"/>
+          <p:nvPr/>
+        </p:nvSpPr>
+        <p:spPr>
+          <a:xfrm>
+            <a:off x="548640" y="3383280"/>
+            <a:ext cx="1645920" cy="320040"/>
+          </a:xfrm>
+          <a:prstGeom prst="rect">
+            <a:avLst/>
+          </a:prstGeom>
+          <a:noFill/>
+          <a:ln/>
+        </p:spPr>
+        <p:txBody>
+          <a:bodyPr wrap="square" lIns="0" tIns="0" rIns="0" bIns="0" rtlCol="0" anchor="ctr"/>
+          <a:lstStyle/>
+          <a:p>
+            <a:pPr indent="0" marL="0">
+              <a:buNone/>
+            </a:pPr>
+            <a:r>
+              <a:rPr lang="en-US" sz="1200" b="1" dirty="0">
+                <a:solidFill>
+                  <a:srgbClr val="E8833A"/>
+                </a:solidFill>
+                <a:latin typeface="Courier New" pitchFamily="34" charset="0"/>
+                <a:ea typeface="Courier New" pitchFamily="34" charset="-122"/>
+                <a:cs typeface="Courier New" pitchFamily="34" charset="-120"/>
+              </a:rPr>
+              <a:t>profilers</a:t>
+            </a:r>
+            <a:endParaRPr lang="en-US" sz="1200" dirty="0"/>
+          </a:p>
+        </p:txBody>
+      </p:sp>
+      <p:sp>
+        <p:nvSpPr>
+          <p:cNvPr id="14" name="Text 12"/>
+          <p:cNvSpPr txBox="1"/>
+          <p:nvPr/>
+        </p:nvSpPr>
+        <p:spPr>
+          <a:xfrm>
+            <a:off x="2286000" y="3383280"/>
+            <a:ext cx="9326880" cy="320040"/>
+          </a:xfrm>
+          <a:prstGeom prst="rect">
+            <a:avLst/>
+          </a:prstGeom>
+          <a:noFill/>
+          <a:ln/>
+        </p:spPr>
+        <p:txBody>
+          <a:bodyPr wrap="square" lIns="0" tIns="0" rIns="0" bIns="0" rtlCol="0" anchor="ctr"/>
+          <a:lstStyle/>
+          <a:p>
+            <a:pPr indent="0" marL="0">
+              <a:buNone/>
+            </a:pPr>
+            <a:r>
+              <a:rPr lang="en-US" sz="1250" dirty="0">
+                <a:solidFill>
+                  <a:srgbClr val="1B2430"/>
+                </a:solidFill>
+                <a:latin typeface="Calibri" pitchFamily="34" charset="0"/>
+                <a:ea typeface="Calibri" pitchFamily="34" charset="-122"/>
+                <a:cs typeface="Calibri" pitchFamily="34" charset="-120"/>
+              </a:rPr>
+              <a:t>py-spy 0.4.2 (Python frames)  ·  cProfile (call counts)</a:t>
+            </a:r>
+            <a:endParaRPr lang="en-US" sz="1250" dirty="0"/>
+          </a:p>
+        </p:txBody>
+      </p:sp>
+      <p:sp>
+        <p:nvSpPr>
+          <p:cNvPr id="15" name="Text 13"/>
+          <p:cNvSpPr txBox="1"/>
+          <p:nvPr/>
+        </p:nvSpPr>
+        <p:spPr>
+          <a:xfrm>
+            <a:off x="548640" y="3886200"/>
+            <a:ext cx="1645920" cy="320040"/>
+          </a:xfrm>
+          <a:prstGeom prst="rect">
+            <a:avLst/>
+          </a:prstGeom>
+          <a:noFill/>
+          <a:ln/>
+        </p:spPr>
+        <p:txBody>
+          <a:bodyPr wrap="square" lIns="0" tIns="0" rIns="0" bIns="0" rtlCol="0" anchor="ctr"/>
+          <a:lstStyle/>
+          <a:p>
+            <a:pPr indent="0" marL="0">
+              <a:buNone/>
+            </a:pPr>
+            <a:r>
+              <a:rPr lang="en-US" sz="1200" b="1" dirty="0">
+                <a:solidFill>
+                  <a:srgbClr val="E8833A"/>
+                </a:solidFill>
+                <a:latin typeface="Courier New" pitchFamily="34" charset="0"/>
+                <a:ea typeface="Courier New" pitchFamily="34" charset="-122"/>
+                <a:cs typeface="Courier New" pitchFamily="34" charset="-120"/>
+              </a:rPr>
+              <a:t>simulator</a:t>
+            </a:r>
+            <a:endParaRPr lang="en-US" sz="1200" dirty="0"/>
+          </a:p>
+        </p:txBody>
+      </p:sp>
+      <p:sp>
+        <p:nvSpPr>
+          <p:cNvPr id="16" name="Text 14"/>
+          <p:cNvSpPr txBox="1"/>
+          <p:nvPr/>
+        </p:nvSpPr>
+        <p:spPr>
+          <a:xfrm>
+            <a:off x="2286000" y="3886200"/>
+            <a:ext cx="9326880" cy="320040"/>
+          </a:xfrm>
+          <a:prstGeom prst="rect">
+            <a:avLst/>
+          </a:prstGeom>
+          <a:noFill/>
+          <a:ln/>
+        </p:spPr>
+        <p:txBody>
+          <a:bodyPr wrap="square" lIns="0" tIns="0" rIns="0" bIns="0" rtlCol="0" anchor="ctr"/>
+          <a:lstStyle/>
+          <a:p>
+            <a:pPr indent="0" marL="0">
+              <a:buNone/>
+            </a:pPr>
+            <a:r>
+              <a:rPr lang="en-US" sz="1250" dirty="0">
+                <a:solidFill>
+                  <a:srgbClr val="1B2430"/>
+                </a:solidFill>
+                <a:latin typeface="Calibri" pitchFamily="34" charset="0"/>
+                <a:ea typeface="Calibri" pitchFamily="34" charset="-122"/>
+                <a:cs typeface="Calibri" pitchFamily="34" charset="-120"/>
+              </a:rPr>
+              <a:t>Icarus Verilog 11.0</a:t>
+            </a:r>
+            <a:endParaRPr lang="en-US" sz="1250" dirty="0"/>
+          </a:p>
+        </p:txBody>
+      </p:sp>
+      <p:sp>
+        <p:nvSpPr>
+          <p:cNvPr id="17" name="Text 15"/>
+          <p:cNvSpPr txBox="1"/>
+          <p:nvPr/>
+        </p:nvSpPr>
+        <p:spPr>
+          <a:xfrm>
+            <a:off x="548640" y="4389120"/>
+            <a:ext cx="1645920" cy="320040"/>
+          </a:xfrm>
+          <a:prstGeom prst="rect">
+            <a:avLst/>
+          </a:prstGeom>
+          <a:noFill/>
+          <a:ln/>
+        </p:spPr>
+        <p:txBody>
+          <a:bodyPr wrap="square" lIns="0" tIns="0" rIns="0" bIns="0" rtlCol="0" anchor="ctr"/>
+          <a:lstStyle/>
+          <a:p>
+            <a:pPr indent="0" marL="0">
+              <a:buNone/>
+            </a:pPr>
+            <a:r>
+              <a:rPr lang="en-US" sz="1200" b="1" dirty="0">
+                <a:solidFill>
+                  <a:srgbClr val="E8833A"/>
+                </a:solidFill>
+                <a:latin typeface="Courier New" pitchFamily="34" charset="0"/>
+                <a:ea typeface="Courier New" pitchFamily="34" charset="-122"/>
+                <a:cs typeface="Courier New" pitchFamily="34" charset="-120"/>
+              </a:rPr>
+              <a:t>launch</a:t>
+            </a:r>
+            <a:endParaRPr lang="en-US" sz="1200" dirty="0"/>
+          </a:p>
+        </p:txBody>
+      </p:sp>
+      <p:sp>
+        <p:nvSpPr>
+          <p:cNvPr id="18" name="Text 16"/>
+          <p:cNvSpPr txBox="1"/>
+          <p:nvPr/>
+        </p:nvSpPr>
+        <p:spPr>
+          <a:xfrm>
+            <a:off x="2286000" y="4389120"/>
+            <a:ext cx="9326880" cy="320040"/>
+          </a:xfrm>
+          <a:prstGeom prst="rect">
+            <a:avLst/>
+          </a:prstGeom>
+          <a:noFill/>
+          <a:ln/>
+        </p:spPr>
+        <p:txBody>
+          <a:bodyPr wrap="square" lIns="0" tIns="0" rIns="0" bIns="0" rtlCol="0" anchor="ctr"/>
+          <a:lstStyle/>
+          <a:p>
+            <a:pPr indent="0" marL="0">
+              <a:buNone/>
+            </a:pPr>
+            <a:r>
+              <a:rPr lang="en-US" sz="1250" dirty="0">
+                <a:solidFill>
+                  <a:srgbClr val="1B2430"/>
+                </a:solidFill>
+                <a:latin typeface="Calibri" pitchFamily="34" charset="0"/>
+                <a:ea typeface="Calibri" pitchFamily="34" charset="-122"/>
+                <a:cs typeface="Calibri" pitchFamily="34" charset="-120"/>
+              </a:rPr>
+              <a:t>-cpu host,pmu=on over a qcow2 overlay; image never written</a:t>
+            </a:r>
+            <a:endParaRPr lang="en-US" sz="1250" dirty="0"/>
+          </a:p>
+        </p:txBody>
+      </p:sp>
+      <p:sp>
+        <p:nvSpPr>
+          <p:cNvPr id="19" name="Text 17"/>
+          <p:cNvSpPr txBox="1"/>
+          <p:nvPr/>
+        </p:nvSpPr>
+        <p:spPr>
+          <a:xfrm>
+            <a:off x="548640" y="4892040"/>
+            <a:ext cx="1645920" cy="320040"/>
+          </a:xfrm>
+          <a:prstGeom prst="rect">
+            <a:avLst/>
+          </a:prstGeom>
+          <a:noFill/>
+          <a:ln/>
+        </p:spPr>
+        <p:txBody>
+          <a:bodyPr wrap="square" lIns="0" tIns="0" rIns="0" bIns="0" rtlCol="0" anchor="ctr"/>
+          <a:lstStyle/>
+          <a:p>
+            <a:pPr indent="0" marL="0">
+              <a:buNone/>
+            </a:pPr>
+            <a:r>
+              <a:rPr lang="en-US" sz="1200" b="1" dirty="0">
+                <a:solidFill>
+                  <a:srgbClr val="E8833A"/>
+                </a:solidFill>
+                <a:latin typeface="Courier New" pitchFamily="34" charset="0"/>
+                <a:ea typeface="Courier New" pitchFamily="34" charset="-122"/>
+                <a:cs typeface="Courier New" pitchFamily="34" charset="-120"/>
+              </a:rPr>
+              <a:t>method</a:t>
+            </a:r>
+            <a:endParaRPr lang="en-US" sz="1200" dirty="0"/>
+          </a:p>
+        </p:txBody>
+      </p:sp>
+      <p:sp>
+        <p:nvSpPr>
+          <p:cNvPr id="20" name="Text 18"/>
+          <p:cNvSpPr txBox="1"/>
+          <p:nvPr/>
+        </p:nvSpPr>
+        <p:spPr>
+          <a:xfrm>
+            <a:off x="2286000" y="4892040"/>
+            <a:ext cx="9326880" cy="320040"/>
+          </a:xfrm>
+          <a:prstGeom prst="rect">
+            <a:avLst/>
+          </a:prstGeom>
+          <a:noFill/>
+          <a:ln/>
+        </p:spPr>
+        <p:txBody>
+          <a:bodyPr wrap="square" lIns="0" tIns="0" rIns="0" bIns="0" rtlCol="0" anchor="ctr"/>
+          <a:lstStyle/>
+          <a:p>
+            <a:pPr indent="0" marL="0">
+              <a:buNone/>
+            </a:pPr>
+            <a:r>
+              <a:rPr lang="en-US" sz="1250" dirty="0">
+                <a:solidFill>
+                  <a:srgbClr val="1B2430"/>
+                </a:solidFill>
+                <a:latin typeface="Calibri" pitchFamily="34" charset="0"/>
+                <a:ea typeface="Calibri" pitchFamily="34" charset="-122"/>
+                <a:cs typeface="Calibri" pitchFamily="34" charset="-120"/>
+              </a:rPr>
+              <a:t>pyperf --rigorous, taskset -c 2, counters in groups of two</a:t>
+            </a:r>
+            <a:endParaRPr lang="en-US" sz="1250" dirty="0"/>
+          </a:p>
+        </p:txBody>
+      </p:sp>
+      <p:sp>
+        <p:nvSpPr>
+          <p:cNvPr id="21" name="Text 19"/>
+          <p:cNvSpPr txBox="1"/>
+          <p:nvPr/>
+        </p:nvSpPr>
+        <p:spPr>
+          <a:xfrm>
+            <a:off x="548640" y="5577840"/>
+            <a:ext cx="11091672" cy="548640"/>
           </a:xfrm>
           <a:prstGeom prst="rect">
             <a:avLst/>
@@ -18571,12 +19075,12 @@
           <a:p>
             <a:pPr indent="0" marL="0">
               <a:lnSpc>
-                <a:spcPts val="1600"/>
+                <a:spcPts val="1500"/>
               </a:lnSpc>
               <a:buNone/>
             </a:pPr>
             <a:r>
-              <a:rPr lang="en-US" sz="1200" dirty="0">
+              <a:rPr lang="en-US" sz="1150" i="1" dirty="0">
                 <a:solidFill>
                   <a:srgbClr val="6B7785"/>
                 </a:solidFill>
@@ -18584,495 +19088,15 @@
                 <a:ea typeface="Calibri" pitchFamily="34" charset="-122"/>
                 <a:cs typeface="Calibri" pitchFamily="34" charset="-120"/>
               </a:rPr>
-              <a:t>Would decode in one step, but bzip2 allows 6 tables of length ≤ 20 — about 6M entries to BUILD per block, for a block that decodes 148k symbols. Table construction costs more than it saves.</a:t>
-            </a:r>
-            <a:endParaRPr lang="en-US" sz="1200" dirty="0"/>
-          </a:p>
-        </p:txBody>
-      </p:sp>
-      <p:sp>
-        <p:nvSpPr>
-          <p:cNvPr id="8" name="Text 6"/>
-          <p:cNvSpPr txBox="1"/>
-          <p:nvPr/>
-        </p:nvSpPr>
-        <p:spPr>
-          <a:xfrm>
-            <a:off x="548640" y="2331720"/>
-            <a:ext cx="320040" cy="274320"/>
-          </a:xfrm>
-          <a:prstGeom prst="rect">
-            <a:avLst/>
-          </a:prstGeom>
-          <a:noFill/>
-          <a:ln/>
-        </p:spPr>
-        <p:txBody>
-          <a:bodyPr wrap="square" lIns="0" tIns="0" rIns="0" bIns="0" rtlCol="0" anchor="ctr"/>
-          <a:lstStyle/>
-          <a:p>
-            <a:pPr indent="0" marL="0">
-              <a:buNone/>
-            </a:pPr>
-            <a:r>
-              <a:rPr lang="en-US" sz="1500" b="1" dirty="0">
-                <a:solidFill>
-                  <a:srgbClr val="B3543F"/>
-                </a:solidFill>
-                <a:latin typeface="Calibri" pitchFamily="34" charset="0"/>
-                <a:ea typeface="Calibri" pitchFamily="34" charset="-122"/>
-                <a:cs typeface="Calibri" pitchFamily="34" charset="-120"/>
-              </a:rPr>
-              <a:t>✗</a:t>
-            </a:r>
-            <a:endParaRPr lang="en-US" sz="1500" dirty="0"/>
-          </a:p>
-        </p:txBody>
-      </p:sp>
-      <p:sp>
-        <p:nvSpPr>
-          <p:cNvPr id="9" name="Text 7"/>
-          <p:cNvSpPr txBox="1"/>
-          <p:nvPr/>
-        </p:nvSpPr>
-        <p:spPr>
-          <a:xfrm>
-            <a:off x="914400" y="2331720"/>
-            <a:ext cx="10607040" cy="274320"/>
-          </a:xfrm>
-          <a:prstGeom prst="rect">
-            <a:avLst/>
-          </a:prstGeom>
-          <a:noFill/>
-          <a:ln/>
-        </p:spPr>
-        <p:txBody>
-          <a:bodyPr wrap="square" lIns="0" tIns="0" rIns="0" bIns="0" rtlCol="0" anchor="ctr"/>
-          <a:lstStyle/>
-          <a:p>
-            <a:pPr indent="0" marL="0">
-              <a:buNone/>
-            </a:pPr>
-            <a:r>
-              <a:rPr lang="en-US" sz="1350" b="1" dirty="0">
-                <a:solidFill>
-                  <a:srgbClr val="1B2430"/>
-                </a:solidFill>
-                <a:latin typeface="Calibri" pitchFamily="34" charset="0"/>
-                <a:ea typeface="Calibri" pitchFamily="34" charset="-122"/>
-                <a:cs typeface="Calibri" pitchFamily="34" charset="-120"/>
-              </a:rPr>
-              <a:t>numpy for the inverse BWT</a:t>
-            </a:r>
-            <a:endParaRPr lang="en-US" sz="1350" dirty="0"/>
-          </a:p>
-        </p:txBody>
-      </p:sp>
-      <p:sp>
-        <p:nvSpPr>
-          <p:cNvPr id="10" name="Text 8"/>
-          <p:cNvSpPr txBox="1"/>
-          <p:nvPr/>
-        </p:nvSpPr>
-        <p:spPr>
-          <a:xfrm>
-            <a:off x="914400" y="2624328"/>
-            <a:ext cx="10607040" cy="566928"/>
-          </a:xfrm>
-          <a:prstGeom prst="rect">
-            <a:avLst/>
-          </a:prstGeom>
-          <a:noFill/>
-          <a:ln/>
-        </p:spPr>
-        <p:txBody>
-          <a:bodyPr wrap="square" lIns="0" tIns="0" rIns="0" bIns="0" rtlCol="0" anchor="ctr"/>
-          <a:lstStyle/>
-          <a:p>
-            <a:pPr indent="0" marL="0">
-              <a:lnSpc>
-                <a:spcPts val="1600"/>
-              </a:lnSpc>
-              <a:buNone/>
-            </a:pPr>
-            <a:r>
-              <a:rPr lang="en-US" sz="1200" dirty="0">
-                <a:solidFill>
-                  <a:srgbClr val="6B7785"/>
-                </a:solidFill>
-                <a:latin typeface="Calibri" pitchFamily="34" charset="0"/>
-                <a:ea typeface="Calibri" pitchFamily="34" charset="-122"/>
-                <a:cs typeface="Calibri" pitchFamily="34" charset="-120"/>
-              </a:rPr>
-              <a:t>An added dependency for a stage the ablation shows is worth ~3%.</a:t>
-            </a:r>
-            <a:endParaRPr lang="en-US" sz="1200" dirty="0"/>
-          </a:p>
-        </p:txBody>
-      </p:sp>
-      <p:sp>
-        <p:nvSpPr>
-          <p:cNvPr id="11" name="Text 9"/>
-          <p:cNvSpPr txBox="1"/>
-          <p:nvPr/>
-        </p:nvSpPr>
-        <p:spPr>
-          <a:xfrm>
-            <a:off x="548640" y="3291840"/>
-            <a:ext cx="320040" cy="274320"/>
-          </a:xfrm>
-          <a:prstGeom prst="rect">
-            <a:avLst/>
-          </a:prstGeom>
-          <a:noFill/>
-          <a:ln/>
-        </p:spPr>
-        <p:txBody>
-          <a:bodyPr wrap="square" lIns="0" tIns="0" rIns="0" bIns="0" rtlCol="0" anchor="ctr"/>
-          <a:lstStyle/>
-          <a:p>
-            <a:pPr indent="0" marL="0">
-              <a:buNone/>
-            </a:pPr>
-            <a:r>
-              <a:rPr lang="en-US" sz="1500" b="1" dirty="0">
-                <a:solidFill>
-                  <a:srgbClr val="B3543F"/>
-                </a:solidFill>
-                <a:latin typeface="Calibri" pitchFamily="34" charset="0"/>
-                <a:ea typeface="Calibri" pitchFamily="34" charset="-122"/>
-                <a:cs typeface="Calibri" pitchFamily="34" charset="-120"/>
-              </a:rPr>
-              <a:t>✗</a:t>
-            </a:r>
-            <a:endParaRPr lang="en-US" sz="1500" dirty="0"/>
-          </a:p>
-        </p:txBody>
-      </p:sp>
-      <p:sp>
-        <p:nvSpPr>
-          <p:cNvPr id="12" name="Text 10"/>
-          <p:cNvSpPr txBox="1"/>
-          <p:nvPr/>
-        </p:nvSpPr>
-        <p:spPr>
-          <a:xfrm>
-            <a:off x="914400" y="3291840"/>
-            <a:ext cx="10607040" cy="274320"/>
-          </a:xfrm>
-          <a:prstGeom prst="rect">
-            <a:avLst/>
-          </a:prstGeom>
-          <a:noFill/>
-          <a:ln/>
-        </p:spPr>
-        <p:txBody>
-          <a:bodyPr wrap="square" lIns="0" tIns="0" rIns="0" bIns="0" rtlCol="0" anchor="ctr"/>
-          <a:lstStyle/>
-          <a:p>
-            <a:pPr indent="0" marL="0">
-              <a:buNone/>
-            </a:pPr>
-            <a:r>
-              <a:rPr lang="en-US" sz="1350" b="1" dirty="0">
-                <a:solidFill>
-                  <a:srgbClr val="1B2430"/>
-                </a:solidFill>
-                <a:latin typeface="Calibri" pitchFamily="34" charset="0"/>
-                <a:ea typeface="Calibri" pitchFamily="34" charset="-122"/>
-                <a:cs typeface="Calibri" pitchFamily="34" charset="-120"/>
-              </a:rPr>
-              <a:t>A BVH for raytrace</a:t>
-            </a:r>
-            <a:endParaRPr lang="en-US" sz="1350" dirty="0"/>
-          </a:p>
-        </p:txBody>
-      </p:sp>
-      <p:sp>
-        <p:nvSpPr>
-          <p:cNvPr id="13" name="Text 11"/>
-          <p:cNvSpPr txBox="1"/>
-          <p:nvPr/>
-        </p:nvSpPr>
-        <p:spPr>
-          <a:xfrm>
-            <a:off x="914400" y="3584448"/>
-            <a:ext cx="10607040" cy="566928"/>
-          </a:xfrm>
-          <a:prstGeom prst="rect">
-            <a:avLst/>
-          </a:prstGeom>
-          <a:noFill/>
-          <a:ln/>
-        </p:spPr>
-        <p:txBody>
-          <a:bodyPr wrap="square" lIns="0" tIns="0" rIns="0" bIns="0" rtlCol="0" anchor="ctr"/>
-          <a:lstStyle/>
-          <a:p>
-            <a:pPr indent="0" marL="0">
-              <a:lnSpc>
-                <a:spcPts val="1600"/>
-              </a:lnSpc>
-              <a:buNone/>
-            </a:pPr>
-            <a:r>
-              <a:rPr lang="en-US" sz="1200" dirty="0">
-                <a:solidFill>
-                  <a:srgbClr val="6B7785"/>
-                </a:solidFill>
-                <a:latin typeface="Calibri" pitchFamily="34" charset="0"/>
-                <a:ea typeface="Calibri" pitchFamily="34" charset="-122"/>
-                <a:cs typeface="Calibri" pitchFamily="34" charset="-120"/>
-              </a:rPr>
-              <a:t>The first thing a graphics person proposes. With 8 objects, traversal overhead exceeds the 8 intersection tests it would save.</a:t>
-            </a:r>
-            <a:endParaRPr lang="en-US" sz="1200" dirty="0"/>
-          </a:p>
-        </p:txBody>
-      </p:sp>
-      <p:sp>
-        <p:nvSpPr>
-          <p:cNvPr id="14" name="Text 12"/>
-          <p:cNvSpPr txBox="1"/>
-          <p:nvPr/>
-        </p:nvSpPr>
-        <p:spPr>
-          <a:xfrm>
-            <a:off x="548640" y="4251960"/>
-            <a:ext cx="320040" cy="274320"/>
-          </a:xfrm>
-          <a:prstGeom prst="rect">
-            <a:avLst/>
-          </a:prstGeom>
-          <a:noFill/>
-          <a:ln/>
-        </p:spPr>
-        <p:txBody>
-          <a:bodyPr wrap="square" lIns="0" tIns="0" rIns="0" bIns="0" rtlCol="0" anchor="ctr"/>
-          <a:lstStyle/>
-          <a:p>
-            <a:pPr indent="0" marL="0">
-              <a:buNone/>
-            </a:pPr>
-            <a:r>
-              <a:rPr lang="en-US" sz="1500" b="1" dirty="0">
-                <a:solidFill>
-                  <a:srgbClr val="B3543F"/>
-                </a:solidFill>
-                <a:latin typeface="Calibri" pitchFamily="34" charset="0"/>
-                <a:ea typeface="Calibri" pitchFamily="34" charset="-122"/>
-                <a:cs typeface="Calibri" pitchFamily="34" charset="-120"/>
-              </a:rPr>
-              <a:t>✗</a:t>
-            </a:r>
-            <a:endParaRPr lang="en-US" sz="1500" dirty="0"/>
-          </a:p>
-        </p:txBody>
-      </p:sp>
-      <p:sp>
-        <p:nvSpPr>
-          <p:cNvPr id="15" name="Text 13"/>
-          <p:cNvSpPr txBox="1"/>
-          <p:nvPr/>
-        </p:nvSpPr>
-        <p:spPr>
-          <a:xfrm>
-            <a:off x="914400" y="4251960"/>
-            <a:ext cx="10607040" cy="274320"/>
-          </a:xfrm>
-          <a:prstGeom prst="rect">
-            <a:avLst/>
-          </a:prstGeom>
-          <a:noFill/>
-          <a:ln/>
-        </p:spPr>
-        <p:txBody>
-          <a:bodyPr wrap="square" lIns="0" tIns="0" rIns="0" bIns="0" rtlCol="0" anchor="ctr"/>
-          <a:lstStyle/>
-          <a:p>
-            <a:pPr indent="0" marL="0">
-              <a:buNone/>
-            </a:pPr>
-            <a:r>
-              <a:rPr lang="en-US" sz="1350" b="1" dirty="0">
-                <a:solidFill>
-                  <a:srgbClr val="1B2430"/>
-                </a:solidFill>
-                <a:latin typeface="Calibri" pitchFamily="34" charset="0"/>
-                <a:ea typeface="Calibri" pitchFamily="34" charset="-122"/>
-                <a:cs typeface="Calibri" pitchFamily="34" charset="-120"/>
-              </a:rPr>
-              <a:t>bfloat16 in the raytrace datapath</a:t>
-            </a:r>
-            <a:endParaRPr lang="en-US" sz="1350" dirty="0"/>
-          </a:p>
-        </p:txBody>
-      </p:sp>
-      <p:sp>
-        <p:nvSpPr>
-          <p:cNvPr id="16" name="Text 14"/>
-          <p:cNvSpPr txBox="1"/>
-          <p:nvPr/>
-        </p:nvSpPr>
-        <p:spPr>
-          <a:xfrm>
-            <a:off x="914400" y="4544568"/>
-            <a:ext cx="10607040" cy="566928"/>
-          </a:xfrm>
-          <a:prstGeom prst="rect">
-            <a:avLst/>
-          </a:prstGeom>
-          <a:noFill/>
-          <a:ln/>
-        </p:spPr>
-        <p:txBody>
-          <a:bodyPr wrap="square" lIns="0" tIns="0" rIns="0" bIns="0" rtlCol="0" anchor="ctr"/>
-          <a:lstStyle/>
-          <a:p>
-            <a:pPr indent="0" marL="0">
-              <a:lnSpc>
-                <a:spcPts val="1600"/>
-              </a:lnSpc>
-              <a:buNone/>
-            </a:pPr>
-            <a:r>
-              <a:rPr lang="en-US" sz="1200" dirty="0">
-                <a:solidFill>
-                  <a:srgbClr val="6B7785"/>
-                </a:solidFill>
-                <a:latin typeface="Calibri" pitchFamily="34" charset="0"/>
-                <a:ea typeface="Calibri" pitchFamily="34" charset="-122"/>
-                <a:cs typeface="Calibri" pitchFamily="34" charset="-120"/>
-              </a:rPr>
-              <a:t>Halves multiplier area, but 8 mantissa bits cannot survive the catastrophic cancellation in (cc − v·v).</a:t>
-            </a:r>
-            <a:endParaRPr lang="en-US" sz="1200" dirty="0"/>
-          </a:p>
-        </p:txBody>
-      </p:sp>
-      <p:sp>
-        <p:nvSpPr>
-          <p:cNvPr id="17" name="Text 15"/>
-          <p:cNvSpPr txBox="1"/>
-          <p:nvPr/>
-        </p:nvSpPr>
-        <p:spPr>
-          <a:xfrm>
-            <a:off x="548640" y="5212080"/>
-            <a:ext cx="320040" cy="274320"/>
-          </a:xfrm>
-          <a:prstGeom prst="rect">
-            <a:avLst/>
-          </a:prstGeom>
-          <a:noFill/>
-          <a:ln/>
-        </p:spPr>
-        <p:txBody>
-          <a:bodyPr wrap="square" lIns="0" tIns="0" rIns="0" bIns="0" rtlCol="0" anchor="ctr"/>
-          <a:lstStyle/>
-          <a:p>
-            <a:pPr indent="0" marL="0">
-              <a:buNone/>
-            </a:pPr>
-            <a:r>
-              <a:rPr lang="en-US" sz="1500" b="1" dirty="0">
-                <a:solidFill>
-                  <a:srgbClr val="B3543F"/>
-                </a:solidFill>
-                <a:latin typeface="Calibri" pitchFamily="34" charset="0"/>
-                <a:ea typeface="Calibri" pitchFamily="34" charset="-122"/>
-                <a:cs typeface="Calibri" pitchFamily="34" charset="-120"/>
-              </a:rPr>
-              <a:t>✗</a:t>
-            </a:r>
-            <a:endParaRPr lang="en-US" sz="1500" dirty="0"/>
-          </a:p>
-        </p:txBody>
-      </p:sp>
-      <p:sp>
-        <p:nvSpPr>
-          <p:cNvPr id="18" name="Text 16"/>
-          <p:cNvSpPr txBox="1"/>
-          <p:nvPr/>
-        </p:nvSpPr>
-        <p:spPr>
-          <a:xfrm>
-            <a:off x="914400" y="5212080"/>
-            <a:ext cx="10607040" cy="274320"/>
-          </a:xfrm>
-          <a:prstGeom prst="rect">
-            <a:avLst/>
-          </a:prstGeom>
-          <a:noFill/>
-          <a:ln/>
-        </p:spPr>
-        <p:txBody>
-          <a:bodyPr wrap="square" lIns="0" tIns="0" rIns="0" bIns="0" rtlCol="0" anchor="ctr"/>
-          <a:lstStyle/>
-          <a:p>
-            <a:pPr indent="0" marL="0">
-              <a:buNone/>
-            </a:pPr>
-            <a:r>
-              <a:rPr lang="en-US" sz="1350" b="1" dirty="0">
-                <a:solidFill>
-                  <a:srgbClr val="1B2430"/>
-                </a:solidFill>
-                <a:latin typeface="Calibri" pitchFamily="34" charset="0"/>
-                <a:ea typeface="Calibri" pitchFamily="34" charset="-122"/>
-                <a:cs typeface="Calibri" pitchFamily="34" charset="-120"/>
-              </a:rPr>
-              <a:t>Swapping in libbz2 / a C extension</a:t>
-            </a:r>
-            <a:endParaRPr lang="en-US" sz="1350" dirty="0"/>
-          </a:p>
-        </p:txBody>
-      </p:sp>
-      <p:sp>
-        <p:nvSpPr>
-          <p:cNvPr id="19" name="Text 17"/>
-          <p:cNvSpPr txBox="1"/>
-          <p:nvPr/>
-        </p:nvSpPr>
-        <p:spPr>
-          <a:xfrm>
-            <a:off x="914400" y="5504688"/>
-            <a:ext cx="10607040" cy="566928"/>
-          </a:xfrm>
-          <a:prstGeom prst="rect">
-            <a:avLst/>
-          </a:prstGeom>
-          <a:noFill/>
-          <a:ln/>
-        </p:spPr>
-        <p:txBody>
-          <a:bodyPr wrap="square" lIns="0" tIns="0" rIns="0" bIns="0" rtlCol="0" anchor="ctr"/>
-          <a:lstStyle/>
-          <a:p>
-            <a:pPr indent="0" marL="0">
-              <a:lnSpc>
-                <a:spcPts val="1600"/>
-              </a:lnSpc>
-              <a:buNone/>
-            </a:pPr>
-            <a:r>
-              <a:rPr lang="en-US" sz="1200" dirty="0">
-                <a:solidFill>
-                  <a:srgbClr val="6B7785"/>
-                </a:solidFill>
-                <a:latin typeface="Calibri" pitchFamily="34" charset="0"/>
-                <a:ea typeface="Calibri" pitchFamily="34" charset="-122"/>
-                <a:cs typeface="Calibri" pitchFamily="34" charset="-120"/>
-              </a:rPr>
-              <a:t>Would post a huge speedup while measuring nothing. The benchmark exists to measure the interpreter.</a:t>
-            </a:r>
-            <a:endParaRPr lang="en-US" sz="1200" dirty="0"/>
-          </a:p>
-        </p:txBody>
-      </p:sp>
-      <p:sp>
-        <p:nvSpPr>
-          <p:cNvPr id="20" name="Text 18"/>
+              <a:t>pmu=on is what makes hardware counters work at all in the guest; without it perf answers &lt;not supported&gt; for every hardware event. Every table in both reports regenerates with ./script_pyflate.sh and ./script_raytrace.sh, run inside the guest.</a:t>
+            </a:r>
+            <a:endParaRPr lang="en-US" sz="1150" dirty="0"/>
+          </a:p>
+        </p:txBody>
+      </p:sp>
+      <p:sp>
+        <p:nvSpPr>
+          <p:cNvPr id="22" name="Text 20"/>
           <p:cNvSpPr txBox="1"/>
           <p:nvPr/>
         </p:nvSpPr>
@@ -19111,7 +19135,7 @@
       </p:sp>
       <p:sp>
         <p:nvSpPr>
-          <p:cNvPr id="21" name="Text 19"/>
+          <p:cNvPr id="23" name="Text 21"/>
           <p:cNvSpPr txBox="1"/>
           <p:nvPr/>
         </p:nvSpPr>
@@ -19206,6 +19230,826 @@
                 <a:ea typeface="Calibri" pitchFamily="34" charset="-122"/>
                 <a:cs typeface="Calibri" pitchFamily="34" charset="-120"/>
               </a:rPr>
+              <a:t>BACKUP B4</a:t>
+            </a:r>
+            <a:endParaRPr lang="en-US" sz="1100" dirty="0"/>
+          </a:p>
+        </p:txBody>
+      </p:sp>
+      <p:sp>
+        <p:nvSpPr>
+          <p:cNvPr id="3" name="Text 1"/>
+          <p:cNvSpPr txBox="1"/>
+          <p:nvPr/>
+        </p:nvSpPr>
+        <p:spPr>
+          <a:xfrm>
+            <a:off x="548640" y="694944"/>
+            <a:ext cx="11091672" cy="585216"/>
+          </a:xfrm>
+          <a:prstGeom prst="rect">
+            <a:avLst/>
+          </a:prstGeom>
+          <a:noFill/>
+          <a:ln/>
+        </p:spPr>
+        <p:txBody>
+          <a:bodyPr wrap="square" lIns="0" tIns="0" rIns="0" bIns="0" rtlCol="0" anchor="ctr"/>
+          <a:lstStyle/>
+          <a:p>
+            <a:pPr indent="0" marL="0">
+              <a:buNone/>
+            </a:pPr>
+            <a:r>
+              <a:rPr lang="en-US" sz="2900" b="1" dirty="0">
+                <a:solidFill>
+                  <a:srgbClr val="1B2430"/>
+                </a:solidFill>
+                <a:latin typeface="Cambria" pitchFamily="34" charset="0"/>
+                <a:ea typeface="Cambria" pitchFamily="34" charset="-122"/>
+                <a:cs typeface="Cambria" pitchFamily="34" charset="-120"/>
+              </a:rPr>
+              <a:t>Things we tried and rejected</a:t>
+            </a:r>
+            <a:endParaRPr lang="en-US" sz="2900" dirty="0"/>
+          </a:p>
+        </p:txBody>
+      </p:sp>
+      <p:sp>
+        <p:nvSpPr>
+          <p:cNvPr id="4" name="Text 2"/>
+          <p:cNvSpPr txBox="1"/>
+          <p:nvPr/>
+        </p:nvSpPr>
+        <p:spPr>
+          <a:xfrm>
+            <a:off x="8897112" y="457200"/>
+            <a:ext cx="2743200" cy="237744"/>
+          </a:xfrm>
+          <a:prstGeom prst="rect">
+            <a:avLst/>
+          </a:prstGeom>
+          <a:noFill/>
+          <a:ln/>
+        </p:spPr>
+        <p:txBody>
+          <a:bodyPr wrap="square" lIns="0" tIns="0" rIns="0" bIns="0" rtlCol="0" anchor="ctr"/>
+          <a:lstStyle/>
+          <a:p>
+            <a:pPr algn="r" indent="0" marL="0">
+              <a:buNone/>
+            </a:pPr>
+            <a:r>
+              <a:rPr lang="en-US" sz="1000" b="1" dirty="0">
+                <a:solidFill>
+                  <a:srgbClr val="B3543F"/>
+                </a:solidFill>
+                <a:latin typeface="Calibri" pitchFamily="34" charset="0"/>
+                <a:ea typeface="Calibri" pitchFamily="34" charset="-122"/>
+                <a:cs typeface="Calibri" pitchFamily="34" charset="-120"/>
+              </a:rPr>
+              <a:t>BACKUP — not presented</a:t>
+            </a:r>
+            <a:endParaRPr lang="en-US" sz="1000" dirty="0"/>
+          </a:p>
+        </p:txBody>
+      </p:sp>
+      <p:sp>
+        <p:nvSpPr>
+          <p:cNvPr id="5" name="Text 3"/>
+          <p:cNvSpPr txBox="1"/>
+          <p:nvPr/>
+        </p:nvSpPr>
+        <p:spPr>
+          <a:xfrm>
+            <a:off x="548640" y="1371600"/>
+            <a:ext cx="320040" cy="274320"/>
+          </a:xfrm>
+          <a:prstGeom prst="rect">
+            <a:avLst/>
+          </a:prstGeom>
+          <a:noFill/>
+          <a:ln/>
+        </p:spPr>
+        <p:txBody>
+          <a:bodyPr wrap="square" lIns="0" tIns="0" rIns="0" bIns="0" rtlCol="0" anchor="ctr"/>
+          <a:lstStyle/>
+          <a:p>
+            <a:pPr indent="0" marL="0">
+              <a:buNone/>
+            </a:pPr>
+            <a:r>
+              <a:rPr lang="en-US" sz="1500" b="1" dirty="0">
+                <a:solidFill>
+                  <a:srgbClr val="B3543F"/>
+                </a:solidFill>
+                <a:latin typeface="Calibri" pitchFamily="34" charset="0"/>
+                <a:ea typeface="Calibri" pitchFamily="34" charset="-122"/>
+                <a:cs typeface="Calibri" pitchFamily="34" charset="-120"/>
+              </a:rPr>
+              <a:t>✗</a:t>
+            </a:r>
+            <a:endParaRPr lang="en-US" sz="1500" dirty="0"/>
+          </a:p>
+        </p:txBody>
+      </p:sp>
+      <p:sp>
+        <p:nvSpPr>
+          <p:cNvPr id="6" name="Text 4"/>
+          <p:cNvSpPr txBox="1"/>
+          <p:nvPr/>
+        </p:nvSpPr>
+        <p:spPr>
+          <a:xfrm>
+            <a:off x="914400" y="1371600"/>
+            <a:ext cx="10607040" cy="274320"/>
+          </a:xfrm>
+          <a:prstGeom prst="rect">
+            <a:avLst/>
+          </a:prstGeom>
+          <a:noFill/>
+          <a:ln/>
+        </p:spPr>
+        <p:txBody>
+          <a:bodyPr wrap="square" lIns="0" tIns="0" rIns="0" bIns="0" rtlCol="0" anchor="ctr"/>
+          <a:lstStyle/>
+          <a:p>
+            <a:pPr indent="0" marL="0">
+              <a:buNone/>
+            </a:pPr>
+            <a:r>
+              <a:rPr lang="en-US" sz="1350" b="1" dirty="0">
+                <a:solidFill>
+                  <a:srgbClr val="1B2430"/>
+                </a:solidFill>
+                <a:latin typeface="Calibri" pitchFamily="34" charset="0"/>
+                <a:ea typeface="Calibri" pitchFamily="34" charset="-122"/>
+                <a:cs typeface="Calibri" pitchFamily="34" charset="-120"/>
+              </a:rPr>
+              <a:t>A full 2^20-entry Huffman LUT</a:t>
+            </a:r>
+            <a:endParaRPr lang="en-US" sz="1350" dirty="0"/>
+          </a:p>
+        </p:txBody>
+      </p:sp>
+      <p:sp>
+        <p:nvSpPr>
+          <p:cNvPr id="7" name="Text 5"/>
+          <p:cNvSpPr txBox="1"/>
+          <p:nvPr/>
+        </p:nvSpPr>
+        <p:spPr>
+          <a:xfrm>
+            <a:off x="914400" y="1664208"/>
+            <a:ext cx="10607040" cy="566928"/>
+          </a:xfrm>
+          <a:prstGeom prst="rect">
+            <a:avLst/>
+          </a:prstGeom>
+          <a:noFill/>
+          <a:ln/>
+        </p:spPr>
+        <p:txBody>
+          <a:bodyPr wrap="square" lIns="0" tIns="0" rIns="0" bIns="0" rtlCol="0" anchor="ctr"/>
+          <a:lstStyle/>
+          <a:p>
+            <a:pPr indent="0" marL="0">
+              <a:lnSpc>
+                <a:spcPts val="1600"/>
+              </a:lnSpc>
+              <a:buNone/>
+            </a:pPr>
+            <a:r>
+              <a:rPr lang="en-US" sz="1200" dirty="0">
+                <a:solidFill>
+                  <a:srgbClr val="6B7785"/>
+                </a:solidFill>
+                <a:latin typeface="Calibri" pitchFamily="34" charset="0"/>
+                <a:ea typeface="Calibri" pitchFamily="34" charset="-122"/>
+                <a:cs typeface="Calibri" pitchFamily="34" charset="-120"/>
+              </a:rPr>
+              <a:t>Would decode in one step, but bzip2 allows 6 tables of length ≤ 20 — about 6M entries to BUILD per block, for a block that decodes 148k symbols. Table construction costs more than it saves.</a:t>
+            </a:r>
+            <a:endParaRPr lang="en-US" sz="1200" dirty="0"/>
+          </a:p>
+        </p:txBody>
+      </p:sp>
+      <p:sp>
+        <p:nvSpPr>
+          <p:cNvPr id="8" name="Text 6"/>
+          <p:cNvSpPr txBox="1"/>
+          <p:nvPr/>
+        </p:nvSpPr>
+        <p:spPr>
+          <a:xfrm>
+            <a:off x="548640" y="2331720"/>
+            <a:ext cx="320040" cy="274320"/>
+          </a:xfrm>
+          <a:prstGeom prst="rect">
+            <a:avLst/>
+          </a:prstGeom>
+          <a:noFill/>
+          <a:ln/>
+        </p:spPr>
+        <p:txBody>
+          <a:bodyPr wrap="square" lIns="0" tIns="0" rIns="0" bIns="0" rtlCol="0" anchor="ctr"/>
+          <a:lstStyle/>
+          <a:p>
+            <a:pPr indent="0" marL="0">
+              <a:buNone/>
+            </a:pPr>
+            <a:r>
+              <a:rPr lang="en-US" sz="1500" b="1" dirty="0">
+                <a:solidFill>
+                  <a:srgbClr val="B3543F"/>
+                </a:solidFill>
+                <a:latin typeface="Calibri" pitchFamily="34" charset="0"/>
+                <a:ea typeface="Calibri" pitchFamily="34" charset="-122"/>
+                <a:cs typeface="Calibri" pitchFamily="34" charset="-120"/>
+              </a:rPr>
+              <a:t>✗</a:t>
+            </a:r>
+            <a:endParaRPr lang="en-US" sz="1500" dirty="0"/>
+          </a:p>
+        </p:txBody>
+      </p:sp>
+      <p:sp>
+        <p:nvSpPr>
+          <p:cNvPr id="9" name="Text 7"/>
+          <p:cNvSpPr txBox="1"/>
+          <p:nvPr/>
+        </p:nvSpPr>
+        <p:spPr>
+          <a:xfrm>
+            <a:off x="914400" y="2331720"/>
+            <a:ext cx="10607040" cy="274320"/>
+          </a:xfrm>
+          <a:prstGeom prst="rect">
+            <a:avLst/>
+          </a:prstGeom>
+          <a:noFill/>
+          <a:ln/>
+        </p:spPr>
+        <p:txBody>
+          <a:bodyPr wrap="square" lIns="0" tIns="0" rIns="0" bIns="0" rtlCol="0" anchor="ctr"/>
+          <a:lstStyle/>
+          <a:p>
+            <a:pPr indent="0" marL="0">
+              <a:buNone/>
+            </a:pPr>
+            <a:r>
+              <a:rPr lang="en-US" sz="1350" b="1" dirty="0">
+                <a:solidFill>
+                  <a:srgbClr val="1B2430"/>
+                </a:solidFill>
+                <a:latin typeface="Calibri" pitchFamily="34" charset="0"/>
+                <a:ea typeface="Calibri" pitchFamily="34" charset="-122"/>
+                <a:cs typeface="Calibri" pitchFamily="34" charset="-120"/>
+              </a:rPr>
+              <a:t>numpy for the inverse BWT</a:t>
+            </a:r>
+            <a:endParaRPr lang="en-US" sz="1350" dirty="0"/>
+          </a:p>
+        </p:txBody>
+      </p:sp>
+      <p:sp>
+        <p:nvSpPr>
+          <p:cNvPr id="10" name="Text 8"/>
+          <p:cNvSpPr txBox="1"/>
+          <p:nvPr/>
+        </p:nvSpPr>
+        <p:spPr>
+          <a:xfrm>
+            <a:off x="914400" y="2624328"/>
+            <a:ext cx="10607040" cy="566928"/>
+          </a:xfrm>
+          <a:prstGeom prst="rect">
+            <a:avLst/>
+          </a:prstGeom>
+          <a:noFill/>
+          <a:ln/>
+        </p:spPr>
+        <p:txBody>
+          <a:bodyPr wrap="square" lIns="0" tIns="0" rIns="0" bIns="0" rtlCol="0" anchor="ctr"/>
+          <a:lstStyle/>
+          <a:p>
+            <a:pPr indent="0" marL="0">
+              <a:lnSpc>
+                <a:spcPts val="1600"/>
+              </a:lnSpc>
+              <a:buNone/>
+            </a:pPr>
+            <a:r>
+              <a:rPr lang="en-US" sz="1200" dirty="0">
+                <a:solidFill>
+                  <a:srgbClr val="6B7785"/>
+                </a:solidFill>
+                <a:latin typeface="Calibri" pitchFamily="34" charset="0"/>
+                <a:ea typeface="Calibri" pitchFamily="34" charset="-122"/>
+                <a:cs typeface="Calibri" pitchFamily="34" charset="-120"/>
+              </a:rPr>
+              <a:t>An added dependency for a stage the ablation shows is worth ~3%.</a:t>
+            </a:r>
+            <a:endParaRPr lang="en-US" sz="1200" dirty="0"/>
+          </a:p>
+        </p:txBody>
+      </p:sp>
+      <p:sp>
+        <p:nvSpPr>
+          <p:cNvPr id="11" name="Text 9"/>
+          <p:cNvSpPr txBox="1"/>
+          <p:nvPr/>
+        </p:nvSpPr>
+        <p:spPr>
+          <a:xfrm>
+            <a:off x="548640" y="3291840"/>
+            <a:ext cx="320040" cy="274320"/>
+          </a:xfrm>
+          <a:prstGeom prst="rect">
+            <a:avLst/>
+          </a:prstGeom>
+          <a:noFill/>
+          <a:ln/>
+        </p:spPr>
+        <p:txBody>
+          <a:bodyPr wrap="square" lIns="0" tIns="0" rIns="0" bIns="0" rtlCol="0" anchor="ctr"/>
+          <a:lstStyle/>
+          <a:p>
+            <a:pPr indent="0" marL="0">
+              <a:buNone/>
+            </a:pPr>
+            <a:r>
+              <a:rPr lang="en-US" sz="1500" b="1" dirty="0">
+                <a:solidFill>
+                  <a:srgbClr val="B3543F"/>
+                </a:solidFill>
+                <a:latin typeface="Calibri" pitchFamily="34" charset="0"/>
+                <a:ea typeface="Calibri" pitchFamily="34" charset="-122"/>
+                <a:cs typeface="Calibri" pitchFamily="34" charset="-120"/>
+              </a:rPr>
+              <a:t>✗</a:t>
+            </a:r>
+            <a:endParaRPr lang="en-US" sz="1500" dirty="0"/>
+          </a:p>
+        </p:txBody>
+      </p:sp>
+      <p:sp>
+        <p:nvSpPr>
+          <p:cNvPr id="12" name="Text 10"/>
+          <p:cNvSpPr txBox="1"/>
+          <p:nvPr/>
+        </p:nvSpPr>
+        <p:spPr>
+          <a:xfrm>
+            <a:off x="914400" y="3291840"/>
+            <a:ext cx="10607040" cy="274320"/>
+          </a:xfrm>
+          <a:prstGeom prst="rect">
+            <a:avLst/>
+          </a:prstGeom>
+          <a:noFill/>
+          <a:ln/>
+        </p:spPr>
+        <p:txBody>
+          <a:bodyPr wrap="square" lIns="0" tIns="0" rIns="0" bIns="0" rtlCol="0" anchor="ctr"/>
+          <a:lstStyle/>
+          <a:p>
+            <a:pPr indent="0" marL="0">
+              <a:buNone/>
+            </a:pPr>
+            <a:r>
+              <a:rPr lang="en-US" sz="1350" b="1" dirty="0">
+                <a:solidFill>
+                  <a:srgbClr val="1B2430"/>
+                </a:solidFill>
+                <a:latin typeface="Calibri" pitchFamily="34" charset="0"/>
+                <a:ea typeface="Calibri" pitchFamily="34" charset="-122"/>
+                <a:cs typeface="Calibri" pitchFamily="34" charset="-120"/>
+              </a:rPr>
+              <a:t>A BVH for raytrace</a:t>
+            </a:r>
+            <a:endParaRPr lang="en-US" sz="1350" dirty="0"/>
+          </a:p>
+        </p:txBody>
+      </p:sp>
+      <p:sp>
+        <p:nvSpPr>
+          <p:cNvPr id="13" name="Text 11"/>
+          <p:cNvSpPr txBox="1"/>
+          <p:nvPr/>
+        </p:nvSpPr>
+        <p:spPr>
+          <a:xfrm>
+            <a:off x="914400" y="3584448"/>
+            <a:ext cx="10607040" cy="566928"/>
+          </a:xfrm>
+          <a:prstGeom prst="rect">
+            <a:avLst/>
+          </a:prstGeom>
+          <a:noFill/>
+          <a:ln/>
+        </p:spPr>
+        <p:txBody>
+          <a:bodyPr wrap="square" lIns="0" tIns="0" rIns="0" bIns="0" rtlCol="0" anchor="ctr"/>
+          <a:lstStyle/>
+          <a:p>
+            <a:pPr indent="0" marL="0">
+              <a:lnSpc>
+                <a:spcPts val="1600"/>
+              </a:lnSpc>
+              <a:buNone/>
+            </a:pPr>
+            <a:r>
+              <a:rPr lang="en-US" sz="1200" dirty="0">
+                <a:solidFill>
+                  <a:srgbClr val="6B7785"/>
+                </a:solidFill>
+                <a:latin typeface="Calibri" pitchFamily="34" charset="0"/>
+                <a:ea typeface="Calibri" pitchFamily="34" charset="-122"/>
+                <a:cs typeface="Calibri" pitchFamily="34" charset="-120"/>
+              </a:rPr>
+              <a:t>The first thing a graphics person proposes. With 8 objects, traversal overhead exceeds the 8 intersection tests it would save.</a:t>
+            </a:r>
+            <a:endParaRPr lang="en-US" sz="1200" dirty="0"/>
+          </a:p>
+        </p:txBody>
+      </p:sp>
+      <p:sp>
+        <p:nvSpPr>
+          <p:cNvPr id="14" name="Text 12"/>
+          <p:cNvSpPr txBox="1"/>
+          <p:nvPr/>
+        </p:nvSpPr>
+        <p:spPr>
+          <a:xfrm>
+            <a:off x="548640" y="4251960"/>
+            <a:ext cx="320040" cy="274320"/>
+          </a:xfrm>
+          <a:prstGeom prst="rect">
+            <a:avLst/>
+          </a:prstGeom>
+          <a:noFill/>
+          <a:ln/>
+        </p:spPr>
+        <p:txBody>
+          <a:bodyPr wrap="square" lIns="0" tIns="0" rIns="0" bIns="0" rtlCol="0" anchor="ctr"/>
+          <a:lstStyle/>
+          <a:p>
+            <a:pPr indent="0" marL="0">
+              <a:buNone/>
+            </a:pPr>
+            <a:r>
+              <a:rPr lang="en-US" sz="1500" b="1" dirty="0">
+                <a:solidFill>
+                  <a:srgbClr val="B3543F"/>
+                </a:solidFill>
+                <a:latin typeface="Calibri" pitchFamily="34" charset="0"/>
+                <a:ea typeface="Calibri" pitchFamily="34" charset="-122"/>
+                <a:cs typeface="Calibri" pitchFamily="34" charset="-120"/>
+              </a:rPr>
+              <a:t>✗</a:t>
+            </a:r>
+            <a:endParaRPr lang="en-US" sz="1500" dirty="0"/>
+          </a:p>
+        </p:txBody>
+      </p:sp>
+      <p:sp>
+        <p:nvSpPr>
+          <p:cNvPr id="15" name="Text 13"/>
+          <p:cNvSpPr txBox="1"/>
+          <p:nvPr/>
+        </p:nvSpPr>
+        <p:spPr>
+          <a:xfrm>
+            <a:off x="914400" y="4251960"/>
+            <a:ext cx="10607040" cy="274320"/>
+          </a:xfrm>
+          <a:prstGeom prst="rect">
+            <a:avLst/>
+          </a:prstGeom>
+          <a:noFill/>
+          <a:ln/>
+        </p:spPr>
+        <p:txBody>
+          <a:bodyPr wrap="square" lIns="0" tIns="0" rIns="0" bIns="0" rtlCol="0" anchor="ctr"/>
+          <a:lstStyle/>
+          <a:p>
+            <a:pPr indent="0" marL="0">
+              <a:buNone/>
+            </a:pPr>
+            <a:r>
+              <a:rPr lang="en-US" sz="1350" b="1" dirty="0">
+                <a:solidFill>
+                  <a:srgbClr val="1B2430"/>
+                </a:solidFill>
+                <a:latin typeface="Calibri" pitchFamily="34" charset="0"/>
+                <a:ea typeface="Calibri" pitchFamily="34" charset="-122"/>
+                <a:cs typeface="Calibri" pitchFamily="34" charset="-120"/>
+              </a:rPr>
+              <a:t>bfloat16 in the raytrace datapath</a:t>
+            </a:r>
+            <a:endParaRPr lang="en-US" sz="1350" dirty="0"/>
+          </a:p>
+        </p:txBody>
+      </p:sp>
+      <p:sp>
+        <p:nvSpPr>
+          <p:cNvPr id="16" name="Text 14"/>
+          <p:cNvSpPr txBox="1"/>
+          <p:nvPr/>
+        </p:nvSpPr>
+        <p:spPr>
+          <a:xfrm>
+            <a:off x="914400" y="4544568"/>
+            <a:ext cx="10607040" cy="566928"/>
+          </a:xfrm>
+          <a:prstGeom prst="rect">
+            <a:avLst/>
+          </a:prstGeom>
+          <a:noFill/>
+          <a:ln/>
+        </p:spPr>
+        <p:txBody>
+          <a:bodyPr wrap="square" lIns="0" tIns="0" rIns="0" bIns="0" rtlCol="0" anchor="ctr"/>
+          <a:lstStyle/>
+          <a:p>
+            <a:pPr indent="0" marL="0">
+              <a:lnSpc>
+                <a:spcPts val="1600"/>
+              </a:lnSpc>
+              <a:buNone/>
+            </a:pPr>
+            <a:r>
+              <a:rPr lang="en-US" sz="1200" dirty="0">
+                <a:solidFill>
+                  <a:srgbClr val="6B7785"/>
+                </a:solidFill>
+                <a:latin typeface="Calibri" pitchFamily="34" charset="0"/>
+                <a:ea typeface="Calibri" pitchFamily="34" charset="-122"/>
+                <a:cs typeface="Calibri" pitchFamily="34" charset="-120"/>
+              </a:rPr>
+              <a:t>Halves multiplier area, but 8 mantissa bits cannot survive the catastrophic cancellation in (cc − v·v).</a:t>
+            </a:r>
+            <a:endParaRPr lang="en-US" sz="1200" dirty="0"/>
+          </a:p>
+        </p:txBody>
+      </p:sp>
+      <p:sp>
+        <p:nvSpPr>
+          <p:cNvPr id="17" name="Text 15"/>
+          <p:cNvSpPr txBox="1"/>
+          <p:nvPr/>
+        </p:nvSpPr>
+        <p:spPr>
+          <a:xfrm>
+            <a:off x="548640" y="5212080"/>
+            <a:ext cx="320040" cy="274320"/>
+          </a:xfrm>
+          <a:prstGeom prst="rect">
+            <a:avLst/>
+          </a:prstGeom>
+          <a:noFill/>
+          <a:ln/>
+        </p:spPr>
+        <p:txBody>
+          <a:bodyPr wrap="square" lIns="0" tIns="0" rIns="0" bIns="0" rtlCol="0" anchor="ctr"/>
+          <a:lstStyle/>
+          <a:p>
+            <a:pPr indent="0" marL="0">
+              <a:buNone/>
+            </a:pPr>
+            <a:r>
+              <a:rPr lang="en-US" sz="1500" b="1" dirty="0">
+                <a:solidFill>
+                  <a:srgbClr val="B3543F"/>
+                </a:solidFill>
+                <a:latin typeface="Calibri" pitchFamily="34" charset="0"/>
+                <a:ea typeface="Calibri" pitchFamily="34" charset="-122"/>
+                <a:cs typeface="Calibri" pitchFamily="34" charset="-120"/>
+              </a:rPr>
+              <a:t>✗</a:t>
+            </a:r>
+            <a:endParaRPr lang="en-US" sz="1500" dirty="0"/>
+          </a:p>
+        </p:txBody>
+      </p:sp>
+      <p:sp>
+        <p:nvSpPr>
+          <p:cNvPr id="18" name="Text 16"/>
+          <p:cNvSpPr txBox="1"/>
+          <p:nvPr/>
+        </p:nvSpPr>
+        <p:spPr>
+          <a:xfrm>
+            <a:off x="914400" y="5212080"/>
+            <a:ext cx="10607040" cy="274320"/>
+          </a:xfrm>
+          <a:prstGeom prst="rect">
+            <a:avLst/>
+          </a:prstGeom>
+          <a:noFill/>
+          <a:ln/>
+        </p:spPr>
+        <p:txBody>
+          <a:bodyPr wrap="square" lIns="0" tIns="0" rIns="0" bIns="0" rtlCol="0" anchor="ctr"/>
+          <a:lstStyle/>
+          <a:p>
+            <a:pPr indent="0" marL="0">
+              <a:buNone/>
+            </a:pPr>
+            <a:r>
+              <a:rPr lang="en-US" sz="1350" b="1" dirty="0">
+                <a:solidFill>
+                  <a:srgbClr val="1B2430"/>
+                </a:solidFill>
+                <a:latin typeface="Calibri" pitchFamily="34" charset="0"/>
+                <a:ea typeface="Calibri" pitchFamily="34" charset="-122"/>
+                <a:cs typeface="Calibri" pitchFamily="34" charset="-120"/>
+              </a:rPr>
+              <a:t>Swapping in libbz2 / a C extension</a:t>
+            </a:r>
+            <a:endParaRPr lang="en-US" sz="1350" dirty="0"/>
+          </a:p>
+        </p:txBody>
+      </p:sp>
+      <p:sp>
+        <p:nvSpPr>
+          <p:cNvPr id="19" name="Text 17"/>
+          <p:cNvSpPr txBox="1"/>
+          <p:nvPr/>
+        </p:nvSpPr>
+        <p:spPr>
+          <a:xfrm>
+            <a:off x="914400" y="5504688"/>
+            <a:ext cx="10607040" cy="566928"/>
+          </a:xfrm>
+          <a:prstGeom prst="rect">
+            <a:avLst/>
+          </a:prstGeom>
+          <a:noFill/>
+          <a:ln/>
+        </p:spPr>
+        <p:txBody>
+          <a:bodyPr wrap="square" lIns="0" tIns="0" rIns="0" bIns="0" rtlCol="0" anchor="ctr"/>
+          <a:lstStyle/>
+          <a:p>
+            <a:pPr indent="0" marL="0">
+              <a:lnSpc>
+                <a:spcPts val="1600"/>
+              </a:lnSpc>
+              <a:buNone/>
+            </a:pPr>
+            <a:r>
+              <a:rPr lang="en-US" sz="1200" dirty="0">
+                <a:solidFill>
+                  <a:srgbClr val="6B7785"/>
+                </a:solidFill>
+                <a:latin typeface="Calibri" pitchFamily="34" charset="0"/>
+                <a:ea typeface="Calibri" pitchFamily="34" charset="-122"/>
+                <a:cs typeface="Calibri" pitchFamily="34" charset="-120"/>
+              </a:rPr>
+              <a:t>Would post a huge speedup while measuring nothing. The benchmark exists to measure the interpreter.</a:t>
+            </a:r>
+            <a:endParaRPr lang="en-US" sz="1200" dirty="0"/>
+          </a:p>
+        </p:txBody>
+      </p:sp>
+      <p:sp>
+        <p:nvSpPr>
+          <p:cNvPr id="20" name="Text 18"/>
+          <p:cNvSpPr txBox="1"/>
+          <p:nvPr/>
+        </p:nvSpPr>
+        <p:spPr>
+          <a:xfrm>
+            <a:off x="548640" y="6336792"/>
+            <a:ext cx="4572000" cy="274320"/>
+          </a:xfrm>
+          <a:prstGeom prst="rect">
+            <a:avLst/>
+          </a:prstGeom>
+          <a:noFill/>
+          <a:ln/>
+        </p:spPr>
+        <p:txBody>
+          <a:bodyPr wrap="square" lIns="0" tIns="0" rIns="0" bIns="0" rtlCol="0" anchor="ctr"/>
+          <a:lstStyle/>
+          <a:p>
+            <a:pPr indent="0" marL="0">
+              <a:buNone/>
+            </a:pPr>
+            <a:r>
+              <a:rPr lang="en-US" sz="1000" dirty="0">
+                <a:solidFill>
+                  <a:srgbClr val="6B7785"/>
+                </a:solidFill>
+                <a:latin typeface="Calibri" pitchFamily="34" charset="0"/>
+                <a:ea typeface="Calibri" pitchFamily="34" charset="-122"/>
+                <a:cs typeface="Calibri" pitchFamily="34" charset="-120"/>
+              </a:rPr>
+              <a:t>backup</a:t>
+            </a:r>
+            <a:endParaRPr lang="en-US" sz="1000" dirty="0"/>
+          </a:p>
+        </p:txBody>
+      </p:sp>
+      <p:sp>
+        <p:nvSpPr>
+          <p:cNvPr id="21" name="Text 19"/>
+          <p:cNvSpPr txBox="1"/>
+          <p:nvPr/>
+        </p:nvSpPr>
+        <p:spPr>
+          <a:xfrm>
+            <a:off x="10725912" y="6336792"/>
+            <a:ext cx="914400" cy="274320"/>
+          </a:xfrm>
+          <a:prstGeom prst="rect">
+            <a:avLst/>
+          </a:prstGeom>
+          <a:noFill/>
+          <a:ln/>
+        </p:spPr>
+        <p:txBody>
+          <a:bodyPr wrap="square" lIns="0" tIns="0" rIns="0" bIns="0" rtlCol="0" anchor="ctr"/>
+          <a:lstStyle/>
+          <a:p>
+            <a:pPr algn="r" indent="0" marL="0">
+              <a:buNone/>
+            </a:pPr>
+            <a:r>
+              <a:rPr lang="en-US" sz="1000" dirty="0">
+                <a:solidFill>
+                  <a:srgbClr val="6B7785"/>
+                </a:solidFill>
+                <a:latin typeface="Calibri" pitchFamily="34" charset="0"/>
+                <a:ea typeface="Calibri" pitchFamily="34" charset="-122"/>
+                <a:cs typeface="Calibri" pitchFamily="34" charset="-120"/>
+              </a:rPr>
+              <a:t>26</a:t>
+            </a:r>
+            <a:endParaRPr lang="en-US" sz="1000" dirty="0"/>
+          </a:p>
+        </p:txBody>
+      </p:sp>
+    </p:spTree>
+  </p:cSld>
+  <p:clrMapOvr>
+    <a:masterClrMapping/>
+  </p:clrMapOvr>
+</p:sld>
+</file>
+
+<file path=ppt/slides/slide27.xml><?xml version="1.0" encoding="utf-8"?>
+<p:sld xmlns:a="http://schemas.openxmlformats.org/drawingml/2006/main" xmlns:r="http://schemas.openxmlformats.org/officeDocument/2006/relationships" xmlns:p="http://schemas.openxmlformats.org/presentationml/2006/main">
+  <p:cSld name="Slide 27">
+    <p:spTree>
+      <p:nvGrpSpPr>
+        <p:cNvPr id="1" name=""/>
+        <p:cNvGrpSpPr/>
+        <p:nvPr/>
+      </p:nvGrpSpPr>
+      <p:grpSpPr>
+        <a:xfrm>
+          <a:off x="0" y="0"/>
+          <a:ext cx="0" cy="0"/>
+          <a:chOff x="0" y="0"/>
+          <a:chExt cx="0" cy="0"/>
+        </a:xfrm>
+      </p:grpSpPr>
+      <p:sp>
+        <p:nvSpPr>
+          <p:cNvPr id="2" name="Text 0"/>
+          <p:cNvSpPr txBox="1"/>
+          <p:nvPr/>
+        </p:nvSpPr>
+        <p:spPr>
+          <a:xfrm>
+            <a:off x="548640" y="457200"/>
+            <a:ext cx="6858000" cy="237744"/>
+          </a:xfrm>
+          <a:prstGeom prst="rect">
+            <a:avLst/>
+          </a:prstGeom>
+          <a:noFill/>
+          <a:ln/>
+        </p:spPr>
+        <p:txBody>
+          <a:bodyPr wrap="square" lIns="0" tIns="0" rIns="0" bIns="0" rtlCol="0" anchor="ctr"/>
+          <a:lstStyle/>
+          <a:p>
+            <a:pPr indent="0" marL="0">
+              <a:buNone/>
+            </a:pPr>
+            <a:r>
+              <a:rPr lang="en-US" sz="1100" b="1" spc="160" kern="0" dirty="0">
+                <a:solidFill>
+                  <a:srgbClr val="6B7785"/>
+                </a:solidFill>
+                <a:latin typeface="Calibri" pitchFamily="34" charset="0"/>
+                <a:ea typeface="Calibri" pitchFamily="34" charset="-122"/>
+                <a:cs typeface="Calibri" pitchFamily="34" charset="-120"/>
+              </a:rPr>
               <a:t>BACKUP B5</a:t>
             </a:r>
             <a:endParaRPr lang="en-US" sz="1100" dirty="0"/>
@@ -19877,7 +20721,7 @@
                 <a:ea typeface="Calibri" pitchFamily="34" charset="-122"/>
                 <a:cs typeface="Calibri" pitchFamily="34" charset="-120"/>
               </a:rPr>
-              <a:t>26</a:t>
+              <a:t>27</a:t>
             </a:r>
             <a:endParaRPr lang="en-US" sz="1000" dirty="0"/>
           </a:p>

--- a/presentation/HWSW_CoDesign_Final_Taha_Lana.pptx
+++ b/presentation/HWSW_CoDesign_Final_Taha_Lana.pptx
@@ -1406,7 +1406,7 @@
           <a:p>
             <a:r>
               <a:rPr lang="en-US" dirty="0"/>
-              <a:t>Both. 0:05. Stop here - this is the end of the presented material. Leave the slide up for the questions: it carries both headline numbers and the verification count. Everything after it is backup: B1 canonical Huffman, B2 the three interface rules, B3 the measurement environment, B4 what we rejected, B5 testing beyond the benchmark.</a:t>
+              <a:t>Both. 0:05. Stop here - this is the end of the presented material. Leave the slide up for the questions: it carries both headline numbers and the verification count. Everything after it is backup: B1 canonical Huffman, B2 the three interface rules, B3 the measurement environment, B4 what we rejected, B5 testing beyond the benchmark, B6 what perf can and cannot do in the guest.</a:t>
             </a:r>
             <a:endParaRPr lang="en-US" dirty="0"/>
           </a:p>
@@ -3187,7 +3187,7 @@
                 <a:ea typeface="Calibri" pitchFamily="34" charset="-122"/>
                 <a:cs typeface="Calibri" pitchFamily="34" charset="-120"/>
               </a:rPr>
-              <a:t>Taha Taha   ·   Lana Bakre</a:t>
+              <a:t>Taha Taha   ·   Lana Bakrieh</a:t>
             </a:r>
             <a:endParaRPr lang="en-US" sz="1600" dirty="0"/>
           </a:p>
@@ -3241,7 +3241,7 @@
         <p:spPr>
           <a:xfrm>
             <a:off x="8686800" y="1783080"/>
-            <a:ext cx="2971800" cy="3200400"/>
+            <a:ext cx="2971800" cy="3474720"/>
           </a:xfrm>
           <a:prstGeom prst="roundRect">
             <a:avLst>
@@ -12954,7 +12954,7 @@
                 <a:ea typeface="Calibri" pitchFamily="34" charset="-122"/>
                 <a:cs typeface="Calibri" pitchFamily="34" charset="-120"/>
               </a:rPr>
-              <a:t>Taha Taha   ·   Lana Bakre</a:t>
+              <a:t>Taha Taha   ·   Lana Bakrieh</a:t>
             </a:r>
             <a:endParaRPr lang="en-US" sz="1600" dirty="0"/>
           </a:p>
@@ -13440,7 +13440,7 @@
                 <a:ea typeface="Calibri" pitchFamily="34" charset="-122"/>
                 <a:cs typeface="Calibri" pitchFamily="34" charset="-120"/>
               </a:rPr>
-              <a:t>Backup slides follow — B1 to B5</a:t>
+              <a:t>Backup slides follow — B1 to B6</a:t>
             </a:r>
             <a:endParaRPr lang="en-US" sz="1100" dirty="0"/>
           </a:p>
